--- a/TechNotes_AI_Presentation.pptx
+++ b/TechNotes_AI_Presentation.pptx
@@ -3115,20 +3115,20 @@
       <p:grpSpPr/>
       <p:sp>
         <p:nvSpPr>
-          <p:cNvPr id="2" name="Rectangle 1"/>
+          <p:cNvPr id="2" name="Oval 1"/>
           <p:cNvSpPr/>
           <p:nvPr/>
         </p:nvSpPr>
         <p:spPr>
           <a:xfrm>
-            <a:off x="0" y="0"/>
-            <a:ext cx="12191695" cy="6858000"/>
-          </a:xfrm>
-          <a:prstGeom prst="rect">
+            <a:off x="-1828800" y="-1828800"/>
+            <a:ext cx="4572000" cy="4572000"/>
+          </a:xfrm>
+          <a:prstGeom prst="ellipse">
             <a:avLst/>
           </a:prstGeom>
           <a:solidFill>
-            <a:srgbClr val="0A0A0F"/>
+            <a:srgbClr val="0D1A18"/>
           </a:solidFill>
           <a:ln>
             <a:noFill/>
@@ -3159,49 +3159,6 @@
       <p:sp>
         <p:nvSpPr>
           <p:cNvPr id="3" name="Oval 2"/>
-          <p:cNvSpPr/>
-          <p:nvPr/>
-        </p:nvSpPr>
-        <p:spPr>
-          <a:xfrm>
-            <a:off x="-1828800" y="-1828800"/>
-            <a:ext cx="4572000" cy="4572000"/>
-          </a:xfrm>
-          <a:prstGeom prst="ellipse">
-            <a:avLst/>
-          </a:prstGeom>
-          <a:solidFill>
-            <a:srgbClr val="1E3A8A"/>
-          </a:solidFill>
-          <a:ln>
-            <a:noFill/>
-          </a:ln>
-        </p:spPr>
-        <p:style>
-          <a:lnRef idx="1">
-            <a:schemeClr val="accent1"/>
-          </a:lnRef>
-          <a:fillRef idx="3">
-            <a:schemeClr val="accent1"/>
-          </a:fillRef>
-          <a:effectRef idx="2">
-            <a:schemeClr val="accent1"/>
-          </a:effectRef>
-          <a:fontRef idx="minor">
-            <a:schemeClr val="lt1"/>
-          </a:fontRef>
-        </p:style>
-        <p:txBody>
-          <a:bodyPr rtlCol="0" anchor="ctr"/>
-          <a:lstStyle/>
-          <a:p>
-            <a:pPr algn="ctr"/>
-          </a:p>
-        </p:txBody>
-      </p:sp>
-      <p:sp>
-        <p:nvSpPr>
-          <p:cNvPr id="4" name="Oval 3"/>
           <p:cNvSpPr/>
           <p:nvPr/>
         </p:nvSpPr>
@@ -3244,7 +3201,7 @@
       </p:sp>
       <p:sp>
         <p:nvSpPr>
-          <p:cNvPr id="5" name="Rectangle 4"/>
+          <p:cNvPr id="4" name="Rectangle 3"/>
           <p:cNvSpPr/>
           <p:nvPr/>
         </p:nvSpPr>
@@ -3255,6 +3212,159 @@
           </a:xfrm>
           <a:prstGeom prst="rect">
             <a:avLst/>
+          </a:prstGeom>
+          <a:solidFill>
+            <a:srgbClr val="14B8A6"/>
+          </a:solidFill>
+          <a:ln>
+            <a:noFill/>
+          </a:ln>
+        </p:spPr>
+        <p:style>
+          <a:lnRef idx="1">
+            <a:schemeClr val="accent1"/>
+          </a:lnRef>
+          <a:fillRef idx="3">
+            <a:schemeClr val="accent1"/>
+          </a:fillRef>
+          <a:effectRef idx="2">
+            <a:schemeClr val="accent1"/>
+          </a:effectRef>
+          <a:fontRef idx="minor">
+            <a:schemeClr val="lt1"/>
+          </a:fontRef>
+        </p:style>
+        <p:txBody>
+          <a:bodyPr rtlCol="0" anchor="ctr"/>
+          <a:lstStyle/>
+          <a:p>
+            <a:pPr algn="ctr"/>
+          </a:p>
+        </p:txBody>
+      </p:sp>
+      <p:sp>
+        <p:nvSpPr>
+          <p:cNvPr id="5" name="TextBox 4"/>
+          <p:cNvSpPr txBox="1"/>
+          <p:nvPr/>
+        </p:nvSpPr>
+        <p:spPr>
+          <a:xfrm>
+            <a:off x="914400" y="1371600"/>
+            <a:ext cx="10332720" cy="457200"/>
+          </a:xfrm>
+          <a:prstGeom prst="rect">
+            <a:avLst/>
+          </a:prstGeom>
+          <a:noFill/>
+        </p:spPr>
+        <p:txBody>
+          <a:bodyPr wrap="square">
+            <a:spAutoFit/>
+          </a:bodyPr>
+          <a:lstStyle/>
+          <a:p>
+            <a:pPr algn="ctr">
+              <a:defRPr sz="1500" b="1">
+                <a:solidFill>
+                  <a:srgbClr val="14B8A6"/>
+                </a:solidFill>
+                <a:latin typeface="Segoe UI"/>
+              </a:defRPr>
+            </a:pPr>
+            <a:r>
+              <a:t>PROJECT PRESENTATION</a:t>
+            </a:r>
+          </a:p>
+        </p:txBody>
+      </p:sp>
+      <p:sp>
+        <p:nvSpPr>
+          <p:cNvPr id="6" name="TextBox 5"/>
+          <p:cNvSpPr txBox="1"/>
+          <p:nvPr/>
+        </p:nvSpPr>
+        <p:spPr>
+          <a:xfrm>
+            <a:off x="914400" y="1920240"/>
+            <a:ext cx="10332720" cy="1097280"/>
+          </a:xfrm>
+          <a:prstGeom prst="rect">
+            <a:avLst/>
+          </a:prstGeom>
+          <a:noFill/>
+        </p:spPr>
+        <p:txBody>
+          <a:bodyPr wrap="square">
+            <a:spAutoFit/>
+          </a:bodyPr>
+          <a:lstStyle/>
+          <a:p>
+            <a:pPr algn="ctr">
+              <a:defRPr sz="5800" b="1">
+                <a:solidFill>
+                  <a:srgbClr val="FFFFFF"/>
+                </a:solidFill>
+                <a:latin typeface="Segoe UI"/>
+              </a:defRPr>
+            </a:pPr>
+            <a:r>
+              <a:t>TechNotes AI</a:t>
+            </a:r>
+          </a:p>
+        </p:txBody>
+      </p:sp>
+      <p:sp>
+        <p:nvSpPr>
+          <p:cNvPr id="7" name="TextBox 6"/>
+          <p:cNvSpPr txBox="1"/>
+          <p:nvPr/>
+        </p:nvSpPr>
+        <p:spPr>
+          <a:xfrm>
+            <a:off x="914400" y="3017520"/>
+            <a:ext cx="10332720" cy="548640"/>
+          </a:xfrm>
+          <a:prstGeom prst="rect">
+            <a:avLst/>
+          </a:prstGeom>
+          <a:noFill/>
+        </p:spPr>
+        <p:txBody>
+          <a:bodyPr wrap="square">
+            <a:spAutoFit/>
+          </a:bodyPr>
+          <a:lstStyle/>
+          <a:p>
+            <a:pPr algn="ctr">
+              <a:defRPr sz="2000" b="0">
+                <a:solidFill>
+                  <a:srgbClr val="B0B0C0"/>
+                </a:solidFill>
+                <a:latin typeface="Segoe UI"/>
+              </a:defRPr>
+            </a:pPr>
+            <a:r>
+              <a:t>A Smart Study Platform for RGPV Engineering Students</a:t>
+            </a:r>
+          </a:p>
+        </p:txBody>
+      </p:sp>
+      <p:sp>
+        <p:nvSpPr>
+          <p:cNvPr id="8" name="Rounded Rectangle 7"/>
+          <p:cNvSpPr/>
+          <p:nvPr/>
+        </p:nvSpPr>
+        <p:spPr>
+          <a:xfrm>
+            <a:off x="3291840" y="3931920"/>
+            <a:ext cx="1353312" cy="329184"/>
+          </a:xfrm>
+          <a:prstGeom prst="roundRect">
+            <a:avLst>
+              <a:gd name="adj" fmla="val 50000"/>
+            </a:avLst>
           </a:prstGeom>
           <a:solidFill>
             <a:srgbClr val="F97316"/>
@@ -3278,73 +3388,11 @@
           </a:fontRef>
         </p:style>
         <p:txBody>
-          <a:bodyPr rtlCol="0" anchor="ctr"/>
-          <a:lstStyle/>
-          <a:p>
-            <a:pPr algn="ctr"/>
-          </a:p>
-        </p:txBody>
-      </p:sp>
-      <p:sp>
-        <p:nvSpPr>
-          <p:cNvPr id="6" name="TextBox 5"/>
-          <p:cNvSpPr txBox="1"/>
-          <p:nvPr/>
-        </p:nvSpPr>
-        <p:spPr>
-          <a:xfrm>
-            <a:off x="914400" y="1645920"/>
-            <a:ext cx="10332720" cy="457200"/>
-          </a:xfrm>
-          <a:prstGeom prst="rect">
-            <a:avLst/>
-          </a:prstGeom>
-          <a:noFill/>
-        </p:spPr>
-        <p:txBody>
-          <a:bodyPr wrap="square">
-            <a:spAutoFit/>
-          </a:bodyPr>
+          <a:bodyPr rtlCol="0" anchor="ctr" tIns="25400" bIns="25400"/>
           <a:lstStyle/>
           <a:p>
             <a:pPr algn="ctr">
-              <a:defRPr sz="1600" b="1">
-                <a:solidFill>
-                  <a:srgbClr val="F97316"/>
-                </a:solidFill>
-                <a:latin typeface="Segoe UI"/>
-              </a:defRPr>
-            </a:pPr>
-            <a:r>
-              <a:t>PROJECT PRESENTATION</a:t>
-            </a:r>
-          </a:p>
-        </p:txBody>
-      </p:sp>
-      <p:sp>
-        <p:nvSpPr>
-          <p:cNvPr id="7" name="TextBox 6"/>
-          <p:cNvSpPr txBox="1"/>
-          <p:nvPr/>
-        </p:nvSpPr>
-        <p:spPr>
-          <a:xfrm>
-            <a:off x="914400" y="2194560"/>
-            <a:ext cx="10332720" cy="1097280"/>
-          </a:xfrm>
-          <a:prstGeom prst="rect">
-            <a:avLst/>
-          </a:prstGeom>
-          <a:noFill/>
-        </p:spPr>
-        <p:txBody>
-          <a:bodyPr wrap="square">
-            <a:spAutoFit/>
-          </a:bodyPr>
-          <a:lstStyle/>
-          <a:p>
-            <a:pPr algn="ctr">
-              <a:defRPr sz="6000" b="1">
+              <a:defRPr sz="1100" b="1">
                 <a:solidFill>
                   <a:srgbClr val="FFFFFF"/>
                 </a:solidFill>
@@ -3352,43 +3400,7 @@
               </a:defRPr>
             </a:pPr>
             <a:r>
-              <a:t>TechNotes AI</a:t>
-            </a:r>
-          </a:p>
-        </p:txBody>
-      </p:sp>
-      <p:sp>
-        <p:nvSpPr>
-          <p:cNvPr id="8" name="TextBox 7"/>
-          <p:cNvSpPr txBox="1"/>
-          <p:nvPr/>
-        </p:nvSpPr>
-        <p:spPr>
-          <a:xfrm>
-            <a:off x="914400" y="3291840"/>
-            <a:ext cx="10332720" cy="640080"/>
-          </a:xfrm>
-          <a:prstGeom prst="rect">
-            <a:avLst/>
-          </a:prstGeom>
-          <a:noFill/>
-        </p:spPr>
-        <p:txBody>
-          <a:bodyPr wrap="square">
-            <a:spAutoFit/>
-          </a:bodyPr>
-          <a:lstStyle/>
-          <a:p>
-            <a:pPr algn="ctr">
-              <a:defRPr sz="2200" b="0">
-                <a:solidFill>
-                  <a:srgbClr val="B0B0C0"/>
-                </a:solidFill>
-                <a:latin typeface="Segoe UI"/>
-              </a:defRPr>
-            </a:pPr>
-            <a:r>
-              <a:t>A Smart Study Platform for RGPV Engineering Students</a:t>
+              <a:t>Next.js</a:t>
             </a:r>
           </a:p>
         </p:txBody>
@@ -3401,11 +3413,13 @@
         </p:nvSpPr>
         <p:spPr>
           <a:xfrm>
-            <a:off x="3200400" y="4206240"/>
-            <a:ext cx="1508760" cy="347472"/>
+            <a:off x="4828032" y="3931920"/>
+            <a:ext cx="1481328" cy="329184"/>
           </a:xfrm>
           <a:prstGeom prst="roundRect">
-            <a:avLst/>
+            <a:avLst>
+              <a:gd name="adj" fmla="val 50000"/>
+            </a:avLst>
           </a:prstGeom>
           <a:solidFill>
             <a:srgbClr val="F97316"/>
@@ -3429,7 +3443,7 @@
           </a:fontRef>
         </p:style>
         <p:txBody>
-          <a:bodyPr rtlCol="0" anchor="ctr" wrap="none" tIns="25400" bIns="25400"/>
+          <a:bodyPr rtlCol="0" anchor="ctr" tIns="25400" bIns="25400"/>
           <a:lstStyle/>
           <a:p>
             <a:pPr algn="ctr">
@@ -3441,7 +3455,7 @@
               </a:defRPr>
             </a:pPr>
             <a:r>
-              <a:t>Next.js</a:t>
+              <a:t>Supabase</a:t>
             </a:r>
           </a:p>
         </p:txBody>
@@ -3454,11 +3468,13 @@
         </p:nvSpPr>
         <p:spPr>
           <a:xfrm>
-            <a:off x="4892040" y="4206240"/>
-            <a:ext cx="1645919" cy="347472"/>
+            <a:off x="6492240" y="3931920"/>
+            <a:ext cx="1609344" cy="329184"/>
           </a:xfrm>
           <a:prstGeom prst="roundRect">
-            <a:avLst/>
+            <a:avLst>
+              <a:gd name="adj" fmla="val 50000"/>
+            </a:avLst>
           </a:prstGeom>
           <a:solidFill>
             <a:srgbClr val="F97316"/>
@@ -3482,7 +3498,7 @@
           </a:fontRef>
         </p:style>
         <p:txBody>
-          <a:bodyPr rtlCol="0" anchor="ctr" wrap="none" tIns="25400" bIns="25400"/>
+          <a:bodyPr rtlCol="0" anchor="ctr" tIns="25400" bIns="25400"/>
           <a:lstStyle/>
           <a:p>
             <a:pPr algn="ctr">
@@ -3494,7 +3510,7 @@
               </a:defRPr>
             </a:pPr>
             <a:r>
-              <a:t>Supabase</a:t>
+              <a:t>Gemini AI</a:t>
             </a:r>
           </a:p>
         </p:txBody>
@@ -3507,11 +3523,13 @@
         </p:nvSpPr>
         <p:spPr>
           <a:xfrm>
-            <a:off x="6720839" y="4206240"/>
-            <a:ext cx="2331720" cy="347472"/>
+            <a:off x="8284464" y="3931920"/>
+            <a:ext cx="1737360" cy="329184"/>
           </a:xfrm>
           <a:prstGeom prst="roundRect">
-            <a:avLst/>
+            <a:avLst>
+              <a:gd name="adj" fmla="val 50000"/>
+            </a:avLst>
           </a:prstGeom>
           <a:solidFill>
             <a:srgbClr val="F97316"/>
@@ -3535,7 +3553,7 @@
           </a:fontRef>
         </p:style>
         <p:txBody>
-          <a:bodyPr rtlCol="0" anchor="ctr" wrap="none" tIns="25400" bIns="25400"/>
+          <a:bodyPr rtlCol="0" anchor="ctr" tIns="25400" bIns="25400"/>
           <a:lstStyle/>
           <a:p>
             <a:pPr algn="ctr">
@@ -3547,7 +3565,7 @@
               </a:defRPr>
             </a:pPr>
             <a:r>
-              <a:t>Google Gemini</a:t>
+              <a:t>TypeScript</a:t>
             </a:r>
           </a:p>
         </p:txBody>
@@ -3560,11 +3578,13 @@
         </p:nvSpPr>
         <p:spPr>
           <a:xfrm>
-            <a:off x="9235439" y="4206240"/>
-            <a:ext cx="1920240" cy="347472"/>
+            <a:off x="10204704" y="3931920"/>
+            <a:ext cx="1993392" cy="329184"/>
           </a:xfrm>
           <a:prstGeom prst="roundRect">
-            <a:avLst/>
+            <a:avLst>
+              <a:gd name="adj" fmla="val 50000"/>
+            </a:avLst>
           </a:prstGeom>
           <a:solidFill>
             <a:srgbClr val="F97316"/>
@@ -3588,7 +3608,7 @@
           </a:fontRef>
         </p:style>
         <p:txBody>
-          <a:bodyPr rtlCol="0" anchor="ctr" wrap="none" tIns="25400" bIns="25400"/>
+          <a:bodyPr rtlCol="0" anchor="ctr" tIns="25400" bIns="25400"/>
           <a:lstStyle/>
           <a:p>
             <a:pPr algn="ctr">
@@ -3600,27 +3620,63 @@
               </a:defRPr>
             </a:pPr>
             <a:r>
-              <a:t>TypeScript</a:t>
-            </a:r>
-          </a:p>
-        </p:txBody>
-      </p:sp>
-      <p:sp>
-        <p:nvSpPr>
-          <p:cNvPr id="13" name="Rounded Rectangle 12"/>
+              <a:t>Tailwind CSS</a:t>
+            </a:r>
+          </a:p>
+        </p:txBody>
+      </p:sp>
+      <p:sp>
+        <p:nvSpPr>
+          <p:cNvPr id="13" name="TextBox 12"/>
+          <p:cNvSpPr txBox="1"/>
+          <p:nvPr/>
+        </p:nvSpPr>
+        <p:spPr>
+          <a:xfrm>
+            <a:off x="914400" y="4663440"/>
+            <a:ext cx="10332720" cy="457200"/>
+          </a:xfrm>
+          <a:prstGeom prst="rect">
+            <a:avLst/>
+          </a:prstGeom>
+          <a:noFill/>
+        </p:spPr>
+        <p:txBody>
+          <a:bodyPr wrap="square">
+            <a:spAutoFit/>
+          </a:bodyPr>
+          <a:lstStyle/>
+          <a:p>
+            <a:pPr algn="ctr">
+              <a:defRPr sz="1400" b="0">
+                <a:solidFill>
+                  <a:srgbClr val="707080"/>
+                </a:solidFill>
+                <a:latin typeface="Segoe UI"/>
+              </a:defRPr>
+            </a:pPr>
+            <a:r>
+              <a:t>Free  •  No Ads  •  Bilingual (Hindi / English)  •  AI-Powered</a:t>
+            </a:r>
+          </a:p>
+        </p:txBody>
+      </p:sp>
+      <p:sp>
+        <p:nvSpPr>
+          <p:cNvPr id="14" name="Rectangle 13"/>
           <p:cNvSpPr/>
           <p:nvPr/>
         </p:nvSpPr>
         <p:spPr>
           <a:xfrm>
-            <a:off x="11338559" y="4206240"/>
-            <a:ext cx="2194560" cy="347472"/>
-          </a:xfrm>
-          <a:prstGeom prst="roundRect">
+            <a:off x="5029200" y="5303520"/>
+            <a:ext cx="2103120" cy="38100"/>
+          </a:xfrm>
+          <a:prstGeom prst="rect">
             <a:avLst/>
           </a:prstGeom>
           <a:solidFill>
-            <a:srgbClr val="F97316"/>
+            <a:srgbClr val="14B8A6"/>
           </a:solidFill>
           <a:ln>
             <a:noFill/>
@@ -3641,32 +3697,22 @@
           </a:fontRef>
         </p:style>
         <p:txBody>
-          <a:bodyPr rtlCol="0" anchor="ctr" wrap="none" tIns="25400" bIns="25400"/>
-          <a:lstStyle/>
-          <a:p>
-            <a:pPr algn="ctr">
-              <a:defRPr sz="1100" b="1">
-                <a:solidFill>
-                  <a:srgbClr val="FFFFFF"/>
-                </a:solidFill>
-                <a:latin typeface="Segoe UI"/>
-              </a:defRPr>
-            </a:pPr>
-            <a:r>
-              <a:t>Tailwind CSS</a:t>
-            </a:r>
-          </a:p>
-        </p:txBody>
-      </p:sp>
-      <p:sp>
-        <p:nvSpPr>
-          <p:cNvPr id="14" name="TextBox 13"/>
+          <a:bodyPr rtlCol="0" anchor="ctr"/>
+          <a:lstStyle/>
+          <a:p>
+            <a:pPr algn="ctr"/>
+          </a:p>
+        </p:txBody>
+      </p:sp>
+      <p:sp>
+        <p:nvSpPr>
+          <p:cNvPr id="15" name="TextBox 14"/>
           <p:cNvSpPr txBox="1"/>
           <p:nvPr/>
         </p:nvSpPr>
         <p:spPr>
           <a:xfrm>
-            <a:off x="914400" y="5943600"/>
+            <a:off x="914400" y="5577840"/>
             <a:ext cx="10332720" cy="457200"/>
           </a:xfrm>
           <a:prstGeom prst="rect">
@@ -3681,7 +3727,43 @@
           <a:lstStyle/>
           <a:p>
             <a:pPr algn="ctr">
-              <a:defRPr sz="1500" b="0">
+              <a:defRPr sz="1400" b="0">
+                <a:solidFill>
+                  <a:srgbClr val="B0B0C0"/>
+                </a:solidFill>
+                <a:latin typeface="Segoe UI"/>
+              </a:defRPr>
+            </a:pPr>
+            <a:r>
+              <a:t>Department of Computer Science &amp; Engineering</a:t>
+            </a:r>
+          </a:p>
+        </p:txBody>
+      </p:sp>
+      <p:sp>
+        <p:nvSpPr>
+          <p:cNvPr id="16" name="TextBox 15"/>
+          <p:cNvSpPr txBox="1"/>
+          <p:nvPr/>
+        </p:nvSpPr>
+        <p:spPr>
+          <a:xfrm>
+            <a:off x="914400" y="5943600"/>
+            <a:ext cx="10332720" cy="457200"/>
+          </a:xfrm>
+          <a:prstGeom prst="rect">
+            <a:avLst/>
+          </a:prstGeom>
+          <a:noFill/>
+        </p:spPr>
+        <p:txBody>
+          <a:bodyPr wrap="square">
+            <a:spAutoFit/>
+          </a:bodyPr>
+          <a:lstStyle/>
+          <a:p>
+            <a:pPr algn="ctr">
+              <a:defRPr sz="1300" b="0">
                 <a:solidFill>
                   <a:srgbClr val="707080"/>
                 </a:solidFill>
@@ -3689,7 +3771,7 @@
               </a:defRPr>
             </a:pPr>
             <a:r>
-              <a:t>Free  •  No Ads  •  Bilingual (Hindi / English)  •  AI-Powered</a:t>
+              <a:t>RGPV — Rajiv Gandhi Proudyogiki Vishwavidyalaya</a:t>
             </a:r>
           </a:p>
         </p:txBody>
@@ -3735,7 +3817,7 @@
             <a:avLst/>
           </a:prstGeom>
           <a:solidFill>
-            <a:srgbClr val="F97316"/>
+            <a:srgbClr val="14B8A6"/>
           </a:solidFill>
           <a:ln>
             <a:noFill/>
@@ -3786,7 +3868,7 @@
           <a:lstStyle/>
           <a:p>
             <a:pPr algn="l">
-              <a:defRPr sz="3000" b="1">
+              <a:defRPr sz="2800" b="1">
                 <a:solidFill>
                   <a:srgbClr val="FFFFFF"/>
                 </a:solidFill>
@@ -3807,7 +3889,7 @@
         </p:nvSpPr>
         <p:spPr>
           <a:xfrm>
-            <a:off x="731520" y="914400"/>
+            <a:off x="731520" y="868680"/>
             <a:ext cx="10058400" cy="457200"/>
           </a:xfrm>
           <a:prstGeom prst="rect">
@@ -3822,7 +3904,7 @@
           <a:lstStyle/>
           <a:p>
             <a:pPr algn="l">
-              <a:defRPr sz="1500" b="0">
+              <a:defRPr sz="1400" b="0">
                 <a:solidFill>
                   <a:srgbClr val="B0B0C0"/>
                 </a:solidFill>
@@ -3843,8 +3925,8 @@
         </p:nvSpPr>
         <p:spPr>
           <a:xfrm>
-            <a:off x="11155680" y="365760"/>
-            <a:ext cx="731520" cy="457200"/>
+            <a:off x="11247120" y="365760"/>
+            <a:ext cx="640080" cy="365760"/>
           </a:xfrm>
           <a:prstGeom prst="rect">
             <a:avLst/>
@@ -3858,7 +3940,7 @@
           <a:lstStyle/>
           <a:p>
             <a:pPr algn="r">
-              <a:defRPr sz="1400" b="0">
+              <a:defRPr sz="1300" b="0">
                 <a:solidFill>
                   <a:srgbClr val="707080"/>
                 </a:solidFill>
@@ -3879,14 +3961,14 @@
         </p:nvSpPr>
         <p:spPr>
           <a:xfrm>
-            <a:off x="731520" y="1325880"/>
+            <a:off x="731520" y="1234440"/>
             <a:ext cx="10698480" cy="19050"/>
           </a:xfrm>
           <a:prstGeom prst="rect">
             <a:avLst/>
           </a:prstGeom>
           <a:solidFill>
-            <a:srgbClr val="333344"/>
+            <a:srgbClr val="303040"/>
           </a:solidFill>
           <a:ln>
             <a:noFill/>
@@ -3922,8 +4004,8 @@
         </p:nvSpPr>
         <p:spPr>
           <a:xfrm>
-            <a:off x="914400" y="1828800"/>
-            <a:ext cx="10515600" cy="4114800"/>
+            <a:off x="914400" y="1645920"/>
+            <a:ext cx="10515600" cy="3657600"/>
           </a:xfrm>
           <a:prstGeom prst="rect">
             <a:avLst/>
@@ -3936,11 +4018,11 @@
           </a:bodyPr>
           <a:lstStyle/>
           <a:p>
-            <a:pPr algn="l">
-              <a:spcAft>
-                <a:spcPts val="2720"/>
-              </a:spcAft>
-              <a:defRPr sz="1700" b="0">
+            <a:pPr>
+              <a:spcAft>
+                <a:spcPts val="2400"/>
+              </a:spcAft>
+              <a:defRPr sz="1600">
                 <a:solidFill>
                   <a:srgbClr val="FFFFFF"/>
                 </a:solidFill>
@@ -3954,11 +4036,11 @@
             </a:r>
           </a:p>
           <a:p>
-            <a:pPr algn="l">
-              <a:spcAft>
-                <a:spcPts val="2720"/>
-              </a:spcAft>
-              <a:defRPr sz="1700" b="0">
+            <a:pPr>
+              <a:spcAft>
+                <a:spcPts val="2400"/>
+              </a:spcAft>
+              <a:defRPr sz="1600">
                 <a:solidFill>
                   <a:srgbClr val="FFFFFF"/>
                 </a:solidFill>
@@ -3972,11 +4054,11 @@
             </a:r>
           </a:p>
           <a:p>
-            <a:pPr algn="l">
-              <a:spcAft>
-                <a:spcPts val="2720"/>
-              </a:spcAft>
-              <a:defRPr sz="1700" b="0">
+            <a:pPr>
+              <a:spcAft>
+                <a:spcPts val="2400"/>
+              </a:spcAft>
+              <a:defRPr sz="1600">
                 <a:solidFill>
                   <a:srgbClr val="FFFFFF"/>
                 </a:solidFill>
@@ -3990,11 +4072,11 @@
             </a:r>
           </a:p>
           <a:p>
-            <a:pPr algn="l">
-              <a:spcAft>
-                <a:spcPts val="2720"/>
-              </a:spcAft>
-              <a:defRPr sz="1700" b="0">
+            <a:pPr>
+              <a:spcAft>
+                <a:spcPts val="2400"/>
+              </a:spcAft>
+              <a:defRPr sz="1600">
                 <a:solidFill>
                   <a:srgbClr val="FFFFFF"/>
                 </a:solidFill>
@@ -4008,11 +4090,11 @@
             </a:r>
           </a:p>
           <a:p>
-            <a:pPr algn="l">
-              <a:spcAft>
-                <a:spcPts val="2720"/>
-              </a:spcAft>
-              <a:defRPr sz="1700" b="0">
+            <a:pPr>
+              <a:spcAft>
+                <a:spcPts val="2400"/>
+              </a:spcAft>
+              <a:defRPr sz="1600">
                 <a:solidFill>
                   <a:srgbClr val="FFFFFF"/>
                 </a:solidFill>
@@ -4026,11 +4108,11 @@
             </a:r>
           </a:p>
           <a:p>
-            <a:pPr algn="l">
-              <a:spcAft>
-                <a:spcPts val="2720"/>
-              </a:spcAft>
-              <a:defRPr sz="1700" b="0">
+            <a:pPr>
+              <a:spcAft>
+                <a:spcPts val="2400"/>
+              </a:spcAft>
+              <a:defRPr sz="1600">
                 <a:solidFill>
                   <a:srgbClr val="FFFFFF"/>
                 </a:solidFill>
@@ -4053,14 +4135,16 @@
         </p:nvSpPr>
         <p:spPr>
           <a:xfrm>
-            <a:off x="914400" y="5303520"/>
-            <a:ext cx="10332720" cy="822960"/>
+            <a:off x="914400" y="5120640"/>
+            <a:ext cx="10332720" cy="1005840"/>
           </a:xfrm>
           <a:prstGeom prst="roundRect">
-            <a:avLst/>
+            <a:avLst>
+              <a:gd name="adj" fmla="val 5000"/>
+            </a:avLst>
           </a:prstGeom>
           <a:solidFill>
-            <a:srgbClr val="14141C"/>
+            <a:srgbClr val="1A1A28"/>
           </a:solidFill>
           <a:ln>
             <a:noFill/>
@@ -4096,7 +4180,7 @@
         </p:nvSpPr>
         <p:spPr>
           <a:xfrm>
-            <a:off x="1188720" y="5349240"/>
+            <a:off x="1188720" y="5212080"/>
             <a:ext cx="4572000" cy="365760"/>
           </a:xfrm>
           <a:prstGeom prst="rect">
@@ -4111,7 +4195,7 @@
           <a:lstStyle/>
           <a:p>
             <a:pPr algn="l">
-              <a:defRPr sz="1600" b="1">
+              <a:defRPr sz="1500" b="1">
                 <a:solidFill>
                   <a:srgbClr val="F97316"/>
                 </a:solidFill>
@@ -4132,7 +4216,7 @@
         </p:nvSpPr>
         <p:spPr>
           <a:xfrm>
-            <a:off x="1188720" y="5669280"/>
+            <a:off x="1188720" y="5577840"/>
             <a:ext cx="4572000" cy="365760"/>
           </a:xfrm>
           <a:prstGeom prst="rect">
@@ -4147,9 +4231,9 @@
           <a:lstStyle/>
           <a:p>
             <a:pPr algn="l">
-              <a:defRPr sz="1600" b="1">
-                <a:solidFill>
-                  <a:srgbClr val="1E3A8A"/>
+              <a:defRPr sz="1500" b="1">
+                <a:solidFill>
+                  <a:srgbClr val="14B8A6"/>
                 </a:solidFill>
                 <a:latin typeface="Segoe UI"/>
               </a:defRPr>
@@ -4168,7 +4252,7 @@
         </p:nvSpPr>
         <p:spPr>
           <a:xfrm>
-            <a:off x="6400800" y="5349240"/>
+            <a:off x="6400800" y="5212080"/>
             <a:ext cx="4572000" cy="365760"/>
           </a:xfrm>
           <a:prstGeom prst="rect">
@@ -4183,7 +4267,7 @@
           <a:lstStyle/>
           <a:p>
             <a:pPr algn="l">
-              <a:defRPr sz="1600" b="1">
+              <a:defRPr sz="1500" b="1">
                 <a:solidFill>
                   <a:srgbClr val="F97316"/>
                 </a:solidFill>
@@ -4204,7 +4288,7 @@
         </p:nvSpPr>
         <p:spPr>
           <a:xfrm>
-            <a:off x="6400800" y="5669280"/>
+            <a:off x="6400800" y="5577840"/>
             <a:ext cx="4572000" cy="365760"/>
           </a:xfrm>
           <a:prstGeom prst="rect">
@@ -4219,9 +4303,9 @@
           <a:lstStyle/>
           <a:p>
             <a:pPr algn="l">
-              <a:defRPr sz="1600" b="1">
-                <a:solidFill>
-                  <a:srgbClr val="1E3A8A"/>
+              <a:defRPr sz="1500" b="1">
+                <a:solidFill>
+                  <a:srgbClr val="14B8A6"/>
                 </a:solidFill>
                 <a:latin typeface="Segoe UI"/>
               </a:defRPr>
@@ -4240,8 +4324,8 @@
         </p:nvSpPr>
         <p:spPr>
           <a:xfrm>
-            <a:off x="731520" y="6400800"/>
-            <a:ext cx="7315200" cy="365760"/>
+            <a:off x="731520" y="6446520"/>
+            <a:ext cx="7315200" cy="320040"/>
           </a:xfrm>
           <a:prstGeom prst="rect">
             <a:avLst/>
@@ -4255,7 +4339,7 @@
           <a:lstStyle/>
           <a:p>
             <a:pPr algn="l">
-              <a:defRPr sz="1100" b="0">
+              <a:defRPr sz="1000" b="0">
                 <a:solidFill>
                   <a:srgbClr val="707080"/>
                 </a:solidFill>
@@ -4309,7 +4393,7 @@
             <a:avLst/>
           </a:prstGeom>
           <a:solidFill>
-            <a:srgbClr val="F97316"/>
+            <a:srgbClr val="14B8A6"/>
           </a:solidFill>
           <a:ln>
             <a:noFill/>
@@ -4360,7 +4444,7 @@
           <a:lstStyle/>
           <a:p>
             <a:pPr algn="l">
-              <a:defRPr sz="3000" b="1">
+              <a:defRPr sz="2800" b="1">
                 <a:solidFill>
                   <a:srgbClr val="FFFFFF"/>
                 </a:solidFill>
@@ -4381,7 +4465,7 @@
         </p:nvSpPr>
         <p:spPr>
           <a:xfrm>
-            <a:off x="731520" y="914400"/>
+            <a:off x="731520" y="868680"/>
             <a:ext cx="10058400" cy="457200"/>
           </a:xfrm>
           <a:prstGeom prst="rect">
@@ -4396,15 +4480,15 @@
           <a:lstStyle/>
           <a:p>
             <a:pPr algn="l">
-              <a:defRPr sz="1500" b="0">
-                <a:solidFill>
-                  <a:srgbClr val="B0B0C0"/>
-                </a:solidFill>
-                <a:latin typeface="Segoe UI"/>
-              </a:defRPr>
-            </a:pPr>
-            <a:r>
-              <a:t>Content management dashboard — admin-only access</a:t>
+              <a:defRPr sz="1400" b="0">
+                <a:solidFill>
+                  <a:srgbClr val="B0B0C0"/>
+                </a:solidFill>
+                <a:latin typeface="Segoe UI"/>
+              </a:defRPr>
+            </a:pPr>
+            <a:r>
+              <a:t>Secure content management — admin-only access</a:t>
             </a:r>
           </a:p>
         </p:txBody>
@@ -4417,8 +4501,8 @@
         </p:nvSpPr>
         <p:spPr>
           <a:xfrm>
-            <a:off x="11155680" y="365760"/>
-            <a:ext cx="731520" cy="457200"/>
+            <a:off x="11247120" y="365760"/>
+            <a:ext cx="640080" cy="365760"/>
           </a:xfrm>
           <a:prstGeom prst="rect">
             <a:avLst/>
@@ -4432,7 +4516,7 @@
           <a:lstStyle/>
           <a:p>
             <a:pPr algn="r">
-              <a:defRPr sz="1400" b="0">
+              <a:defRPr sz="1300" b="0">
                 <a:solidFill>
                   <a:srgbClr val="707080"/>
                 </a:solidFill>
@@ -4453,14 +4537,14 @@
         </p:nvSpPr>
         <p:spPr>
           <a:xfrm>
-            <a:off x="731520" y="1325880"/>
+            <a:off x="731520" y="1234440"/>
             <a:ext cx="10698480" cy="19050"/>
           </a:xfrm>
           <a:prstGeom prst="rect">
             <a:avLst/>
           </a:prstGeom>
           <a:solidFill>
-            <a:srgbClr val="333344"/>
+            <a:srgbClr val="303040"/>
           </a:solidFill>
           <a:ln>
             <a:noFill/>
@@ -4496,7 +4580,7 @@
         </p:nvSpPr>
         <p:spPr>
           <a:xfrm>
-            <a:off x="914400" y="1828800"/>
+            <a:off x="914400" y="1645920"/>
             <a:ext cx="10515600" cy="4114800"/>
           </a:xfrm>
           <a:prstGeom prst="rect">
@@ -4510,11 +4594,11 @@
           </a:bodyPr>
           <a:lstStyle/>
           <a:p>
-            <a:pPr algn="l">
-              <a:spcAft>
-                <a:spcPts val="2400"/>
-              </a:spcAft>
-              <a:defRPr sz="1600" b="0">
+            <a:pPr>
+              <a:spcAft>
+                <a:spcPts val="2100"/>
+              </a:spcAft>
+              <a:defRPr sz="1500">
                 <a:solidFill>
                   <a:srgbClr val="FFFFFF"/>
                 </a:solidFill>
@@ -4524,15 +4608,15 @@
               <a:buChar char="▸"/>
             </a:pPr>
             <a:r>
-              <a:t>Admin-only access via Supabase Auth + whitelisted emails in admin_users table</a:t>
-            </a:r>
-          </a:p>
-          <a:p>
-            <a:pPr algn="l">
-              <a:spcAft>
-                <a:spcPts val="2400"/>
-              </a:spcAft>
-              <a:defRPr sz="1600" b="0">
+              <a:t>Admin-only access via Supabase Auth (email/password) + whitelisted emails in admin_users table</a:t>
+            </a:r>
+          </a:p>
+          <a:p>
+            <a:pPr>
+              <a:spcAft>
+                <a:spcPts val="2100"/>
+              </a:spcAft>
+              <a:defRPr sz="1500">
                 <a:solidFill>
                   <a:srgbClr val="FFFFFF"/>
                 </a:solidFill>
@@ -4542,15 +4626,15 @@
               <a:buChar char="▸"/>
             </a:pPr>
             <a:r>
-              <a:t>Upload and manage content across all sections (notes, PYQ, DSA, placement, imp_questions, syllabus)</a:t>
-            </a:r>
-          </a:p>
-          <a:p>
-            <a:pPr algn="l">
-              <a:spcAft>
-                <a:spcPts val="2400"/>
-              </a:spcAft>
-              <a:defRPr sz="1600" b="0">
+              <a:t>Upload and manage content across all sections — notes, PYQ, DSA, placement, imp_questions, syllabus</a:t>
+            </a:r>
+          </a:p>
+          <a:p>
+            <a:pPr>
+              <a:spcAft>
+                <a:spcPts val="2100"/>
+              </a:spcAft>
+              <a:defRPr sz="1500">
                 <a:solidFill>
                   <a:srgbClr val="FFFFFF"/>
                 </a:solidFill>
@@ -4564,11 +4648,11 @@
             </a:r>
           </a:p>
           <a:p>
-            <a:pPr algn="l">
-              <a:spcAft>
-                <a:spcPts val="2400"/>
-              </a:spcAft>
-              <a:defRPr sz="1600" b="0">
+            <a:pPr>
+              <a:spcAft>
+                <a:spcPts val="2100"/>
+              </a:spcAft>
+              <a:defRPr sz="1500">
                 <a:solidFill>
                   <a:srgbClr val="FFFFFF"/>
                 </a:solidFill>
@@ -4578,15 +4662,15 @@
               <a:buChar char="▸"/>
             </a:pPr>
             <a:r>
-              <a:t>Upload files to Supabase Storage (notes-files bucket) — PDF, image, DOCX, PPTX</a:t>
-            </a:r>
-          </a:p>
-          <a:p>
-            <a:pPr algn="l">
-              <a:spcAft>
-                <a:spcPts val="2400"/>
-              </a:spcAft>
-              <a:defRPr sz="1600" b="0">
+              <a:t>Upload files to Supabase Storage (notes-files bucket) — PDF, image, DOCX, PPTX, DOC, PPT</a:t>
+            </a:r>
+          </a:p>
+          <a:p>
+            <a:pPr>
+              <a:spcAft>
+                <a:spcPts val="2100"/>
+              </a:spcAft>
+              <a:defRPr sz="1500">
                 <a:solidFill>
                   <a:srgbClr val="FFFFFF"/>
                 </a:solidFill>
@@ -4596,15 +4680,15 @@
               <a:buChar char="▸"/>
             </a:pPr>
             <a:r>
-              <a:t>Manage academic structure — add/edit/delete branches, years, semesters, subjects</a:t>
-            </a:r>
-          </a:p>
-          <a:p>
-            <a:pPr algn="l">
-              <a:spcAft>
-                <a:spcPts val="2400"/>
-              </a:spcAft>
-              <a:defRPr sz="1600" b="0">
+              <a:t>Manage academic structure — add / edit / delete branches, years, semesters, subjects</a:t>
+            </a:r>
+          </a:p>
+          <a:p>
+            <a:pPr>
+              <a:spcAft>
+                <a:spcPts val="2100"/>
+              </a:spcAft>
+              <a:defRPr sz="1500">
                 <a:solidFill>
                   <a:srgbClr val="FFFFFF"/>
                 </a:solidFill>
@@ -4618,11 +4702,11 @@
             </a:r>
           </a:p>
           <a:p>
-            <a:pPr algn="l">
-              <a:spcAft>
-                <a:spcPts val="2400"/>
-              </a:spcAft>
-              <a:defRPr sz="1600" b="0">
+            <a:pPr>
+              <a:spcAft>
+                <a:spcPts val="2100"/>
+              </a:spcAft>
+              <a:defRPr sz="1500">
                 <a:solidFill>
                   <a:srgbClr val="FFFFFF"/>
                 </a:solidFill>
@@ -4645,8 +4729,8 @@
         </p:nvSpPr>
         <p:spPr>
           <a:xfrm>
-            <a:off x="731520" y="6400800"/>
-            <a:ext cx="7315200" cy="365760"/>
+            <a:off x="731520" y="6446520"/>
+            <a:ext cx="7315200" cy="320040"/>
           </a:xfrm>
           <a:prstGeom prst="rect">
             <a:avLst/>
@@ -4660,7 +4744,7 @@
           <a:lstStyle/>
           <a:p>
             <a:pPr algn="l">
-              <a:defRPr sz="1100" b="0">
+              <a:defRPr sz="1000" b="0">
                 <a:solidFill>
                   <a:srgbClr val="707080"/>
                 </a:solidFill>
@@ -4714,7 +4798,7 @@
             <a:avLst/>
           </a:prstGeom>
           <a:solidFill>
-            <a:srgbClr val="F97316"/>
+            <a:srgbClr val="14B8A6"/>
           </a:solidFill>
           <a:ln>
             <a:noFill/>
@@ -4765,7 +4849,7 @@
           <a:lstStyle/>
           <a:p>
             <a:pPr algn="l">
-              <a:defRPr sz="3000" b="1">
+              <a:defRPr sz="2800" b="1">
                 <a:solidFill>
                   <a:srgbClr val="FFFFFF"/>
                 </a:solidFill>
@@ -4786,7 +4870,7 @@
         </p:nvSpPr>
         <p:spPr>
           <a:xfrm>
-            <a:off x="731520" y="914400"/>
+            <a:off x="731520" y="868680"/>
             <a:ext cx="10058400" cy="457200"/>
           </a:xfrm>
           <a:prstGeom prst="rect">
@@ -4801,7 +4885,7 @@
           <a:lstStyle/>
           <a:p>
             <a:pPr algn="l">
-              <a:defRPr sz="1500" b="0">
+              <a:defRPr sz="1400" b="0">
                 <a:solidFill>
                   <a:srgbClr val="B0B0C0"/>
                 </a:solidFill>
@@ -4822,8 +4906,8 @@
         </p:nvSpPr>
         <p:spPr>
           <a:xfrm>
-            <a:off x="11155680" y="365760"/>
-            <a:ext cx="731520" cy="457200"/>
+            <a:off x="11247120" y="365760"/>
+            <a:ext cx="640080" cy="365760"/>
           </a:xfrm>
           <a:prstGeom prst="rect">
             <a:avLst/>
@@ -4837,7 +4921,7 @@
           <a:lstStyle/>
           <a:p>
             <a:pPr algn="r">
-              <a:defRPr sz="1400" b="0">
+              <a:defRPr sz="1300" b="0">
                 <a:solidFill>
                   <a:srgbClr val="707080"/>
                 </a:solidFill>
@@ -4858,14 +4942,14 @@
         </p:nvSpPr>
         <p:spPr>
           <a:xfrm>
-            <a:off x="731520" y="1325880"/>
+            <a:off x="731520" y="1234440"/>
             <a:ext cx="10698480" cy="19050"/>
           </a:xfrm>
           <a:prstGeom prst="rect">
             <a:avLst/>
           </a:prstGeom>
           <a:solidFill>
-            <a:srgbClr val="333344"/>
+            <a:srgbClr val="303040"/>
           </a:solidFill>
           <a:ln>
             <a:noFill/>
@@ -4901,11 +4985,13 @@
         </p:nvSpPr>
         <p:spPr>
           <a:xfrm>
-            <a:off x="548640" y="1645920"/>
-            <a:ext cx="2926080" cy="4114800"/>
+            <a:off x="457200" y="1554480"/>
+            <a:ext cx="2834640" cy="4114800"/>
           </a:xfrm>
           <a:prstGeom prst="roundRect">
-            <a:avLst/>
+            <a:avLst>
+              <a:gd name="adj" fmla="val 8000"/>
+            </a:avLst>
           </a:prstGeom>
           <a:solidFill>
             <a:srgbClr val="14141C"/>
@@ -4944,8 +5030,8 @@
         </p:nvSpPr>
         <p:spPr>
           <a:xfrm>
-            <a:off x="548640" y="1645920"/>
-            <a:ext cx="2926080" cy="45720"/>
+            <a:off x="457200" y="1554480"/>
+            <a:ext cx="2834640" cy="45720"/>
           </a:xfrm>
           <a:prstGeom prst="rect">
             <a:avLst/>
@@ -4987,8 +5073,8 @@
         </p:nvSpPr>
         <p:spPr>
           <a:xfrm>
-            <a:off x="777240" y="1783080"/>
-            <a:ext cx="2468880" cy="365760"/>
+            <a:off x="640080" y="1664208"/>
+            <a:ext cx="2468880" cy="320040"/>
           </a:xfrm>
           <a:prstGeom prst="rect">
             <a:avLst/>
@@ -5002,7 +5088,7 @@
           <a:lstStyle/>
           <a:p>
             <a:pPr algn="l">
-              <a:defRPr sz="1600" b="1">
+              <a:defRPr sz="1500" b="1">
                 <a:solidFill>
                   <a:srgbClr val="F97316"/>
                 </a:solidFill>
@@ -5023,8 +5109,8 @@
         </p:nvSpPr>
         <p:spPr>
           <a:xfrm>
-            <a:off x="777240" y="2194560"/>
-            <a:ext cx="2468880" cy="3474720"/>
+            <a:off x="640080" y="2011680"/>
+            <a:ext cx="2468880" cy="3566160"/>
           </a:xfrm>
           <a:prstGeom prst="rect">
             <a:avLst/>
@@ -5039,9 +5125,9 @@
           <a:p>
             <a:pPr algn="l">
               <a:spcAft>
-                <a:spcPts val="1560"/>
-              </a:spcAft>
-              <a:defRPr sz="1300" b="0">
+                <a:spcPts val="1380"/>
+              </a:spcAft>
+              <a:defRPr sz="1200" b="0">
                 <a:solidFill>
                   <a:srgbClr val="B0B0C0"/>
                 </a:solidFill>
@@ -5055,9 +5141,9 @@
           <a:p>
             <a:pPr algn="l">
               <a:spcAft>
-                <a:spcPts val="1560"/>
-              </a:spcAft>
-              <a:defRPr sz="1300" b="0">
+                <a:spcPts val="1380"/>
+              </a:spcAft>
+              <a:defRPr sz="1200" b="0">
                 <a:solidFill>
                   <a:srgbClr val="B0B0C0"/>
                 </a:solidFill>
@@ -5071,9 +5157,9 @@
           <a:p>
             <a:pPr algn="l">
               <a:spcAft>
-                <a:spcPts val="1560"/>
-              </a:spcAft>
-              <a:defRPr sz="1300" b="0">
+                <a:spcPts val="1380"/>
+              </a:spcAft>
+              <a:defRPr sz="1200" b="0">
                 <a:solidFill>
                   <a:srgbClr val="B0B0C0"/>
                 </a:solidFill>
@@ -5087,9 +5173,9 @@
           <a:p>
             <a:pPr algn="l">
               <a:spcAft>
-                <a:spcPts val="1560"/>
-              </a:spcAft>
-              <a:defRPr sz="1300" b="0">
+                <a:spcPts val="1380"/>
+              </a:spcAft>
+              <a:defRPr sz="1200" b="0">
                 <a:solidFill>
                   <a:srgbClr val="B0B0C0"/>
                 </a:solidFill>
@@ -5103,9 +5189,9 @@
           <a:p>
             <a:pPr algn="l">
               <a:spcAft>
-                <a:spcPts val="1560"/>
-              </a:spcAft>
-              <a:defRPr sz="1300" b="0">
+                <a:spcPts val="1380"/>
+              </a:spcAft>
+              <a:defRPr sz="1200" b="0">
                 <a:solidFill>
                   <a:srgbClr val="B0B0C0"/>
                 </a:solidFill>
@@ -5126,11 +5212,13 @@
         </p:nvSpPr>
         <p:spPr>
           <a:xfrm>
-            <a:off x="3749039" y="1645920"/>
-            <a:ext cx="2926080" cy="4114800"/>
+            <a:off x="3657600" y="1554480"/>
+            <a:ext cx="2834640" cy="4114800"/>
           </a:xfrm>
           <a:prstGeom prst="roundRect">
-            <a:avLst/>
+            <a:avLst>
+              <a:gd name="adj" fmla="val 8000"/>
+            </a:avLst>
           </a:prstGeom>
           <a:solidFill>
             <a:srgbClr val="14141C"/>
@@ -5169,8 +5257,8 @@
         </p:nvSpPr>
         <p:spPr>
           <a:xfrm>
-            <a:off x="3749039" y="1645920"/>
-            <a:ext cx="2926080" cy="45720"/>
+            <a:off x="3657600" y="1554480"/>
+            <a:ext cx="2834640" cy="45720"/>
           </a:xfrm>
           <a:prstGeom prst="rect">
             <a:avLst/>
@@ -5212,8 +5300,8 @@
         </p:nvSpPr>
         <p:spPr>
           <a:xfrm>
-            <a:off x="3977639" y="1783080"/>
-            <a:ext cx="2468880" cy="365760"/>
+            <a:off x="3840480" y="1664208"/>
+            <a:ext cx="2468880" cy="320040"/>
           </a:xfrm>
           <a:prstGeom prst="rect">
             <a:avLst/>
@@ -5227,7 +5315,7 @@
           <a:lstStyle/>
           <a:p>
             <a:pPr algn="l">
-              <a:defRPr sz="1600" b="1">
+              <a:defRPr sz="1500" b="1">
                 <a:solidFill>
                   <a:srgbClr val="1E3A8A"/>
                 </a:solidFill>
@@ -5248,8 +5336,8 @@
         </p:nvSpPr>
         <p:spPr>
           <a:xfrm>
-            <a:off x="3977639" y="2194560"/>
-            <a:ext cx="2468880" cy="3474720"/>
+            <a:off x="3840480" y="2011680"/>
+            <a:ext cx="2468880" cy="3566160"/>
           </a:xfrm>
           <a:prstGeom prst="rect">
             <a:avLst/>
@@ -5264,9 +5352,9 @@
           <a:p>
             <a:pPr algn="l">
               <a:spcAft>
-                <a:spcPts val="1560"/>
-              </a:spcAft>
-              <a:defRPr sz="1300" b="0">
+                <a:spcPts val="1380"/>
+              </a:spcAft>
+              <a:defRPr sz="1200" b="0">
                 <a:solidFill>
                   <a:srgbClr val="B0B0C0"/>
                 </a:solidFill>
@@ -5280,9 +5368,9 @@
           <a:p>
             <a:pPr algn="l">
               <a:spcAft>
-                <a:spcPts val="1560"/>
-              </a:spcAft>
-              <a:defRPr sz="1300" b="0">
+                <a:spcPts val="1380"/>
+              </a:spcAft>
+              <a:defRPr sz="1200" b="0">
                 <a:solidFill>
                   <a:srgbClr val="B0B0C0"/>
                 </a:solidFill>
@@ -5296,9 +5384,9 @@
           <a:p>
             <a:pPr algn="l">
               <a:spcAft>
-                <a:spcPts val="1560"/>
-              </a:spcAft>
-              <a:defRPr sz="1300" b="0">
+                <a:spcPts val="1380"/>
+              </a:spcAft>
+              <a:defRPr sz="1200" b="0">
                 <a:solidFill>
                   <a:srgbClr val="B0B0C0"/>
                 </a:solidFill>
@@ -5312,9 +5400,9 @@
           <a:p>
             <a:pPr algn="l">
               <a:spcAft>
-                <a:spcPts val="1560"/>
-              </a:spcAft>
-              <a:defRPr sz="1300" b="0">
+                <a:spcPts val="1380"/>
+              </a:spcAft>
+              <a:defRPr sz="1200" b="0">
                 <a:solidFill>
                   <a:srgbClr val="B0B0C0"/>
                 </a:solidFill>
@@ -5328,9 +5416,9 @@
           <a:p>
             <a:pPr algn="l">
               <a:spcAft>
-                <a:spcPts val="1560"/>
-              </a:spcAft>
-              <a:defRPr sz="1300" b="0">
+                <a:spcPts val="1380"/>
+              </a:spcAft>
+              <a:defRPr sz="1200" b="0">
                 <a:solidFill>
                   <a:srgbClr val="B0B0C0"/>
                 </a:solidFill>
@@ -5351,11 +5439,13 @@
         </p:nvSpPr>
         <p:spPr>
           <a:xfrm>
-            <a:off x="6949440" y="1645920"/>
-            <a:ext cx="2926080" cy="4114800"/>
+            <a:off x="6858000" y="1554480"/>
+            <a:ext cx="2834640" cy="4114800"/>
           </a:xfrm>
           <a:prstGeom prst="roundRect">
-            <a:avLst/>
+            <a:avLst>
+              <a:gd name="adj" fmla="val 8000"/>
+            </a:avLst>
           </a:prstGeom>
           <a:solidFill>
             <a:srgbClr val="14141C"/>
@@ -5394,8 +5484,8 @@
         </p:nvSpPr>
         <p:spPr>
           <a:xfrm>
-            <a:off x="6949440" y="1645920"/>
-            <a:ext cx="2926080" cy="45720"/>
+            <a:off x="6858000" y="1554480"/>
+            <a:ext cx="2834640" cy="45720"/>
           </a:xfrm>
           <a:prstGeom prst="rect">
             <a:avLst/>
@@ -5437,8 +5527,8 @@
         </p:nvSpPr>
         <p:spPr>
           <a:xfrm>
-            <a:off x="7178040" y="1783080"/>
-            <a:ext cx="2468880" cy="365760"/>
+            <a:off x="7040880" y="1664208"/>
+            <a:ext cx="2468880" cy="320040"/>
           </a:xfrm>
           <a:prstGeom prst="rect">
             <a:avLst/>
@@ -5452,7 +5542,7 @@
           <a:lstStyle/>
           <a:p>
             <a:pPr algn="l">
-              <a:defRPr sz="1600" b="1">
+              <a:defRPr sz="1500" b="1">
                 <a:solidFill>
                   <a:srgbClr val="22C55E"/>
                 </a:solidFill>
@@ -5473,8 +5563,8 @@
         </p:nvSpPr>
         <p:spPr>
           <a:xfrm>
-            <a:off x="7178040" y="2194560"/>
-            <a:ext cx="2468880" cy="3474720"/>
+            <a:off x="7040880" y="2011680"/>
+            <a:ext cx="2468880" cy="3566160"/>
           </a:xfrm>
           <a:prstGeom prst="rect">
             <a:avLst/>
@@ -5489,9 +5579,9 @@
           <a:p>
             <a:pPr algn="l">
               <a:spcAft>
-                <a:spcPts val="1560"/>
-              </a:spcAft>
-              <a:defRPr sz="1300" b="0">
+                <a:spcPts val="1380"/>
+              </a:spcAft>
+              <a:defRPr sz="1200" b="0">
                 <a:solidFill>
                   <a:srgbClr val="B0B0C0"/>
                 </a:solidFill>
@@ -5505,9 +5595,9 @@
           <a:p>
             <a:pPr algn="l">
               <a:spcAft>
-                <a:spcPts val="1560"/>
-              </a:spcAft>
-              <a:defRPr sz="1300" b="0">
+                <a:spcPts val="1380"/>
+              </a:spcAft>
+              <a:defRPr sz="1200" b="0">
                 <a:solidFill>
                   <a:srgbClr val="B0B0C0"/>
                 </a:solidFill>
@@ -5521,9 +5611,9 @@
           <a:p>
             <a:pPr algn="l">
               <a:spcAft>
-                <a:spcPts val="1560"/>
-              </a:spcAft>
-              <a:defRPr sz="1300" b="0">
+                <a:spcPts val="1380"/>
+              </a:spcAft>
+              <a:defRPr sz="1200" b="0">
                 <a:solidFill>
                   <a:srgbClr val="B0B0C0"/>
                 </a:solidFill>
@@ -5537,9 +5627,9 @@
           <a:p>
             <a:pPr algn="l">
               <a:spcAft>
-                <a:spcPts val="1560"/>
-              </a:spcAft>
-              <a:defRPr sz="1300" b="0">
+                <a:spcPts val="1380"/>
+              </a:spcAft>
+              <a:defRPr sz="1200" b="0">
                 <a:solidFill>
                   <a:srgbClr val="B0B0C0"/>
                 </a:solidFill>
@@ -5553,9 +5643,9 @@
           <a:p>
             <a:pPr algn="l">
               <a:spcAft>
-                <a:spcPts val="1560"/>
-              </a:spcAft>
-              <a:defRPr sz="1300" b="0">
+                <a:spcPts val="1380"/>
+              </a:spcAft>
+              <a:defRPr sz="1200" b="0">
                 <a:solidFill>
                   <a:srgbClr val="B0B0C0"/>
                 </a:solidFill>
@@ -5576,11 +5666,13 @@
         </p:nvSpPr>
         <p:spPr>
           <a:xfrm>
-            <a:off x="10149840" y="1645920"/>
-            <a:ext cx="2926080" cy="4114800"/>
+            <a:off x="10058400" y="1554480"/>
+            <a:ext cx="2834640" cy="4114800"/>
           </a:xfrm>
           <a:prstGeom prst="roundRect">
-            <a:avLst/>
+            <a:avLst>
+              <a:gd name="adj" fmla="val 8000"/>
+            </a:avLst>
           </a:prstGeom>
           <a:solidFill>
             <a:srgbClr val="14141C"/>
@@ -5619,8 +5711,8 @@
         </p:nvSpPr>
         <p:spPr>
           <a:xfrm>
-            <a:off x="10149840" y="1645920"/>
-            <a:ext cx="2926080" cy="45720"/>
+            <a:off x="10058400" y="1554480"/>
+            <a:ext cx="2834640" cy="45720"/>
           </a:xfrm>
           <a:prstGeom prst="rect">
             <a:avLst/>
@@ -5662,8 +5754,8 @@
         </p:nvSpPr>
         <p:spPr>
           <a:xfrm>
-            <a:off x="10378440" y="1783080"/>
-            <a:ext cx="2468880" cy="365760"/>
+            <a:off x="10241280" y="1664208"/>
+            <a:ext cx="2468880" cy="320040"/>
           </a:xfrm>
           <a:prstGeom prst="rect">
             <a:avLst/>
@@ -5677,7 +5769,7 @@
           <a:lstStyle/>
           <a:p>
             <a:pPr algn="l">
-              <a:defRPr sz="1600" b="1">
+              <a:defRPr sz="1500" b="1">
                 <a:solidFill>
                   <a:srgbClr val="A855F7"/>
                 </a:solidFill>
@@ -5685,7 +5777,7 @@
               </a:defRPr>
             </a:pPr>
             <a:r>
-              <a:t>Tools</a:t>
+              <a:t>Tools &amp; Deploy</a:t>
             </a:r>
           </a:p>
         </p:txBody>
@@ -5698,8 +5790,8 @@
         </p:nvSpPr>
         <p:spPr>
           <a:xfrm>
-            <a:off x="10378440" y="2194560"/>
-            <a:ext cx="2468880" cy="3474720"/>
+            <a:off x="10241280" y="2011680"/>
+            <a:ext cx="2468880" cy="3566160"/>
           </a:xfrm>
           <a:prstGeom prst="rect">
             <a:avLst/>
@@ -5714,9 +5806,9 @@
           <a:p>
             <a:pPr algn="l">
               <a:spcAft>
-                <a:spcPts val="1560"/>
-              </a:spcAft>
-              <a:defRPr sz="1300" b="0">
+                <a:spcPts val="1380"/>
+              </a:spcAft>
+              <a:defRPr sz="1200" b="0">
                 <a:solidFill>
                   <a:srgbClr val="B0B0C0"/>
                 </a:solidFill>
@@ -5730,41 +5822,25 @@
           <a:p>
             <a:pPr algn="l">
               <a:spcAft>
-                <a:spcPts val="1560"/>
-              </a:spcAft>
-              <a:defRPr sz="1300" b="0">
-                <a:solidFill>
-                  <a:srgbClr val="B0B0C0"/>
-                </a:solidFill>
-                <a:latin typeface="Segoe UI"/>
-              </a:defRPr>
-            </a:pPr>
-            <a:r>
-              <a:t>React Hook Form</a:t>
-            </a:r>
-          </a:p>
-          <a:p>
-            <a:pPr algn="l">
-              <a:spcAft>
-                <a:spcPts val="1560"/>
-              </a:spcAft>
-              <a:defRPr sz="1300" b="0">
-                <a:solidFill>
-                  <a:srgbClr val="B0B0C0"/>
-                </a:solidFill>
-                <a:latin typeface="Segoe UI"/>
-              </a:defRPr>
-            </a:pPr>
-            <a:r>
-              <a:t>Zod validation</a:t>
-            </a:r>
-          </a:p>
-          <a:p>
-            <a:pPr algn="l">
-              <a:spcAft>
-                <a:spcPts val="1560"/>
-              </a:spcAft>
-              <a:defRPr sz="1300" b="0">
+                <a:spcPts val="1380"/>
+              </a:spcAft>
+              <a:defRPr sz="1200" b="0">
+                <a:solidFill>
+                  <a:srgbClr val="B0B0C0"/>
+                </a:solidFill>
+                <a:latin typeface="Segoe UI"/>
+              </a:defRPr>
+            </a:pPr>
+            <a:r>
+              <a:t>React Hook Form + Zod</a:t>
+            </a:r>
+          </a:p>
+          <a:p>
+            <a:pPr algn="l">
+              <a:spcAft>
+                <a:spcPts val="1380"/>
+              </a:spcAft>
+              <a:defRPr sz="1200" b="0">
                 <a:solidFill>
                   <a:srgbClr val="B0B0C0"/>
                 </a:solidFill>
@@ -5778,9 +5854,9 @@
           <a:p>
             <a:pPr algn="l">
               <a:spcAft>
-                <a:spcPts val="1560"/>
-              </a:spcAft>
-              <a:defRPr sz="1300" b="0">
+                <a:spcPts val="1380"/>
+              </a:spcAft>
+              <a:defRPr sz="1200" b="0">
                 <a:solidFill>
                   <a:srgbClr val="B0B0C0"/>
                 </a:solidFill>
@@ -5789,6 +5865,22 @@
             </a:pPr>
             <a:r>
               <a:t>Netlify deployment</a:t>
+            </a:r>
+          </a:p>
+          <a:p>
+            <a:pPr algn="l">
+              <a:spcAft>
+                <a:spcPts val="1380"/>
+              </a:spcAft>
+              <a:defRPr sz="1200" b="0">
+                <a:solidFill>
+                  <a:srgbClr val="B0B0C0"/>
+                </a:solidFill>
+                <a:latin typeface="Segoe UI"/>
+              </a:defRPr>
+            </a:pPr>
+            <a:r>
+              <a:t>Vite build system</a:t>
             </a:r>
           </a:p>
         </p:txBody>
@@ -5801,8 +5893,8 @@
         </p:nvSpPr>
         <p:spPr>
           <a:xfrm>
-            <a:off x="731520" y="6400800"/>
-            <a:ext cx="7315200" cy="365760"/>
+            <a:off x="731520" y="6446520"/>
+            <a:ext cx="7315200" cy="320040"/>
           </a:xfrm>
           <a:prstGeom prst="rect">
             <a:avLst/>
@@ -5816,7 +5908,7 @@
           <a:lstStyle/>
           <a:p>
             <a:pPr algn="l">
-              <a:defRPr sz="1100" b="0">
+              <a:defRPr sz="1000" b="0">
                 <a:solidFill>
                   <a:srgbClr val="707080"/>
                 </a:solidFill>
@@ -5870,7 +5962,7 @@
             <a:avLst/>
           </a:prstGeom>
           <a:solidFill>
-            <a:srgbClr val="F97316"/>
+            <a:srgbClr val="14B8A6"/>
           </a:solidFill>
           <a:ln>
             <a:noFill/>
@@ -5921,7 +6013,7 @@
           <a:lstStyle/>
           <a:p>
             <a:pPr algn="l">
-              <a:defRPr sz="3000" b="1">
+              <a:defRPr sz="2800" b="1">
                 <a:solidFill>
                   <a:srgbClr val="FFFFFF"/>
                 </a:solidFill>
@@ -5942,7 +6034,7 @@
         </p:nvSpPr>
         <p:spPr>
           <a:xfrm>
-            <a:off x="731520" y="914400"/>
+            <a:off x="731520" y="868680"/>
             <a:ext cx="10058400" cy="457200"/>
           </a:xfrm>
           <a:prstGeom prst="rect">
@@ -5957,7 +6049,7 @@
           <a:lstStyle/>
           <a:p>
             <a:pPr algn="l">
-              <a:defRPr sz="1500" b="0">
+              <a:defRPr sz="1400" b="0">
                 <a:solidFill>
                   <a:srgbClr val="B0B0C0"/>
                 </a:solidFill>
@@ -5978,8 +6070,8 @@
         </p:nvSpPr>
         <p:spPr>
           <a:xfrm>
-            <a:off x="11155680" y="365760"/>
-            <a:ext cx="731520" cy="457200"/>
+            <a:off x="11247120" y="365760"/>
+            <a:ext cx="640080" cy="365760"/>
           </a:xfrm>
           <a:prstGeom prst="rect">
             <a:avLst/>
@@ -5993,7 +6085,7 @@
           <a:lstStyle/>
           <a:p>
             <a:pPr algn="r">
-              <a:defRPr sz="1400" b="0">
+              <a:defRPr sz="1300" b="0">
                 <a:solidFill>
                   <a:srgbClr val="707080"/>
                 </a:solidFill>
@@ -6014,14 +6106,14 @@
         </p:nvSpPr>
         <p:spPr>
           <a:xfrm>
-            <a:off x="731520" y="1325880"/>
+            <a:off x="731520" y="1234440"/>
             <a:ext cx="10698480" cy="19050"/>
           </a:xfrm>
           <a:prstGeom prst="rect">
             <a:avLst/>
           </a:prstGeom>
           <a:solidFill>
-            <a:srgbClr val="333344"/>
+            <a:srgbClr val="303040"/>
           </a:solidFill>
           <a:ln>
             <a:noFill/>
@@ -6057,7 +6149,7 @@
         </p:nvSpPr>
         <p:spPr>
           <a:xfrm>
-            <a:off x="731520" y="1645920"/>
+            <a:off x="731520" y="1554480"/>
             <a:ext cx="4572000" cy="365760"/>
           </a:xfrm>
           <a:prstGeom prst="rect">
@@ -6072,7 +6164,7 @@
           <a:lstStyle/>
           <a:p>
             <a:pPr algn="l">
-              <a:defRPr sz="1800" b="1">
+              <a:defRPr sz="1700" b="1">
                 <a:solidFill>
                   <a:srgbClr val="F97316"/>
                 </a:solidFill>
@@ -6093,7 +6185,7 @@
         </p:nvSpPr>
         <p:spPr>
           <a:xfrm>
-            <a:off x="731520" y="2103120"/>
+            <a:off x="731520" y="2011680"/>
             <a:ext cx="5029200" cy="2743200"/>
           </a:xfrm>
           <a:prstGeom prst="rect">
@@ -6119,7 +6211,7 @@
               </a:defRPr>
             </a:pPr>
             <a:r>
-              <a:t>Years (1-4)</a:t>
+              <a:t>Years (1–4)</a:t>
             </a:r>
           </a:p>
           <a:p>
@@ -6196,7 +6288,7 @@
         </p:nvSpPr>
         <p:spPr>
           <a:xfrm>
-            <a:off x="6400800" y="1645920"/>
+            <a:off x="6400800" y="1554480"/>
             <a:ext cx="4572000" cy="365760"/>
           </a:xfrm>
           <a:prstGeom prst="rect">
@@ -6211,9 +6303,9 @@
           <a:lstStyle/>
           <a:p>
             <a:pPr algn="l">
-              <a:defRPr sz="1800" b="1">
-                <a:solidFill>
-                  <a:srgbClr val="1E3A8A"/>
+              <a:defRPr sz="1700" b="1">
+                <a:solidFill>
+                  <a:srgbClr val="14B8A6"/>
                 </a:solidFill>
                 <a:latin typeface="Segoe UI"/>
               </a:defRPr>
@@ -6232,7 +6324,7 @@
         </p:nvSpPr>
         <p:spPr>
           <a:xfrm>
-            <a:off x="6400800" y="2103120"/>
+            <a:off x="6400800" y="2011680"/>
             <a:ext cx="5029200" cy="3657600"/>
           </a:xfrm>
           <a:prstGeom prst="rect">
@@ -6383,14 +6475,16 @@
         </p:nvSpPr>
         <p:spPr>
           <a:xfrm>
-            <a:off x="731520" y="5029200"/>
+            <a:off x="731520" y="4937760"/>
             <a:ext cx="10515600" cy="822960"/>
           </a:xfrm>
           <a:prstGeom prst="roundRect">
-            <a:avLst/>
+            <a:avLst>
+              <a:gd name="adj" fmla="val 5000"/>
+            </a:avLst>
           </a:prstGeom>
           <a:solidFill>
-            <a:srgbClr val="14141C"/>
+            <a:srgbClr val="1A1A28"/>
           </a:solidFill>
           <a:ln>
             <a:noFill/>
@@ -6426,7 +6520,7 @@
         </p:nvSpPr>
         <p:spPr>
           <a:xfrm>
-            <a:off x="1005840" y="5074920"/>
+            <a:off x="1005840" y="4983480"/>
             <a:ext cx="10058400" cy="365760"/>
           </a:xfrm>
           <a:prstGeom prst="rect">
@@ -6462,7 +6556,7 @@
         </p:nvSpPr>
         <p:spPr>
           <a:xfrm>
-            <a:off x="1005840" y="5394960"/>
+            <a:off x="1005840" y="5303520"/>
             <a:ext cx="10058400" cy="365760"/>
           </a:xfrm>
           <a:prstGeom prst="rect">
@@ -6498,8 +6592,8 @@
         </p:nvSpPr>
         <p:spPr>
           <a:xfrm>
-            <a:off x="731520" y="6400800"/>
-            <a:ext cx="7315200" cy="365760"/>
+            <a:off x="731520" y="6446520"/>
+            <a:ext cx="7315200" cy="320040"/>
           </a:xfrm>
           <a:prstGeom prst="rect">
             <a:avLst/>
@@ -6513,7 +6607,7 @@
           <a:lstStyle/>
           <a:p>
             <a:pPr algn="l">
-              <a:defRPr sz="1100" b="0">
+              <a:defRPr sz="1000" b="0">
                 <a:solidFill>
                   <a:srgbClr val="707080"/>
                 </a:solidFill>
@@ -6567,7 +6661,7 @@
             <a:avLst/>
           </a:prstGeom>
           <a:solidFill>
-            <a:srgbClr val="F97316"/>
+            <a:srgbClr val="14B8A6"/>
           </a:solidFill>
           <a:ln>
             <a:noFill/>
@@ -6618,7 +6712,7 @@
           <a:lstStyle/>
           <a:p>
             <a:pPr algn="l">
-              <a:defRPr sz="3000" b="1">
+              <a:defRPr sz="2800" b="1">
                 <a:solidFill>
                   <a:srgbClr val="FFFFFF"/>
                 </a:solidFill>
@@ -6639,7 +6733,7 @@
         </p:nvSpPr>
         <p:spPr>
           <a:xfrm>
-            <a:off x="731520" y="914400"/>
+            <a:off x="731520" y="868680"/>
             <a:ext cx="10058400" cy="457200"/>
           </a:xfrm>
           <a:prstGeom prst="rect">
@@ -6654,7 +6748,7 @@
           <a:lstStyle/>
           <a:p>
             <a:pPr algn="l">
-              <a:defRPr sz="1500" b="0">
+              <a:defRPr sz="1400" b="0">
                 <a:solidFill>
                   <a:srgbClr val="B0B0C0"/>
                 </a:solidFill>
@@ -6675,8 +6769,8 @@
         </p:nvSpPr>
         <p:spPr>
           <a:xfrm>
-            <a:off x="11155680" y="365760"/>
-            <a:ext cx="731520" cy="457200"/>
+            <a:off x="11247120" y="365760"/>
+            <a:ext cx="640080" cy="365760"/>
           </a:xfrm>
           <a:prstGeom prst="rect">
             <a:avLst/>
@@ -6690,7 +6784,7 @@
           <a:lstStyle/>
           <a:p>
             <a:pPr algn="r">
-              <a:defRPr sz="1400" b="0">
+              <a:defRPr sz="1300" b="0">
                 <a:solidFill>
                   <a:srgbClr val="707080"/>
                 </a:solidFill>
@@ -6711,14 +6805,14 @@
         </p:nvSpPr>
         <p:spPr>
           <a:xfrm>
-            <a:off x="731520" y="1325880"/>
+            <a:off x="731520" y="1234440"/>
             <a:ext cx="10698480" cy="19050"/>
           </a:xfrm>
           <a:prstGeom prst="rect">
             <a:avLst/>
           </a:prstGeom>
           <a:solidFill>
-            <a:srgbClr val="333344"/>
+            <a:srgbClr val="303040"/>
           </a:solidFill>
           <a:ln>
             <a:noFill/>
@@ -6754,7 +6848,7 @@
         </p:nvSpPr>
         <p:spPr>
           <a:xfrm>
-            <a:off x="914400" y="1828800"/>
+            <a:off x="914400" y="1645920"/>
             <a:ext cx="10515600" cy="4114800"/>
           </a:xfrm>
           <a:prstGeom prst="rect">
@@ -6768,11 +6862,11 @@
           </a:bodyPr>
           <a:lstStyle/>
           <a:p>
-            <a:pPr algn="l">
-              <a:spcAft>
-                <a:spcPts val="2400"/>
-              </a:spcAft>
-              <a:defRPr sz="1600" b="0">
+            <a:pPr>
+              <a:spcAft>
+                <a:spcPts val="2100"/>
+              </a:spcAft>
+              <a:defRPr sz="1500">
                 <a:solidFill>
                   <a:srgbClr val="FFFFFF"/>
                 </a:solidFill>
@@ -6782,15 +6876,15 @@
               <a:buChar char="▸"/>
             </a:pPr>
             <a:r>
-              <a:t>Row Level Security (RLS) enabled on every table</a:t>
-            </a:r>
-          </a:p>
-          <a:p>
-            <a:pPr algn="l">
-              <a:spcAft>
-                <a:spcPts val="2400"/>
-              </a:spcAft>
-              <a:defRPr sz="1600" b="0">
+              <a:t>Row Level Security (RLS) enabled on every table — no data leaks without explicit policy</a:t>
+            </a:r>
+          </a:p>
+          <a:p>
+            <a:pPr>
+              <a:spcAft>
+                <a:spcPts val="2100"/>
+              </a:spcAft>
+              <a:defRPr sz="1500">
                 <a:solidFill>
                   <a:srgbClr val="FFFFFF"/>
                 </a:solidFill>
@@ -6804,11 +6898,11 @@
             </a:r>
           </a:p>
           <a:p>
-            <a:pPr algn="l">
-              <a:spcAft>
-                <a:spcPts val="2400"/>
-              </a:spcAft>
-              <a:defRPr sz="1600" b="0">
+            <a:pPr>
+              <a:spcAft>
+                <a:spcPts val="2100"/>
+              </a:spcAft>
+              <a:defRPr sz="1500">
                 <a:solidFill>
                   <a:srgbClr val="FFFFFF"/>
                 </a:solidFill>
@@ -6822,11 +6916,11 @@
             </a:r>
           </a:p>
           <a:p>
-            <a:pPr algn="l">
-              <a:spcAft>
-                <a:spcPts val="2400"/>
-              </a:spcAft>
-              <a:defRPr sz="1600" b="0">
+            <a:pPr>
+              <a:spcAft>
+                <a:spcPts val="2100"/>
+              </a:spcAft>
+              <a:defRPr sz="1500">
                 <a:solidFill>
                   <a:srgbClr val="FFFFFF"/>
                 </a:solidFill>
@@ -6836,15 +6930,15 @@
               <a:buChar char="▸"/>
             </a:pPr>
             <a:r>
-              <a:t>Security-hardened SECURITY DEFINER function with SET search_path = ''</a:t>
-            </a:r>
-          </a:p>
-          <a:p>
-            <a:pPr algn="l">
-              <a:spcAft>
-                <a:spcPts val="2400"/>
-              </a:spcAft>
-              <a:defRPr sz="1600" b="0">
+              <a:t>Security-hardened SECURITY DEFINER function with SET search_path = '' to prevent injection</a:t>
+            </a:r>
+          </a:p>
+          <a:p>
+            <a:pPr>
+              <a:spcAft>
+                <a:spcPts val="2100"/>
+              </a:spcAft>
+              <a:defRPr sz="1500">
                 <a:solidFill>
                   <a:srgbClr val="FFFFFF"/>
                 </a:solidFill>
@@ -6854,15 +6948,15 @@
               <a:buChar char="▸"/>
             </a:pPr>
             <a:r>
-              <a:t>Feedback rate limiting: 5 submissions per IP per 24 hours</a:t>
-            </a:r>
-          </a:p>
-          <a:p>
-            <a:pPr algn="l">
-              <a:spcAft>
-                <a:spcPts val="2400"/>
-              </a:spcAft>
-              <a:defRPr sz="1600" b="0">
+              <a:t>Feedback rate limiting: 5 submissions per IP per 24 hours, enforced server-side</a:t>
+            </a:r>
+          </a:p>
+          <a:p>
+            <a:pPr>
+              <a:spcAft>
+                <a:spcPts val="2100"/>
+              </a:spcAft>
+              <a:defRPr sz="1500">
                 <a:solidFill>
                   <a:srgbClr val="FFFFFF"/>
                 </a:solidFill>
@@ -6872,15 +6966,15 @@
               <a:buChar char="▸"/>
             </a:pPr>
             <a:r>
-              <a:t>Server-side input validation and sanitization on feedback</a:t>
-            </a:r>
-          </a:p>
-          <a:p>
-            <a:pPr algn="l">
-              <a:spcAft>
-                <a:spcPts val="2400"/>
-              </a:spcAft>
-              <a:defRPr sz="1600" b="0">
+              <a:t>Server-side input validation and sanitization on all feedback submissions</a:t>
+            </a:r>
+          </a:p>
+          <a:p>
+            <a:pPr>
+              <a:spcAft>
+                <a:spcPts val="2100"/>
+              </a:spcAft>
+              <a:defRPr sz="1500">
                 <a:solidFill>
                   <a:srgbClr val="FFFFFF"/>
                 </a:solidFill>
@@ -6890,15 +6984,15 @@
               <a:buChar char="▸"/>
             </a:pPr>
             <a:r>
-              <a:t>Storage bucket: public read, admin-only write</a:t>
-            </a:r>
-          </a:p>
-          <a:p>
-            <a:pPr algn="l">
-              <a:spcAft>
-                <a:spcPts val="2400"/>
-              </a:spcAft>
-              <a:defRPr sz="1600" b="0">
+              <a:t>Storage bucket: public read, admin-only write — students cannot upload or modify content</a:t>
+            </a:r>
+          </a:p>
+          <a:p>
+            <a:pPr>
+              <a:spcAft>
+                <a:spcPts val="2100"/>
+              </a:spcAft>
+              <a:defRPr sz="1500">
                 <a:solidFill>
                   <a:srgbClr val="FFFFFF"/>
                 </a:solidFill>
@@ -6908,7 +7002,7 @@
               <a:buChar char="▸"/>
             </a:pPr>
             <a:r>
-              <a:t>Admin authorization checked via Supabase session + admin_users table</a:t>
+              <a:t>Admin authorization checked via Supabase session + admin_users whitelist table</a:t>
             </a:r>
           </a:p>
         </p:txBody>
@@ -6921,8 +7015,8 @@
         </p:nvSpPr>
         <p:spPr>
           <a:xfrm>
-            <a:off x="731520" y="6400800"/>
-            <a:ext cx="7315200" cy="365760"/>
+            <a:off x="731520" y="6446520"/>
+            <a:ext cx="7315200" cy="320040"/>
           </a:xfrm>
           <a:prstGeom prst="rect">
             <a:avLst/>
@@ -6936,7 +7030,7 @@
           <a:lstStyle/>
           <a:p>
             <a:pPr algn="l">
-              <a:defRPr sz="1100" b="0">
+              <a:defRPr sz="1000" b="0">
                 <a:solidFill>
                   <a:srgbClr val="707080"/>
                 </a:solidFill>
@@ -6990,7 +7084,7 @@
             <a:avLst/>
           </a:prstGeom>
           <a:solidFill>
-            <a:srgbClr val="F97316"/>
+            <a:srgbClr val="14B8A6"/>
           </a:solidFill>
           <a:ln>
             <a:noFill/>
@@ -7041,7 +7135,7 @@
           <a:lstStyle/>
           <a:p>
             <a:pPr algn="l">
-              <a:defRPr sz="3000" b="1">
+              <a:defRPr sz="2800" b="1">
                 <a:solidFill>
                   <a:srgbClr val="FFFFFF"/>
                 </a:solidFill>
@@ -7062,7 +7156,7 @@
         </p:nvSpPr>
         <p:spPr>
           <a:xfrm>
-            <a:off x="731520" y="914400"/>
+            <a:off x="731520" y="868680"/>
             <a:ext cx="10058400" cy="457200"/>
           </a:xfrm>
           <a:prstGeom prst="rect">
@@ -7077,7 +7171,7 @@
           <a:lstStyle/>
           <a:p>
             <a:pPr algn="l">
-              <a:defRPr sz="1500" b="0">
+              <a:defRPr sz="1400" b="0">
                 <a:solidFill>
                   <a:srgbClr val="B0B0C0"/>
                 </a:solidFill>
@@ -7098,8 +7192,8 @@
         </p:nvSpPr>
         <p:spPr>
           <a:xfrm>
-            <a:off x="11155680" y="365760"/>
-            <a:ext cx="731520" cy="457200"/>
+            <a:off x="11247120" y="365760"/>
+            <a:ext cx="640080" cy="365760"/>
           </a:xfrm>
           <a:prstGeom prst="rect">
             <a:avLst/>
@@ -7113,7 +7207,7 @@
           <a:lstStyle/>
           <a:p>
             <a:pPr algn="r">
-              <a:defRPr sz="1400" b="0">
+              <a:defRPr sz="1300" b="0">
                 <a:solidFill>
                   <a:srgbClr val="707080"/>
                 </a:solidFill>
@@ -7134,14 +7228,14 @@
         </p:nvSpPr>
         <p:spPr>
           <a:xfrm>
-            <a:off x="731520" y="1325880"/>
+            <a:off x="731520" y="1234440"/>
             <a:ext cx="10698480" cy="19050"/>
           </a:xfrm>
           <a:prstGeom prst="rect">
             <a:avLst/>
           </a:prstGeom>
           <a:solidFill>
-            <a:srgbClr val="333344"/>
+            <a:srgbClr val="303040"/>
           </a:solidFill>
           <a:ln>
             <a:noFill/>
@@ -7177,11 +7271,13 @@
         </p:nvSpPr>
         <p:spPr>
           <a:xfrm>
-            <a:off x="548640" y="1645920"/>
-            <a:ext cx="2926080" cy="4114800"/>
+            <a:off x="457200" y="1554480"/>
+            <a:ext cx="2834640" cy="4114800"/>
           </a:xfrm>
           <a:prstGeom prst="roundRect">
-            <a:avLst/>
+            <a:avLst>
+              <a:gd name="adj" fmla="val 8000"/>
+            </a:avLst>
           </a:prstGeom>
           <a:solidFill>
             <a:srgbClr val="14141C"/>
@@ -7220,8 +7316,8 @@
         </p:nvSpPr>
         <p:spPr>
           <a:xfrm>
-            <a:off x="548640" y="1645920"/>
-            <a:ext cx="2926080" cy="45720"/>
+            <a:off x="457200" y="1554480"/>
+            <a:ext cx="2834640" cy="45720"/>
           </a:xfrm>
           <a:prstGeom prst="rect">
             <a:avLst/>
@@ -7263,8 +7359,8 @@
         </p:nvSpPr>
         <p:spPr>
           <a:xfrm>
-            <a:off x="777240" y="1783080"/>
-            <a:ext cx="2468880" cy="365760"/>
+            <a:off x="640080" y="1664208"/>
+            <a:ext cx="2468880" cy="320040"/>
           </a:xfrm>
           <a:prstGeom prst="rect">
             <a:avLst/>
@@ -7278,7 +7374,7 @@
           <a:lstStyle/>
           <a:p>
             <a:pPr algn="l">
-              <a:defRPr sz="1500" b="1">
+              <a:defRPr sz="1400" b="1">
                 <a:solidFill>
                   <a:srgbClr val="F97316"/>
                 </a:solidFill>
@@ -7299,8 +7395,8 @@
         </p:nvSpPr>
         <p:spPr>
           <a:xfrm>
-            <a:off x="777240" y="2194560"/>
-            <a:ext cx="2468880" cy="3474720"/>
+            <a:off x="640080" y="2011680"/>
+            <a:ext cx="2468880" cy="3566160"/>
           </a:xfrm>
           <a:prstGeom prst="rect">
             <a:avLst/>
@@ -7315,7 +7411,7 @@
           <a:p>
             <a:pPr algn="l">
               <a:spcAft>
-                <a:spcPts val="1439"/>
+                <a:spcPts val="1380"/>
               </a:spcAft>
               <a:defRPr sz="1200" b="0">
                 <a:solidFill>
@@ -7331,7 +7427,7 @@
           <a:p>
             <a:pPr algn="l">
               <a:spcAft>
-                <a:spcPts val="1439"/>
+                <a:spcPts val="1380"/>
               </a:spcAft>
               <a:defRPr sz="1200" b="0">
                 <a:solidFill>
@@ -7347,7 +7443,7 @@
           <a:p>
             <a:pPr algn="l">
               <a:spcAft>
-                <a:spcPts val="1439"/>
+                <a:spcPts val="1380"/>
               </a:spcAft>
               <a:defRPr sz="1200" b="0">
                 <a:solidFill>
@@ -7363,7 +7459,7 @@
           <a:p>
             <a:pPr algn="l">
               <a:spcAft>
-                <a:spcPts val="1439"/>
+                <a:spcPts val="1380"/>
               </a:spcAft>
               <a:defRPr sz="1200" b="0">
                 <a:solidFill>
@@ -7379,7 +7475,7 @@
           <a:p>
             <a:pPr algn="l">
               <a:spcAft>
-                <a:spcPts val="1439"/>
+                <a:spcPts val="1380"/>
               </a:spcAft>
               <a:defRPr sz="1200" b="0">
                 <a:solidFill>
@@ -7395,7 +7491,7 @@
           <a:p>
             <a:pPr algn="l">
               <a:spcAft>
-                <a:spcPts val="1439"/>
+                <a:spcPts val="1380"/>
               </a:spcAft>
               <a:defRPr sz="1200" b="0">
                 <a:solidFill>
@@ -7411,7 +7507,7 @@
           <a:p>
             <a:pPr algn="l">
               <a:spcAft>
-                <a:spcPts val="1439"/>
+                <a:spcPts val="1380"/>
               </a:spcAft>
               <a:defRPr sz="1200" b="0">
                 <a:solidFill>
@@ -7421,7 +7517,7 @@
               </a:defRPr>
             </a:pPr>
             <a:r>
-              <a:t>/imp-questions — Imp Questions</a:t>
+              <a:t>/imp-questions — Imp Qs</a:t>
             </a:r>
           </a:p>
         </p:txBody>
@@ -7434,11 +7530,13 @@
         </p:nvSpPr>
         <p:spPr>
           <a:xfrm>
-            <a:off x="3749039" y="1645920"/>
-            <a:ext cx="2926080" cy="4114800"/>
+            <a:off x="3657600" y="1554480"/>
+            <a:ext cx="2834640" cy="4114800"/>
           </a:xfrm>
           <a:prstGeom prst="roundRect">
-            <a:avLst/>
+            <a:avLst>
+              <a:gd name="adj" fmla="val 8000"/>
+            </a:avLst>
           </a:prstGeom>
           <a:solidFill>
             <a:srgbClr val="14141C"/>
@@ -7477,8 +7575,8 @@
         </p:nvSpPr>
         <p:spPr>
           <a:xfrm>
-            <a:off x="3749039" y="1645920"/>
-            <a:ext cx="2926080" cy="45720"/>
+            <a:off x="3657600" y="1554480"/>
+            <a:ext cx="2834640" cy="45720"/>
           </a:xfrm>
           <a:prstGeom prst="rect">
             <a:avLst/>
@@ -7520,8 +7618,8 @@
         </p:nvSpPr>
         <p:spPr>
           <a:xfrm>
-            <a:off x="3977639" y="1783080"/>
-            <a:ext cx="2468880" cy="365760"/>
+            <a:off x="3840480" y="1664208"/>
+            <a:ext cx="2468880" cy="320040"/>
           </a:xfrm>
           <a:prstGeom prst="rect">
             <a:avLst/>
@@ -7535,7 +7633,7 @@
           <a:lstStyle/>
           <a:p>
             <a:pPr algn="l">
-              <a:defRPr sz="1500" b="1">
+              <a:defRPr sz="1400" b="1">
                 <a:solidFill>
                   <a:srgbClr val="1E3A8A"/>
                 </a:solidFill>
@@ -7556,8 +7654,8 @@
         </p:nvSpPr>
         <p:spPr>
           <a:xfrm>
-            <a:off x="3977639" y="2194560"/>
-            <a:ext cx="2468880" cy="3474720"/>
+            <a:off x="3840480" y="2011680"/>
+            <a:ext cx="2468880" cy="3566160"/>
           </a:xfrm>
           <a:prstGeom prst="rect">
             <a:avLst/>
@@ -7572,7 +7670,7 @@
           <a:p>
             <a:pPr algn="l">
               <a:spcAft>
-                <a:spcPts val="1439"/>
+                <a:spcPts val="1380"/>
               </a:spcAft>
               <a:defRPr sz="1200" b="0">
                 <a:solidFill>
@@ -7588,7 +7686,7 @@
           <a:p>
             <a:pPr algn="l">
               <a:spcAft>
-                <a:spcPts val="1439"/>
+                <a:spcPts val="1380"/>
               </a:spcAft>
               <a:defRPr sz="1200" b="0">
                 <a:solidFill>
@@ -7604,7 +7702,7 @@
           <a:p>
             <a:pPr algn="l">
               <a:spcAft>
-                <a:spcPts val="1439"/>
+                <a:spcPts val="1380"/>
               </a:spcAft>
               <a:defRPr sz="1200" b="0">
                 <a:solidFill>
@@ -7614,13 +7712,13 @@
               </a:defRPr>
             </a:pPr>
             <a:r>
-              <a:t>/feedback — Feedback Form</a:t>
-            </a:r>
-          </a:p>
-          <a:p>
-            <a:pPr algn="l">
-              <a:spcAft>
-                <a:spcPts val="1439"/>
+              <a:t>/feedback — Feedback</a:t>
+            </a:r>
+          </a:p>
+          <a:p>
+            <a:pPr algn="l">
+              <a:spcAft>
+                <a:spcPts val="1380"/>
               </a:spcAft>
               <a:defRPr sz="1200" b="0">
                 <a:solidFill>
@@ -7636,7 +7734,7 @@
           <a:p>
             <a:pPr algn="l">
               <a:spcAft>
-                <a:spcPts val="1439"/>
+                <a:spcPts val="1380"/>
               </a:spcAft>
               <a:defRPr sz="1200" b="0">
                 <a:solidFill>
@@ -7659,11 +7757,13 @@
         </p:nvSpPr>
         <p:spPr>
           <a:xfrm>
-            <a:off x="6949440" y="1645920"/>
-            <a:ext cx="2926080" cy="4114800"/>
+            <a:off x="6858000" y="1554480"/>
+            <a:ext cx="2834640" cy="4114800"/>
           </a:xfrm>
           <a:prstGeom prst="roundRect">
-            <a:avLst/>
+            <a:avLst>
+              <a:gd name="adj" fmla="val 8000"/>
+            </a:avLst>
           </a:prstGeom>
           <a:solidFill>
             <a:srgbClr val="14141C"/>
@@ -7702,8 +7802,8 @@
         </p:nvSpPr>
         <p:spPr>
           <a:xfrm>
-            <a:off x="6949440" y="1645920"/>
-            <a:ext cx="2926080" cy="45720"/>
+            <a:off x="6858000" y="1554480"/>
+            <a:ext cx="2834640" cy="45720"/>
           </a:xfrm>
           <a:prstGeom prst="rect">
             <a:avLst/>
@@ -7745,8 +7845,8 @@
         </p:nvSpPr>
         <p:spPr>
           <a:xfrm>
-            <a:off x="7178040" y="1783080"/>
-            <a:ext cx="2468880" cy="365760"/>
+            <a:off x="7040880" y="1664208"/>
+            <a:ext cx="2468880" cy="320040"/>
           </a:xfrm>
           <a:prstGeom prst="rect">
             <a:avLst/>
@@ -7760,7 +7860,7 @@
           <a:lstStyle/>
           <a:p>
             <a:pPr algn="l">
-              <a:defRPr sz="1500" b="1">
+              <a:defRPr sz="1400" b="1">
                 <a:solidFill>
                   <a:srgbClr val="22C55E"/>
                 </a:solidFill>
@@ -7781,8 +7881,8 @@
         </p:nvSpPr>
         <p:spPr>
           <a:xfrm>
-            <a:off x="7178040" y="2194560"/>
-            <a:ext cx="2468880" cy="3474720"/>
+            <a:off x="7040880" y="2011680"/>
+            <a:ext cx="2468880" cy="3566160"/>
           </a:xfrm>
           <a:prstGeom prst="rect">
             <a:avLst/>
@@ -7797,7 +7897,7 @@
           <a:p>
             <a:pPr algn="l">
               <a:spcAft>
-                <a:spcPts val="1439"/>
+                <a:spcPts val="1380"/>
               </a:spcAft>
               <a:defRPr sz="1200" b="0">
                 <a:solidFill>
@@ -7813,7 +7913,7 @@
           <a:p>
             <a:pPr algn="l">
               <a:spcAft>
-                <a:spcPts val="1439"/>
+                <a:spcPts val="1380"/>
               </a:spcAft>
               <a:defRPr sz="1200" b="0">
                 <a:solidFill>
@@ -7829,7 +7929,7 @@
           <a:p>
             <a:pPr algn="l">
               <a:spcAft>
-                <a:spcPts val="1439"/>
+                <a:spcPts val="1380"/>
               </a:spcAft>
               <a:defRPr sz="1200" b="0">
                 <a:solidFill>
@@ -7839,13 +7939,13 @@
               </a:defRPr>
             </a:pPr>
             <a:r>
-              <a:t>/year/.../semester/[sem] — Subjects</a:t>
-            </a:r>
-          </a:p>
-          <a:p>
-            <a:pPr algn="l">
-              <a:spcAft>
-                <a:spcPts val="1439"/>
+              <a:t>/year/.../sem/[sem] — Subjects</a:t>
+            </a:r>
+          </a:p>
+          <a:p>
+            <a:pPr algn="l">
+              <a:spcAft>
+                <a:spcPts val="1380"/>
               </a:spcAft>
               <a:defRPr sz="1200" b="0">
                 <a:solidFill>
@@ -7868,11 +7968,13 @@
         </p:nvSpPr>
         <p:spPr>
           <a:xfrm>
-            <a:off x="10149840" y="1645920"/>
-            <a:ext cx="2926080" cy="4114800"/>
+            <a:off x="10058400" y="1554480"/>
+            <a:ext cx="2834640" cy="4114800"/>
           </a:xfrm>
           <a:prstGeom prst="roundRect">
-            <a:avLst/>
+            <a:avLst>
+              <a:gd name="adj" fmla="val 8000"/>
+            </a:avLst>
           </a:prstGeom>
           <a:solidFill>
             <a:srgbClr val="14141C"/>
@@ -7911,8 +8013,8 @@
         </p:nvSpPr>
         <p:spPr>
           <a:xfrm>
-            <a:off x="10149840" y="1645920"/>
-            <a:ext cx="2926080" cy="45720"/>
+            <a:off x="10058400" y="1554480"/>
+            <a:ext cx="2834640" cy="45720"/>
           </a:xfrm>
           <a:prstGeom prst="rect">
             <a:avLst/>
@@ -7954,8 +8056,8 @@
         </p:nvSpPr>
         <p:spPr>
           <a:xfrm>
-            <a:off x="10378440" y="1783080"/>
-            <a:ext cx="2468880" cy="365760"/>
+            <a:off x="10241280" y="1664208"/>
+            <a:ext cx="2468880" cy="320040"/>
           </a:xfrm>
           <a:prstGeom prst="rect">
             <a:avLst/>
@@ -7969,7 +8071,7 @@
           <a:lstStyle/>
           <a:p>
             <a:pPr algn="l">
-              <a:defRPr sz="1500" b="1">
+              <a:defRPr sz="1400" b="1">
                 <a:solidFill>
                   <a:srgbClr val="A855F7"/>
                 </a:solidFill>
@@ -7990,8 +8092,8 @@
         </p:nvSpPr>
         <p:spPr>
           <a:xfrm>
-            <a:off x="10378440" y="2194560"/>
-            <a:ext cx="2468880" cy="3474720"/>
+            <a:off x="10241280" y="2011680"/>
+            <a:ext cx="2468880" cy="3566160"/>
           </a:xfrm>
           <a:prstGeom prst="rect">
             <a:avLst/>
@@ -8006,7 +8108,7 @@
           <a:p>
             <a:pPr algn="l">
               <a:spcAft>
-                <a:spcPts val="1439"/>
+                <a:spcPts val="1380"/>
               </a:spcAft>
               <a:defRPr sz="1200" b="0">
                 <a:solidFill>
@@ -8022,7 +8124,7 @@
           <a:p>
             <a:pPr algn="l">
               <a:spcAft>
-                <a:spcPts val="1439"/>
+                <a:spcPts val="1380"/>
               </a:spcAft>
               <a:defRPr sz="1200" b="0">
                 <a:solidFill>
@@ -8038,7 +8140,7 @@
           <a:p>
             <a:pPr algn="l">
               <a:spcAft>
-                <a:spcPts val="1439"/>
+                <a:spcPts val="1380"/>
               </a:spcAft>
               <a:defRPr sz="1200" b="0">
                 <a:solidFill>
@@ -8054,7 +8156,7 @@
           <a:p>
             <a:pPr algn="l">
               <a:spcAft>
-                <a:spcPts val="1439"/>
+                <a:spcPts val="1380"/>
               </a:spcAft>
               <a:defRPr sz="1200" b="0">
                 <a:solidFill>
@@ -8070,7 +8172,7 @@
           <a:p>
             <a:pPr algn="l">
               <a:spcAft>
-                <a:spcPts val="1439"/>
+                <a:spcPts val="1380"/>
               </a:spcAft>
               <a:defRPr sz="1200" b="0">
                 <a:solidFill>
@@ -8093,8 +8195,8 @@
         </p:nvSpPr>
         <p:spPr>
           <a:xfrm>
-            <a:off x="731520" y="6400800"/>
-            <a:ext cx="7315200" cy="365760"/>
+            <a:off x="731520" y="6446520"/>
+            <a:ext cx="7315200" cy="320040"/>
           </a:xfrm>
           <a:prstGeom prst="rect">
             <a:avLst/>
@@ -8108,7 +8210,7 @@
           <a:lstStyle/>
           <a:p>
             <a:pPr algn="l">
-              <a:defRPr sz="1100" b="0">
+              <a:defRPr sz="1000" b="0">
                 <a:solidFill>
                   <a:srgbClr val="707080"/>
                 </a:solidFill>
@@ -8162,7 +8264,7 @@
             <a:avLst/>
           </a:prstGeom>
           <a:solidFill>
-            <a:srgbClr val="F97316"/>
+            <a:srgbClr val="14B8A6"/>
           </a:solidFill>
           <a:ln>
             <a:noFill/>
@@ -8213,7 +8315,7 @@
           <a:lstStyle/>
           <a:p>
             <a:pPr algn="l">
-              <a:defRPr sz="3000" b="1">
+              <a:defRPr sz="2800" b="1">
                 <a:solidFill>
                   <a:srgbClr val="FFFFFF"/>
                 </a:solidFill>
@@ -8221,7 +8323,7 @@
               </a:defRPr>
             </a:pPr>
             <a:r>
-              <a:t>User Flow</a:t>
+              <a:t>Challenges &amp; Learnings</a:t>
             </a:r>
           </a:p>
         </p:txBody>
@@ -8234,7 +8336,7 @@
         </p:nvSpPr>
         <p:spPr>
           <a:xfrm>
-            <a:off x="731520" y="914400"/>
+            <a:off x="731520" y="868680"/>
             <a:ext cx="10058400" cy="457200"/>
           </a:xfrm>
           <a:prstGeom prst="rect">
@@ -8249,15 +8351,15 @@
           <a:lstStyle/>
           <a:p>
             <a:pPr algn="l">
-              <a:defRPr sz="1500" b="0">
-                <a:solidFill>
-                  <a:srgbClr val="B0B0C0"/>
-                </a:solidFill>
-                <a:latin typeface="Segoe UI"/>
-              </a:defRPr>
-            </a:pPr>
-            <a:r>
-              <a:t>How a student uses TechNotes AI</a:t>
+              <a:defRPr sz="1400" b="0">
+                <a:solidFill>
+                  <a:srgbClr val="B0B0C0"/>
+                </a:solidFill>
+                <a:latin typeface="Segoe UI"/>
+              </a:defRPr>
+            </a:pPr>
+            <a:r>
+              <a:t>What we faced and what we learned</a:t>
             </a:r>
           </a:p>
         </p:txBody>
@@ -8270,8 +8372,8 @@
         </p:nvSpPr>
         <p:spPr>
           <a:xfrm>
-            <a:off x="11155680" y="365760"/>
-            <a:ext cx="731520" cy="457200"/>
+            <a:off x="11247120" y="365760"/>
+            <a:ext cx="640080" cy="365760"/>
           </a:xfrm>
           <a:prstGeom prst="rect">
             <a:avLst/>
@@ -8285,7 +8387,7 @@
           <a:lstStyle/>
           <a:p>
             <a:pPr algn="r">
-              <a:defRPr sz="1400" b="0">
+              <a:defRPr sz="1300" b="0">
                 <a:solidFill>
                   <a:srgbClr val="707080"/>
                 </a:solidFill>
@@ -8306,14 +8408,14 @@
         </p:nvSpPr>
         <p:spPr>
           <a:xfrm>
-            <a:off x="731520" y="1325880"/>
+            <a:off x="731520" y="1234440"/>
             <a:ext cx="10698480" cy="19050"/>
           </a:xfrm>
           <a:prstGeom prst="rect">
             <a:avLst/>
           </a:prstGeom>
           <a:solidFill>
-            <a:srgbClr val="333344"/>
+            <a:srgbClr val="303040"/>
           </a:solidFill>
           <a:ln>
             <a:noFill/>
@@ -8343,14 +8445,102 @@
       </p:sp>
       <p:sp>
         <p:nvSpPr>
-          <p:cNvPr id="7" name="TextBox 6"/>
+          <p:cNvPr id="7" name="Rounded Rectangle 6"/>
+          <p:cNvSpPr/>
+          <p:nvPr/>
+        </p:nvSpPr>
+        <p:spPr>
+          <a:xfrm>
+            <a:off x="548640" y="1554480"/>
+            <a:ext cx="5303520" cy="4389120"/>
+          </a:xfrm>
+          <a:prstGeom prst="roundRect">
+            <a:avLst>
+              <a:gd name="adj" fmla="val 8000"/>
+            </a:avLst>
+          </a:prstGeom>
+          <a:solidFill>
+            <a:srgbClr val="14141C"/>
+          </a:solidFill>
+          <a:ln>
+            <a:noFill/>
+          </a:ln>
+        </p:spPr>
+        <p:style>
+          <a:lnRef idx="1">
+            <a:schemeClr val="accent1"/>
+          </a:lnRef>
+          <a:fillRef idx="3">
+            <a:schemeClr val="accent1"/>
+          </a:fillRef>
+          <a:effectRef idx="2">
+            <a:schemeClr val="accent1"/>
+          </a:effectRef>
+          <a:fontRef idx="minor">
+            <a:schemeClr val="lt1"/>
+          </a:fontRef>
+        </p:style>
+        <p:txBody>
+          <a:bodyPr rtlCol="0" anchor="ctr"/>
+          <a:lstStyle/>
+          <a:p>
+            <a:pPr algn="ctr"/>
+          </a:p>
+        </p:txBody>
+      </p:sp>
+      <p:sp>
+        <p:nvSpPr>
+          <p:cNvPr id="8" name="Rectangle 7"/>
+          <p:cNvSpPr/>
+          <p:nvPr/>
+        </p:nvSpPr>
+        <p:spPr>
+          <a:xfrm>
+            <a:off x="548640" y="1554480"/>
+            <a:ext cx="5303520" cy="45720"/>
+          </a:xfrm>
+          <a:prstGeom prst="rect">
+            <a:avLst/>
+          </a:prstGeom>
+          <a:solidFill>
+            <a:srgbClr val="EF4444"/>
+          </a:solidFill>
+          <a:ln>
+            <a:noFill/>
+          </a:ln>
+        </p:spPr>
+        <p:style>
+          <a:lnRef idx="1">
+            <a:schemeClr val="accent1"/>
+          </a:lnRef>
+          <a:fillRef idx="3">
+            <a:schemeClr val="accent1"/>
+          </a:fillRef>
+          <a:effectRef idx="2">
+            <a:schemeClr val="accent1"/>
+          </a:effectRef>
+          <a:fontRef idx="minor">
+            <a:schemeClr val="lt1"/>
+          </a:fontRef>
+        </p:style>
+        <p:txBody>
+          <a:bodyPr rtlCol="0" anchor="ctr"/>
+          <a:lstStyle/>
+          <a:p>
+            <a:pPr algn="ctr"/>
+          </a:p>
+        </p:txBody>
+      </p:sp>
+      <p:sp>
+        <p:nvSpPr>
+          <p:cNvPr id="9" name="TextBox 8"/>
           <p:cNvSpPr txBox="1"/>
           <p:nvPr/>
         </p:nvSpPr>
         <p:spPr>
           <a:xfrm>
-            <a:off x="914400" y="1828800"/>
-            <a:ext cx="10515600" cy="4114800"/>
+            <a:off x="731520" y="1664208"/>
+            <a:ext cx="4937760" cy="320040"/>
           </a:xfrm>
           <a:prstGeom prst="rect">
             <a:avLst/>
@@ -8364,160 +8554,29 @@
           <a:lstStyle/>
           <a:p>
             <a:pPr algn="l">
-              <a:spcAft>
-                <a:spcPts val="2550"/>
-              </a:spcAft>
-              <a:defRPr sz="1700" b="0">
-                <a:solidFill>
-                  <a:srgbClr val="FFFFFF"/>
-                </a:solidFill>
-                <a:latin typeface="Segoe UI"/>
-              </a:defRPr>
-              <a:buFont typeface="Arial"/>
-              <a:buChar char="▸"/>
-            </a:pPr>
-            <a:r>
-              <a:t>1.  Student lands on the home page</a:t>
-            </a:r>
-          </a:p>
-          <a:p>
-            <a:pPr algn="l">
-              <a:spcAft>
-                <a:spcPts val="2550"/>
-              </a:spcAft>
-              <a:defRPr sz="1700" b="0">
-                <a:solidFill>
-                  <a:srgbClr val="FFFFFF"/>
-                </a:solidFill>
-                <a:latin typeface="Segoe UI"/>
-              </a:defRPr>
-              <a:buFont typeface="Arial"/>
-              <a:buChar char="▸"/>
-            </a:pPr>
-            <a:r>
-              <a:t>2.  Picks a section — Notes, PYQ, DSA, Placement, Syllabus, or Important Questions</a:t>
-            </a:r>
-          </a:p>
-          <a:p>
-            <a:pPr algn="l">
-              <a:spcAft>
-                <a:spcPts val="2550"/>
-              </a:spcAft>
-              <a:defRPr sz="1700" b="0">
-                <a:solidFill>
-                  <a:srgbClr val="FFFFFF"/>
-                </a:solidFill>
-                <a:latin typeface="Segoe UI"/>
-              </a:defRPr>
-              <a:buFont typeface="Arial"/>
-              <a:buChar char="▸"/>
-            </a:pPr>
-            <a:r>
-              <a:t>3.  Navigates: Year → Branch → Semester → Subject</a:t>
-            </a:r>
-          </a:p>
-          <a:p>
-            <a:pPr algn="l">
-              <a:spcAft>
-                <a:spcPts val="2550"/>
-              </a:spcAft>
-              <a:defRPr sz="1700" b="0">
-                <a:solidFill>
-                  <a:srgbClr val="FFFFFF"/>
-                </a:solidFill>
-                <a:latin typeface="Segoe UI"/>
-              </a:defRPr>
-              <a:buFont typeface="Arial"/>
-              <a:buChar char="▸"/>
-            </a:pPr>
-            <a:r>
-              <a:t>4.  Views or downloads the content (PDF, image, or text)</a:t>
-            </a:r>
-          </a:p>
-          <a:p>
-            <a:pPr algn="l">
-              <a:spcAft>
-                <a:spcPts val="2550"/>
-              </a:spcAft>
-              <a:defRPr sz="1700" b="0">
-                <a:solidFill>
-                  <a:srgbClr val="FFFFFF"/>
-                </a:solidFill>
-                <a:latin typeface="Segoe UI"/>
-              </a:defRPr>
-              <a:buFont typeface="Arial"/>
-              <a:buChar char="▸"/>
-            </a:pPr>
-            <a:r>
-              <a:t>5.  Opens the floating chat widget for quick doubt solving</a:t>
-            </a:r>
-          </a:p>
-          <a:p>
-            <a:pPr algn="l">
-              <a:spcAft>
-                <a:spcPts val="2550"/>
-              </a:spcAft>
-              <a:defRPr sz="1700" b="0">
-                <a:solidFill>
-                  <a:srgbClr val="FFFFFF"/>
-                </a:solidFill>
-                <a:latin typeface="Segoe UI"/>
-              </a:defRPr>
-              <a:buFont typeface="Arial"/>
-              <a:buChar char="▸"/>
-            </a:pPr>
-            <a:r>
-              <a:t>6.  Uploads a PDF or image to the chatbot for analysis</a:t>
-            </a:r>
-          </a:p>
-          <a:p>
-            <a:pPr algn="l">
-              <a:spcAft>
-                <a:spcPts val="2550"/>
-              </a:spcAft>
-              <a:defRPr sz="1700" b="0">
-                <a:solidFill>
-                  <a:srgbClr val="FFFFFF"/>
-                </a:solidFill>
-                <a:latin typeface="Segoe UI"/>
-              </a:defRPr>
-              <a:buFont typeface="Arial"/>
-              <a:buChar char="▸"/>
-            </a:pPr>
-            <a:r>
-              <a:t>7.  Gets a detailed, subject-specific answer with formulas and examples</a:t>
-            </a:r>
-          </a:p>
-          <a:p>
-            <a:pPr algn="l">
-              <a:spcAft>
-                <a:spcPts val="2550"/>
-              </a:spcAft>
-              <a:defRPr sz="1700" b="0">
-                <a:solidFill>
-                  <a:srgbClr val="FFFFFF"/>
-                </a:solidFill>
-                <a:latin typeface="Segoe UI"/>
-              </a:defRPr>
-              <a:buFont typeface="Arial"/>
-              <a:buChar char="▸"/>
-            </a:pPr>
-            <a:r>
-              <a:t>8.  Submits feedback (optional)</a:t>
-            </a:r>
-          </a:p>
-        </p:txBody>
-      </p:sp>
-      <p:sp>
-        <p:nvSpPr>
-          <p:cNvPr id="8" name="TextBox 7"/>
+              <a:defRPr sz="1700" b="1">
+                <a:solidFill>
+                  <a:srgbClr val="EF4444"/>
+                </a:solidFill>
+                <a:latin typeface="Segoe UI"/>
+              </a:defRPr>
+            </a:pPr>
+            <a:r>
+              <a:t>Challenges Faced</a:t>
+            </a:r>
+          </a:p>
+        </p:txBody>
+      </p:sp>
+      <p:sp>
+        <p:nvSpPr>
+          <p:cNvPr id="10" name="TextBox 9"/>
           <p:cNvSpPr txBox="1"/>
           <p:nvPr/>
         </p:nvSpPr>
         <p:spPr>
           <a:xfrm>
-            <a:off x="731520" y="6400800"/>
-            <a:ext cx="7315200" cy="365760"/>
+            <a:off x="731520" y="2011680"/>
+            <a:ext cx="4937760" cy="3840480"/>
           </a:xfrm>
           <a:prstGeom prst="rect">
             <a:avLst/>
@@ -8531,7 +8590,369 @@
           <a:lstStyle/>
           <a:p>
             <a:pPr algn="l">
-              <a:defRPr sz="1100" b="0">
+              <a:spcAft>
+                <a:spcPts val="1495"/>
+              </a:spcAft>
+              <a:defRPr sz="1300" b="0">
+                <a:solidFill>
+                  <a:srgbClr val="B0B0C0"/>
+                </a:solidFill>
+                <a:latin typeface="Segoe UI"/>
+              </a:defRPr>
+            </a:pPr>
+            <a:r>
+              <a:t>Gemini API rate limits — solved with 6-key rotation system</a:t>
+            </a:r>
+          </a:p>
+          <a:p>
+            <a:pPr algn="l">
+              <a:spcAft>
+                <a:spcPts val="1495"/>
+              </a:spcAft>
+              <a:defRPr sz="1300" b="0">
+                <a:solidFill>
+                  <a:srgbClr val="B0B0C0"/>
+                </a:solidFill>
+                <a:latin typeface="Segoe UI"/>
+              </a:defRPr>
+            </a:pPr>
+            <a:r>
+              <a:t>Managing 6 content types in one schema — solved with unified content_files table</a:t>
+            </a:r>
+          </a:p>
+          <a:p>
+            <a:pPr algn="l">
+              <a:spcAft>
+                <a:spcPts val="1495"/>
+              </a:spcAft>
+              <a:defRPr sz="1300" b="0">
+                <a:solidFill>
+                  <a:srgbClr val="B0B0C0"/>
+                </a:solidFill>
+                <a:latin typeface="Segoe UI"/>
+              </a:defRPr>
+            </a:pPr>
+            <a:r>
+              <a:t>Bilingual support without translation files — solved with inline t(en, hi) pattern</a:t>
+            </a:r>
+          </a:p>
+          <a:p>
+            <a:pPr algn="l">
+              <a:spcAft>
+                <a:spcPts val="1495"/>
+              </a:spcAft>
+              <a:defRPr sz="1300" b="0">
+                <a:solidFill>
+                  <a:srgbClr val="B0B0C0"/>
+                </a:solidFill>
+                <a:latin typeface="Segoe UI"/>
+              </a:defRPr>
+            </a:pPr>
+            <a:r>
+              <a:t>Security hardening of SECURITY DEFINER functions — SET search_path = ''</a:t>
+            </a:r>
+          </a:p>
+          <a:p>
+            <a:pPr algn="l">
+              <a:spcAft>
+                <a:spcPts val="1495"/>
+              </a:spcAft>
+              <a:defRPr sz="1300" b="0">
+                <a:solidFill>
+                  <a:srgbClr val="B0B0C0"/>
+                </a:solidFill>
+                <a:latin typeface="Segoe UI"/>
+              </a:defRPr>
+            </a:pPr>
+            <a:r>
+              <a:t>Office document viewing — integrated Google Docs Viewer</a:t>
+            </a:r>
+          </a:p>
+          <a:p>
+            <a:pPr algn="l">
+              <a:spcAft>
+                <a:spcPts val="1495"/>
+              </a:spcAft>
+              <a:defRPr sz="1300" b="0">
+                <a:solidFill>
+                  <a:srgbClr val="B0B0C0"/>
+                </a:solidFill>
+                <a:latin typeface="Segoe UI"/>
+              </a:defRPr>
+            </a:pPr>
+            <a:r>
+              <a:t>Backward compatibility during schema migration — fallback reads</a:t>
+            </a:r>
+          </a:p>
+        </p:txBody>
+      </p:sp>
+      <p:sp>
+        <p:nvSpPr>
+          <p:cNvPr id="11" name="Rounded Rectangle 10"/>
+          <p:cNvSpPr/>
+          <p:nvPr/>
+        </p:nvSpPr>
+        <p:spPr>
+          <a:xfrm>
+            <a:off x="6217920" y="1554480"/>
+            <a:ext cx="5303520" cy="4389120"/>
+          </a:xfrm>
+          <a:prstGeom prst="roundRect">
+            <a:avLst>
+              <a:gd name="adj" fmla="val 8000"/>
+            </a:avLst>
+          </a:prstGeom>
+          <a:solidFill>
+            <a:srgbClr val="14141C"/>
+          </a:solidFill>
+          <a:ln>
+            <a:noFill/>
+          </a:ln>
+        </p:spPr>
+        <p:style>
+          <a:lnRef idx="1">
+            <a:schemeClr val="accent1"/>
+          </a:lnRef>
+          <a:fillRef idx="3">
+            <a:schemeClr val="accent1"/>
+          </a:fillRef>
+          <a:effectRef idx="2">
+            <a:schemeClr val="accent1"/>
+          </a:effectRef>
+          <a:fontRef idx="minor">
+            <a:schemeClr val="lt1"/>
+          </a:fontRef>
+        </p:style>
+        <p:txBody>
+          <a:bodyPr rtlCol="0" anchor="ctr"/>
+          <a:lstStyle/>
+          <a:p>
+            <a:pPr algn="ctr"/>
+          </a:p>
+        </p:txBody>
+      </p:sp>
+      <p:sp>
+        <p:nvSpPr>
+          <p:cNvPr id="12" name="Rectangle 11"/>
+          <p:cNvSpPr/>
+          <p:nvPr/>
+        </p:nvSpPr>
+        <p:spPr>
+          <a:xfrm>
+            <a:off x="6217920" y="1554480"/>
+            <a:ext cx="5303520" cy="45720"/>
+          </a:xfrm>
+          <a:prstGeom prst="rect">
+            <a:avLst/>
+          </a:prstGeom>
+          <a:solidFill>
+            <a:srgbClr val="14B8A6"/>
+          </a:solidFill>
+          <a:ln>
+            <a:noFill/>
+          </a:ln>
+        </p:spPr>
+        <p:style>
+          <a:lnRef idx="1">
+            <a:schemeClr val="accent1"/>
+          </a:lnRef>
+          <a:fillRef idx="3">
+            <a:schemeClr val="accent1"/>
+          </a:fillRef>
+          <a:effectRef idx="2">
+            <a:schemeClr val="accent1"/>
+          </a:effectRef>
+          <a:fontRef idx="minor">
+            <a:schemeClr val="lt1"/>
+          </a:fontRef>
+        </p:style>
+        <p:txBody>
+          <a:bodyPr rtlCol="0" anchor="ctr"/>
+          <a:lstStyle/>
+          <a:p>
+            <a:pPr algn="ctr"/>
+          </a:p>
+        </p:txBody>
+      </p:sp>
+      <p:sp>
+        <p:nvSpPr>
+          <p:cNvPr id="13" name="TextBox 12"/>
+          <p:cNvSpPr txBox="1"/>
+          <p:nvPr/>
+        </p:nvSpPr>
+        <p:spPr>
+          <a:xfrm>
+            <a:off x="6400800" y="1664208"/>
+            <a:ext cx="4937760" cy="320040"/>
+          </a:xfrm>
+          <a:prstGeom prst="rect">
+            <a:avLst/>
+          </a:prstGeom>
+          <a:noFill/>
+        </p:spPr>
+        <p:txBody>
+          <a:bodyPr wrap="square">
+            <a:spAutoFit/>
+          </a:bodyPr>
+          <a:lstStyle/>
+          <a:p>
+            <a:pPr algn="l">
+              <a:defRPr sz="1700" b="1">
+                <a:solidFill>
+                  <a:srgbClr val="14B8A6"/>
+                </a:solidFill>
+                <a:latin typeface="Segoe UI"/>
+              </a:defRPr>
+            </a:pPr>
+            <a:r>
+              <a:t>Key Learnings</a:t>
+            </a:r>
+          </a:p>
+        </p:txBody>
+      </p:sp>
+      <p:sp>
+        <p:nvSpPr>
+          <p:cNvPr id="14" name="TextBox 13"/>
+          <p:cNvSpPr txBox="1"/>
+          <p:nvPr/>
+        </p:nvSpPr>
+        <p:spPr>
+          <a:xfrm>
+            <a:off x="6400800" y="2011680"/>
+            <a:ext cx="4937760" cy="3840480"/>
+          </a:xfrm>
+          <a:prstGeom prst="rect">
+            <a:avLst/>
+          </a:prstGeom>
+          <a:noFill/>
+        </p:spPr>
+        <p:txBody>
+          <a:bodyPr wrap="square">
+            <a:spAutoFit/>
+          </a:bodyPr>
+          <a:lstStyle/>
+          <a:p>
+            <a:pPr algn="l">
+              <a:spcAft>
+                <a:spcPts val="1495"/>
+              </a:spcAft>
+              <a:defRPr sz="1300" b="0">
+                <a:solidFill>
+                  <a:srgbClr val="B0B0C0"/>
+                </a:solidFill>
+                <a:latin typeface="Segoe UI"/>
+              </a:defRPr>
+            </a:pPr>
+            <a:r>
+              <a:t>RLS is essential — never expose tables without policies</a:t>
+            </a:r>
+          </a:p>
+          <a:p>
+            <a:pPr algn="l">
+              <a:spcAft>
+                <a:spcPts val="1495"/>
+              </a:spcAft>
+              <a:defRPr sz="1300" b="0">
+                <a:solidFill>
+                  <a:srgbClr val="B0B0C0"/>
+                </a:solidFill>
+                <a:latin typeface="Segoe UI"/>
+              </a:defRPr>
+            </a:pPr>
+            <a:r>
+              <a:t>Unified table design is better than many small tables for polymorphic content</a:t>
+            </a:r>
+          </a:p>
+          <a:p>
+            <a:pPr algn="l">
+              <a:spcAft>
+                <a:spcPts val="1495"/>
+              </a:spcAft>
+              <a:defRPr sz="1300" b="0">
+                <a:solidFill>
+                  <a:srgbClr val="B0B0C0"/>
+                </a:solidFill>
+                <a:latin typeface="Segoe UI"/>
+              </a:defRPr>
+            </a:pPr>
+            <a:r>
+              <a:t>Edge functions need mandatory CORS headers on every response</a:t>
+            </a:r>
+          </a:p>
+          <a:p>
+            <a:pPr algn="l">
+              <a:spcAft>
+                <a:spcPts val="1495"/>
+              </a:spcAft>
+              <a:defRPr sz="1300" b="0">
+                <a:solidFill>
+                  <a:srgbClr val="B0B0C0"/>
+                </a:solidFill>
+                <a:latin typeface="Segoe UI"/>
+              </a:defRPr>
+            </a:pPr>
+            <a:r>
+              <a:t>Client-side API key rotation improves UX during rate limits</a:t>
+            </a:r>
+          </a:p>
+          <a:p>
+            <a:pPr algn="l">
+              <a:spcAft>
+                <a:spcPts val="1495"/>
+              </a:spcAft>
+              <a:defRPr sz="1300" b="0">
+                <a:solidFill>
+                  <a:srgbClr val="B0B0C0"/>
+                </a:solidFill>
+                <a:latin typeface="Segoe UI"/>
+              </a:defRPr>
+            </a:pPr>
+            <a:r>
+              <a:t>Inline translation pattern scales better than separate locale files</a:t>
+            </a:r>
+          </a:p>
+          <a:p>
+            <a:pPr algn="l">
+              <a:spcAft>
+                <a:spcPts val="1495"/>
+              </a:spcAft>
+              <a:defRPr sz="1300" b="0">
+                <a:solidFill>
+                  <a:srgbClr val="B0B0C0"/>
+                </a:solidFill>
+                <a:latin typeface="Segoe UI"/>
+              </a:defRPr>
+            </a:pPr>
+            <a:r>
+              <a:t>Security DEFINER functions need search_path hardening</a:t>
+            </a:r>
+          </a:p>
+        </p:txBody>
+      </p:sp>
+      <p:sp>
+        <p:nvSpPr>
+          <p:cNvPr id="15" name="TextBox 14"/>
+          <p:cNvSpPr txBox="1"/>
+          <p:nvPr/>
+        </p:nvSpPr>
+        <p:spPr>
+          <a:xfrm>
+            <a:off x="731520" y="6446520"/>
+            <a:ext cx="7315200" cy="320040"/>
+          </a:xfrm>
+          <a:prstGeom prst="rect">
+            <a:avLst/>
+          </a:prstGeom>
+          <a:noFill/>
+        </p:spPr>
+        <p:txBody>
+          <a:bodyPr wrap="square">
+            <a:spAutoFit/>
+          </a:bodyPr>
+          <a:lstStyle/>
+          <a:p>
+            <a:pPr algn="l">
+              <a:defRPr sz="1000" b="0">
                 <a:solidFill>
                   <a:srgbClr val="707080"/>
                 </a:solidFill>
@@ -8585,7 +9006,7 @@
             <a:avLst/>
           </a:prstGeom>
           <a:solidFill>
-            <a:srgbClr val="F97316"/>
+            <a:srgbClr val="14B8A6"/>
           </a:solidFill>
           <a:ln>
             <a:noFill/>
@@ -8636,7 +9057,7 @@
           <a:lstStyle/>
           <a:p>
             <a:pPr algn="l">
-              <a:defRPr sz="3000" b="1">
+              <a:defRPr sz="2800" b="1">
                 <a:solidFill>
                   <a:srgbClr val="FFFFFF"/>
                 </a:solidFill>
@@ -8657,7 +9078,7 @@
         </p:nvSpPr>
         <p:spPr>
           <a:xfrm>
-            <a:off x="731520" y="914400"/>
+            <a:off x="731520" y="868680"/>
             <a:ext cx="10058400" cy="457200"/>
           </a:xfrm>
           <a:prstGeom prst="rect">
@@ -8672,7 +9093,7 @@
           <a:lstStyle/>
           <a:p>
             <a:pPr algn="l">
-              <a:defRPr sz="1500" b="0">
+              <a:defRPr sz="1400" b="0">
                 <a:solidFill>
                   <a:srgbClr val="B0B0C0"/>
                 </a:solidFill>
@@ -8693,8 +9114,8 @@
         </p:nvSpPr>
         <p:spPr>
           <a:xfrm>
-            <a:off x="11155680" y="365760"/>
-            <a:ext cx="731520" cy="457200"/>
+            <a:off x="11247120" y="365760"/>
+            <a:ext cx="640080" cy="365760"/>
           </a:xfrm>
           <a:prstGeom prst="rect">
             <a:avLst/>
@@ -8708,7 +9129,7 @@
           <a:lstStyle/>
           <a:p>
             <a:pPr algn="r">
-              <a:defRPr sz="1400" b="0">
+              <a:defRPr sz="1300" b="0">
                 <a:solidFill>
                   <a:srgbClr val="707080"/>
                 </a:solidFill>
@@ -8729,14 +9150,14 @@
         </p:nvSpPr>
         <p:spPr>
           <a:xfrm>
-            <a:off x="731520" y="1325880"/>
+            <a:off x="731520" y="1234440"/>
             <a:ext cx="10698480" cy="19050"/>
           </a:xfrm>
           <a:prstGeom prst="rect">
             <a:avLst/>
           </a:prstGeom>
           <a:solidFill>
-            <a:srgbClr val="333344"/>
+            <a:srgbClr val="303040"/>
           </a:solidFill>
           <a:ln>
             <a:noFill/>
@@ -8772,7 +9193,7 @@
         </p:nvSpPr>
         <p:spPr>
           <a:xfrm>
-            <a:off x="914400" y="1828800"/>
+            <a:off x="914400" y="1645920"/>
             <a:ext cx="10515600" cy="4114800"/>
           </a:xfrm>
           <a:prstGeom prst="rect">
@@ -8786,11 +9207,11 @@
           </a:bodyPr>
           <a:lstStyle/>
           <a:p>
-            <a:pPr algn="l">
-              <a:spcAft>
-                <a:spcPts val="2550"/>
-              </a:spcAft>
-              <a:defRPr sz="1700" b="0">
+            <a:pPr>
+              <a:spcAft>
+                <a:spcPts val="2400"/>
+              </a:spcAft>
+              <a:defRPr sz="1600">
                 <a:solidFill>
                   <a:srgbClr val="FFFFFF"/>
                 </a:solidFill>
@@ -8804,11 +9225,11 @@
             </a:r>
           </a:p>
           <a:p>
-            <a:pPr algn="l">
-              <a:spcAft>
-                <a:spcPts val="2550"/>
-              </a:spcAft>
-              <a:defRPr sz="1700" b="0">
+            <a:pPr>
+              <a:spcAft>
+                <a:spcPts val="2400"/>
+              </a:spcAft>
+              <a:defRPr sz="1600">
                 <a:solidFill>
                   <a:srgbClr val="FFFFFF"/>
                 </a:solidFill>
@@ -8822,11 +9243,11 @@
             </a:r>
           </a:p>
           <a:p>
-            <a:pPr algn="l">
-              <a:spcAft>
-                <a:spcPts val="2550"/>
-              </a:spcAft>
-              <a:defRPr sz="1700" b="0">
+            <a:pPr>
+              <a:spcAft>
+                <a:spcPts val="2400"/>
+              </a:spcAft>
+              <a:defRPr sz="1600">
                 <a:solidFill>
                   <a:srgbClr val="FFFFFF"/>
                 </a:solidFill>
@@ -8840,11 +9261,11 @@
             </a:r>
           </a:p>
           <a:p>
-            <a:pPr algn="l">
-              <a:spcAft>
-                <a:spcPts val="2550"/>
-              </a:spcAft>
-              <a:defRPr sz="1700" b="0">
+            <a:pPr>
+              <a:spcAft>
+                <a:spcPts val="2400"/>
+              </a:spcAft>
+              <a:defRPr sz="1600">
                 <a:solidFill>
                   <a:srgbClr val="FFFFFF"/>
                 </a:solidFill>
@@ -8854,15 +9275,15 @@
               <a:buChar char="▸"/>
             </a:pPr>
             <a:r>
-              <a:t>More branches and subjects (ECE, ME, CE, EE already in AI)</a:t>
-            </a:r>
-          </a:p>
-          <a:p>
-            <a:pPr algn="l">
-              <a:spcAft>
-                <a:spcPts val="2550"/>
-              </a:spcAft>
-              <a:defRPr sz="1700" b="0">
+              <a:t>More branches and subjects — ECE, ME, CE, EE already in AI</a:t>
+            </a:r>
+          </a:p>
+          <a:p>
+            <a:pPr>
+              <a:spcAft>
+                <a:spcPts val="2400"/>
+              </a:spcAft>
+              <a:defRPr sz="1600">
                 <a:solidFill>
                   <a:srgbClr val="FFFFFF"/>
                 </a:solidFill>
@@ -8876,11 +9297,11 @@
             </a:r>
           </a:p>
           <a:p>
-            <a:pPr algn="l">
-              <a:spcAft>
-                <a:spcPts val="2550"/>
-              </a:spcAft>
-              <a:defRPr sz="1700" b="0">
+            <a:pPr>
+              <a:spcAft>
+                <a:spcPts val="2400"/>
+              </a:spcAft>
+              <a:defRPr sz="1600">
                 <a:solidFill>
                   <a:srgbClr val="FFFFFF"/>
                 </a:solidFill>
@@ -8894,11 +9315,11 @@
             </a:r>
           </a:p>
           <a:p>
-            <a:pPr algn="l">
-              <a:spcAft>
-                <a:spcPts val="2550"/>
-              </a:spcAft>
-              <a:defRPr sz="1700" b="0">
+            <a:pPr>
+              <a:spcAft>
+                <a:spcPts val="2400"/>
+              </a:spcAft>
+              <a:defRPr sz="1600">
                 <a:solidFill>
                   <a:srgbClr val="FFFFFF"/>
                 </a:solidFill>
@@ -8912,11 +9333,11 @@
             </a:r>
           </a:p>
           <a:p>
-            <a:pPr algn="l">
-              <a:spcAft>
-                <a:spcPts val="2550"/>
-              </a:spcAft>
-              <a:defRPr sz="1700" b="0">
+            <a:pPr>
+              <a:spcAft>
+                <a:spcPts val="2400"/>
+              </a:spcAft>
+              <a:defRPr sz="1600">
                 <a:solidFill>
                   <a:srgbClr val="FFFFFF"/>
                 </a:solidFill>
@@ -8939,8 +9360,8 @@
         </p:nvSpPr>
         <p:spPr>
           <a:xfrm>
-            <a:off x="731520" y="6400800"/>
-            <a:ext cx="7315200" cy="365760"/>
+            <a:off x="731520" y="6446520"/>
+            <a:ext cx="7315200" cy="320040"/>
           </a:xfrm>
           <a:prstGeom prst="rect">
             <a:avLst/>
@@ -8954,7 +9375,7 @@
           <a:lstStyle/>
           <a:p>
             <a:pPr algn="l">
-              <a:defRPr sz="1100" b="0">
+              <a:defRPr sz="1000" b="0">
                 <a:solidFill>
                   <a:srgbClr val="707080"/>
                 </a:solidFill>
@@ -9008,7 +9429,7 @@
             <a:avLst/>
           </a:prstGeom>
           <a:solidFill>
-            <a:srgbClr val="F97316"/>
+            <a:srgbClr val="14B8A6"/>
           </a:solidFill>
           <a:ln>
             <a:noFill/>
@@ -9051,7 +9472,7 @@
             <a:avLst/>
           </a:prstGeom>
           <a:solidFill>
-            <a:srgbClr val="1A1A2E"/>
+            <a:srgbClr val="0D1A18"/>
           </a:solidFill>
           <a:ln>
             <a:noFill/>
@@ -9087,7 +9508,7 @@
         </p:nvSpPr>
         <p:spPr>
           <a:xfrm>
-            <a:off x="914400" y="1371600"/>
+            <a:off x="914400" y="1188720"/>
             <a:ext cx="10332720" cy="457200"/>
           </a:xfrm>
           <a:prstGeom prst="rect">
@@ -9102,9 +9523,9 @@
           <a:lstStyle/>
           <a:p>
             <a:pPr algn="ctr">
-              <a:defRPr sz="1600" b="1">
-                <a:solidFill>
-                  <a:srgbClr val="F97316"/>
+              <a:defRPr sz="1500" b="1">
+                <a:solidFill>
+                  <a:srgbClr val="14B8A6"/>
                 </a:solidFill>
                 <a:latin typeface="Segoe UI"/>
               </a:defRPr>
@@ -9123,7 +9544,7 @@
         </p:nvSpPr>
         <p:spPr>
           <a:xfrm>
-            <a:off x="914400" y="2011680"/>
+            <a:off x="914400" y="1828800"/>
             <a:ext cx="10332720" cy="731520"/>
           </a:xfrm>
           <a:prstGeom prst="rect">
@@ -9138,7 +9559,7 @@
           <a:lstStyle/>
           <a:p>
             <a:pPr algn="ctr">
-              <a:defRPr sz="4400" b="1">
+              <a:defRPr sz="4200" b="1">
                 <a:solidFill>
                   <a:srgbClr val="FFFFFF"/>
                 </a:solidFill>
@@ -9159,7 +9580,7 @@
         </p:nvSpPr>
         <p:spPr>
           <a:xfrm>
-            <a:off x="1828800" y="3200400"/>
+            <a:off x="1828800" y="3017520"/>
             <a:ext cx="8503920" cy="2286000"/>
           </a:xfrm>
           <a:prstGeom prst="rect">
@@ -9173,11 +9594,11 @@
           </a:bodyPr>
           <a:lstStyle/>
           <a:p>
-            <a:pPr algn="l">
-              <a:spcAft>
-                <a:spcPts val="2880"/>
-              </a:spcAft>
-              <a:defRPr sz="1800" b="0">
+            <a:pPr>
+              <a:spcAft>
+                <a:spcPts val="2720"/>
+              </a:spcAft>
+              <a:defRPr sz="1700">
                 <a:solidFill>
                   <a:srgbClr val="B0B0C0"/>
                 </a:solidFill>
@@ -9191,11 +9612,11 @@
             </a:r>
           </a:p>
           <a:p>
-            <a:pPr algn="l">
-              <a:spcAft>
-                <a:spcPts val="2880"/>
-              </a:spcAft>
-              <a:defRPr sz="1800" b="0">
+            <a:pPr>
+              <a:spcAft>
+                <a:spcPts val="2720"/>
+              </a:spcAft>
+              <a:defRPr sz="1700">
                 <a:solidFill>
                   <a:srgbClr val="B0B0C0"/>
                 </a:solidFill>
@@ -9209,11 +9630,11 @@
             </a:r>
           </a:p>
           <a:p>
-            <a:pPr algn="l">
-              <a:spcAft>
-                <a:spcPts val="2880"/>
-              </a:spcAft>
-              <a:defRPr sz="1800" b="0">
+            <a:pPr>
+              <a:spcAft>
+                <a:spcPts val="2720"/>
+              </a:spcAft>
+              <a:defRPr sz="1700">
                 <a:solidFill>
                   <a:srgbClr val="B0B0C0"/>
                 </a:solidFill>
@@ -9227,11 +9648,11 @@
             </a:r>
           </a:p>
           <a:p>
-            <a:pPr algn="l">
-              <a:spcAft>
-                <a:spcPts val="2880"/>
-              </a:spcAft>
-              <a:defRPr sz="1800" b="0">
+            <a:pPr>
+              <a:spcAft>
+                <a:spcPts val="2720"/>
+              </a:spcAft>
+              <a:defRPr sz="1700">
                 <a:solidFill>
                   <a:srgbClr val="B0B0C0"/>
                 </a:solidFill>
@@ -9254,7 +9675,7 @@
         </p:nvSpPr>
         <p:spPr>
           <a:xfrm>
-            <a:off x="914400" y="5669280"/>
+            <a:off x="914400" y="5486400"/>
             <a:ext cx="10332720" cy="548640"/>
           </a:xfrm>
           <a:prstGeom prst="rect">
@@ -9269,9 +9690,9 @@
           <a:lstStyle/>
           <a:p>
             <a:pPr algn="ctr">
-              <a:defRPr sz="2200" b="1">
-                <a:solidFill>
-                  <a:srgbClr val="F97316"/>
+              <a:defRPr sz="2000" b="1">
+                <a:solidFill>
+                  <a:srgbClr val="14B8A6"/>
                 </a:solidFill>
                 <a:latin typeface="Segoe UI"/>
               </a:defRPr>
@@ -9290,7 +9711,7 @@
         </p:nvSpPr>
         <p:spPr>
           <a:xfrm>
-            <a:off x="914400" y="6217920"/>
+            <a:off x="914400" y="6126480"/>
             <a:ext cx="10332720" cy="365760"/>
           </a:xfrm>
           <a:prstGeom prst="rect">
@@ -9305,7 +9726,7 @@
           <a:lstStyle/>
           <a:p>
             <a:pPr algn="ctr">
-              <a:defRPr sz="1600" b="0">
+              <a:defRPr sz="1500" b="0">
                 <a:solidFill>
                   <a:srgbClr val="707080"/>
                 </a:solidFill>
@@ -9359,7 +9780,7 @@
             <a:avLst/>
           </a:prstGeom>
           <a:solidFill>
-            <a:srgbClr val="F97316"/>
+            <a:srgbClr val="14B8A6"/>
           </a:solidFill>
           <a:ln>
             <a:noFill/>
@@ -9410,7 +9831,7 @@
           <a:lstStyle/>
           <a:p>
             <a:pPr algn="l">
-              <a:defRPr sz="3000" b="1">
+              <a:defRPr sz="2800" b="1">
                 <a:solidFill>
                   <a:srgbClr val="FFFFFF"/>
                 </a:solidFill>
@@ -9431,7 +9852,7 @@
         </p:nvSpPr>
         <p:spPr>
           <a:xfrm>
-            <a:off x="731520" y="914400"/>
+            <a:off x="731520" y="868680"/>
             <a:ext cx="10058400" cy="457200"/>
           </a:xfrm>
           <a:prstGeom prst="rect">
@@ -9446,15 +9867,15 @@
           <a:lstStyle/>
           <a:p>
             <a:pPr algn="l">
-              <a:defRPr sz="1500" b="0">
-                <a:solidFill>
-                  <a:srgbClr val="B0B0C0"/>
-                </a:solidFill>
-                <a:latin typeface="Segoe UI"/>
-              </a:defRPr>
-            </a:pPr>
-            <a:r>
-              <a:t>Why TechNotes AI was built</a:t>
+              <a:defRPr sz="1400" b="0">
+                <a:solidFill>
+                  <a:srgbClr val="B0B0C0"/>
+                </a:solidFill>
+                <a:latin typeface="Segoe UI"/>
+              </a:defRPr>
+            </a:pPr>
+            <a:r>
+              <a:t>Why we built TechNotes AI</a:t>
             </a:r>
           </a:p>
         </p:txBody>
@@ -9467,8 +9888,8 @@
         </p:nvSpPr>
         <p:spPr>
           <a:xfrm>
-            <a:off x="11155680" y="365760"/>
-            <a:ext cx="731520" cy="457200"/>
+            <a:off x="11247120" y="365760"/>
+            <a:ext cx="640080" cy="365760"/>
           </a:xfrm>
           <a:prstGeom prst="rect">
             <a:avLst/>
@@ -9482,7 +9903,7 @@
           <a:lstStyle/>
           <a:p>
             <a:pPr algn="r">
-              <a:defRPr sz="1400" b="0">
+              <a:defRPr sz="1300" b="0">
                 <a:solidFill>
                   <a:srgbClr val="707080"/>
                 </a:solidFill>
@@ -9503,14 +9924,14 @@
         </p:nvSpPr>
         <p:spPr>
           <a:xfrm>
-            <a:off x="731520" y="1325880"/>
+            <a:off x="731520" y="1234440"/>
             <a:ext cx="10698480" cy="19050"/>
           </a:xfrm>
           <a:prstGeom prst="rect">
             <a:avLst/>
           </a:prstGeom>
           <a:solidFill>
-            <a:srgbClr val="333344"/>
+            <a:srgbClr val="303040"/>
           </a:solidFill>
           <a:ln>
             <a:noFill/>
@@ -9546,8 +9967,8 @@
         </p:nvSpPr>
         <p:spPr>
           <a:xfrm>
-            <a:off x="914400" y="1828800"/>
-            <a:ext cx="10515600" cy="4114800"/>
+            <a:off x="914400" y="1645920"/>
+            <a:ext cx="10332720" cy="4114800"/>
           </a:xfrm>
           <a:prstGeom prst="rect">
             <a:avLst/>
@@ -9560,11 +9981,11 @@
           </a:bodyPr>
           <a:lstStyle/>
           <a:p>
-            <a:pPr algn="l">
-              <a:spcAft>
-                <a:spcPts val="2880"/>
-              </a:spcAft>
-              <a:defRPr sz="1800" b="0">
+            <a:pPr>
+              <a:spcAft>
+                <a:spcPts val="2550"/>
+              </a:spcAft>
+              <a:defRPr sz="1700">
                 <a:solidFill>
                   <a:srgbClr val="FFFFFF"/>
                 </a:solidFill>
@@ -9574,15 +9995,15 @@
               <a:buChar char="▸"/>
             </a:pPr>
             <a:r>
-              <a:t>Engineering students struggle to find organized, branch-specific study material in one place</a:t>
-            </a:r>
-          </a:p>
-          <a:p>
-            <a:pPr algn="l">
-              <a:spcAft>
-                <a:spcPts val="2880"/>
-              </a:spcAft>
-              <a:defRPr sz="1800" b="0">
+              <a:t>Scattered resources — notes, PYQs, and syllabus spread across WhatsApp groups, Google Drive links, and outdated websites</a:t>
+            </a:r>
+          </a:p>
+          <a:p>
+            <a:pPr>
+              <a:spcAft>
+                <a:spcPts val="2550"/>
+              </a:spcAft>
+              <a:defRPr sz="1700">
                 <a:solidFill>
                   <a:srgbClr val="FFFFFF"/>
                 </a:solidFill>
@@ -9592,15 +10013,15 @@
               <a:buChar char="▸"/>
             </a:pPr>
             <a:r>
-              <a:t>Notes, PYQs, syllabus, and important questions are scattered across WhatsApp groups and drive links</a:t>
-            </a:r>
-          </a:p>
-          <a:p>
-            <a:pPr algn="l">
-              <a:spcAft>
-                <a:spcPts val="2880"/>
-              </a:spcAft>
-              <a:defRPr sz="1800" b="0">
+              <a:t>No central hub — students waste hours searching for branch-specific study material instead of studying</a:t>
+            </a:r>
+          </a:p>
+          <a:p>
+            <a:pPr>
+              <a:spcAft>
+                <a:spcPts val="2550"/>
+              </a:spcAft>
+              <a:defRPr sz="1700">
                 <a:solidFill>
                   <a:srgbClr val="FFFFFF"/>
                 </a:solidFill>
@@ -9610,15 +10031,15 @@
               <a:buChar char="▸"/>
             </a:pPr>
             <a:r>
-              <a:t>No AI assistant that answers subject-specific questions with formulas, diagrams, and examples</a:t>
-            </a:r>
-          </a:p>
-          <a:p>
-            <a:pPr algn="l">
-              <a:spcAft>
-                <a:spcPts val="2880"/>
-              </a:spcAft>
-              <a:defRPr sz="1800" b="0">
+              <a:t>Language barrier — most online resources are English-only, excluding Hindi-speaking students</a:t>
+            </a:r>
+          </a:p>
+          <a:p>
+            <a:pPr>
+              <a:spcAft>
+                <a:spcPts val="2550"/>
+              </a:spcAft>
+              <a:defRPr sz="1700">
                 <a:solidFill>
                   <a:srgbClr val="FFFFFF"/>
                 </a:solidFill>
@@ -9628,15 +10049,15 @@
               <a:buChar char="▸"/>
             </a:pPr>
             <a:r>
-              <a:t>Most resources are English-only — a barrier for Hindi-speaking students</a:t>
-            </a:r>
-          </a:p>
-          <a:p>
-            <a:pPr algn="l">
-              <a:spcAft>
-                <a:spcPts val="2880"/>
-              </a:spcAft>
-              <a:defRPr sz="1800" b="0">
+              <a:t>No AI doubt-solving — no assistant that gives subject-specific answers with formulas, diagrams, and examples</a:t>
+            </a:r>
+          </a:p>
+          <a:p>
+            <a:pPr>
+              <a:spcAft>
+                <a:spcPts val="2550"/>
+              </a:spcAft>
+              <a:defRPr sz="1700">
                 <a:solidFill>
                   <a:srgbClr val="FFFFFF"/>
                 </a:solidFill>
@@ -9646,15 +10067,15 @@
               <a:buChar char="▸"/>
             </a:pPr>
             <a:r>
-              <a:t>Existing platforms are cluttered with ads and paywalls</a:t>
-            </a:r>
-          </a:p>
-          <a:p>
-            <a:pPr algn="l">
-              <a:spcAft>
-                <a:spcPts val="2880"/>
-              </a:spcAft>
-              <a:defRPr sz="1800" b="0">
+              <a:t>Ad-cluttered platforms — existing sites are full of pop-ups, paywalls, and irrelevant content</a:t>
+            </a:r>
+          </a:p>
+          <a:p>
+            <a:pPr>
+              <a:spcAft>
+                <a:spcPts val="2550"/>
+              </a:spcAft>
+              <a:defRPr sz="1700">
                 <a:solidFill>
                   <a:srgbClr val="FFFFFF"/>
                 </a:solidFill>
@@ -9664,7 +10085,7 @@
               <a:buChar char="▸"/>
             </a:pPr>
             <a:r>
-              <a:t>No centralized place for DSA and placement preparation resources</a:t>
+              <a:t>No placement prep hub — DSA resources and company-wise interview material are not organized in one place</a:t>
             </a:r>
           </a:p>
         </p:txBody>
@@ -9678,13 +10099,15 @@
         <p:spPr>
           <a:xfrm>
             <a:off x="914400" y="5303520"/>
-            <a:ext cx="10332720" cy="822960"/>
+            <a:ext cx="10332720" cy="777240"/>
           </a:xfrm>
           <a:prstGeom prst="roundRect">
-            <a:avLst/>
+            <a:avLst>
+              <a:gd name="adj" fmla="val 6000"/>
+            </a:avLst>
           </a:prstGeom>
           <a:solidFill>
-            <a:srgbClr val="F97316"/>
+            <a:srgbClr val="14B8A6"/>
           </a:solidFill>
           <a:ln>
             <a:noFill/>
@@ -9705,19 +10128,19 @@
           </a:fontRef>
         </p:style>
         <p:txBody>
-          <a:bodyPr rtlCol="0" anchor="ctr" wrap="square" tIns="127000"/>
+          <a:bodyPr rtlCol="0" anchor="ctr" tIns="127000"/>
           <a:lstStyle/>
           <a:p>
             <a:pPr algn="ctr">
-              <a:defRPr sz="1800" b="1">
-                <a:solidFill>
-                  <a:srgbClr val="FFFFFF"/>
-                </a:solidFill>
-                <a:latin typeface="Segoe UI"/>
-              </a:defRPr>
-            </a:pPr>
-            <a:r>
-              <a:t>TechNotes AI solves all of this — one platform, all branches, AI-powered, bilingual, free.</a:t>
+              <a:defRPr sz="1700" b="1">
+                <a:solidFill>
+                  <a:srgbClr val="0A0A0F"/>
+                </a:solidFill>
+                <a:latin typeface="Segoe UI"/>
+              </a:defRPr>
+            </a:pPr>
+            <a:r>
+              <a:t>TechNotes AI solves all of this — one platform, all branches, AI-powered, bilingual, and completely free.</a:t>
             </a:r>
           </a:p>
         </p:txBody>
@@ -9730,8 +10153,8 @@
         </p:nvSpPr>
         <p:spPr>
           <a:xfrm>
-            <a:off x="731520" y="6400800"/>
-            <a:ext cx="7315200" cy="365760"/>
+            <a:off x="731520" y="6446520"/>
+            <a:ext cx="7315200" cy="320040"/>
           </a:xfrm>
           <a:prstGeom prst="rect">
             <a:avLst/>
@@ -9745,7 +10168,7 @@
           <a:lstStyle/>
           <a:p>
             <a:pPr algn="l">
-              <a:defRPr sz="1100" b="0">
+              <a:defRPr sz="1000" b="0">
                 <a:solidFill>
                   <a:srgbClr val="707080"/>
                 </a:solidFill>
@@ -9799,7 +10222,7 @@
             <a:avLst/>
           </a:prstGeom>
           <a:solidFill>
-            <a:srgbClr val="F97316"/>
+            <a:srgbClr val="14B8A6"/>
           </a:solidFill>
           <a:ln>
             <a:noFill/>
@@ -9850,7 +10273,7 @@
           <a:lstStyle/>
           <a:p>
             <a:pPr algn="l">
-              <a:defRPr sz="3000" b="1">
+              <a:defRPr sz="2800" b="1">
                 <a:solidFill>
                   <a:srgbClr val="FFFFFF"/>
                 </a:solidFill>
@@ -9858,7 +10281,7 @@
               </a:defRPr>
             </a:pPr>
             <a:r>
-              <a:t>What is TechNotes AI?</a:t>
+              <a:t>Our Solution</a:t>
             </a:r>
           </a:p>
         </p:txBody>
@@ -9871,7 +10294,7 @@
         </p:nvSpPr>
         <p:spPr>
           <a:xfrm>
-            <a:off x="731520" y="914400"/>
+            <a:off x="731520" y="868680"/>
             <a:ext cx="10058400" cy="457200"/>
           </a:xfrm>
           <a:prstGeom prst="rect">
@@ -9886,15 +10309,15 @@
           <a:lstStyle/>
           <a:p>
             <a:pPr algn="l">
-              <a:defRPr sz="1500" b="0">
-                <a:solidFill>
-                  <a:srgbClr val="B0B0C0"/>
-                </a:solidFill>
-                <a:latin typeface="Segoe UI"/>
-              </a:defRPr>
-            </a:pPr>
-            <a:r>
-              <a:t>A free, ad-free study platform built for RGPV students</a:t>
+              <a:defRPr sz="1400" b="0">
+                <a:solidFill>
+                  <a:srgbClr val="B0B0C0"/>
+                </a:solidFill>
+                <a:latin typeface="Segoe UI"/>
+              </a:defRPr>
+            </a:pPr>
+            <a:r>
+              <a:t>What TechNotes AI does</a:t>
             </a:r>
           </a:p>
         </p:txBody>
@@ -9907,8 +10330,8 @@
         </p:nvSpPr>
         <p:spPr>
           <a:xfrm>
-            <a:off x="11155680" y="365760"/>
-            <a:ext cx="731520" cy="457200"/>
+            <a:off x="11247120" y="365760"/>
+            <a:ext cx="640080" cy="365760"/>
           </a:xfrm>
           <a:prstGeom prst="rect">
             <a:avLst/>
@@ -9922,7 +10345,7 @@
           <a:lstStyle/>
           <a:p>
             <a:pPr algn="r">
-              <a:defRPr sz="1400" b="0">
+              <a:defRPr sz="1300" b="0">
                 <a:solidFill>
                   <a:srgbClr val="707080"/>
                 </a:solidFill>
@@ -9943,14 +10366,14 @@
         </p:nvSpPr>
         <p:spPr>
           <a:xfrm>
-            <a:off x="731520" y="1325880"/>
+            <a:off x="731520" y="1234440"/>
             <a:ext cx="10698480" cy="19050"/>
           </a:xfrm>
           <a:prstGeom prst="rect">
             <a:avLst/>
           </a:prstGeom>
           <a:solidFill>
-            <a:srgbClr val="333344"/>
+            <a:srgbClr val="303040"/>
           </a:solidFill>
           <a:ln>
             <a:noFill/>
@@ -9986,7 +10409,7 @@
         </p:nvSpPr>
         <p:spPr>
           <a:xfrm>
-            <a:off x="914400" y="1645920"/>
+            <a:off x="914400" y="1554480"/>
             <a:ext cx="10332720" cy="1097280"/>
           </a:xfrm>
           <a:prstGeom prst="rect">
@@ -10001,15 +10424,15 @@
           <a:lstStyle/>
           <a:p>
             <a:pPr algn="l">
-              <a:defRPr sz="1700" b="0">
-                <a:solidFill>
-                  <a:srgbClr val="B0B0C0"/>
-                </a:solidFill>
-                <a:latin typeface="Segoe UI"/>
-              </a:defRPr>
-            </a:pPr>
-            <a:r>
-              <a:t>TechNotes AI centralizes everything an engineering student needs — academic notes, previous year papers, syllabus, important questions, DSA and placement prep — paired with an AI chatbot that answers questions across ALL engineering branches and analyzes uploaded PDFs and images.</a:t>
+              <a:defRPr sz="1600" b="0">
+                <a:solidFill>
+                  <a:srgbClr val="B0B0C0"/>
+                </a:solidFill>
+                <a:latin typeface="Segoe UI"/>
+              </a:defRPr>
+            </a:pPr>
+            <a:r>
+              <a:t>A free, ad-free study platform that centralizes everything an RGPV engineering student needs — academic notes, previous year papers, syllabus, important questions, DSA and placement prep — paired with an AI chatbot that answers questions across ALL engineering branches and analyzes uploaded PDFs and images.</a:t>
             </a:r>
           </a:p>
         </p:txBody>
@@ -10022,7 +10445,7 @@
         </p:nvSpPr>
         <p:spPr>
           <a:xfrm>
-            <a:off x="914400" y="3017520"/>
+            <a:off x="914400" y="2926080"/>
             <a:ext cx="10515600" cy="3200400"/>
           </a:xfrm>
           <a:prstGeom prst="rect">
@@ -10036,11 +10459,11 @@
           </a:bodyPr>
           <a:lstStyle/>
           <a:p>
-            <a:pPr algn="l">
-              <a:spcAft>
-                <a:spcPts val="2550"/>
-              </a:spcAft>
-              <a:defRPr sz="1700" b="0">
+            <a:pPr>
+              <a:spcAft>
+                <a:spcPts val="2080"/>
+              </a:spcAft>
+              <a:defRPr sz="1600">
                 <a:solidFill>
                   <a:srgbClr val="FFFFFF"/>
                 </a:solidFill>
@@ -10050,15 +10473,15 @@
               <a:buChar char="▸"/>
             </a:pPr>
             <a:r>
-              <a:t>Academic notes and PDFs across all engineering branches</a:t>
-            </a:r>
-          </a:p>
-          <a:p>
-            <a:pPr algn="l">
-              <a:spcAft>
-                <a:spcPts val="2550"/>
-              </a:spcAft>
-              <a:defRPr sz="1700" b="0">
+              <a:t>Centralized academic notes and PDFs across all engineering branches</a:t>
+            </a:r>
+          </a:p>
+          <a:p>
+            <a:pPr>
+              <a:spcAft>
+                <a:spcPts val="2080"/>
+              </a:spcAft>
+              <a:defRPr sz="1600">
                 <a:solidFill>
                   <a:srgbClr val="FFFFFF"/>
                 </a:solidFill>
@@ -10068,15 +10491,15 @@
               <a:buChar char="▸"/>
             </a:pPr>
             <a:r>
-              <a:t>Previous Year Question papers (PYQs) with answer keys</a:t>
-            </a:r>
-          </a:p>
-          <a:p>
-            <a:pPr algn="l">
-              <a:spcAft>
-                <a:spcPts val="2550"/>
-              </a:spcAft>
-              <a:defRPr sz="1700" b="0">
+              <a:t>Previous Year Question papers (PYQs) with optional answer keys</a:t>
+            </a:r>
+          </a:p>
+          <a:p>
+            <a:pPr>
+              <a:spcAft>
+                <a:spcPts val="2080"/>
+              </a:spcAft>
+              <a:defRPr sz="1600">
                 <a:solidFill>
                   <a:srgbClr val="FFFFFF"/>
                 </a:solidFill>
@@ -10086,15 +10509,15 @@
               <a:buChar char="▸"/>
             </a:pPr>
             <a:r>
-              <a:t>Unit-wise syllabus and important questions</a:t>
-            </a:r>
-          </a:p>
-          <a:p>
-            <a:pPr algn="l">
-              <a:spcAft>
-                <a:spcPts val="2550"/>
-              </a:spcAft>
-              <a:defRPr sz="1700" b="0">
+              <a:t>Unit-wise syllabus and important questions per subject</a:t>
+            </a:r>
+          </a:p>
+          <a:p>
+            <a:pPr>
+              <a:spcAft>
+                <a:spcPts val="2080"/>
+              </a:spcAft>
+              <a:defRPr sz="1600">
                 <a:solidFill>
                   <a:srgbClr val="FFFFFF"/>
                 </a:solidFill>
@@ -10104,15 +10527,15 @@
               <a:buChar char="▸"/>
             </a:pPr>
             <a:r>
-              <a:t>DSA and placement preparation resources</a:t>
-            </a:r>
-          </a:p>
-          <a:p>
-            <a:pPr algn="l">
-              <a:spcAft>
-                <a:spcPts val="2550"/>
-              </a:spcAft>
-              <a:defRPr sz="1700" b="0">
+              <a:t>DSA preparation hub with notes and practice questions</a:t>
+            </a:r>
+          </a:p>
+          <a:p>
+            <a:pPr>
+              <a:spcAft>
+                <a:spcPts val="2080"/>
+              </a:spcAft>
+              <a:defRPr sz="1600">
                 <a:solidFill>
                   <a:srgbClr val="FFFFFF"/>
                 </a:solidFill>
@@ -10122,15 +10545,15 @@
               <a:buChar char="▸"/>
             </a:pPr>
             <a:r>
-              <a:t>AI chatbot covering all engineering branches</a:t>
-            </a:r>
-          </a:p>
-          <a:p>
-            <a:pPr algn="l">
-              <a:spcAft>
-                <a:spcPts val="2550"/>
-              </a:spcAft>
-              <a:defRPr sz="1700" b="0">
+              <a:t>Placement preparation with company-wise filtering</a:t>
+            </a:r>
+          </a:p>
+          <a:p>
+            <a:pPr>
+              <a:spcAft>
+                <a:spcPts val="2080"/>
+              </a:spcAft>
+              <a:defRPr sz="1600">
                 <a:solidFill>
                   <a:srgbClr val="FFFFFF"/>
                 </a:solidFill>
@@ -10140,7 +10563,43 @@
               <a:buChar char="▸"/>
             </a:pPr>
             <a:r>
-              <a:t>Bilingual interface (Hindi / English)</a:t>
+              <a:t>AI chatbot covering CSE, Civil, Electrical, Electronics, Mechanical, Math, Physics, Chemistry</a:t>
+            </a:r>
+          </a:p>
+          <a:p>
+            <a:pPr>
+              <a:spcAft>
+                <a:spcPts val="2080"/>
+              </a:spcAft>
+              <a:defRPr sz="1600">
+                <a:solidFill>
+                  <a:srgbClr val="FFFFFF"/>
+                </a:solidFill>
+                <a:latin typeface="Segoe UI"/>
+              </a:defRPr>
+              <a:buFont typeface="Arial"/>
+              <a:buChar char="▸"/>
+            </a:pPr>
+            <a:r>
+              <a:t>Bilingual interface — Hindi and English with instant toggle</a:t>
+            </a:r>
+          </a:p>
+          <a:p>
+            <a:pPr>
+              <a:spcAft>
+                <a:spcPts val="2080"/>
+              </a:spcAft>
+              <a:defRPr sz="1600">
+                <a:solidFill>
+                  <a:srgbClr val="FFFFFF"/>
+                </a:solidFill>
+                <a:latin typeface="Segoe UI"/>
+              </a:defRPr>
+              <a:buFont typeface="Arial"/>
+              <a:buChar char="▸"/>
+            </a:pPr>
+            <a:r>
+              <a:t>Admin panel for secure content management</a:t>
             </a:r>
           </a:p>
         </p:txBody>
@@ -10153,8 +10612,8 @@
         </p:nvSpPr>
         <p:spPr>
           <a:xfrm>
-            <a:off x="731520" y="6400800"/>
-            <a:ext cx="7315200" cy="365760"/>
+            <a:off x="731520" y="6446520"/>
+            <a:ext cx="7315200" cy="320040"/>
           </a:xfrm>
           <a:prstGeom prst="rect">
             <a:avLst/>
@@ -10168,7 +10627,7 @@
           <a:lstStyle/>
           <a:p>
             <a:pPr algn="l">
-              <a:defRPr sz="1100" b="0">
+              <a:defRPr sz="1000" b="0">
                 <a:solidFill>
                   <a:srgbClr val="707080"/>
                 </a:solidFill>
@@ -10222,7 +10681,7 @@
             <a:avLst/>
           </a:prstGeom>
           <a:solidFill>
-            <a:srgbClr val="F97316"/>
+            <a:srgbClr val="14B8A6"/>
           </a:solidFill>
           <a:ln>
             <a:noFill/>
@@ -10273,7 +10732,7 @@
           <a:lstStyle/>
           <a:p>
             <a:pPr algn="l">
-              <a:defRPr sz="3000" b="1">
+              <a:defRPr sz="2800" b="1">
                 <a:solidFill>
                   <a:srgbClr val="FFFFFF"/>
                 </a:solidFill>
@@ -10294,7 +10753,7 @@
         </p:nvSpPr>
         <p:spPr>
           <a:xfrm>
-            <a:off x="731520" y="914400"/>
+            <a:off x="731520" y="868680"/>
             <a:ext cx="10058400" cy="457200"/>
           </a:xfrm>
           <a:prstGeom prst="rect">
@@ -10309,7 +10768,7 @@
           <a:lstStyle/>
           <a:p>
             <a:pPr algn="l">
-              <a:defRPr sz="1500" b="0">
+              <a:defRPr sz="1400" b="0">
                 <a:solidFill>
                   <a:srgbClr val="B0B0C0"/>
                 </a:solidFill>
@@ -10330,8 +10789,8 @@
         </p:nvSpPr>
         <p:spPr>
           <a:xfrm>
-            <a:off x="11155680" y="365760"/>
-            <a:ext cx="731520" cy="457200"/>
+            <a:off x="11247120" y="365760"/>
+            <a:ext cx="640080" cy="365760"/>
           </a:xfrm>
           <a:prstGeom prst="rect">
             <a:avLst/>
@@ -10345,7 +10804,7 @@
           <a:lstStyle/>
           <a:p>
             <a:pPr algn="r">
-              <a:defRPr sz="1400" b="0">
+              <a:defRPr sz="1300" b="0">
                 <a:solidFill>
                   <a:srgbClr val="707080"/>
                 </a:solidFill>
@@ -10366,14 +10825,14 @@
         </p:nvSpPr>
         <p:spPr>
           <a:xfrm>
-            <a:off x="731520" y="1325880"/>
+            <a:off x="731520" y="1234440"/>
             <a:ext cx="10698480" cy="19050"/>
           </a:xfrm>
           <a:prstGeom prst="rect">
             <a:avLst/>
           </a:prstGeom>
           <a:solidFill>
-            <a:srgbClr val="333344"/>
+            <a:srgbClr val="303040"/>
           </a:solidFill>
           <a:ln>
             <a:noFill/>
@@ -10409,11 +10868,13 @@
         </p:nvSpPr>
         <p:spPr>
           <a:xfrm>
-            <a:off x="548640" y="1645920"/>
-            <a:ext cx="2926080" cy="2286000"/>
+            <a:off x="457200" y="1554480"/>
+            <a:ext cx="2834640" cy="2194560"/>
           </a:xfrm>
           <a:prstGeom prst="roundRect">
-            <a:avLst/>
+            <a:avLst>
+              <a:gd name="adj" fmla="val 8000"/>
+            </a:avLst>
           </a:prstGeom>
           <a:solidFill>
             <a:srgbClr val="14141C"/>
@@ -10452,8 +10913,8 @@
         </p:nvSpPr>
         <p:spPr>
           <a:xfrm>
-            <a:off x="548640" y="1645920"/>
-            <a:ext cx="2926080" cy="45720"/>
+            <a:off x="457200" y="1554480"/>
+            <a:ext cx="2834640" cy="45720"/>
           </a:xfrm>
           <a:prstGeom prst="rect">
             <a:avLst/>
@@ -10495,8 +10956,8 @@
         </p:nvSpPr>
         <p:spPr>
           <a:xfrm>
-            <a:off x="777240" y="1783080"/>
-            <a:ext cx="2468880" cy="365760"/>
+            <a:off x="640080" y="1664208"/>
+            <a:ext cx="2468880" cy="320040"/>
           </a:xfrm>
           <a:prstGeom prst="rect">
             <a:avLst/>
@@ -10510,7 +10971,7 @@
           <a:lstStyle/>
           <a:p>
             <a:pPr algn="l">
-              <a:defRPr sz="1600" b="1">
+              <a:defRPr sz="1400" b="1">
                 <a:solidFill>
                   <a:srgbClr val="F97316"/>
                 </a:solidFill>
@@ -10531,7 +10992,7 @@
         </p:nvSpPr>
         <p:spPr>
           <a:xfrm>
-            <a:off x="777240" y="2194560"/>
+            <a:off x="640080" y="2011680"/>
             <a:ext cx="2468880" cy="1645920"/>
           </a:xfrm>
           <a:prstGeom prst="rect">
@@ -10547,9 +11008,9 @@
           <a:p>
             <a:pPr algn="l">
               <a:spcAft>
-                <a:spcPts val="1560"/>
-              </a:spcAft>
-              <a:defRPr sz="1300" b="0">
+                <a:spcPts val="1264"/>
+              </a:spcAft>
+              <a:defRPr sz="1100" b="0">
                 <a:solidFill>
                   <a:srgbClr val="B0B0C0"/>
                 </a:solidFill>
@@ -10563,9 +11024,9 @@
           <a:p>
             <a:pPr algn="l">
               <a:spcAft>
-                <a:spcPts val="1560"/>
-              </a:spcAft>
-              <a:defRPr sz="1300" b="0">
+                <a:spcPts val="1264"/>
+              </a:spcAft>
+              <a:defRPr sz="1100" b="0">
                 <a:solidFill>
                   <a:srgbClr val="B0B0C0"/>
                 </a:solidFill>
@@ -10579,25 +11040,25 @@
           <a:p>
             <a:pPr algn="l">
               <a:spcAft>
-                <a:spcPts val="1560"/>
-              </a:spcAft>
-              <a:defRPr sz="1300" b="0">
-                <a:solidFill>
-                  <a:srgbClr val="B0B0C0"/>
-                </a:solidFill>
-                <a:latin typeface="Segoe UI"/>
-              </a:defRPr>
-            </a:pPr>
-            <a:r>
-              <a:t>PDF/image upload</a:t>
-            </a:r>
-          </a:p>
-          <a:p>
-            <a:pPr algn="l">
-              <a:spcAft>
-                <a:spcPts val="1560"/>
-              </a:spcAft>
-              <a:defRPr sz="1300" b="0">
+                <a:spcPts val="1264"/>
+              </a:spcAft>
+              <a:defRPr sz="1100" b="0">
+                <a:solidFill>
+                  <a:srgbClr val="B0B0C0"/>
+                </a:solidFill>
+                <a:latin typeface="Segoe UI"/>
+              </a:defRPr>
+            </a:pPr>
+            <a:r>
+              <a:t>PDF / image upload</a:t>
+            </a:r>
+          </a:p>
+          <a:p>
+            <a:pPr algn="l">
+              <a:spcAft>
+                <a:spcPts val="1264"/>
+              </a:spcAft>
+              <a:defRPr sz="1100" b="0">
                 <a:solidFill>
                   <a:srgbClr val="B0B0C0"/>
                 </a:solidFill>
@@ -10618,11 +11079,13 @@
         </p:nvSpPr>
         <p:spPr>
           <a:xfrm>
-            <a:off x="3749039" y="1645920"/>
-            <a:ext cx="2926080" cy="2286000"/>
+            <a:off x="3657600" y="1554480"/>
+            <a:ext cx="2834640" cy="2194560"/>
           </a:xfrm>
           <a:prstGeom prst="roundRect">
-            <a:avLst/>
+            <a:avLst>
+              <a:gd name="adj" fmla="val 8000"/>
+            </a:avLst>
           </a:prstGeom>
           <a:solidFill>
             <a:srgbClr val="14141C"/>
@@ -10661,8 +11124,8 @@
         </p:nvSpPr>
         <p:spPr>
           <a:xfrm>
-            <a:off x="3749039" y="1645920"/>
-            <a:ext cx="2926080" cy="45720"/>
+            <a:off x="3657600" y="1554480"/>
+            <a:ext cx="2834640" cy="45720"/>
           </a:xfrm>
           <a:prstGeom prst="rect">
             <a:avLst/>
@@ -10704,8 +11167,8 @@
         </p:nvSpPr>
         <p:spPr>
           <a:xfrm>
-            <a:off x="3977639" y="1783080"/>
-            <a:ext cx="2468880" cy="365760"/>
+            <a:off x="3840480" y="1664208"/>
+            <a:ext cx="2468880" cy="320040"/>
           </a:xfrm>
           <a:prstGeom prst="rect">
             <a:avLst/>
@@ -10719,7 +11182,7 @@
           <a:lstStyle/>
           <a:p>
             <a:pPr algn="l">
-              <a:defRPr sz="1600" b="1">
+              <a:defRPr sz="1400" b="1">
                 <a:solidFill>
                   <a:srgbClr val="1E3A8A"/>
                 </a:solidFill>
@@ -10740,7 +11203,7 @@
         </p:nvSpPr>
         <p:spPr>
           <a:xfrm>
-            <a:off x="3977639" y="2194560"/>
+            <a:off x="3840480" y="2011680"/>
             <a:ext cx="2468880" cy="1645920"/>
           </a:xfrm>
           <a:prstGeom prst="rect">
@@ -10756,9 +11219,9 @@
           <a:p>
             <a:pPr algn="l">
               <a:spcAft>
-                <a:spcPts val="1560"/>
-              </a:spcAft>
-              <a:defRPr sz="1300" b="0">
+                <a:spcPts val="1264"/>
+              </a:spcAft>
+              <a:defRPr sz="1100" b="0">
                 <a:solidFill>
                   <a:srgbClr val="B0B0C0"/>
                 </a:solidFill>
@@ -10772,9 +11235,9 @@
           <a:p>
             <a:pPr algn="l">
               <a:spcAft>
-                <a:spcPts val="1560"/>
-              </a:spcAft>
-              <a:defRPr sz="1300" b="0">
+                <a:spcPts val="1264"/>
+              </a:spcAft>
+              <a:defRPr sz="1100" b="0">
                 <a:solidFill>
                   <a:srgbClr val="B0B0C0"/>
                 </a:solidFill>
@@ -10788,9 +11251,9 @@
           <a:p>
             <a:pPr algn="l">
               <a:spcAft>
-                <a:spcPts val="1560"/>
-              </a:spcAft>
-              <a:defRPr sz="1300" b="0">
+                <a:spcPts val="1264"/>
+              </a:spcAft>
+              <a:defRPr sz="1100" b="0">
                 <a:solidFill>
                   <a:srgbClr val="B0B0C0"/>
                 </a:solidFill>
@@ -10804,9 +11267,9 @@
           <a:p>
             <a:pPr algn="l">
               <a:spcAft>
-                <a:spcPts val="1560"/>
-              </a:spcAft>
-              <a:defRPr sz="1300" b="0">
+                <a:spcPts val="1264"/>
+              </a:spcAft>
+              <a:defRPr sz="1100" b="0">
                 <a:solidFill>
                   <a:srgbClr val="B0B0C0"/>
                 </a:solidFill>
@@ -10827,11 +11290,13 @@
         </p:nvSpPr>
         <p:spPr>
           <a:xfrm>
-            <a:off x="6949440" y="1645920"/>
-            <a:ext cx="2926080" cy="2286000"/>
+            <a:off x="6858000" y="1554480"/>
+            <a:ext cx="2834640" cy="2194560"/>
           </a:xfrm>
           <a:prstGeom prst="roundRect">
-            <a:avLst/>
+            <a:avLst>
+              <a:gd name="adj" fmla="val 8000"/>
+            </a:avLst>
           </a:prstGeom>
           <a:solidFill>
             <a:srgbClr val="14141C"/>
@@ -10870,8 +11335,8 @@
         </p:nvSpPr>
         <p:spPr>
           <a:xfrm>
-            <a:off x="6949440" y="1645920"/>
-            <a:ext cx="2926080" cy="45720"/>
+            <a:off x="6858000" y="1554480"/>
+            <a:ext cx="2834640" cy="45720"/>
           </a:xfrm>
           <a:prstGeom prst="rect">
             <a:avLst/>
@@ -10913,8 +11378,8 @@
         </p:nvSpPr>
         <p:spPr>
           <a:xfrm>
-            <a:off x="7178040" y="1783080"/>
-            <a:ext cx="2468880" cy="365760"/>
+            <a:off x="7040880" y="1664208"/>
+            <a:ext cx="2468880" cy="320040"/>
           </a:xfrm>
           <a:prstGeom prst="rect">
             <a:avLst/>
@@ -10928,7 +11393,7 @@
           <a:lstStyle/>
           <a:p>
             <a:pPr algn="l">
-              <a:defRPr sz="1600" b="1">
+              <a:defRPr sz="1400" b="1">
                 <a:solidFill>
                   <a:srgbClr val="22C55E"/>
                 </a:solidFill>
@@ -10949,7 +11414,7 @@
         </p:nvSpPr>
         <p:spPr>
           <a:xfrm>
-            <a:off x="7178040" y="2194560"/>
+            <a:off x="7040880" y="2011680"/>
             <a:ext cx="2468880" cy="1645920"/>
           </a:xfrm>
           <a:prstGeom prst="rect">
@@ -10965,9 +11430,9 @@
           <a:p>
             <a:pPr algn="l">
               <a:spcAft>
-                <a:spcPts val="1560"/>
-              </a:spcAft>
-              <a:defRPr sz="1300" b="0">
+                <a:spcPts val="1264"/>
+              </a:spcAft>
+              <a:defRPr sz="1100" b="0">
                 <a:solidFill>
                   <a:srgbClr val="B0B0C0"/>
                 </a:solidFill>
@@ -10981,9 +11446,9 @@
           <a:p>
             <a:pPr algn="l">
               <a:spcAft>
-                <a:spcPts val="1560"/>
-              </a:spcAft>
-              <a:defRPr sz="1300" b="0">
+                <a:spcPts val="1264"/>
+              </a:spcAft>
+              <a:defRPr sz="1100" b="0">
                 <a:solidFill>
                   <a:srgbClr val="B0B0C0"/>
                 </a:solidFill>
@@ -10997,9 +11462,9 @@
           <a:p>
             <a:pPr algn="l">
               <a:spcAft>
-                <a:spcPts val="1560"/>
-              </a:spcAft>
-              <a:defRPr sz="1300" b="0">
+                <a:spcPts val="1264"/>
+              </a:spcAft>
+              <a:defRPr sz="1100" b="0">
                 <a:solidFill>
                   <a:srgbClr val="B0B0C0"/>
                 </a:solidFill>
@@ -11013,9 +11478,9 @@
           <a:p>
             <a:pPr algn="l">
               <a:spcAft>
-                <a:spcPts val="1560"/>
-              </a:spcAft>
-              <a:defRPr sz="1300" b="0">
+                <a:spcPts val="1264"/>
+              </a:spcAft>
+              <a:defRPr sz="1100" b="0">
                 <a:solidFill>
                   <a:srgbClr val="B0B0C0"/>
                 </a:solidFill>
@@ -11036,11 +11501,13 @@
         </p:nvSpPr>
         <p:spPr>
           <a:xfrm>
-            <a:off x="10149840" y="1645920"/>
-            <a:ext cx="2926080" cy="2286000"/>
+            <a:off x="10058400" y="1554480"/>
+            <a:ext cx="2834640" cy="2194560"/>
           </a:xfrm>
           <a:prstGeom prst="roundRect">
-            <a:avLst/>
+            <a:avLst>
+              <a:gd name="adj" fmla="val 8000"/>
+            </a:avLst>
           </a:prstGeom>
           <a:solidFill>
             <a:srgbClr val="14141C"/>
@@ -11079,8 +11546,8 @@
         </p:nvSpPr>
         <p:spPr>
           <a:xfrm>
-            <a:off x="10149840" y="1645920"/>
-            <a:ext cx="2926080" cy="45720"/>
+            <a:off x="10058400" y="1554480"/>
+            <a:ext cx="2834640" cy="45720"/>
           </a:xfrm>
           <a:prstGeom prst="rect">
             <a:avLst/>
@@ -11122,8 +11589,8 @@
         </p:nvSpPr>
         <p:spPr>
           <a:xfrm>
-            <a:off x="10378440" y="1783080"/>
-            <a:ext cx="2468880" cy="365760"/>
+            <a:off x="10241280" y="1664208"/>
+            <a:ext cx="2468880" cy="320040"/>
           </a:xfrm>
           <a:prstGeom prst="rect">
             <a:avLst/>
@@ -11137,7 +11604,7 @@
           <a:lstStyle/>
           <a:p>
             <a:pPr algn="l">
-              <a:defRPr sz="1600" b="1">
+              <a:defRPr sz="1400" b="1">
                 <a:solidFill>
                   <a:srgbClr val="A855F7"/>
                 </a:solidFill>
@@ -11158,7 +11625,7 @@
         </p:nvSpPr>
         <p:spPr>
           <a:xfrm>
-            <a:off x="10378440" y="2194560"/>
+            <a:off x="10241280" y="2011680"/>
             <a:ext cx="2468880" cy="1645920"/>
           </a:xfrm>
           <a:prstGeom prst="rect">
@@ -11174,9 +11641,9 @@
           <a:p>
             <a:pPr algn="l">
               <a:spcAft>
-                <a:spcPts val="1560"/>
-              </a:spcAft>
-              <a:defRPr sz="1300" b="0">
+                <a:spcPts val="1264"/>
+              </a:spcAft>
+              <a:defRPr sz="1100" b="0">
                 <a:solidFill>
                   <a:srgbClr val="B0B0C0"/>
                 </a:solidFill>
@@ -11190,9 +11657,9 @@
           <a:p>
             <a:pPr algn="l">
               <a:spcAft>
-                <a:spcPts val="1560"/>
-              </a:spcAft>
-              <a:defRPr sz="1300" b="0">
+                <a:spcPts val="1264"/>
+              </a:spcAft>
+              <a:defRPr sz="1100" b="0">
                 <a:solidFill>
                   <a:srgbClr val="B0B0C0"/>
                 </a:solidFill>
@@ -11206,9 +11673,9 @@
           <a:p>
             <a:pPr algn="l">
               <a:spcAft>
-                <a:spcPts val="1560"/>
-              </a:spcAft>
-              <a:defRPr sz="1300" b="0">
+                <a:spcPts val="1264"/>
+              </a:spcAft>
+              <a:defRPr sz="1100" b="0">
                 <a:solidFill>
                   <a:srgbClr val="B0B0C0"/>
                 </a:solidFill>
@@ -11222,9 +11689,9 @@
           <a:p>
             <a:pPr algn="l">
               <a:spcAft>
-                <a:spcPts val="1560"/>
-              </a:spcAft>
-              <a:defRPr sz="1300" b="0">
+                <a:spcPts val="1264"/>
+              </a:spcAft>
+              <a:defRPr sz="1100" b="0">
                 <a:solidFill>
                   <a:srgbClr val="B0B0C0"/>
                 </a:solidFill>
@@ -11245,11 +11712,13 @@
         </p:nvSpPr>
         <p:spPr>
           <a:xfrm>
-            <a:off x="548640" y="4114800"/>
-            <a:ext cx="2926080" cy="2286000"/>
+            <a:off x="457200" y="3931920"/>
+            <a:ext cx="2834640" cy="2194560"/>
           </a:xfrm>
           <a:prstGeom prst="roundRect">
-            <a:avLst/>
+            <a:avLst>
+              <a:gd name="adj" fmla="val 8000"/>
+            </a:avLst>
           </a:prstGeom>
           <a:solidFill>
             <a:srgbClr val="14141C"/>
@@ -11288,8 +11757,8 @@
         </p:nvSpPr>
         <p:spPr>
           <a:xfrm>
-            <a:off x="548640" y="4114800"/>
-            <a:ext cx="2926080" cy="45720"/>
+            <a:off x="457200" y="3931920"/>
+            <a:ext cx="2834640" cy="45720"/>
           </a:xfrm>
           <a:prstGeom prst="rect">
             <a:avLst/>
@@ -11331,8 +11800,8 @@
         </p:nvSpPr>
         <p:spPr>
           <a:xfrm>
-            <a:off x="777240" y="4251960"/>
-            <a:ext cx="2468880" cy="365760"/>
+            <a:off x="640080" y="4041648"/>
+            <a:ext cx="2468880" cy="320040"/>
           </a:xfrm>
           <a:prstGeom prst="rect">
             <a:avLst/>
@@ -11346,7 +11815,7 @@
           <a:lstStyle/>
           <a:p>
             <a:pPr algn="l">
-              <a:defRPr sz="1600" b="1">
+              <a:defRPr sz="1400" b="1">
                 <a:solidFill>
                   <a:srgbClr val="14B8A6"/>
                 </a:solidFill>
@@ -11367,7 +11836,7 @@
         </p:nvSpPr>
         <p:spPr>
           <a:xfrm>
-            <a:off x="777240" y="4663440"/>
+            <a:off x="640080" y="4389120"/>
             <a:ext cx="2468880" cy="1645920"/>
           </a:xfrm>
           <a:prstGeom prst="rect">
@@ -11383,9 +11852,9 @@
           <a:p>
             <a:pPr algn="l">
               <a:spcAft>
-                <a:spcPts val="1560"/>
-              </a:spcAft>
-              <a:defRPr sz="1300" b="0">
+                <a:spcPts val="1264"/>
+              </a:spcAft>
+              <a:defRPr sz="1100" b="0">
                 <a:solidFill>
                   <a:srgbClr val="B0B0C0"/>
                 </a:solidFill>
@@ -11399,9 +11868,9 @@
           <a:p>
             <a:pPr algn="l">
               <a:spcAft>
-                <a:spcPts val="1560"/>
-              </a:spcAft>
-              <a:defRPr sz="1300" b="0">
+                <a:spcPts val="1264"/>
+              </a:spcAft>
+              <a:defRPr sz="1100" b="0">
                 <a:solidFill>
                   <a:srgbClr val="B0B0C0"/>
                 </a:solidFill>
@@ -11415,9 +11884,9 @@
           <a:p>
             <a:pPr algn="l">
               <a:spcAft>
-                <a:spcPts val="1560"/>
-              </a:spcAft>
-              <a:defRPr sz="1300" b="0">
+                <a:spcPts val="1264"/>
+              </a:spcAft>
+              <a:defRPr sz="1100" b="0">
                 <a:solidFill>
                   <a:srgbClr val="B0B0C0"/>
                 </a:solidFill>
@@ -11431,9 +11900,9 @@
           <a:p>
             <a:pPr algn="l">
               <a:spcAft>
-                <a:spcPts val="1560"/>
-              </a:spcAft>
-              <a:defRPr sz="1300" b="0">
+                <a:spcPts val="1264"/>
+              </a:spcAft>
+              <a:defRPr sz="1100" b="0">
                 <a:solidFill>
                   <a:srgbClr val="B0B0C0"/>
                 </a:solidFill>
@@ -11454,11 +11923,13 @@
         </p:nvSpPr>
         <p:spPr>
           <a:xfrm>
-            <a:off x="3749039" y="4114800"/>
-            <a:ext cx="2926080" cy="2286000"/>
+            <a:off x="3657600" y="3931920"/>
+            <a:ext cx="2834640" cy="2194560"/>
           </a:xfrm>
           <a:prstGeom prst="roundRect">
-            <a:avLst/>
+            <a:avLst>
+              <a:gd name="adj" fmla="val 8000"/>
+            </a:avLst>
           </a:prstGeom>
           <a:solidFill>
             <a:srgbClr val="14141C"/>
@@ -11497,8 +11968,8 @@
         </p:nvSpPr>
         <p:spPr>
           <a:xfrm>
-            <a:off x="3749039" y="4114800"/>
-            <a:ext cx="2926080" cy="45720"/>
+            <a:off x="3657600" y="3931920"/>
+            <a:ext cx="2834640" cy="45720"/>
           </a:xfrm>
           <a:prstGeom prst="rect">
             <a:avLst/>
@@ -11540,8 +12011,8 @@
         </p:nvSpPr>
         <p:spPr>
           <a:xfrm>
-            <a:off x="3977639" y="4251960"/>
-            <a:ext cx="2468880" cy="365760"/>
+            <a:off x="3840480" y="4041648"/>
+            <a:ext cx="2468880" cy="320040"/>
           </a:xfrm>
           <a:prstGeom prst="rect">
             <a:avLst/>
@@ -11555,7 +12026,7 @@
           <a:lstStyle/>
           <a:p>
             <a:pPr algn="l">
-              <a:defRPr sz="1600" b="1">
+              <a:defRPr sz="1400" b="1">
                 <a:solidFill>
                   <a:srgbClr val="EF4444"/>
                 </a:solidFill>
@@ -11576,7 +12047,7 @@
         </p:nvSpPr>
         <p:spPr>
           <a:xfrm>
-            <a:off x="3977639" y="4663440"/>
+            <a:off x="3840480" y="4389120"/>
             <a:ext cx="2468880" cy="1645920"/>
           </a:xfrm>
           <a:prstGeom prst="rect">
@@ -11592,9 +12063,9 @@
           <a:p>
             <a:pPr algn="l">
               <a:spcAft>
-                <a:spcPts val="1560"/>
-              </a:spcAft>
-              <a:defRPr sz="1300" b="0">
+                <a:spcPts val="1264"/>
+              </a:spcAft>
+              <a:defRPr sz="1100" b="0">
                 <a:solidFill>
                   <a:srgbClr val="B0B0C0"/>
                 </a:solidFill>
@@ -11608,9 +12079,9 @@
           <a:p>
             <a:pPr algn="l">
               <a:spcAft>
-                <a:spcPts val="1560"/>
-              </a:spcAft>
-              <a:defRPr sz="1300" b="0">
+                <a:spcPts val="1264"/>
+              </a:spcAft>
+              <a:defRPr sz="1100" b="0">
                 <a:solidFill>
                   <a:srgbClr val="B0B0C0"/>
                 </a:solidFill>
@@ -11624,25 +12095,25 @@
           <a:p>
             <a:pPr algn="l">
               <a:spcAft>
-                <a:spcPts val="1560"/>
-              </a:spcAft>
-              <a:defRPr sz="1300" b="0">
-                <a:solidFill>
-                  <a:srgbClr val="B0B0C0"/>
-                </a:solidFill>
-                <a:latin typeface="Segoe UI"/>
-              </a:defRPr>
-            </a:pPr>
-            <a:r>
-              <a:t>AI responds in user language</a:t>
-            </a:r>
-          </a:p>
-          <a:p>
-            <a:pPr algn="l">
-              <a:spcAft>
-                <a:spcPts val="1560"/>
-              </a:spcAft>
-              <a:defRPr sz="1300" b="0">
+                <a:spcPts val="1264"/>
+              </a:spcAft>
+              <a:defRPr sz="1100" b="0">
+                <a:solidFill>
+                  <a:srgbClr val="B0B0C0"/>
+                </a:solidFill>
+                <a:latin typeface="Segoe UI"/>
+              </a:defRPr>
+            </a:pPr>
+            <a:r>
+              <a:t>AI in user language</a:t>
+            </a:r>
+          </a:p>
+          <a:p>
+            <a:pPr algn="l">
+              <a:spcAft>
+                <a:spcPts val="1264"/>
+              </a:spcAft>
+              <a:defRPr sz="1100" b="0">
                 <a:solidFill>
                   <a:srgbClr val="B0B0C0"/>
                 </a:solidFill>
@@ -11663,11 +12134,13 @@
         </p:nvSpPr>
         <p:spPr>
           <a:xfrm>
-            <a:off x="6949440" y="4114800"/>
-            <a:ext cx="2926080" cy="2286000"/>
+            <a:off x="6858000" y="3931920"/>
+            <a:ext cx="2834640" cy="2194560"/>
           </a:xfrm>
           <a:prstGeom prst="roundRect">
-            <a:avLst/>
+            <a:avLst>
+              <a:gd name="adj" fmla="val 8000"/>
+            </a:avLst>
           </a:prstGeom>
           <a:solidFill>
             <a:srgbClr val="14141C"/>
@@ -11706,8 +12179,8 @@
         </p:nvSpPr>
         <p:spPr>
           <a:xfrm>
-            <a:off x="6949440" y="4114800"/>
-            <a:ext cx="2926080" cy="45720"/>
+            <a:off x="6858000" y="3931920"/>
+            <a:ext cx="2834640" cy="45720"/>
           </a:xfrm>
           <a:prstGeom prst="rect">
             <a:avLst/>
@@ -11749,8 +12222,8 @@
         </p:nvSpPr>
         <p:spPr>
           <a:xfrm>
-            <a:off x="7178040" y="4251960"/>
-            <a:ext cx="2468880" cy="365760"/>
+            <a:off x="7040880" y="4041648"/>
+            <a:ext cx="2468880" cy="320040"/>
           </a:xfrm>
           <a:prstGeom prst="rect">
             <a:avLst/>
@@ -11764,7 +12237,7 @@
           <a:lstStyle/>
           <a:p>
             <a:pPr algn="l">
-              <a:defRPr sz="1600" b="1">
+              <a:defRPr sz="1400" b="1">
                 <a:solidFill>
                   <a:srgbClr val="F97316"/>
                 </a:solidFill>
@@ -11785,7 +12258,7 @@
         </p:nvSpPr>
         <p:spPr>
           <a:xfrm>
-            <a:off x="7178040" y="4663440"/>
+            <a:off x="7040880" y="4389120"/>
             <a:ext cx="2468880" cy="1645920"/>
           </a:xfrm>
           <a:prstGeom prst="rect">
@@ -11801,9 +12274,9 @@
           <a:p>
             <a:pPr algn="l">
               <a:spcAft>
-                <a:spcPts val="1560"/>
-              </a:spcAft>
-              <a:defRPr sz="1300" b="0">
+                <a:spcPts val="1264"/>
+              </a:spcAft>
+              <a:defRPr sz="1100" b="0">
                 <a:solidFill>
                   <a:srgbClr val="B0B0C0"/>
                 </a:solidFill>
@@ -11817,25 +12290,25 @@
           <a:p>
             <a:pPr algn="l">
               <a:spcAft>
-                <a:spcPts val="1560"/>
-              </a:spcAft>
-              <a:defRPr sz="1300" b="0">
-                <a:solidFill>
-                  <a:srgbClr val="B0B0C0"/>
-                </a:solidFill>
-                <a:latin typeface="Segoe UI"/>
-              </a:defRPr>
-            </a:pPr>
-            <a:r>
-              <a:t>File uploads</a:t>
-            </a:r>
-          </a:p>
-          <a:p>
-            <a:pPr algn="l">
-              <a:spcAft>
-                <a:spcPts val="1560"/>
-              </a:spcAft>
-              <a:defRPr sz="1300" b="0">
+                <a:spcPts val="1264"/>
+              </a:spcAft>
+              <a:defRPr sz="1100" b="0">
+                <a:solidFill>
+                  <a:srgbClr val="B0B0C0"/>
+                </a:solidFill>
+                <a:latin typeface="Segoe UI"/>
+              </a:defRPr>
+            </a:pPr>
+            <a:r>
+              <a:t>File uploads to storage</a:t>
+            </a:r>
+          </a:p>
+          <a:p>
+            <a:pPr algn="l">
+              <a:spcAft>
+                <a:spcPts val="1264"/>
+              </a:spcAft>
+              <a:defRPr sz="1100" b="0">
                 <a:solidFill>
                   <a:srgbClr val="B0B0C0"/>
                 </a:solidFill>
@@ -11849,9 +12322,9 @@
           <a:p>
             <a:pPr algn="l">
               <a:spcAft>
-                <a:spcPts val="1560"/>
-              </a:spcAft>
-              <a:defRPr sz="1300" b="0">
+                <a:spcPts val="1264"/>
+              </a:spcAft>
+              <a:defRPr sz="1100" b="0">
                 <a:solidFill>
                   <a:srgbClr val="B0B0C0"/>
                 </a:solidFill>
@@ -11872,11 +12345,13 @@
         </p:nvSpPr>
         <p:spPr>
           <a:xfrm>
-            <a:off x="10149840" y="4114800"/>
-            <a:ext cx="2926080" cy="2286000"/>
+            <a:off x="10058400" y="3931920"/>
+            <a:ext cx="2834640" cy="2194560"/>
           </a:xfrm>
           <a:prstGeom prst="roundRect">
-            <a:avLst/>
+            <a:avLst>
+              <a:gd name="adj" fmla="val 8000"/>
+            </a:avLst>
           </a:prstGeom>
           <a:solidFill>
             <a:srgbClr val="14141C"/>
@@ -11915,8 +12390,8 @@
         </p:nvSpPr>
         <p:spPr>
           <a:xfrm>
-            <a:off x="10149840" y="4114800"/>
-            <a:ext cx="2926080" cy="45720"/>
+            <a:off x="10058400" y="3931920"/>
+            <a:ext cx="2834640" cy="45720"/>
           </a:xfrm>
           <a:prstGeom prst="rect">
             <a:avLst/>
@@ -11958,8 +12433,8 @@
         </p:nvSpPr>
         <p:spPr>
           <a:xfrm>
-            <a:off x="10378440" y="4251960"/>
-            <a:ext cx="2468880" cy="365760"/>
+            <a:off x="10241280" y="4041648"/>
+            <a:ext cx="2468880" cy="320040"/>
           </a:xfrm>
           <a:prstGeom prst="rect">
             <a:avLst/>
@@ -11973,7 +12448,7 @@
           <a:lstStyle/>
           <a:p>
             <a:pPr algn="l">
-              <a:defRPr sz="1600" b="1">
+              <a:defRPr sz="1400" b="1">
                 <a:solidFill>
                   <a:srgbClr val="1E3A8A"/>
                 </a:solidFill>
@@ -11994,7 +12469,7 @@
         </p:nvSpPr>
         <p:spPr>
           <a:xfrm>
-            <a:off x="10378440" y="4663440"/>
+            <a:off x="10241280" y="4389120"/>
             <a:ext cx="2468880" cy="1645920"/>
           </a:xfrm>
           <a:prstGeom prst="rect">
@@ -12010,41 +12485,25 @@
           <a:p>
             <a:pPr algn="l">
               <a:spcAft>
-                <a:spcPts val="1560"/>
-              </a:spcAft>
-              <a:defRPr sz="1300" b="0">
-                <a:solidFill>
-                  <a:srgbClr val="B0B0C0"/>
-                </a:solidFill>
-                <a:latin typeface="Segoe UI"/>
-              </a:defRPr>
-            </a:pPr>
-            <a:r>
-              <a:t>Subject search</a:t>
-            </a:r>
-          </a:p>
-          <a:p>
-            <a:pPr algn="l">
-              <a:spcAft>
-                <a:spcPts val="1560"/>
-              </a:spcAft>
-              <a:defRPr sz="1300" b="0">
-                <a:solidFill>
-                  <a:srgbClr val="B0B0C0"/>
-                </a:solidFill>
-                <a:latin typeface="Segoe UI"/>
-              </a:defRPr>
-            </a:pPr>
-            <a:r>
-              <a:t>Note search</a:t>
-            </a:r>
-          </a:p>
-          <a:p>
-            <a:pPr algn="l">
-              <a:spcAft>
-                <a:spcPts val="1560"/>
-              </a:spcAft>
-              <a:defRPr sz="1300" b="0">
+                <a:spcPts val="1264"/>
+              </a:spcAft>
+              <a:defRPr sz="1100" b="0">
+                <a:solidFill>
+                  <a:srgbClr val="B0B0C0"/>
+                </a:solidFill>
+                <a:latin typeface="Segoe UI"/>
+              </a:defRPr>
+            </a:pPr>
+            <a:r>
+              <a:t>Subject + note search</a:t>
+            </a:r>
+          </a:p>
+          <a:p>
+            <a:pPr algn="l">
+              <a:spcAft>
+                <a:spcPts val="1264"/>
+              </a:spcAft>
+              <a:defRPr sz="1100" b="0">
                 <a:solidFill>
                   <a:srgbClr val="B0B0C0"/>
                 </a:solidFill>
@@ -12058,9 +12517,9 @@
           <a:p>
             <a:pPr algn="l">
               <a:spcAft>
-                <a:spcPts val="1560"/>
-              </a:spcAft>
-              <a:defRPr sz="1300" b="0">
+                <a:spcPts val="1264"/>
+              </a:spcAft>
+              <a:defRPr sz="1100" b="0">
                 <a:solidFill>
                   <a:srgbClr val="B0B0C0"/>
                 </a:solidFill>
@@ -12069,6 +12528,22 @@
             </a:pPr>
             <a:r>
               <a:t>Type badges</a:t>
+            </a:r>
+          </a:p>
+          <a:p>
+            <a:pPr algn="l">
+              <a:spcAft>
+                <a:spcPts val="1264"/>
+              </a:spcAft>
+              <a:defRPr sz="1100" b="0">
+                <a:solidFill>
+                  <a:srgbClr val="B0B0C0"/>
+                </a:solidFill>
+                <a:latin typeface="Segoe UI"/>
+              </a:defRPr>
+            </a:pPr>
+            <a:r>
+              <a:t>View / download</a:t>
             </a:r>
           </a:p>
         </p:txBody>
@@ -12081,8 +12556,8 @@
         </p:nvSpPr>
         <p:spPr>
           <a:xfrm>
-            <a:off x="731520" y="6400800"/>
-            <a:ext cx="7315200" cy="365760"/>
+            <a:off x="731520" y="6446520"/>
+            <a:ext cx="7315200" cy="320040"/>
           </a:xfrm>
           <a:prstGeom prst="rect">
             <a:avLst/>
@@ -12096,7 +12571,7 @@
           <a:lstStyle/>
           <a:p>
             <a:pPr algn="l">
-              <a:defRPr sz="1100" b="0">
+              <a:defRPr sz="1000" b="0">
                 <a:solidFill>
                   <a:srgbClr val="707080"/>
                 </a:solidFill>
@@ -12150,7 +12625,7 @@
             <a:avLst/>
           </a:prstGeom>
           <a:solidFill>
-            <a:srgbClr val="F97316"/>
+            <a:srgbClr val="14B8A6"/>
           </a:solidFill>
           <a:ln>
             <a:noFill/>
@@ -12201,7 +12676,7 @@
           <a:lstStyle/>
           <a:p>
             <a:pPr algn="l">
-              <a:defRPr sz="3000" b="1">
+              <a:defRPr sz="2800" b="1">
                 <a:solidFill>
                   <a:srgbClr val="FFFFFF"/>
                 </a:solidFill>
@@ -12209,7 +12684,7 @@
               </a:defRPr>
             </a:pPr>
             <a:r>
-              <a:t>AI Chatbot</a:t>
+              <a:t>AI Chatbot — All Engineering Branches</a:t>
             </a:r>
           </a:p>
         </p:txBody>
@@ -12222,7 +12697,7 @@
         </p:nvSpPr>
         <p:spPr>
           <a:xfrm>
-            <a:off x="731520" y="914400"/>
+            <a:off x="731520" y="868680"/>
             <a:ext cx="10058400" cy="457200"/>
           </a:xfrm>
           <a:prstGeom prst="rect">
@@ -12237,15 +12712,15 @@
           <a:lstStyle/>
           <a:p>
             <a:pPr algn="l">
-              <a:defRPr sz="1500" b="0">
-                <a:solidFill>
-                  <a:srgbClr val="B0B0C0"/>
-                </a:solidFill>
-                <a:latin typeface="Segoe UI"/>
-              </a:defRPr>
-            </a:pPr>
-            <a:r>
-              <a:t>Powered by Google Gemini 2.5 Flash — covers ALL engineering branches</a:t>
+              <a:defRPr sz="1400" b="0">
+                <a:solidFill>
+                  <a:srgbClr val="B0B0C0"/>
+                </a:solidFill>
+                <a:latin typeface="Segoe UI"/>
+              </a:defRPr>
+            </a:pPr>
+            <a:r>
+              <a:t>Powered by Google Gemini 2.5 Flash</a:t>
             </a:r>
           </a:p>
         </p:txBody>
@@ -12258,8 +12733,8 @@
         </p:nvSpPr>
         <p:spPr>
           <a:xfrm>
-            <a:off x="11155680" y="365760"/>
-            <a:ext cx="731520" cy="457200"/>
+            <a:off x="11247120" y="365760"/>
+            <a:ext cx="640080" cy="365760"/>
           </a:xfrm>
           <a:prstGeom prst="rect">
             <a:avLst/>
@@ -12273,7 +12748,7 @@
           <a:lstStyle/>
           <a:p>
             <a:pPr algn="r">
-              <a:defRPr sz="1400" b="0">
+              <a:defRPr sz="1300" b="0">
                 <a:solidFill>
                   <a:srgbClr val="707080"/>
                 </a:solidFill>
@@ -12294,14 +12769,14 @@
         </p:nvSpPr>
         <p:spPr>
           <a:xfrm>
-            <a:off x="731520" y="1325880"/>
+            <a:off x="731520" y="1234440"/>
             <a:ext cx="10698480" cy="19050"/>
           </a:xfrm>
           <a:prstGeom prst="rect">
             <a:avLst/>
           </a:prstGeom>
           <a:solidFill>
-            <a:srgbClr val="333344"/>
+            <a:srgbClr val="303040"/>
           </a:solidFill>
           <a:ln>
             <a:noFill/>
@@ -12337,11 +12812,13 @@
         </p:nvSpPr>
         <p:spPr>
           <a:xfrm>
-            <a:off x="548640" y="1645920"/>
-            <a:ext cx="3200400" cy="2286000"/>
+            <a:off x="457200" y="1554480"/>
+            <a:ext cx="3108960" cy="2194560"/>
           </a:xfrm>
           <a:prstGeom prst="roundRect">
-            <a:avLst/>
+            <a:avLst>
+              <a:gd name="adj" fmla="val 8000"/>
+            </a:avLst>
           </a:prstGeom>
           <a:solidFill>
             <a:srgbClr val="14141C"/>
@@ -12380,8 +12857,8 @@
         </p:nvSpPr>
         <p:spPr>
           <a:xfrm>
-            <a:off x="548640" y="1645920"/>
-            <a:ext cx="3200400" cy="45720"/>
+            <a:off x="457200" y="1554480"/>
+            <a:ext cx="3108960" cy="45720"/>
           </a:xfrm>
           <a:prstGeom prst="rect">
             <a:avLst/>
@@ -12423,8 +12900,8 @@
         </p:nvSpPr>
         <p:spPr>
           <a:xfrm>
-            <a:off x="777240" y="1783080"/>
-            <a:ext cx="2743200" cy="365760"/>
+            <a:off x="640080" y="1664208"/>
+            <a:ext cx="2743200" cy="320040"/>
           </a:xfrm>
           <a:prstGeom prst="rect">
             <a:avLst/>
@@ -12438,7 +12915,7 @@
           <a:lstStyle/>
           <a:p>
             <a:pPr algn="l">
-              <a:defRPr sz="1400" b="1">
+              <a:defRPr sz="1300" b="1">
                 <a:solidFill>
                   <a:srgbClr val="F97316"/>
                 </a:solidFill>
@@ -12459,7 +12936,7 @@
         </p:nvSpPr>
         <p:spPr>
           <a:xfrm>
-            <a:off x="777240" y="2194560"/>
+            <a:off x="640080" y="2011680"/>
             <a:ext cx="2743200" cy="1645920"/>
           </a:xfrm>
           <a:prstGeom prst="rect">
@@ -12475,9 +12952,9 @@
           <a:p>
             <a:pPr algn="l">
               <a:spcAft>
-                <a:spcPts val="1439"/>
-              </a:spcAft>
-              <a:defRPr sz="1200" b="0">
+                <a:spcPts val="1264"/>
+              </a:spcAft>
+              <a:defRPr sz="1100" b="0">
                 <a:solidFill>
                   <a:srgbClr val="B0B0C0"/>
                 </a:solidFill>
@@ -12491,9 +12968,9 @@
           <a:p>
             <a:pPr algn="l">
               <a:spcAft>
-                <a:spcPts val="1439"/>
-              </a:spcAft>
-              <a:defRPr sz="1200" b="0">
+                <a:spcPts val="1264"/>
+              </a:spcAft>
+              <a:defRPr sz="1100" b="0">
                 <a:solidFill>
                   <a:srgbClr val="B0B0C0"/>
                 </a:solidFill>
@@ -12507,9 +12984,9 @@
           <a:p>
             <a:pPr algn="l">
               <a:spcAft>
-                <a:spcPts val="1439"/>
-              </a:spcAft>
-              <a:defRPr sz="1200" b="0">
+                <a:spcPts val="1264"/>
+              </a:spcAft>
+              <a:defRPr sz="1100" b="0">
                 <a:solidFill>
                   <a:srgbClr val="B0B0C0"/>
                 </a:solidFill>
@@ -12523,17 +13000,17 @@
           <a:p>
             <a:pPr algn="l">
               <a:spcAft>
-                <a:spcPts val="1439"/>
-              </a:spcAft>
-              <a:defRPr sz="1200" b="0">
-                <a:solidFill>
-                  <a:srgbClr val="B0B0C0"/>
-                </a:solidFill>
-                <a:latin typeface="Segoe UI"/>
-              </a:defRPr>
-            </a:pPr>
-            <a:r>
-              <a:t>Web Tech, Cloud</a:t>
+                <a:spcPts val="1264"/>
+              </a:spcAft>
+              <a:defRPr sz="1100" b="0">
+                <a:solidFill>
+                  <a:srgbClr val="B0B0C0"/>
+                </a:solidFill>
+                <a:latin typeface="Segoe UI"/>
+              </a:defRPr>
+            </a:pPr>
+            <a:r>
+              <a:t>Web Tech, Cloud, Security</a:t>
             </a:r>
           </a:p>
         </p:txBody>
@@ -12546,11 +13023,13 @@
         </p:nvSpPr>
         <p:spPr>
           <a:xfrm>
-            <a:off x="3749039" y="1645920"/>
-            <a:ext cx="3200400" cy="2286000"/>
+            <a:off x="3657600" y="1554480"/>
+            <a:ext cx="3108960" cy="2194560"/>
           </a:xfrm>
           <a:prstGeom prst="roundRect">
-            <a:avLst/>
+            <a:avLst>
+              <a:gd name="adj" fmla="val 8000"/>
+            </a:avLst>
           </a:prstGeom>
           <a:solidFill>
             <a:srgbClr val="14141C"/>
@@ -12589,8 +13068,8 @@
         </p:nvSpPr>
         <p:spPr>
           <a:xfrm>
-            <a:off x="3749039" y="1645920"/>
-            <a:ext cx="3200400" cy="45720"/>
+            <a:off x="3657600" y="1554480"/>
+            <a:ext cx="3108960" cy="45720"/>
           </a:xfrm>
           <a:prstGeom prst="rect">
             <a:avLst/>
@@ -12632,8 +13111,8 @@
         </p:nvSpPr>
         <p:spPr>
           <a:xfrm>
-            <a:off x="3977639" y="1783080"/>
-            <a:ext cx="2743200" cy="365760"/>
+            <a:off x="3840480" y="1664208"/>
+            <a:ext cx="2743200" cy="320040"/>
           </a:xfrm>
           <a:prstGeom prst="rect">
             <a:avLst/>
@@ -12647,7 +13126,7 @@
           <a:lstStyle/>
           <a:p>
             <a:pPr algn="l">
-              <a:defRPr sz="1400" b="1">
+              <a:defRPr sz="1300" b="1">
                 <a:solidFill>
                   <a:srgbClr val="1E3A8A"/>
                 </a:solidFill>
@@ -12668,7 +13147,7 @@
         </p:nvSpPr>
         <p:spPr>
           <a:xfrm>
-            <a:off x="3977639" y="2194560"/>
+            <a:off x="3840480" y="2011680"/>
             <a:ext cx="2743200" cy="1645920"/>
           </a:xfrm>
           <a:prstGeom prst="rect">
@@ -12684,9 +13163,9 @@
           <a:p>
             <a:pPr algn="l">
               <a:spcAft>
-                <a:spcPts val="1439"/>
-              </a:spcAft>
-              <a:defRPr sz="1200" b="0">
+                <a:spcPts val="1264"/>
+              </a:spcAft>
+              <a:defRPr sz="1100" b="0">
                 <a:solidFill>
                   <a:srgbClr val="B0B0C0"/>
                 </a:solidFill>
@@ -12700,9 +13179,9 @@
           <a:p>
             <a:pPr algn="l">
               <a:spcAft>
-                <a:spcPts val="1439"/>
-              </a:spcAft>
-              <a:defRPr sz="1200" b="0">
+                <a:spcPts val="1264"/>
+              </a:spcAft>
+              <a:defRPr sz="1100" b="0">
                 <a:solidFill>
                   <a:srgbClr val="B0B0C0"/>
                 </a:solidFill>
@@ -12716,9 +13195,9 @@
           <a:p>
             <a:pPr algn="l">
               <a:spcAft>
-                <a:spcPts val="1439"/>
-              </a:spcAft>
-              <a:defRPr sz="1200" b="0">
+                <a:spcPts val="1264"/>
+              </a:spcAft>
+              <a:defRPr sz="1100" b="0">
                 <a:solidFill>
                   <a:srgbClr val="B0B0C0"/>
                 </a:solidFill>
@@ -12732,17 +13211,17 @@
           <a:p>
             <a:pPr algn="l">
               <a:spcAft>
-                <a:spcPts val="1439"/>
-              </a:spcAft>
-              <a:defRPr sz="1200" b="0">
-                <a:solidFill>
-                  <a:srgbClr val="B0B0C0"/>
-                </a:solidFill>
-                <a:latin typeface="Segoe UI"/>
-              </a:defRPr>
-            </a:pPr>
-            <a:r>
-              <a:t>Transportation</a:t>
+                <a:spcPts val="1264"/>
+              </a:spcAft>
+              <a:defRPr sz="1100" b="0">
+                <a:solidFill>
+                  <a:srgbClr val="B0B0C0"/>
+                </a:solidFill>
+                <a:latin typeface="Segoe UI"/>
+              </a:defRPr>
+            </a:pPr>
+            <a:r>
+              <a:t>Transportation, Hydrology</a:t>
             </a:r>
           </a:p>
         </p:txBody>
@@ -12755,11 +13234,13 @@
         </p:nvSpPr>
         <p:spPr>
           <a:xfrm>
-            <a:off x="6949440" y="1645920"/>
-            <a:ext cx="3200400" cy="2286000"/>
+            <a:off x="6858000" y="1554480"/>
+            <a:ext cx="3108960" cy="2194560"/>
           </a:xfrm>
           <a:prstGeom prst="roundRect">
-            <a:avLst/>
+            <a:avLst>
+              <a:gd name="adj" fmla="val 8000"/>
+            </a:avLst>
           </a:prstGeom>
           <a:solidFill>
             <a:srgbClr val="14141C"/>
@@ -12798,8 +13279,8 @@
         </p:nvSpPr>
         <p:spPr>
           <a:xfrm>
-            <a:off x="6949440" y="1645920"/>
-            <a:ext cx="3200400" cy="45720"/>
+            <a:off x="6858000" y="1554480"/>
+            <a:ext cx="3108960" cy="45720"/>
           </a:xfrm>
           <a:prstGeom prst="rect">
             <a:avLst/>
@@ -12841,8 +13322,8 @@
         </p:nvSpPr>
         <p:spPr>
           <a:xfrm>
-            <a:off x="7178040" y="1783080"/>
-            <a:ext cx="2743200" cy="365760"/>
+            <a:off x="7040880" y="1664208"/>
+            <a:ext cx="2743200" cy="320040"/>
           </a:xfrm>
           <a:prstGeom prst="rect">
             <a:avLst/>
@@ -12856,7 +13337,7 @@
           <a:lstStyle/>
           <a:p>
             <a:pPr algn="l">
-              <a:defRPr sz="1400" b="1">
+              <a:defRPr sz="1300" b="1">
                 <a:solidFill>
                   <a:srgbClr val="22C55E"/>
                 </a:solidFill>
@@ -12877,7 +13358,7 @@
         </p:nvSpPr>
         <p:spPr>
           <a:xfrm>
-            <a:off x="7178040" y="2194560"/>
+            <a:off x="7040880" y="2011680"/>
             <a:ext cx="2743200" cy="1645920"/>
           </a:xfrm>
           <a:prstGeom prst="rect">
@@ -12893,9 +13374,9 @@
           <a:p>
             <a:pPr algn="l">
               <a:spcAft>
-                <a:spcPts val="1439"/>
-              </a:spcAft>
-              <a:defRPr sz="1200" b="0">
+                <a:spcPts val="1264"/>
+              </a:spcAft>
+              <a:defRPr sz="1100" b="0">
                 <a:solidFill>
                   <a:srgbClr val="B0B0C0"/>
                 </a:solidFill>
@@ -12909,9 +13390,9 @@
           <a:p>
             <a:pPr algn="l">
               <a:spcAft>
-                <a:spcPts val="1439"/>
-              </a:spcAft>
-              <a:defRPr sz="1200" b="0">
+                <a:spcPts val="1264"/>
+              </a:spcAft>
+              <a:defRPr sz="1100" b="0">
                 <a:solidFill>
                   <a:srgbClr val="B0B0C0"/>
                 </a:solidFill>
@@ -12925,9 +13406,9 @@
           <a:p>
             <a:pPr algn="l">
               <a:spcAft>
-                <a:spcPts val="1439"/>
-              </a:spcAft>
-              <a:defRPr sz="1200" b="0">
+                <a:spcPts val="1264"/>
+              </a:spcAft>
+              <a:defRPr sz="1100" b="0">
                 <a:solidFill>
                   <a:srgbClr val="B0B0C0"/>
                 </a:solidFill>
@@ -12941,17 +13422,17 @@
           <a:p>
             <a:pPr algn="l">
               <a:spcAft>
-                <a:spcPts val="1439"/>
-              </a:spcAft>
-              <a:defRPr sz="1200" b="0">
-                <a:solidFill>
-                  <a:srgbClr val="B0B0C0"/>
-                </a:solidFill>
-                <a:latin typeface="Segoe UI"/>
-              </a:defRPr>
-            </a:pPr>
-            <a:r>
-              <a:t>Power Electronics</a:t>
+                <a:spcPts val="1264"/>
+              </a:spcAft>
+              <a:defRPr sz="1100" b="0">
+                <a:solidFill>
+                  <a:srgbClr val="B0B0C0"/>
+                </a:solidFill>
+                <a:latin typeface="Segoe UI"/>
+              </a:defRPr>
+            </a:pPr>
+            <a:r>
+              <a:t>Power Electronics, Drives</a:t>
             </a:r>
           </a:p>
         </p:txBody>
@@ -12964,11 +13445,13 @@
         </p:nvSpPr>
         <p:spPr>
           <a:xfrm>
-            <a:off x="10149840" y="1645920"/>
-            <a:ext cx="3200400" cy="2286000"/>
+            <a:off x="10058400" y="1554480"/>
+            <a:ext cx="3108960" cy="2194560"/>
           </a:xfrm>
           <a:prstGeom prst="roundRect">
-            <a:avLst/>
+            <a:avLst>
+              <a:gd name="adj" fmla="val 8000"/>
+            </a:avLst>
           </a:prstGeom>
           <a:solidFill>
             <a:srgbClr val="14141C"/>
@@ -13007,8 +13490,8 @@
         </p:nvSpPr>
         <p:spPr>
           <a:xfrm>
-            <a:off x="10149840" y="1645920"/>
-            <a:ext cx="3200400" cy="45720"/>
+            <a:off x="10058400" y="1554480"/>
+            <a:ext cx="3108960" cy="45720"/>
           </a:xfrm>
           <a:prstGeom prst="rect">
             <a:avLst/>
@@ -13050,8 +13533,8 @@
         </p:nvSpPr>
         <p:spPr>
           <a:xfrm>
-            <a:off x="10378440" y="1783080"/>
-            <a:ext cx="2743200" cy="365760"/>
+            <a:off x="10241280" y="1664208"/>
+            <a:ext cx="2743200" cy="320040"/>
           </a:xfrm>
           <a:prstGeom prst="rect">
             <a:avLst/>
@@ -13065,7 +13548,7 @@
           <a:lstStyle/>
           <a:p>
             <a:pPr algn="l">
-              <a:defRPr sz="1400" b="1">
+              <a:defRPr sz="1300" b="1">
                 <a:solidFill>
                   <a:srgbClr val="A855F7"/>
                 </a:solidFill>
@@ -13086,7 +13569,7 @@
         </p:nvSpPr>
         <p:spPr>
           <a:xfrm>
-            <a:off x="10378440" y="2194560"/>
+            <a:off x="10241280" y="2011680"/>
             <a:ext cx="2743200" cy="1645920"/>
           </a:xfrm>
           <a:prstGeom prst="rect">
@@ -13102,9 +13585,9 @@
           <a:p>
             <a:pPr algn="l">
               <a:spcAft>
-                <a:spcPts val="1439"/>
-              </a:spcAft>
-              <a:defRPr sz="1200" b="0">
+                <a:spcPts val="1264"/>
+              </a:spcAft>
+              <a:defRPr sz="1100" b="0">
                 <a:solidFill>
                   <a:srgbClr val="B0B0C0"/>
                 </a:solidFill>
@@ -13118,9 +13601,9 @@
           <a:p>
             <a:pPr algn="l">
               <a:spcAft>
-                <a:spcPts val="1439"/>
-              </a:spcAft>
-              <a:defRPr sz="1200" b="0">
+                <a:spcPts val="1264"/>
+              </a:spcAft>
+              <a:defRPr sz="1100" b="0">
                 <a:solidFill>
                   <a:srgbClr val="B0B0C0"/>
                 </a:solidFill>
@@ -13134,9 +13617,9 @@
           <a:p>
             <a:pPr algn="l">
               <a:spcAft>
-                <a:spcPts val="1439"/>
-              </a:spcAft>
-              <a:defRPr sz="1200" b="0">
+                <a:spcPts val="1264"/>
+              </a:spcAft>
+              <a:defRPr sz="1100" b="0">
                 <a:solidFill>
                   <a:srgbClr val="B0B0C0"/>
                 </a:solidFill>
@@ -13150,9 +13633,9 @@
           <a:p>
             <a:pPr algn="l">
               <a:spcAft>
-                <a:spcPts val="1439"/>
-              </a:spcAft>
-              <a:defRPr sz="1200" b="0">
+                <a:spcPts val="1264"/>
+              </a:spcAft>
+              <a:defRPr sz="1100" b="0">
                 <a:solidFill>
                   <a:srgbClr val="B0B0C0"/>
                 </a:solidFill>
@@ -13173,11 +13656,13 @@
         </p:nvSpPr>
         <p:spPr>
           <a:xfrm>
-            <a:off x="2103120" y="4114800"/>
-            <a:ext cx="3200400" cy="2286000"/>
+            <a:off x="2011680" y="3931920"/>
+            <a:ext cx="3108960" cy="2194560"/>
           </a:xfrm>
           <a:prstGeom prst="roundRect">
-            <a:avLst/>
+            <a:avLst>
+              <a:gd name="adj" fmla="val 8000"/>
+            </a:avLst>
           </a:prstGeom>
           <a:solidFill>
             <a:srgbClr val="14141C"/>
@@ -13216,8 +13701,8 @@
         </p:nvSpPr>
         <p:spPr>
           <a:xfrm>
-            <a:off x="2103120" y="4114800"/>
-            <a:ext cx="3200400" cy="45720"/>
+            <a:off x="2011680" y="3931920"/>
+            <a:ext cx="3108960" cy="45720"/>
           </a:xfrm>
           <a:prstGeom prst="rect">
             <a:avLst/>
@@ -13259,8 +13744,8 @@
         </p:nvSpPr>
         <p:spPr>
           <a:xfrm>
-            <a:off x="2331720" y="4251960"/>
-            <a:ext cx="2743200" cy="365760"/>
+            <a:off x="2194560" y="4041648"/>
+            <a:ext cx="2743200" cy="320040"/>
           </a:xfrm>
           <a:prstGeom prst="rect">
             <a:avLst/>
@@ -13274,7 +13759,7 @@
           <a:lstStyle/>
           <a:p>
             <a:pPr algn="l">
-              <a:defRPr sz="1400" b="1">
+              <a:defRPr sz="1300" b="1">
                 <a:solidFill>
                   <a:srgbClr val="14B8A6"/>
                 </a:solidFill>
@@ -13295,7 +13780,7 @@
         </p:nvSpPr>
         <p:spPr>
           <a:xfrm>
-            <a:off x="2331720" y="4663440"/>
+            <a:off x="2194560" y="4389120"/>
             <a:ext cx="2743200" cy="1645920"/>
           </a:xfrm>
           <a:prstGeom prst="rect">
@@ -13311,9 +13796,9 @@
           <a:p>
             <a:pPr algn="l">
               <a:spcAft>
-                <a:spcPts val="1439"/>
-              </a:spcAft>
-              <a:defRPr sz="1200" b="0">
+                <a:spcPts val="1264"/>
+              </a:spcAft>
+              <a:defRPr sz="1100" b="0">
                 <a:solidFill>
                   <a:srgbClr val="B0B0C0"/>
                 </a:solidFill>
@@ -13327,9 +13812,9 @@
           <a:p>
             <a:pPr algn="l">
               <a:spcAft>
-                <a:spcPts val="1439"/>
-              </a:spcAft>
-              <a:defRPr sz="1200" b="0">
+                <a:spcPts val="1264"/>
+              </a:spcAft>
+              <a:defRPr sz="1100" b="0">
                 <a:solidFill>
                   <a:srgbClr val="B0B0C0"/>
                 </a:solidFill>
@@ -13343,9 +13828,9 @@
           <a:p>
             <a:pPr algn="l">
               <a:spcAft>
-                <a:spcPts val="1439"/>
-              </a:spcAft>
-              <a:defRPr sz="1200" b="0">
+                <a:spcPts val="1264"/>
+              </a:spcAft>
+              <a:defRPr sz="1100" b="0">
                 <a:solidFill>
                   <a:srgbClr val="B0B0C0"/>
                 </a:solidFill>
@@ -13359,9 +13844,9 @@
           <a:p>
             <a:pPr algn="l">
               <a:spcAft>
-                <a:spcPts val="1439"/>
-              </a:spcAft>
-              <a:defRPr sz="1200" b="0">
+                <a:spcPts val="1264"/>
+              </a:spcAft>
+              <a:defRPr sz="1100" b="0">
                 <a:solidFill>
                   <a:srgbClr val="B0B0C0"/>
                 </a:solidFill>
@@ -13382,11 +13867,13 @@
         </p:nvSpPr>
         <p:spPr>
           <a:xfrm>
-            <a:off x="5943600" y="4114800"/>
-            <a:ext cx="3200400" cy="2286000"/>
+            <a:off x="5852160" y="3931920"/>
+            <a:ext cx="3108960" cy="2194560"/>
           </a:xfrm>
           <a:prstGeom prst="roundRect">
-            <a:avLst/>
+            <a:avLst>
+              <a:gd name="adj" fmla="val 8000"/>
+            </a:avLst>
           </a:prstGeom>
           <a:solidFill>
             <a:srgbClr val="14141C"/>
@@ -13425,8 +13912,8 @@
         </p:nvSpPr>
         <p:spPr>
           <a:xfrm>
-            <a:off x="5943600" y="4114800"/>
-            <a:ext cx="3200400" cy="45720"/>
+            <a:off x="5852160" y="3931920"/>
+            <a:ext cx="3108960" cy="45720"/>
           </a:xfrm>
           <a:prstGeom prst="rect">
             <a:avLst/>
@@ -13468,8 +13955,8 @@
         </p:nvSpPr>
         <p:spPr>
           <a:xfrm>
-            <a:off x="6172200" y="4251960"/>
-            <a:ext cx="2743200" cy="365760"/>
+            <a:off x="6035040" y="4041648"/>
+            <a:ext cx="2743200" cy="320040"/>
           </a:xfrm>
           <a:prstGeom prst="rect">
             <a:avLst/>
@@ -13483,7 +13970,7 @@
           <a:lstStyle/>
           <a:p>
             <a:pPr algn="l">
-              <a:defRPr sz="1400" b="1">
+              <a:defRPr sz="1300" b="1">
                 <a:solidFill>
                   <a:srgbClr val="EF4444"/>
                 </a:solidFill>
@@ -13504,7 +13991,7 @@
         </p:nvSpPr>
         <p:spPr>
           <a:xfrm>
-            <a:off x="6172200" y="4663440"/>
+            <a:off x="6035040" y="4389120"/>
             <a:ext cx="2743200" cy="1645920"/>
           </a:xfrm>
           <a:prstGeom prst="rect">
@@ -13520,9 +14007,9 @@
           <a:p>
             <a:pPr algn="l">
               <a:spcAft>
-                <a:spcPts val="1439"/>
-              </a:spcAft>
-              <a:defRPr sz="1200" b="0">
+                <a:spcPts val="1264"/>
+              </a:spcAft>
+              <a:defRPr sz="1100" b="0">
                 <a:solidFill>
                   <a:srgbClr val="B0B0C0"/>
                 </a:solidFill>
@@ -13536,9 +14023,9 @@
           <a:p>
             <a:pPr algn="l">
               <a:spcAft>
-                <a:spcPts val="1439"/>
-              </a:spcAft>
-              <a:defRPr sz="1200" b="0">
+                <a:spcPts val="1264"/>
+              </a:spcAft>
+              <a:defRPr sz="1100" b="0">
                 <a:solidFill>
                   <a:srgbClr val="B0B0C0"/>
                 </a:solidFill>
@@ -13552,9 +14039,9 @@
           <a:p>
             <a:pPr algn="l">
               <a:spcAft>
-                <a:spcPts val="1439"/>
-              </a:spcAft>
-              <a:defRPr sz="1200" b="0">
+                <a:spcPts val="1264"/>
+              </a:spcAft>
+              <a:defRPr sz="1100" b="0">
                 <a:solidFill>
                   <a:srgbClr val="B0B0C0"/>
                 </a:solidFill>
@@ -13568,9 +14055,9 @@
           <a:p>
             <a:pPr algn="l">
               <a:spcAft>
-                <a:spcPts val="1439"/>
-              </a:spcAft>
-              <a:defRPr sz="1200" b="0">
+                <a:spcPts val="1264"/>
+              </a:spcAft>
+              <a:defRPr sz="1100" b="0">
                 <a:solidFill>
                   <a:srgbClr val="B0B0C0"/>
                 </a:solidFill>
@@ -13591,11 +14078,13 @@
         </p:nvSpPr>
         <p:spPr>
           <a:xfrm>
-            <a:off x="9784080" y="4114800"/>
-            <a:ext cx="3200400" cy="2286000"/>
+            <a:off x="9692640" y="3931920"/>
+            <a:ext cx="3108960" cy="2194560"/>
           </a:xfrm>
           <a:prstGeom prst="roundRect">
-            <a:avLst/>
+            <a:avLst>
+              <a:gd name="adj" fmla="val 8000"/>
+            </a:avLst>
           </a:prstGeom>
           <a:solidFill>
             <a:srgbClr val="14141C"/>
@@ -13634,8 +14123,8 @@
         </p:nvSpPr>
         <p:spPr>
           <a:xfrm>
-            <a:off x="9784080" y="4114800"/>
-            <a:ext cx="3200400" cy="45720"/>
+            <a:off x="9692640" y="3931920"/>
+            <a:ext cx="3108960" cy="45720"/>
           </a:xfrm>
           <a:prstGeom prst="rect">
             <a:avLst/>
@@ -13677,8 +14166,8 @@
         </p:nvSpPr>
         <p:spPr>
           <a:xfrm>
-            <a:off x="10012680" y="4251960"/>
-            <a:ext cx="2743200" cy="365760"/>
+            <a:off x="9875520" y="4041648"/>
+            <a:ext cx="2743200" cy="320040"/>
           </a:xfrm>
           <a:prstGeom prst="rect">
             <a:avLst/>
@@ -13692,7 +14181,7 @@
           <a:lstStyle/>
           <a:p>
             <a:pPr algn="l">
-              <a:defRPr sz="1400" b="1">
+              <a:defRPr sz="1300" b="1">
                 <a:solidFill>
                   <a:srgbClr val="F97316"/>
                 </a:solidFill>
@@ -13713,7 +14202,7 @@
         </p:nvSpPr>
         <p:spPr>
           <a:xfrm>
-            <a:off x="10012680" y="4663440"/>
+            <a:off x="9875520" y="4389120"/>
             <a:ext cx="2743200" cy="1645920"/>
           </a:xfrm>
           <a:prstGeom prst="rect">
@@ -13729,9 +14218,9 @@
           <a:p>
             <a:pPr algn="l">
               <a:spcAft>
-                <a:spcPts val="1439"/>
-              </a:spcAft>
-              <a:defRPr sz="1200" b="0">
+                <a:spcPts val="1264"/>
+              </a:spcAft>
+              <a:defRPr sz="1100" b="0">
                 <a:solidFill>
                   <a:srgbClr val="B0B0C0"/>
                 </a:solidFill>
@@ -13745,9 +14234,9 @@
           <a:p>
             <a:pPr algn="l">
               <a:spcAft>
-                <a:spcPts val="1439"/>
-              </a:spcAft>
-              <a:defRPr sz="1200" b="0">
+                <a:spcPts val="1264"/>
+              </a:spcAft>
+              <a:defRPr sz="1100" b="0">
                 <a:solidFill>
                   <a:srgbClr val="B0B0C0"/>
                 </a:solidFill>
@@ -13761,9 +14250,9 @@
           <a:p>
             <a:pPr algn="l">
               <a:spcAft>
-                <a:spcPts val="1439"/>
-              </a:spcAft>
-              <a:defRPr sz="1200" b="0">
+                <a:spcPts val="1264"/>
+              </a:spcAft>
+              <a:defRPr sz="1100" b="0">
                 <a:solidFill>
                   <a:srgbClr val="B0B0C0"/>
                 </a:solidFill>
@@ -13777,9 +14266,9 @@
           <a:p>
             <a:pPr algn="l">
               <a:spcAft>
-                <a:spcPts val="1439"/>
-              </a:spcAft>
-              <a:defRPr sz="1200" b="0">
+                <a:spcPts val="1264"/>
+              </a:spcAft>
+              <a:defRPr sz="1100" b="0">
                 <a:solidFill>
                   <a:srgbClr val="B0B0C0"/>
                 </a:solidFill>
@@ -13800,8 +14289,8 @@
         </p:nvSpPr>
         <p:spPr>
           <a:xfrm>
-            <a:off x="731520" y="6400800"/>
-            <a:ext cx="7315200" cy="365760"/>
+            <a:off x="731520" y="6446520"/>
+            <a:ext cx="7315200" cy="320040"/>
           </a:xfrm>
           <a:prstGeom prst="rect">
             <a:avLst/>
@@ -13815,7 +14304,7 @@
           <a:lstStyle/>
           <a:p>
             <a:pPr algn="l">
-              <a:defRPr sz="1100" b="0">
+              <a:defRPr sz="1000" b="0">
                 <a:solidFill>
                   <a:srgbClr val="707080"/>
                 </a:solidFill>
@@ -13869,7 +14358,7 @@
             <a:avLst/>
           </a:prstGeom>
           <a:solidFill>
-            <a:srgbClr val="F97316"/>
+            <a:srgbClr val="14B8A6"/>
           </a:solidFill>
           <a:ln>
             <a:noFill/>
@@ -13920,7 +14409,7 @@
           <a:lstStyle/>
           <a:p>
             <a:pPr algn="l">
-              <a:defRPr sz="3000" b="1">
+              <a:defRPr sz="2800" b="1">
                 <a:solidFill>
                   <a:srgbClr val="FFFFFF"/>
                 </a:solidFill>
@@ -13928,7 +14417,7 @@
               </a:defRPr>
             </a:pPr>
             <a:r>
-              <a:t>AI Chatbot — Technical</a:t>
+              <a:t>AI Chatbot — How It Works</a:t>
             </a:r>
           </a:p>
         </p:txBody>
@@ -13941,7 +14430,7 @@
         </p:nvSpPr>
         <p:spPr>
           <a:xfrm>
-            <a:off x="731520" y="914400"/>
+            <a:off x="731520" y="868680"/>
             <a:ext cx="10058400" cy="457200"/>
           </a:xfrm>
           <a:prstGeom prst="rect">
@@ -13956,15 +14445,15 @@
           <a:lstStyle/>
           <a:p>
             <a:pPr algn="l">
-              <a:defRPr sz="1500" b="0">
-                <a:solidFill>
-                  <a:srgbClr val="B0B0C0"/>
-                </a:solidFill>
-                <a:latin typeface="Segoe UI"/>
-              </a:defRPr>
-            </a:pPr>
-            <a:r>
-              <a:t>How the chatbot works under the hood</a:t>
+              <a:defRPr sz="1400" b="0">
+                <a:solidFill>
+                  <a:srgbClr val="B0B0C0"/>
+                </a:solidFill>
+                <a:latin typeface="Segoe UI"/>
+              </a:defRPr>
+            </a:pPr>
+            <a:r>
+              <a:t>Technical architecture and capabilities</a:t>
             </a:r>
           </a:p>
         </p:txBody>
@@ -13977,8 +14466,8 @@
         </p:nvSpPr>
         <p:spPr>
           <a:xfrm>
-            <a:off x="11155680" y="365760"/>
-            <a:ext cx="731520" cy="457200"/>
+            <a:off x="11247120" y="365760"/>
+            <a:ext cx="640080" cy="365760"/>
           </a:xfrm>
           <a:prstGeom prst="rect">
             <a:avLst/>
@@ -13992,7 +14481,7 @@
           <a:lstStyle/>
           <a:p>
             <a:pPr algn="r">
-              <a:defRPr sz="1400" b="0">
+              <a:defRPr sz="1300" b="0">
                 <a:solidFill>
                   <a:srgbClr val="707080"/>
                 </a:solidFill>
@@ -14013,14 +14502,14 @@
         </p:nvSpPr>
         <p:spPr>
           <a:xfrm>
-            <a:off x="731520" y="1325880"/>
+            <a:off x="731520" y="1234440"/>
             <a:ext cx="10698480" cy="19050"/>
           </a:xfrm>
           <a:prstGeom prst="rect">
             <a:avLst/>
           </a:prstGeom>
           <a:solidFill>
-            <a:srgbClr val="333344"/>
+            <a:srgbClr val="303040"/>
           </a:solidFill>
           <a:ln>
             <a:noFill/>
@@ -14056,7 +14545,7 @@
         </p:nvSpPr>
         <p:spPr>
           <a:xfrm>
-            <a:off x="731520" y="1645920"/>
+            <a:off x="731520" y="1554480"/>
             <a:ext cx="5029200" cy="365760"/>
           </a:xfrm>
           <a:prstGeom prst="rect">
@@ -14071,7 +14560,7 @@
           <a:lstStyle/>
           <a:p>
             <a:pPr algn="l">
-              <a:defRPr sz="1800" b="1">
+              <a:defRPr sz="1700" b="1">
                 <a:solidFill>
                   <a:srgbClr val="F97316"/>
                 </a:solidFill>
@@ -14092,7 +14581,7 @@
         </p:nvSpPr>
         <p:spPr>
           <a:xfrm>
-            <a:off x="731520" y="2103120"/>
+            <a:off x="731520" y="2011680"/>
             <a:ext cx="5029200" cy="3200400"/>
           </a:xfrm>
           <a:prstGeom prst="rect">
@@ -14106,11 +14595,11 @@
           </a:bodyPr>
           <a:lstStyle/>
           <a:p>
-            <a:pPr algn="l">
-              <a:spcAft>
-                <a:spcPts val="2250"/>
-              </a:spcAft>
-              <a:defRPr sz="1500" b="0">
+            <a:pPr>
+              <a:spcAft>
+                <a:spcPts val="1959"/>
+              </a:spcAft>
+              <a:defRPr sz="1400">
                 <a:solidFill>
                   <a:srgbClr val="FFFFFF"/>
                 </a:solidFill>
@@ -14120,15 +14609,15 @@
               <a:buChar char="▸"/>
             </a:pPr>
             <a:r>
-              <a:t>Multimodal input — PDFs and images sent as base64 to Gemini</a:t>
-            </a:r>
-          </a:p>
-          <a:p>
-            <a:pPr algn="l">
-              <a:spcAft>
-                <a:spcPts val="2250"/>
-              </a:spcAft>
-              <a:defRPr sz="1500" b="0">
+              <a:t>Multimodal — PDFs and images sent as base64 inline_data to Gemini</a:t>
+            </a:r>
+          </a:p>
+          <a:p>
+            <a:pPr>
+              <a:spcAft>
+                <a:spcPts val="1959"/>
+              </a:spcAft>
+              <a:defRPr sz="1400">
                 <a:solidFill>
                   <a:srgbClr val="FFFFFF"/>
                 </a:solidFill>
@@ -14138,15 +14627,15 @@
               <a:buChar char="▸"/>
             </a:pPr>
             <a:r>
-              <a:t>Multi-key rotation with up to 6 API keys for rate limit handling</a:t>
-            </a:r>
-          </a:p>
-          <a:p>
-            <a:pPr algn="l">
-              <a:spcAft>
-                <a:spcPts val="2250"/>
-              </a:spcAft>
-              <a:defRPr sz="1500" b="0">
+              <a:t>Multi-key rotation with up to 6 API keys for rate-limit handling</a:t>
+            </a:r>
+          </a:p>
+          <a:p>
+            <a:pPr>
+              <a:spcAft>
+                <a:spcPts val="1959"/>
+              </a:spcAft>
+              <a:defRPr sz="1400">
                 <a:solidFill>
                   <a:srgbClr val="FFFFFF"/>
                 </a:solidFill>
@@ -14160,11 +14649,11 @@
             </a:r>
           </a:p>
           <a:p>
-            <a:pPr algn="l">
-              <a:spcAft>
-                <a:spcPts val="2250"/>
-              </a:spcAft>
-              <a:defRPr sz="1500" b="0">
+            <a:pPr>
+              <a:spcAft>
+                <a:spcPts val="1959"/>
+              </a:spcAft>
+              <a:defRPr sz="1400">
                 <a:solidFill>
                   <a:srgbClr val="FFFFFF"/>
                 </a:solidFill>
@@ -14174,7 +14663,25 @@
               <a:buChar char="▸"/>
             </a:pPr>
             <a:r>
-              <a:t>Custom response formatting — no markdown, uses symbols and spacing</a:t>
+              <a:t>Custom formatting — no markdown, uses symbols and spacing</a:t>
+            </a:r>
+          </a:p>
+          <a:p>
+            <a:pPr>
+              <a:spcAft>
+                <a:spcPts val="1959"/>
+              </a:spcAft>
+              <a:defRPr sz="1400">
+                <a:solidFill>
+                  <a:srgbClr val="FFFFFF"/>
+                </a:solidFill>
+                <a:latin typeface="Segoe UI"/>
+              </a:defRPr>
+              <a:buFont typeface="Arial"/>
+              <a:buChar char="▸"/>
+            </a:pPr>
+            <a:r>
+              <a:t>Temperature 0.7, max 4096 output tokens</a:t>
             </a:r>
           </a:p>
         </p:txBody>
@@ -14187,7 +14694,7 @@
         </p:nvSpPr>
         <p:spPr>
           <a:xfrm>
-            <a:off x="6400800" y="1645920"/>
+            <a:off x="6400800" y="1554480"/>
             <a:ext cx="5029200" cy="365760"/>
           </a:xfrm>
           <a:prstGeom prst="rect">
@@ -14202,9 +14709,9 @@
           <a:lstStyle/>
           <a:p>
             <a:pPr algn="l">
-              <a:defRPr sz="1800" b="1">
-                <a:solidFill>
-                  <a:srgbClr val="1E3A8A"/>
+              <a:defRPr sz="1700" b="1">
+                <a:solidFill>
+                  <a:srgbClr val="14B8A6"/>
                 </a:solidFill>
                 <a:latin typeface="Segoe UI"/>
               </a:defRPr>
@@ -14223,7 +14730,7 @@
         </p:nvSpPr>
         <p:spPr>
           <a:xfrm>
-            <a:off x="6400800" y="2103120"/>
+            <a:off x="6400800" y="2011680"/>
             <a:ext cx="5029200" cy="3200400"/>
           </a:xfrm>
           <a:prstGeom prst="rect">
@@ -14237,11 +14744,11 @@
           </a:bodyPr>
           <a:lstStyle/>
           <a:p>
-            <a:pPr algn="l">
-              <a:spcAft>
-                <a:spcPts val="2250"/>
-              </a:spcAft>
-              <a:defRPr sz="1500" b="0">
+            <a:pPr>
+              <a:spcAft>
+                <a:spcPts val="1959"/>
+              </a:spcAft>
+              <a:defRPr sz="1400">
                 <a:solidFill>
                   <a:srgbClr val="FFFFFF"/>
                 </a:solidFill>
@@ -14255,11 +14762,11 @@
             </a:r>
           </a:p>
           <a:p>
-            <a:pPr algn="l">
-              <a:spcAft>
-                <a:spcPts val="2250"/>
-              </a:spcAft>
-              <a:defRPr sz="1500" b="0">
+            <a:pPr>
+              <a:spcAft>
+                <a:spcPts val="1959"/>
+              </a:spcAft>
+              <a:defRPr sz="1400">
                 <a:solidFill>
                   <a:srgbClr val="FFFFFF"/>
                 </a:solidFill>
@@ -14273,11 +14780,11 @@
             </a:r>
           </a:p>
           <a:p>
-            <a:pPr algn="l">
-              <a:spcAft>
-                <a:spcPts val="2250"/>
-              </a:spcAft>
-              <a:defRPr sz="1500" b="0">
+            <a:pPr>
+              <a:spcAft>
+                <a:spcPts val="1959"/>
+              </a:spcAft>
+              <a:defRPr sz="1400">
                 <a:solidFill>
                   <a:srgbClr val="FFFFFF"/>
                 </a:solidFill>
@@ -14291,11 +14798,11 @@
             </a:r>
           </a:p>
           <a:p>
-            <a:pPr algn="l">
-              <a:spcAft>
-                <a:spcPts val="2250"/>
-              </a:spcAft>
-              <a:defRPr sz="1500" b="0">
+            <a:pPr>
+              <a:spcAft>
+                <a:spcPts val="1959"/>
+              </a:spcAft>
+              <a:defRPr sz="1400">
                 <a:solidFill>
                   <a:srgbClr val="FFFFFF"/>
                 </a:solidFill>
@@ -14305,7 +14812,25 @@
               <a:buChar char="▸"/>
             </a:pPr>
             <a:r>
-              <a:t>Temperature 0.7, max 4096 output tokens</a:t>
+              <a:t>Branch-specific guidance: IS codes, circuit equations, thermodynamic formulas</a:t>
+            </a:r>
+          </a:p>
+          <a:p>
+            <a:pPr>
+              <a:spcAft>
+                <a:spcPts val="1959"/>
+              </a:spcAft>
+              <a:defRPr sz="1400">
+                <a:solidFill>
+                  <a:srgbClr val="FFFFFF"/>
+                </a:solidFill>
+                <a:latin typeface="Segoe UI"/>
+              </a:defRPr>
+              <a:buFont typeface="Arial"/>
+              <a:buChar char="▸"/>
+            </a:pPr>
+            <a:r>
+              <a:t>Step-by-step derivations for Mathematics</a:t>
             </a:r>
           </a:p>
         </p:txBody>
@@ -14318,7 +14843,7 @@
         </p:nvSpPr>
         <p:spPr>
           <a:xfrm>
-            <a:off x="731520" y="5029200"/>
+            <a:off x="731520" y="4937760"/>
             <a:ext cx="10515600" cy="365760"/>
           </a:xfrm>
           <a:prstGeom prst="rect">
@@ -14333,7 +14858,7 @@
           <a:lstStyle/>
           <a:p>
             <a:pPr algn="l">
-              <a:defRPr sz="1600" b="1">
+              <a:defRPr sz="1500" b="1">
                 <a:solidFill>
                   <a:srgbClr val="F97316"/>
                 </a:solidFill>
@@ -14341,7 +14866,7 @@
               </a:defRPr>
             </a:pPr>
             <a:r>
-              <a:t>Request Flow:</a:t>
+              <a:t>Request Flow</a:t>
             </a:r>
           </a:p>
         </p:txBody>
@@ -14354,14 +14879,16 @@
         </p:nvSpPr>
         <p:spPr>
           <a:xfrm>
-            <a:off x="731520" y="5486400"/>
-            <a:ext cx="10515600" cy="640080"/>
+            <a:off x="731520" y="5394960"/>
+            <a:ext cx="10515600" cy="594360"/>
           </a:xfrm>
           <a:prstGeom prst="roundRect">
-            <a:avLst/>
+            <a:avLst>
+              <a:gd name="adj" fmla="val 5000"/>
+            </a:avLst>
           </a:prstGeom>
           <a:solidFill>
-            <a:srgbClr val="14141C"/>
+            <a:srgbClr val="1A1A28"/>
           </a:solidFill>
           <a:ln>
             <a:noFill/>
@@ -14382,10 +14909,20 @@
           </a:fontRef>
         </p:style>
         <p:txBody>
-          <a:bodyPr rtlCol="0" anchor="ctr"/>
-          <a:lstStyle/>
-          <a:p>
-            <a:pPr algn="ctr"/>
+          <a:bodyPr rtlCol="0" anchor="ctr" tIns="101600"/>
+          <a:lstStyle/>
+          <a:p>
+            <a:pPr algn="ctr">
+              <a:defRPr sz="1400">
+                <a:solidFill>
+                  <a:srgbClr val="B0B0C0"/>
+                </a:solidFill>
+                <a:latin typeface="Segoe UI"/>
+              </a:defRPr>
+            </a:pPr>
+            <a:r>
+              <a:t>Student  →  Chat UI  →  Edge Function  →  Gemini API (key rotation)  →  Formatted Response  →  Student</a:t>
+            </a:r>
           </a:p>
         </p:txBody>
       </p:sp>
@@ -14397,8 +14934,8 @@
         </p:nvSpPr>
         <p:spPr>
           <a:xfrm>
-            <a:off x="914400" y="5532120"/>
-            <a:ext cx="10058400" cy="548640"/>
+            <a:off x="731520" y="6446520"/>
+            <a:ext cx="7315200" cy="320040"/>
           </a:xfrm>
           <a:prstGeom prst="rect">
             <a:avLst/>
@@ -14411,44 +14948,8 @@
           </a:bodyPr>
           <a:lstStyle/>
           <a:p>
-            <a:pPr algn="ctr">
-              <a:defRPr sz="1400" b="0">
-                <a:solidFill>
-                  <a:srgbClr val="B0B0C0"/>
-                </a:solidFill>
-                <a:latin typeface="Segoe UI"/>
-              </a:defRPr>
-            </a:pPr>
-            <a:r>
-              <a:t>Student → Chat UI → Edge Function → Gemini API (key rotation) → Formatted Response → Student</a:t>
-            </a:r>
-          </a:p>
-        </p:txBody>
-      </p:sp>
-      <p:sp>
-        <p:nvSpPr>
-          <p:cNvPr id="14" name="TextBox 13"/>
-          <p:cNvSpPr txBox="1"/>
-          <p:nvPr/>
-        </p:nvSpPr>
-        <p:spPr>
-          <a:xfrm>
-            <a:off x="731520" y="6400800"/>
-            <a:ext cx="7315200" cy="365760"/>
-          </a:xfrm>
-          <a:prstGeom prst="rect">
-            <a:avLst/>
-          </a:prstGeom>
-          <a:noFill/>
-        </p:spPr>
-        <p:txBody>
-          <a:bodyPr wrap="square">
-            <a:spAutoFit/>
-          </a:bodyPr>
-          <a:lstStyle/>
-          <a:p>
-            <a:pPr algn="l">
-              <a:defRPr sz="1100" b="0">
+            <a:pPr algn="l">
+              <a:defRPr sz="1000" b="0">
                 <a:solidFill>
                   <a:srgbClr val="707080"/>
                 </a:solidFill>
@@ -14502,7 +15003,7 @@
             <a:avLst/>
           </a:prstGeom>
           <a:solidFill>
-            <a:srgbClr val="F97316"/>
+            <a:srgbClr val="14B8A6"/>
           </a:solidFill>
           <a:ln>
             <a:noFill/>
@@ -14553,7 +15054,7 @@
           <a:lstStyle/>
           <a:p>
             <a:pPr algn="l">
-              <a:defRPr sz="3000" b="1">
+              <a:defRPr sz="2800" b="1">
                 <a:solidFill>
                   <a:srgbClr val="FFFFFF"/>
                 </a:solidFill>
@@ -14574,7 +15075,7 @@
         </p:nvSpPr>
         <p:spPr>
           <a:xfrm>
-            <a:off x="731520" y="914400"/>
+            <a:off x="731520" y="868680"/>
             <a:ext cx="10058400" cy="457200"/>
           </a:xfrm>
           <a:prstGeom prst="rect">
@@ -14589,7 +15090,7 @@
           <a:lstStyle/>
           <a:p>
             <a:pPr algn="l">
-              <a:defRPr sz="1500" b="0">
+              <a:defRPr sz="1400" b="0">
                 <a:solidFill>
                   <a:srgbClr val="B0B0C0"/>
                 </a:solidFill>
@@ -14610,8 +15111,8 @@
         </p:nvSpPr>
         <p:spPr>
           <a:xfrm>
-            <a:off x="11155680" y="365760"/>
-            <a:ext cx="731520" cy="457200"/>
+            <a:off x="11247120" y="365760"/>
+            <a:ext cx="640080" cy="365760"/>
           </a:xfrm>
           <a:prstGeom prst="rect">
             <a:avLst/>
@@ -14625,7 +15126,7 @@
           <a:lstStyle/>
           <a:p>
             <a:pPr algn="r">
-              <a:defRPr sz="1400" b="0">
+              <a:defRPr sz="1300" b="0">
                 <a:solidFill>
                   <a:srgbClr val="707080"/>
                 </a:solidFill>
@@ -14646,14 +15147,14 @@
         </p:nvSpPr>
         <p:spPr>
           <a:xfrm>
-            <a:off x="731520" y="1325880"/>
+            <a:off x="731520" y="1234440"/>
             <a:ext cx="10698480" cy="19050"/>
           </a:xfrm>
           <a:prstGeom prst="rect">
             <a:avLst/>
           </a:prstGeom>
           <a:solidFill>
-            <a:srgbClr val="333344"/>
+            <a:srgbClr val="303040"/>
           </a:solidFill>
           <a:ln>
             <a:noFill/>
@@ -14689,11 +15190,13 @@
         </p:nvSpPr>
         <p:spPr>
           <a:xfrm>
-            <a:off x="548640" y="1645920"/>
-            <a:ext cx="5303520" cy="4114800"/>
+            <a:off x="548640" y="1554480"/>
+            <a:ext cx="5303520" cy="4389120"/>
           </a:xfrm>
           <a:prstGeom prst="roundRect">
-            <a:avLst/>
+            <a:avLst>
+              <a:gd name="adj" fmla="val 8000"/>
+            </a:avLst>
           </a:prstGeom>
           <a:solidFill>
             <a:srgbClr val="14141C"/>
@@ -14732,7 +15235,7 @@
         </p:nvSpPr>
         <p:spPr>
           <a:xfrm>
-            <a:off x="548640" y="1645920"/>
+            <a:off x="548640" y="1554480"/>
             <a:ext cx="5303520" cy="45720"/>
           </a:xfrm>
           <a:prstGeom prst="rect">
@@ -14775,8 +15278,8 @@
         </p:nvSpPr>
         <p:spPr>
           <a:xfrm>
-            <a:off x="777240" y="1783080"/>
-            <a:ext cx="4846320" cy="365760"/>
+            <a:off x="731520" y="1664208"/>
+            <a:ext cx="4937760" cy="320040"/>
           </a:xfrm>
           <a:prstGeom prst="rect">
             <a:avLst/>
@@ -14790,7 +15293,7 @@
           <a:lstStyle/>
           <a:p>
             <a:pPr algn="l">
-              <a:defRPr sz="1800" b="1">
+              <a:defRPr sz="1700" b="1">
                 <a:solidFill>
                   <a:srgbClr val="F97316"/>
                 </a:solidFill>
@@ -14811,8 +15314,8 @@
         </p:nvSpPr>
         <p:spPr>
           <a:xfrm>
-            <a:off x="777240" y="2194560"/>
-            <a:ext cx="4846320" cy="3474720"/>
+            <a:off x="731520" y="2011680"/>
+            <a:ext cx="4937760" cy="3840480"/>
           </a:xfrm>
           <a:prstGeom prst="rect">
             <a:avLst/>
@@ -14827,7 +15330,7 @@
           <a:p>
             <a:pPr algn="l">
               <a:spcAft>
-                <a:spcPts val="1680"/>
+                <a:spcPts val="1609"/>
               </a:spcAft>
               <a:defRPr sz="1400" b="0">
                 <a:solidFill>
@@ -14843,7 +15346,7 @@
           <a:p>
             <a:pPr algn="l">
               <a:spcAft>
-                <a:spcPts val="1680"/>
+                <a:spcPts val="1609"/>
               </a:spcAft>
               <a:defRPr sz="1400" b="0">
                 <a:solidFill>
@@ -14859,7 +15362,7 @@
           <a:p>
             <a:pPr algn="l">
               <a:spcAft>
-                <a:spcPts val="1680"/>
+                <a:spcPts val="1609"/>
               </a:spcAft>
               <a:defRPr sz="1400" b="0">
                 <a:solidFill>
@@ -14875,7 +15378,7 @@
           <a:p>
             <a:pPr algn="l">
               <a:spcAft>
-                <a:spcPts val="1680"/>
+                <a:spcPts val="1609"/>
               </a:spcAft>
               <a:defRPr sz="1400" b="0">
                 <a:solidFill>
@@ -14891,7 +15394,7 @@
           <a:p>
             <a:pPr algn="l">
               <a:spcAft>
-                <a:spcPts val="1680"/>
+                <a:spcPts val="1609"/>
               </a:spcAft>
               <a:defRPr sz="1400" b="0">
                 <a:solidFill>
@@ -14907,7 +15410,7 @@
           <a:p>
             <a:pPr algn="l">
               <a:spcAft>
-                <a:spcPts val="1680"/>
+                <a:spcPts val="1609"/>
               </a:spcAft>
               <a:defRPr sz="1400" b="0">
                 <a:solidFill>
@@ -14923,7 +15426,7 @@
           <a:p>
             <a:pPr algn="l">
               <a:spcAft>
-                <a:spcPts val="1680"/>
+                <a:spcPts val="1609"/>
               </a:spcAft>
               <a:defRPr sz="1400" b="0">
                 <a:solidFill>
@@ -14946,11 +15449,13 @@
         </p:nvSpPr>
         <p:spPr>
           <a:xfrm>
-            <a:off x="6217920" y="1645920"/>
-            <a:ext cx="5303520" cy="4114800"/>
+            <a:off x="6217920" y="1554480"/>
+            <a:ext cx="5303520" cy="4389120"/>
           </a:xfrm>
           <a:prstGeom prst="roundRect">
-            <a:avLst/>
+            <a:avLst>
+              <a:gd name="adj" fmla="val 8000"/>
+            </a:avLst>
           </a:prstGeom>
           <a:solidFill>
             <a:srgbClr val="14141C"/>
@@ -14989,7 +15494,7 @@
         </p:nvSpPr>
         <p:spPr>
           <a:xfrm>
-            <a:off x="6217920" y="1645920"/>
+            <a:off x="6217920" y="1554480"/>
             <a:ext cx="5303520" cy="45720"/>
           </a:xfrm>
           <a:prstGeom prst="rect">
@@ -15032,8 +15537,8 @@
         </p:nvSpPr>
         <p:spPr>
           <a:xfrm>
-            <a:off x="6446520" y="1783080"/>
-            <a:ext cx="4846320" cy="365760"/>
+            <a:off x="6400800" y="1664208"/>
+            <a:ext cx="4937760" cy="320040"/>
           </a:xfrm>
           <a:prstGeom prst="rect">
             <a:avLst/>
@@ -15047,7 +15552,7 @@
           <a:lstStyle/>
           <a:p>
             <a:pPr algn="l">
-              <a:defRPr sz="1800" b="1">
+              <a:defRPr sz="1700" b="1">
                 <a:solidFill>
                   <a:srgbClr val="1E3A8A"/>
                 </a:solidFill>
@@ -15068,8 +15573,8 @@
         </p:nvSpPr>
         <p:spPr>
           <a:xfrm>
-            <a:off x="6446520" y="2194560"/>
-            <a:ext cx="4846320" cy="3474720"/>
+            <a:off x="6400800" y="2011680"/>
+            <a:ext cx="4937760" cy="3840480"/>
           </a:xfrm>
           <a:prstGeom prst="rect">
             <a:avLst/>
@@ -15084,7 +15589,7 @@
           <a:p>
             <a:pPr algn="l">
               <a:spcAft>
-                <a:spcPts val="1680"/>
+                <a:spcPts val="1609"/>
               </a:spcAft>
               <a:defRPr sz="1400" b="0">
                 <a:solidFill>
@@ -15100,7 +15605,7 @@
           <a:p>
             <a:pPr algn="l">
               <a:spcAft>
-                <a:spcPts val="1680"/>
+                <a:spcPts val="1609"/>
               </a:spcAft>
               <a:defRPr sz="1400" b="0">
                 <a:solidFill>
@@ -15116,7 +15621,7 @@
           <a:p>
             <a:pPr algn="l">
               <a:spcAft>
-                <a:spcPts val="1680"/>
+                <a:spcPts val="1609"/>
               </a:spcAft>
               <a:defRPr sz="1400" b="0">
                 <a:solidFill>
@@ -15132,7 +15637,7 @@
           <a:p>
             <a:pPr algn="l">
               <a:spcAft>
-                <a:spcPts val="1680"/>
+                <a:spcPts val="1609"/>
               </a:spcAft>
               <a:defRPr sz="1400" b="0">
                 <a:solidFill>
@@ -15148,7 +15653,7 @@
           <a:p>
             <a:pPr algn="l">
               <a:spcAft>
-                <a:spcPts val="1680"/>
+                <a:spcPts val="1609"/>
               </a:spcAft>
               <a:defRPr sz="1400" b="0">
                 <a:solidFill>
@@ -15164,7 +15669,7 @@
           <a:p>
             <a:pPr algn="l">
               <a:spcAft>
-                <a:spcPts val="1680"/>
+                <a:spcPts val="1609"/>
               </a:spcAft>
               <a:defRPr sz="1400" b="0">
                 <a:solidFill>
@@ -15180,7 +15685,7 @@
           <a:p>
             <a:pPr algn="l">
               <a:spcAft>
-                <a:spcPts val="1680"/>
+                <a:spcPts val="1609"/>
               </a:spcAft>
               <a:defRPr sz="1400" b="0">
                 <a:solidFill>
@@ -15203,8 +15708,8 @@
         </p:nvSpPr>
         <p:spPr>
           <a:xfrm>
-            <a:off x="731520" y="6400800"/>
-            <a:ext cx="7315200" cy="365760"/>
+            <a:off x="731520" y="6446520"/>
+            <a:ext cx="7315200" cy="320040"/>
           </a:xfrm>
           <a:prstGeom prst="rect">
             <a:avLst/>
@@ -15218,7 +15723,7 @@
           <a:lstStyle/>
           <a:p>
             <a:pPr algn="l">
-              <a:defRPr sz="1100" b="0">
+              <a:defRPr sz="1000" b="0">
                 <a:solidFill>
                   <a:srgbClr val="707080"/>
                 </a:solidFill>
@@ -15272,7 +15777,7 @@
             <a:avLst/>
           </a:prstGeom>
           <a:solidFill>
-            <a:srgbClr val="F97316"/>
+            <a:srgbClr val="14B8A6"/>
           </a:solidFill>
           <a:ln>
             <a:noFill/>
@@ -15323,7 +15828,7 @@
           <a:lstStyle/>
           <a:p>
             <a:pPr algn="l">
-              <a:defRPr sz="3000" b="1">
+              <a:defRPr sz="2800" b="1">
                 <a:solidFill>
                   <a:srgbClr val="FFFFFF"/>
                 </a:solidFill>
@@ -15344,7 +15849,7 @@
         </p:nvSpPr>
         <p:spPr>
           <a:xfrm>
-            <a:off x="731520" y="914400"/>
+            <a:off x="731520" y="868680"/>
             <a:ext cx="10058400" cy="457200"/>
           </a:xfrm>
           <a:prstGeom prst="rect">
@@ -15359,7 +15864,7 @@
           <a:lstStyle/>
           <a:p>
             <a:pPr algn="l">
-              <a:defRPr sz="1500" b="0">
+              <a:defRPr sz="1400" b="0">
                 <a:solidFill>
                   <a:srgbClr val="B0B0C0"/>
                 </a:solidFill>
@@ -15380,8 +15885,8 @@
         </p:nvSpPr>
         <p:spPr>
           <a:xfrm>
-            <a:off x="11155680" y="365760"/>
-            <a:ext cx="731520" cy="457200"/>
+            <a:off x="11247120" y="365760"/>
+            <a:ext cx="640080" cy="365760"/>
           </a:xfrm>
           <a:prstGeom prst="rect">
             <a:avLst/>
@@ -15395,7 +15900,7 @@
           <a:lstStyle/>
           <a:p>
             <a:pPr algn="r">
-              <a:defRPr sz="1400" b="0">
+              <a:defRPr sz="1300" b="0">
                 <a:solidFill>
                   <a:srgbClr val="707080"/>
                 </a:solidFill>
@@ -15416,14 +15921,14 @@
         </p:nvSpPr>
         <p:spPr>
           <a:xfrm>
-            <a:off x="731520" y="1325880"/>
+            <a:off x="731520" y="1234440"/>
             <a:ext cx="10698480" cy="19050"/>
           </a:xfrm>
           <a:prstGeom prst="rect">
             <a:avLst/>
           </a:prstGeom>
           <a:solidFill>
-            <a:srgbClr val="333344"/>
+            <a:srgbClr val="303040"/>
           </a:solidFill>
           <a:ln>
             <a:noFill/>
@@ -15459,11 +15964,13 @@
         </p:nvSpPr>
         <p:spPr>
           <a:xfrm>
-            <a:off x="548640" y="1645920"/>
-            <a:ext cx="5303520" cy="4114800"/>
+            <a:off x="548640" y="1554480"/>
+            <a:ext cx="5303520" cy="4389120"/>
           </a:xfrm>
           <a:prstGeom prst="roundRect">
-            <a:avLst/>
+            <a:avLst>
+              <a:gd name="adj" fmla="val 8000"/>
+            </a:avLst>
           </a:prstGeom>
           <a:solidFill>
             <a:srgbClr val="14141C"/>
@@ -15502,7 +16009,7 @@
         </p:nvSpPr>
         <p:spPr>
           <a:xfrm>
-            <a:off x="548640" y="1645920"/>
+            <a:off x="548640" y="1554480"/>
             <a:ext cx="5303520" cy="45720"/>
           </a:xfrm>
           <a:prstGeom prst="rect">
@@ -15545,8 +16052,8 @@
         </p:nvSpPr>
         <p:spPr>
           <a:xfrm>
-            <a:off x="777240" y="1783080"/>
-            <a:ext cx="4846320" cy="365760"/>
+            <a:off x="731520" y="1664208"/>
+            <a:ext cx="4937760" cy="320040"/>
           </a:xfrm>
           <a:prstGeom prst="rect">
             <a:avLst/>
@@ -15560,7 +16067,7 @@
           <a:lstStyle/>
           <a:p>
             <a:pPr algn="l">
-              <a:defRPr sz="1800" b="1">
+              <a:defRPr sz="1700" b="1">
                 <a:solidFill>
                   <a:srgbClr val="14B8A6"/>
                 </a:solidFill>
@@ -15581,8 +16088,8 @@
         </p:nvSpPr>
         <p:spPr>
           <a:xfrm>
-            <a:off x="777240" y="2194560"/>
-            <a:ext cx="4846320" cy="3474720"/>
+            <a:off x="731520" y="2011680"/>
+            <a:ext cx="4937760" cy="3840480"/>
           </a:xfrm>
           <a:prstGeom prst="rect">
             <a:avLst/>
@@ -15597,7 +16104,7 @@
           <a:p>
             <a:pPr algn="l">
               <a:spcAft>
-                <a:spcPts val="1680"/>
+                <a:spcPts val="1609"/>
               </a:spcAft>
               <a:defRPr sz="1400" b="0">
                 <a:solidFill>
@@ -15613,7 +16120,7 @@
           <a:p>
             <a:pPr algn="l">
               <a:spcAft>
-                <a:spcPts val="1680"/>
+                <a:spcPts val="1609"/>
               </a:spcAft>
               <a:defRPr sz="1400" b="0">
                 <a:solidFill>
@@ -15629,7 +16136,7 @@
           <a:p>
             <a:pPr algn="l">
               <a:spcAft>
-                <a:spcPts val="1680"/>
+                <a:spcPts val="1609"/>
               </a:spcAft>
               <a:defRPr sz="1400" b="0">
                 <a:solidFill>
@@ -15645,7 +16152,7 @@
           <a:p>
             <a:pPr algn="l">
               <a:spcAft>
-                <a:spcPts val="1680"/>
+                <a:spcPts val="1609"/>
               </a:spcAft>
               <a:defRPr sz="1400" b="0">
                 <a:solidFill>
@@ -15661,7 +16168,7 @@
           <a:p>
             <a:pPr algn="l">
               <a:spcAft>
-                <a:spcPts val="1680"/>
+                <a:spcPts val="1609"/>
               </a:spcAft>
               <a:defRPr sz="1400" b="0">
                 <a:solidFill>
@@ -15677,7 +16184,7 @@
           <a:p>
             <a:pPr algn="l">
               <a:spcAft>
-                <a:spcPts val="1680"/>
+                <a:spcPts val="1609"/>
               </a:spcAft>
               <a:defRPr sz="1400" b="0">
                 <a:solidFill>
@@ -15693,7 +16200,7 @@
           <a:p>
             <a:pPr algn="l">
               <a:spcAft>
-                <a:spcPts val="1680"/>
+                <a:spcPts val="1609"/>
               </a:spcAft>
               <a:defRPr sz="1400" b="0">
                 <a:solidFill>
@@ -15716,11 +16223,13 @@
         </p:nvSpPr>
         <p:spPr>
           <a:xfrm>
-            <a:off x="6217920" y="1645920"/>
-            <a:ext cx="5303520" cy="4114800"/>
+            <a:off x="6217920" y="1554480"/>
+            <a:ext cx="5303520" cy="4389120"/>
           </a:xfrm>
           <a:prstGeom prst="roundRect">
-            <a:avLst/>
+            <a:avLst>
+              <a:gd name="adj" fmla="val 8000"/>
+            </a:avLst>
           </a:prstGeom>
           <a:solidFill>
             <a:srgbClr val="14141C"/>
@@ -15759,7 +16268,7 @@
         </p:nvSpPr>
         <p:spPr>
           <a:xfrm>
-            <a:off x="6217920" y="1645920"/>
+            <a:off x="6217920" y="1554480"/>
             <a:ext cx="5303520" cy="45720"/>
           </a:xfrm>
           <a:prstGeom prst="rect">
@@ -15802,8 +16311,8 @@
         </p:nvSpPr>
         <p:spPr>
           <a:xfrm>
-            <a:off x="6446520" y="1783080"/>
-            <a:ext cx="4846320" cy="365760"/>
+            <a:off x="6400800" y="1664208"/>
+            <a:ext cx="4937760" cy="320040"/>
           </a:xfrm>
           <a:prstGeom prst="rect">
             <a:avLst/>
@@ -15817,7 +16326,7 @@
           <a:lstStyle/>
           <a:p>
             <a:pPr algn="l">
-              <a:defRPr sz="1800" b="1">
+              <a:defRPr sz="1700" b="1">
                 <a:solidFill>
                   <a:srgbClr val="A855F7"/>
                 </a:solidFill>
@@ -15838,8 +16347,8 @@
         </p:nvSpPr>
         <p:spPr>
           <a:xfrm>
-            <a:off x="6446520" y="2194560"/>
-            <a:ext cx="4846320" cy="3474720"/>
+            <a:off x="6400800" y="2011680"/>
+            <a:ext cx="4937760" cy="3840480"/>
           </a:xfrm>
           <a:prstGeom prst="rect">
             <a:avLst/>
@@ -15854,7 +16363,7 @@
           <a:p>
             <a:pPr algn="l">
               <a:spcAft>
-                <a:spcPts val="1680"/>
+                <a:spcPts val="1609"/>
               </a:spcAft>
               <a:defRPr sz="1400" b="0">
                 <a:solidFill>
@@ -15870,7 +16379,7 @@
           <a:p>
             <a:pPr algn="l">
               <a:spcAft>
-                <a:spcPts val="1680"/>
+                <a:spcPts val="1609"/>
               </a:spcAft>
               <a:defRPr sz="1400" b="0">
                 <a:solidFill>
@@ -15886,7 +16395,7 @@
           <a:p>
             <a:pPr algn="l">
               <a:spcAft>
-                <a:spcPts val="1680"/>
+                <a:spcPts val="1609"/>
               </a:spcAft>
               <a:defRPr sz="1400" b="0">
                 <a:solidFill>
@@ -15902,7 +16411,7 @@
           <a:p>
             <a:pPr algn="l">
               <a:spcAft>
-                <a:spcPts val="1680"/>
+                <a:spcPts val="1609"/>
               </a:spcAft>
               <a:defRPr sz="1400" b="0">
                 <a:solidFill>
@@ -15918,7 +16427,7 @@
           <a:p>
             <a:pPr algn="l">
               <a:spcAft>
-                <a:spcPts val="1680"/>
+                <a:spcPts val="1609"/>
               </a:spcAft>
               <a:defRPr sz="1400" b="0">
                 <a:solidFill>
@@ -15934,7 +16443,7 @@
           <a:p>
             <a:pPr algn="l">
               <a:spcAft>
-                <a:spcPts val="1680"/>
+                <a:spcPts val="1609"/>
               </a:spcAft>
               <a:defRPr sz="1400" b="0">
                 <a:solidFill>
@@ -15950,7 +16459,7 @@
           <a:p>
             <a:pPr algn="l">
               <a:spcAft>
-                <a:spcPts val="1680"/>
+                <a:spcPts val="1609"/>
               </a:spcAft>
               <a:defRPr sz="1400" b="0">
                 <a:solidFill>
@@ -15973,8 +16482,8 @@
         </p:nvSpPr>
         <p:spPr>
           <a:xfrm>
-            <a:off x="731520" y="6400800"/>
-            <a:ext cx="7315200" cy="365760"/>
+            <a:off x="731520" y="6446520"/>
+            <a:ext cx="7315200" cy="320040"/>
           </a:xfrm>
           <a:prstGeom prst="rect">
             <a:avLst/>
@@ -15988,7 +16497,7 @@
           <a:lstStyle/>
           <a:p>
             <a:pPr algn="l">
-              <a:defRPr sz="1100" b="0">
+              <a:defRPr sz="1000" b="0">
                 <a:solidFill>
                   <a:srgbClr val="707080"/>
                 </a:solidFill>
@@ -16042,7 +16551,7 @@
             <a:avLst/>
           </a:prstGeom>
           <a:solidFill>
-            <a:srgbClr val="F97316"/>
+            <a:srgbClr val="14B8A6"/>
           </a:solidFill>
           <a:ln>
             <a:noFill/>
@@ -16093,7 +16602,7 @@
           <a:lstStyle/>
           <a:p>
             <a:pPr algn="l">
-              <a:defRPr sz="3000" b="1">
+              <a:defRPr sz="2800" b="1">
                 <a:solidFill>
                   <a:srgbClr val="FFFFFF"/>
                 </a:solidFill>
@@ -16114,7 +16623,7 @@
         </p:nvSpPr>
         <p:spPr>
           <a:xfrm>
-            <a:off x="731520" y="914400"/>
+            <a:off x="731520" y="868680"/>
             <a:ext cx="10058400" cy="457200"/>
           </a:xfrm>
           <a:prstGeom prst="rect">
@@ -16129,7 +16638,7 @@
           <a:lstStyle/>
           <a:p>
             <a:pPr algn="l">
-              <a:defRPr sz="1500" b="0">
+              <a:defRPr sz="1400" b="0">
                 <a:solidFill>
                   <a:srgbClr val="B0B0C0"/>
                 </a:solidFill>
@@ -16150,8 +16659,8 @@
         </p:nvSpPr>
         <p:spPr>
           <a:xfrm>
-            <a:off x="11155680" y="365760"/>
-            <a:ext cx="731520" cy="457200"/>
+            <a:off x="11247120" y="365760"/>
+            <a:ext cx="640080" cy="365760"/>
           </a:xfrm>
           <a:prstGeom prst="rect">
             <a:avLst/>
@@ -16165,7 +16674,7 @@
           <a:lstStyle/>
           <a:p>
             <a:pPr algn="r">
-              <a:defRPr sz="1400" b="0">
+              <a:defRPr sz="1300" b="0">
                 <a:solidFill>
                   <a:srgbClr val="707080"/>
                 </a:solidFill>
@@ -16186,14 +16695,14 @@
         </p:nvSpPr>
         <p:spPr>
           <a:xfrm>
-            <a:off x="731520" y="1325880"/>
+            <a:off x="731520" y="1234440"/>
             <a:ext cx="10698480" cy="19050"/>
           </a:xfrm>
           <a:prstGeom prst="rect">
             <a:avLst/>
           </a:prstGeom>
           <a:solidFill>
-            <a:srgbClr val="333344"/>
+            <a:srgbClr val="303040"/>
           </a:solidFill>
           <a:ln>
             <a:noFill/>
@@ -16229,11 +16738,13 @@
         </p:nvSpPr>
         <p:spPr>
           <a:xfrm>
-            <a:off x="548640" y="1645920"/>
-            <a:ext cx="5303520" cy="4114800"/>
+            <a:off x="548640" y="1554480"/>
+            <a:ext cx="5303520" cy="4389120"/>
           </a:xfrm>
           <a:prstGeom prst="roundRect">
-            <a:avLst/>
+            <a:avLst>
+              <a:gd name="adj" fmla="val 8000"/>
+            </a:avLst>
           </a:prstGeom>
           <a:solidFill>
             <a:srgbClr val="14141C"/>
@@ -16272,7 +16783,7 @@
         </p:nvSpPr>
         <p:spPr>
           <a:xfrm>
-            <a:off x="548640" y="1645920"/>
+            <a:off x="548640" y="1554480"/>
             <a:ext cx="5303520" cy="45720"/>
           </a:xfrm>
           <a:prstGeom prst="rect">
@@ -16315,8 +16826,8 @@
         </p:nvSpPr>
         <p:spPr>
           <a:xfrm>
-            <a:off x="777240" y="1783080"/>
-            <a:ext cx="4846320" cy="365760"/>
+            <a:off x="731520" y="1664208"/>
+            <a:ext cx="4937760" cy="320040"/>
           </a:xfrm>
           <a:prstGeom prst="rect">
             <a:avLst/>
@@ -16330,7 +16841,7 @@
           <a:lstStyle/>
           <a:p>
             <a:pPr algn="l">
-              <a:defRPr sz="1800" b="1">
+              <a:defRPr sz="1700" b="1">
                 <a:solidFill>
                   <a:srgbClr val="22C55E"/>
                 </a:solidFill>
@@ -16351,8 +16862,8 @@
         </p:nvSpPr>
         <p:spPr>
           <a:xfrm>
-            <a:off x="777240" y="2194560"/>
-            <a:ext cx="4846320" cy="3474720"/>
+            <a:off x="731520" y="2011680"/>
+            <a:ext cx="4937760" cy="3840480"/>
           </a:xfrm>
           <a:prstGeom prst="rect">
             <a:avLst/>
@@ -16367,7 +16878,7 @@
           <a:p>
             <a:pPr algn="l">
               <a:spcAft>
-                <a:spcPts val="1680"/>
+                <a:spcPts val="1609"/>
               </a:spcAft>
               <a:defRPr sz="1400" b="0">
                 <a:solidFill>
@@ -16383,7 +16894,7 @@
           <a:p>
             <a:pPr algn="l">
               <a:spcAft>
-                <a:spcPts val="1680"/>
+                <a:spcPts val="1609"/>
               </a:spcAft>
               <a:defRPr sz="1400" b="0">
                 <a:solidFill>
@@ -16399,7 +16910,7 @@
           <a:p>
             <a:pPr algn="l">
               <a:spcAft>
-                <a:spcPts val="1680"/>
+                <a:spcPts val="1609"/>
               </a:spcAft>
               <a:defRPr sz="1400" b="0">
                 <a:solidFill>
@@ -16415,7 +16926,7 @@
           <a:p>
             <a:pPr algn="l">
               <a:spcAft>
-                <a:spcPts val="1680"/>
+                <a:spcPts val="1609"/>
               </a:spcAft>
               <a:defRPr sz="1400" b="0">
                 <a:solidFill>
@@ -16431,7 +16942,7 @@
           <a:p>
             <a:pPr algn="l">
               <a:spcAft>
-                <a:spcPts val="1680"/>
+                <a:spcPts val="1609"/>
               </a:spcAft>
               <a:defRPr sz="1400" b="0">
                 <a:solidFill>
@@ -16447,7 +16958,7 @@
           <a:p>
             <a:pPr algn="l">
               <a:spcAft>
-                <a:spcPts val="1680"/>
+                <a:spcPts val="1609"/>
               </a:spcAft>
               <a:defRPr sz="1400" b="0">
                 <a:solidFill>
@@ -16463,7 +16974,7 @@
           <a:p>
             <a:pPr algn="l">
               <a:spcAft>
-                <a:spcPts val="1680"/>
+                <a:spcPts val="1609"/>
               </a:spcAft>
               <a:defRPr sz="1400" b="0">
                 <a:solidFill>
@@ -16486,11 +16997,13 @@
         </p:nvSpPr>
         <p:spPr>
           <a:xfrm>
-            <a:off x="6217920" y="1645920"/>
-            <a:ext cx="5303520" cy="4114800"/>
+            <a:off x="6217920" y="1554480"/>
+            <a:ext cx="5303520" cy="4389120"/>
           </a:xfrm>
           <a:prstGeom prst="roundRect">
-            <a:avLst/>
+            <a:avLst>
+              <a:gd name="adj" fmla="val 8000"/>
+            </a:avLst>
           </a:prstGeom>
           <a:solidFill>
             <a:srgbClr val="14141C"/>
@@ -16529,7 +17042,7 @@
         </p:nvSpPr>
         <p:spPr>
           <a:xfrm>
-            <a:off x="6217920" y="1645920"/>
+            <a:off x="6217920" y="1554480"/>
             <a:ext cx="5303520" cy="45720"/>
           </a:xfrm>
           <a:prstGeom prst="rect">
@@ -16572,8 +17085,8 @@
         </p:nvSpPr>
         <p:spPr>
           <a:xfrm>
-            <a:off x="6446520" y="1783080"/>
-            <a:ext cx="4846320" cy="365760"/>
+            <a:off x="6400800" y="1664208"/>
+            <a:ext cx="4937760" cy="320040"/>
           </a:xfrm>
           <a:prstGeom prst="rect">
             <a:avLst/>
@@ -16587,7 +17100,7 @@
           <a:lstStyle/>
           <a:p>
             <a:pPr algn="l">
-              <a:defRPr sz="1800" b="1">
+              <a:defRPr sz="1700" b="1">
                 <a:solidFill>
                   <a:srgbClr val="EF4444"/>
                 </a:solidFill>
@@ -16608,8 +17121,8 @@
         </p:nvSpPr>
         <p:spPr>
           <a:xfrm>
-            <a:off x="6446520" y="2194560"/>
-            <a:ext cx="4846320" cy="3474720"/>
+            <a:off x="6400800" y="2011680"/>
+            <a:ext cx="4937760" cy="3840480"/>
           </a:xfrm>
           <a:prstGeom prst="rect">
             <a:avLst/>
@@ -16624,7 +17137,7 @@
           <a:p>
             <a:pPr algn="l">
               <a:spcAft>
-                <a:spcPts val="1680"/>
+                <a:spcPts val="1609"/>
               </a:spcAft>
               <a:defRPr sz="1400" b="0">
                 <a:solidFill>
@@ -16640,7 +17153,7 @@
           <a:p>
             <a:pPr algn="l">
               <a:spcAft>
-                <a:spcPts val="1680"/>
+                <a:spcPts val="1609"/>
               </a:spcAft>
               <a:defRPr sz="1400" b="0">
                 <a:solidFill>
@@ -16656,7 +17169,7 @@
           <a:p>
             <a:pPr algn="l">
               <a:spcAft>
-                <a:spcPts val="1680"/>
+                <a:spcPts val="1609"/>
               </a:spcAft>
               <a:defRPr sz="1400" b="0">
                 <a:solidFill>
@@ -16672,7 +17185,7 @@
           <a:p>
             <a:pPr algn="l">
               <a:spcAft>
-                <a:spcPts val="1680"/>
+                <a:spcPts val="1609"/>
               </a:spcAft>
               <a:defRPr sz="1400" b="0">
                 <a:solidFill>
@@ -16688,7 +17201,7 @@
           <a:p>
             <a:pPr algn="l">
               <a:spcAft>
-                <a:spcPts val="1680"/>
+                <a:spcPts val="1609"/>
               </a:spcAft>
               <a:defRPr sz="1400" b="0">
                 <a:solidFill>
@@ -16704,7 +17217,7 @@
           <a:p>
             <a:pPr algn="l">
               <a:spcAft>
-                <a:spcPts val="1680"/>
+                <a:spcPts val="1609"/>
               </a:spcAft>
               <a:defRPr sz="1400" b="0">
                 <a:solidFill>
@@ -16720,7 +17233,7 @@
           <a:p>
             <a:pPr algn="l">
               <a:spcAft>
-                <a:spcPts val="1680"/>
+                <a:spcPts val="1609"/>
               </a:spcAft>
               <a:defRPr sz="1400" b="0">
                 <a:solidFill>
@@ -16743,8 +17256,8 @@
         </p:nvSpPr>
         <p:spPr>
           <a:xfrm>
-            <a:off x="731520" y="6400800"/>
-            <a:ext cx="7315200" cy="365760"/>
+            <a:off x="731520" y="6446520"/>
+            <a:ext cx="7315200" cy="320040"/>
           </a:xfrm>
           <a:prstGeom prst="rect">
             <a:avLst/>
@@ -16758,7 +17271,7 @@
           <a:lstStyle/>
           <a:p>
             <a:pPr algn="l">
-              <a:defRPr sz="1100" b="0">
+              <a:defRPr sz="1000" b="0">
                 <a:solidFill>
                   <a:srgbClr val="707080"/>
                 </a:solidFill>

--- a/TechNotes_AI_Presentation.pptx
+++ b/TechNotes_AI_Presentation.pptx
@@ -3115,20 +3115,20 @@
       <p:grpSpPr/>
       <p:sp>
         <p:nvSpPr>
-          <p:cNvPr id="2" name="Oval 1"/>
+          <p:cNvPr id="2" name="Rectangle 1"/>
           <p:cNvSpPr/>
           <p:nvPr/>
         </p:nvSpPr>
         <p:spPr>
           <a:xfrm>
-            <a:off x="-1828800" y="-1828800"/>
-            <a:ext cx="4572000" cy="4572000"/>
-          </a:xfrm>
-          <a:prstGeom prst="ellipse">
+            <a:off x="0" y="0"/>
+            <a:ext cx="12191695" cy="6858000"/>
+          </a:xfrm>
+          <a:prstGeom prst="rect">
             <a:avLst/>
           </a:prstGeom>
           <a:solidFill>
-            <a:srgbClr val="0D1A18"/>
+            <a:srgbClr val="0A0A0F"/>
           </a:solidFill>
           <a:ln>
             <a:noFill/>
@@ -3159,6 +3159,49 @@
       <p:sp>
         <p:nvSpPr>
           <p:cNvPr id="3" name="Oval 2"/>
+          <p:cNvSpPr/>
+          <p:nvPr/>
+        </p:nvSpPr>
+        <p:spPr>
+          <a:xfrm>
+            <a:off x="-1828800" y="-1828800"/>
+            <a:ext cx="4572000" cy="4572000"/>
+          </a:xfrm>
+          <a:prstGeom prst="ellipse">
+            <a:avLst/>
+          </a:prstGeom>
+          <a:solidFill>
+            <a:srgbClr val="1E3A8A"/>
+          </a:solidFill>
+          <a:ln>
+            <a:noFill/>
+          </a:ln>
+        </p:spPr>
+        <p:style>
+          <a:lnRef idx="1">
+            <a:schemeClr val="accent1"/>
+          </a:lnRef>
+          <a:fillRef idx="3">
+            <a:schemeClr val="accent1"/>
+          </a:fillRef>
+          <a:effectRef idx="2">
+            <a:schemeClr val="accent1"/>
+          </a:effectRef>
+          <a:fontRef idx="minor">
+            <a:schemeClr val="lt1"/>
+          </a:fontRef>
+        </p:style>
+        <p:txBody>
+          <a:bodyPr rtlCol="0" anchor="ctr"/>
+          <a:lstStyle/>
+          <a:p>
+            <a:pPr algn="ctr"/>
+          </a:p>
+        </p:txBody>
+      </p:sp>
+      <p:sp>
+        <p:nvSpPr>
+          <p:cNvPr id="4" name="Oval 3"/>
           <p:cNvSpPr/>
           <p:nvPr/>
         </p:nvSpPr>
@@ -3201,7 +3244,7 @@
       </p:sp>
       <p:sp>
         <p:nvSpPr>
-          <p:cNvPr id="4" name="Rectangle 3"/>
+          <p:cNvPr id="5" name="Rectangle 4"/>
           <p:cNvSpPr/>
           <p:nvPr/>
         </p:nvSpPr>
@@ -3212,159 +3255,6 @@
           </a:xfrm>
           <a:prstGeom prst="rect">
             <a:avLst/>
-          </a:prstGeom>
-          <a:solidFill>
-            <a:srgbClr val="14B8A6"/>
-          </a:solidFill>
-          <a:ln>
-            <a:noFill/>
-          </a:ln>
-        </p:spPr>
-        <p:style>
-          <a:lnRef idx="1">
-            <a:schemeClr val="accent1"/>
-          </a:lnRef>
-          <a:fillRef idx="3">
-            <a:schemeClr val="accent1"/>
-          </a:fillRef>
-          <a:effectRef idx="2">
-            <a:schemeClr val="accent1"/>
-          </a:effectRef>
-          <a:fontRef idx="minor">
-            <a:schemeClr val="lt1"/>
-          </a:fontRef>
-        </p:style>
-        <p:txBody>
-          <a:bodyPr rtlCol="0" anchor="ctr"/>
-          <a:lstStyle/>
-          <a:p>
-            <a:pPr algn="ctr"/>
-          </a:p>
-        </p:txBody>
-      </p:sp>
-      <p:sp>
-        <p:nvSpPr>
-          <p:cNvPr id="5" name="TextBox 4"/>
-          <p:cNvSpPr txBox="1"/>
-          <p:nvPr/>
-        </p:nvSpPr>
-        <p:spPr>
-          <a:xfrm>
-            <a:off x="914400" y="1371600"/>
-            <a:ext cx="10332720" cy="457200"/>
-          </a:xfrm>
-          <a:prstGeom prst="rect">
-            <a:avLst/>
-          </a:prstGeom>
-          <a:noFill/>
-        </p:spPr>
-        <p:txBody>
-          <a:bodyPr wrap="square">
-            <a:spAutoFit/>
-          </a:bodyPr>
-          <a:lstStyle/>
-          <a:p>
-            <a:pPr algn="ctr">
-              <a:defRPr sz="1500" b="1">
-                <a:solidFill>
-                  <a:srgbClr val="14B8A6"/>
-                </a:solidFill>
-                <a:latin typeface="Segoe UI"/>
-              </a:defRPr>
-            </a:pPr>
-            <a:r>
-              <a:t>PROJECT PRESENTATION</a:t>
-            </a:r>
-          </a:p>
-        </p:txBody>
-      </p:sp>
-      <p:sp>
-        <p:nvSpPr>
-          <p:cNvPr id="6" name="TextBox 5"/>
-          <p:cNvSpPr txBox="1"/>
-          <p:nvPr/>
-        </p:nvSpPr>
-        <p:spPr>
-          <a:xfrm>
-            <a:off x="914400" y="1920240"/>
-            <a:ext cx="10332720" cy="1097280"/>
-          </a:xfrm>
-          <a:prstGeom prst="rect">
-            <a:avLst/>
-          </a:prstGeom>
-          <a:noFill/>
-        </p:spPr>
-        <p:txBody>
-          <a:bodyPr wrap="square">
-            <a:spAutoFit/>
-          </a:bodyPr>
-          <a:lstStyle/>
-          <a:p>
-            <a:pPr algn="ctr">
-              <a:defRPr sz="5800" b="1">
-                <a:solidFill>
-                  <a:srgbClr val="FFFFFF"/>
-                </a:solidFill>
-                <a:latin typeface="Segoe UI"/>
-              </a:defRPr>
-            </a:pPr>
-            <a:r>
-              <a:t>TechNotes AI</a:t>
-            </a:r>
-          </a:p>
-        </p:txBody>
-      </p:sp>
-      <p:sp>
-        <p:nvSpPr>
-          <p:cNvPr id="7" name="TextBox 6"/>
-          <p:cNvSpPr txBox="1"/>
-          <p:nvPr/>
-        </p:nvSpPr>
-        <p:spPr>
-          <a:xfrm>
-            <a:off x="914400" y="3017520"/>
-            <a:ext cx="10332720" cy="548640"/>
-          </a:xfrm>
-          <a:prstGeom prst="rect">
-            <a:avLst/>
-          </a:prstGeom>
-          <a:noFill/>
-        </p:spPr>
-        <p:txBody>
-          <a:bodyPr wrap="square">
-            <a:spAutoFit/>
-          </a:bodyPr>
-          <a:lstStyle/>
-          <a:p>
-            <a:pPr algn="ctr">
-              <a:defRPr sz="2000" b="0">
-                <a:solidFill>
-                  <a:srgbClr val="B0B0C0"/>
-                </a:solidFill>
-                <a:latin typeface="Segoe UI"/>
-              </a:defRPr>
-            </a:pPr>
-            <a:r>
-              <a:t>A Smart Study Platform for RGPV Engineering Students</a:t>
-            </a:r>
-          </a:p>
-        </p:txBody>
-      </p:sp>
-      <p:sp>
-        <p:nvSpPr>
-          <p:cNvPr id="8" name="Rounded Rectangle 7"/>
-          <p:cNvSpPr/>
-          <p:nvPr/>
-        </p:nvSpPr>
-        <p:spPr>
-          <a:xfrm>
-            <a:off x="3291840" y="3931920"/>
-            <a:ext cx="1353312" cy="329184"/>
-          </a:xfrm>
-          <a:prstGeom prst="roundRect">
-            <a:avLst>
-              <a:gd name="adj" fmla="val 50000"/>
-            </a:avLst>
           </a:prstGeom>
           <a:solidFill>
             <a:srgbClr val="F97316"/>
@@ -3388,11 +3278,73 @@
           </a:fontRef>
         </p:style>
         <p:txBody>
-          <a:bodyPr rtlCol="0" anchor="ctr" tIns="25400" bIns="25400"/>
+          <a:bodyPr rtlCol="0" anchor="ctr"/>
+          <a:lstStyle/>
+          <a:p>
+            <a:pPr algn="ctr"/>
+          </a:p>
+        </p:txBody>
+      </p:sp>
+      <p:sp>
+        <p:nvSpPr>
+          <p:cNvPr id="6" name="TextBox 5"/>
+          <p:cNvSpPr txBox="1"/>
+          <p:nvPr/>
+        </p:nvSpPr>
+        <p:spPr>
+          <a:xfrm>
+            <a:off x="914400" y="1645920"/>
+            <a:ext cx="10332720" cy="457200"/>
+          </a:xfrm>
+          <a:prstGeom prst="rect">
+            <a:avLst/>
+          </a:prstGeom>
+          <a:noFill/>
+        </p:spPr>
+        <p:txBody>
+          <a:bodyPr wrap="square">
+            <a:spAutoFit/>
+          </a:bodyPr>
           <a:lstStyle/>
           <a:p>
             <a:pPr algn="ctr">
-              <a:defRPr sz="1100" b="1">
+              <a:defRPr sz="1600" b="1">
+                <a:solidFill>
+                  <a:srgbClr val="F97316"/>
+                </a:solidFill>
+                <a:latin typeface="Segoe UI"/>
+              </a:defRPr>
+            </a:pPr>
+            <a:r>
+              <a:t>PROJECT PRESENTATION</a:t>
+            </a:r>
+          </a:p>
+        </p:txBody>
+      </p:sp>
+      <p:sp>
+        <p:nvSpPr>
+          <p:cNvPr id="7" name="TextBox 6"/>
+          <p:cNvSpPr txBox="1"/>
+          <p:nvPr/>
+        </p:nvSpPr>
+        <p:spPr>
+          <a:xfrm>
+            <a:off x="914400" y="2194560"/>
+            <a:ext cx="10332720" cy="1097280"/>
+          </a:xfrm>
+          <a:prstGeom prst="rect">
+            <a:avLst/>
+          </a:prstGeom>
+          <a:noFill/>
+        </p:spPr>
+        <p:txBody>
+          <a:bodyPr wrap="square">
+            <a:spAutoFit/>
+          </a:bodyPr>
+          <a:lstStyle/>
+          <a:p>
+            <a:pPr algn="ctr">
+              <a:defRPr sz="6000" b="1">
                 <a:solidFill>
                   <a:srgbClr val="FFFFFF"/>
                 </a:solidFill>
@@ -3400,7 +3352,43 @@
               </a:defRPr>
             </a:pPr>
             <a:r>
-              <a:t>Next.js</a:t>
+              <a:t>TechNotes AI</a:t>
+            </a:r>
+          </a:p>
+        </p:txBody>
+      </p:sp>
+      <p:sp>
+        <p:nvSpPr>
+          <p:cNvPr id="8" name="TextBox 7"/>
+          <p:cNvSpPr txBox="1"/>
+          <p:nvPr/>
+        </p:nvSpPr>
+        <p:spPr>
+          <a:xfrm>
+            <a:off x="914400" y="3291840"/>
+            <a:ext cx="10332720" cy="640080"/>
+          </a:xfrm>
+          <a:prstGeom prst="rect">
+            <a:avLst/>
+          </a:prstGeom>
+          <a:noFill/>
+        </p:spPr>
+        <p:txBody>
+          <a:bodyPr wrap="square">
+            <a:spAutoFit/>
+          </a:bodyPr>
+          <a:lstStyle/>
+          <a:p>
+            <a:pPr algn="ctr">
+              <a:defRPr sz="2200" b="0">
+                <a:solidFill>
+                  <a:srgbClr val="B0B0C0"/>
+                </a:solidFill>
+                <a:latin typeface="Segoe UI"/>
+              </a:defRPr>
+            </a:pPr>
+            <a:r>
+              <a:t>A Smart Study Platform for RGPV Engineering Students</a:t>
             </a:r>
           </a:p>
         </p:txBody>
@@ -3413,13 +3401,11 @@
         </p:nvSpPr>
         <p:spPr>
           <a:xfrm>
-            <a:off x="4828032" y="3931920"/>
-            <a:ext cx="1481328" cy="329184"/>
+            <a:off x="3200400" y="4206240"/>
+            <a:ext cx="1508760" cy="347472"/>
           </a:xfrm>
           <a:prstGeom prst="roundRect">
-            <a:avLst>
-              <a:gd name="adj" fmla="val 50000"/>
-            </a:avLst>
+            <a:avLst/>
           </a:prstGeom>
           <a:solidFill>
             <a:srgbClr val="F97316"/>
@@ -3443,7 +3429,7 @@
           </a:fontRef>
         </p:style>
         <p:txBody>
-          <a:bodyPr rtlCol="0" anchor="ctr" tIns="25400" bIns="25400"/>
+          <a:bodyPr rtlCol="0" anchor="ctr" wrap="none" tIns="25400" bIns="25400"/>
           <a:lstStyle/>
           <a:p>
             <a:pPr algn="ctr">
@@ -3455,7 +3441,7 @@
               </a:defRPr>
             </a:pPr>
             <a:r>
-              <a:t>Supabase</a:t>
+              <a:t>Next.js</a:t>
             </a:r>
           </a:p>
         </p:txBody>
@@ -3468,13 +3454,11 @@
         </p:nvSpPr>
         <p:spPr>
           <a:xfrm>
-            <a:off x="6492240" y="3931920"/>
-            <a:ext cx="1609344" cy="329184"/>
+            <a:off x="4892040" y="4206240"/>
+            <a:ext cx="1645919" cy="347472"/>
           </a:xfrm>
           <a:prstGeom prst="roundRect">
-            <a:avLst>
-              <a:gd name="adj" fmla="val 50000"/>
-            </a:avLst>
+            <a:avLst/>
           </a:prstGeom>
           <a:solidFill>
             <a:srgbClr val="F97316"/>
@@ -3498,7 +3482,7 @@
           </a:fontRef>
         </p:style>
         <p:txBody>
-          <a:bodyPr rtlCol="0" anchor="ctr" tIns="25400" bIns="25400"/>
+          <a:bodyPr rtlCol="0" anchor="ctr" wrap="none" tIns="25400" bIns="25400"/>
           <a:lstStyle/>
           <a:p>
             <a:pPr algn="ctr">
@@ -3510,7 +3494,7 @@
               </a:defRPr>
             </a:pPr>
             <a:r>
-              <a:t>Gemini AI</a:t>
+              <a:t>Supabase</a:t>
             </a:r>
           </a:p>
         </p:txBody>
@@ -3523,13 +3507,11 @@
         </p:nvSpPr>
         <p:spPr>
           <a:xfrm>
-            <a:off x="8284464" y="3931920"/>
-            <a:ext cx="1737360" cy="329184"/>
+            <a:off x="6720839" y="4206240"/>
+            <a:ext cx="2331720" cy="347472"/>
           </a:xfrm>
           <a:prstGeom prst="roundRect">
-            <a:avLst>
-              <a:gd name="adj" fmla="val 50000"/>
-            </a:avLst>
+            <a:avLst/>
           </a:prstGeom>
           <a:solidFill>
             <a:srgbClr val="F97316"/>
@@ -3553,7 +3535,7 @@
           </a:fontRef>
         </p:style>
         <p:txBody>
-          <a:bodyPr rtlCol="0" anchor="ctr" tIns="25400" bIns="25400"/>
+          <a:bodyPr rtlCol="0" anchor="ctr" wrap="none" tIns="25400" bIns="25400"/>
           <a:lstStyle/>
           <a:p>
             <a:pPr algn="ctr">
@@ -3565,7 +3547,7 @@
               </a:defRPr>
             </a:pPr>
             <a:r>
-              <a:t>TypeScript</a:t>
+              <a:t>Google Gemini</a:t>
             </a:r>
           </a:p>
         </p:txBody>
@@ -3578,13 +3560,11 @@
         </p:nvSpPr>
         <p:spPr>
           <a:xfrm>
-            <a:off x="10204704" y="3931920"/>
-            <a:ext cx="1993392" cy="329184"/>
+            <a:off x="9235439" y="4206240"/>
+            <a:ext cx="1920240" cy="347472"/>
           </a:xfrm>
           <a:prstGeom prst="roundRect">
-            <a:avLst>
-              <a:gd name="adj" fmla="val 50000"/>
-            </a:avLst>
+            <a:avLst/>
           </a:prstGeom>
           <a:solidFill>
             <a:srgbClr val="F97316"/>
@@ -3608,7 +3588,7 @@
           </a:fontRef>
         </p:style>
         <p:txBody>
-          <a:bodyPr rtlCol="0" anchor="ctr" tIns="25400" bIns="25400"/>
+          <a:bodyPr rtlCol="0" anchor="ctr" wrap="none" tIns="25400" bIns="25400"/>
           <a:lstStyle/>
           <a:p>
             <a:pPr algn="ctr">
@@ -3620,63 +3600,27 @@
               </a:defRPr>
             </a:pPr>
             <a:r>
-              <a:t>Tailwind CSS</a:t>
-            </a:r>
-          </a:p>
-        </p:txBody>
-      </p:sp>
-      <p:sp>
-        <p:nvSpPr>
-          <p:cNvPr id="13" name="TextBox 12"/>
-          <p:cNvSpPr txBox="1"/>
-          <p:nvPr/>
-        </p:nvSpPr>
-        <p:spPr>
-          <a:xfrm>
-            <a:off x="914400" y="4663440"/>
-            <a:ext cx="10332720" cy="457200"/>
-          </a:xfrm>
-          <a:prstGeom prst="rect">
-            <a:avLst/>
-          </a:prstGeom>
-          <a:noFill/>
-        </p:spPr>
-        <p:txBody>
-          <a:bodyPr wrap="square">
-            <a:spAutoFit/>
-          </a:bodyPr>
-          <a:lstStyle/>
-          <a:p>
-            <a:pPr algn="ctr">
-              <a:defRPr sz="1400" b="0">
-                <a:solidFill>
-                  <a:srgbClr val="707080"/>
-                </a:solidFill>
-                <a:latin typeface="Segoe UI"/>
-              </a:defRPr>
-            </a:pPr>
-            <a:r>
-              <a:t>Free  •  No Ads  •  Bilingual (Hindi / English)  •  AI-Powered</a:t>
-            </a:r>
-          </a:p>
-        </p:txBody>
-      </p:sp>
-      <p:sp>
-        <p:nvSpPr>
-          <p:cNvPr id="14" name="Rectangle 13"/>
+              <a:t>TypeScript</a:t>
+            </a:r>
+          </a:p>
+        </p:txBody>
+      </p:sp>
+      <p:sp>
+        <p:nvSpPr>
+          <p:cNvPr id="13" name="Rounded Rectangle 12"/>
           <p:cNvSpPr/>
           <p:nvPr/>
         </p:nvSpPr>
         <p:spPr>
           <a:xfrm>
-            <a:off x="5029200" y="5303520"/>
-            <a:ext cx="2103120" cy="38100"/>
-          </a:xfrm>
-          <a:prstGeom prst="rect">
+            <a:off x="11338559" y="4206240"/>
+            <a:ext cx="2194560" cy="347472"/>
+          </a:xfrm>
+          <a:prstGeom prst="roundRect">
             <a:avLst/>
           </a:prstGeom>
           <a:solidFill>
-            <a:srgbClr val="14B8A6"/>
+            <a:srgbClr val="F97316"/>
           </a:solidFill>
           <a:ln>
             <a:noFill/>
@@ -3697,22 +3641,32 @@
           </a:fontRef>
         </p:style>
         <p:txBody>
-          <a:bodyPr rtlCol="0" anchor="ctr"/>
-          <a:lstStyle/>
-          <a:p>
-            <a:pPr algn="ctr"/>
-          </a:p>
-        </p:txBody>
-      </p:sp>
-      <p:sp>
-        <p:nvSpPr>
-          <p:cNvPr id="15" name="TextBox 14"/>
+          <a:bodyPr rtlCol="0" anchor="ctr" wrap="none" tIns="25400" bIns="25400"/>
+          <a:lstStyle/>
+          <a:p>
+            <a:pPr algn="ctr">
+              <a:defRPr sz="1100" b="1">
+                <a:solidFill>
+                  <a:srgbClr val="FFFFFF"/>
+                </a:solidFill>
+                <a:latin typeface="Segoe UI"/>
+              </a:defRPr>
+            </a:pPr>
+            <a:r>
+              <a:t>Tailwind CSS</a:t>
+            </a:r>
+          </a:p>
+        </p:txBody>
+      </p:sp>
+      <p:sp>
+        <p:nvSpPr>
+          <p:cNvPr id="14" name="TextBox 13"/>
           <p:cNvSpPr txBox="1"/>
           <p:nvPr/>
         </p:nvSpPr>
         <p:spPr>
           <a:xfrm>
-            <a:off x="914400" y="5577840"/>
+            <a:off x="914400" y="5943600"/>
             <a:ext cx="10332720" cy="457200"/>
           </a:xfrm>
           <a:prstGeom prst="rect">
@@ -3727,43 +3681,7 @@
           <a:lstStyle/>
           <a:p>
             <a:pPr algn="ctr">
-              <a:defRPr sz="1400" b="0">
-                <a:solidFill>
-                  <a:srgbClr val="B0B0C0"/>
-                </a:solidFill>
-                <a:latin typeface="Segoe UI"/>
-              </a:defRPr>
-            </a:pPr>
-            <a:r>
-              <a:t>Department of Computer Science &amp; Engineering</a:t>
-            </a:r>
-          </a:p>
-        </p:txBody>
-      </p:sp>
-      <p:sp>
-        <p:nvSpPr>
-          <p:cNvPr id="16" name="TextBox 15"/>
-          <p:cNvSpPr txBox="1"/>
-          <p:nvPr/>
-        </p:nvSpPr>
-        <p:spPr>
-          <a:xfrm>
-            <a:off x="914400" y="5943600"/>
-            <a:ext cx="10332720" cy="457200"/>
-          </a:xfrm>
-          <a:prstGeom prst="rect">
-            <a:avLst/>
-          </a:prstGeom>
-          <a:noFill/>
-        </p:spPr>
-        <p:txBody>
-          <a:bodyPr wrap="square">
-            <a:spAutoFit/>
-          </a:bodyPr>
-          <a:lstStyle/>
-          <a:p>
-            <a:pPr algn="ctr">
-              <a:defRPr sz="1300" b="0">
+              <a:defRPr sz="1500" b="0">
                 <a:solidFill>
                   <a:srgbClr val="707080"/>
                 </a:solidFill>
@@ -3771,7 +3689,7 @@
               </a:defRPr>
             </a:pPr>
             <a:r>
-              <a:t>RGPV — Rajiv Gandhi Proudyogiki Vishwavidyalaya</a:t>
+              <a:t>Free  •  No Ads  •  Bilingual (Hindi / English)  •  AI-Powered</a:t>
             </a:r>
           </a:p>
         </p:txBody>
@@ -3817,7 +3735,7 @@
             <a:avLst/>
           </a:prstGeom>
           <a:solidFill>
-            <a:srgbClr val="14B8A6"/>
+            <a:srgbClr val="F97316"/>
           </a:solidFill>
           <a:ln>
             <a:noFill/>
@@ -3868,7 +3786,7 @@
           <a:lstStyle/>
           <a:p>
             <a:pPr algn="l">
-              <a:defRPr sz="2800" b="1">
+              <a:defRPr sz="3000" b="1">
                 <a:solidFill>
                   <a:srgbClr val="FFFFFF"/>
                 </a:solidFill>
@@ -3889,7 +3807,7 @@
         </p:nvSpPr>
         <p:spPr>
           <a:xfrm>
-            <a:off x="731520" y="868680"/>
+            <a:off x="731520" y="914400"/>
             <a:ext cx="10058400" cy="457200"/>
           </a:xfrm>
           <a:prstGeom prst="rect">
@@ -3904,7 +3822,7 @@
           <a:lstStyle/>
           <a:p>
             <a:pPr algn="l">
-              <a:defRPr sz="1400" b="0">
+              <a:defRPr sz="1500" b="0">
                 <a:solidFill>
                   <a:srgbClr val="B0B0C0"/>
                 </a:solidFill>
@@ -3925,8 +3843,8 @@
         </p:nvSpPr>
         <p:spPr>
           <a:xfrm>
-            <a:off x="11247120" y="365760"/>
-            <a:ext cx="640080" cy="365760"/>
+            <a:off x="11155680" y="365760"/>
+            <a:ext cx="731520" cy="457200"/>
           </a:xfrm>
           <a:prstGeom prst="rect">
             <a:avLst/>
@@ -3940,7 +3858,7 @@
           <a:lstStyle/>
           <a:p>
             <a:pPr algn="r">
-              <a:defRPr sz="1300" b="0">
+              <a:defRPr sz="1400" b="0">
                 <a:solidFill>
                   <a:srgbClr val="707080"/>
                 </a:solidFill>
@@ -3961,14 +3879,14 @@
         </p:nvSpPr>
         <p:spPr>
           <a:xfrm>
-            <a:off x="731520" y="1234440"/>
+            <a:off x="731520" y="1325880"/>
             <a:ext cx="10698480" cy="19050"/>
           </a:xfrm>
           <a:prstGeom prst="rect">
             <a:avLst/>
           </a:prstGeom>
           <a:solidFill>
-            <a:srgbClr val="303040"/>
+            <a:srgbClr val="333344"/>
           </a:solidFill>
           <a:ln>
             <a:noFill/>
@@ -4004,8 +3922,8 @@
         </p:nvSpPr>
         <p:spPr>
           <a:xfrm>
-            <a:off x="914400" y="1645920"/>
-            <a:ext cx="10515600" cy="3657600"/>
+            <a:off x="914400" y="1828800"/>
+            <a:ext cx="10515600" cy="4114800"/>
           </a:xfrm>
           <a:prstGeom prst="rect">
             <a:avLst/>
@@ -4018,11 +3936,11 @@
           </a:bodyPr>
           <a:lstStyle/>
           <a:p>
-            <a:pPr>
-              <a:spcAft>
-                <a:spcPts val="2400"/>
-              </a:spcAft>
-              <a:defRPr sz="1600">
+            <a:pPr algn="l">
+              <a:spcAft>
+                <a:spcPts val="2720"/>
+              </a:spcAft>
+              <a:defRPr sz="1700" b="0">
                 <a:solidFill>
                   <a:srgbClr val="FFFFFF"/>
                 </a:solidFill>
@@ -4036,11 +3954,11 @@
             </a:r>
           </a:p>
           <a:p>
-            <a:pPr>
-              <a:spcAft>
-                <a:spcPts val="2400"/>
-              </a:spcAft>
-              <a:defRPr sz="1600">
+            <a:pPr algn="l">
+              <a:spcAft>
+                <a:spcPts val="2720"/>
+              </a:spcAft>
+              <a:defRPr sz="1700" b="0">
                 <a:solidFill>
                   <a:srgbClr val="FFFFFF"/>
                 </a:solidFill>
@@ -4054,11 +3972,11 @@
             </a:r>
           </a:p>
           <a:p>
-            <a:pPr>
-              <a:spcAft>
-                <a:spcPts val="2400"/>
-              </a:spcAft>
-              <a:defRPr sz="1600">
+            <a:pPr algn="l">
+              <a:spcAft>
+                <a:spcPts val="2720"/>
+              </a:spcAft>
+              <a:defRPr sz="1700" b="0">
                 <a:solidFill>
                   <a:srgbClr val="FFFFFF"/>
                 </a:solidFill>
@@ -4072,11 +3990,11 @@
             </a:r>
           </a:p>
           <a:p>
-            <a:pPr>
-              <a:spcAft>
-                <a:spcPts val="2400"/>
-              </a:spcAft>
-              <a:defRPr sz="1600">
+            <a:pPr algn="l">
+              <a:spcAft>
+                <a:spcPts val="2720"/>
+              </a:spcAft>
+              <a:defRPr sz="1700" b="0">
                 <a:solidFill>
                   <a:srgbClr val="FFFFFF"/>
                 </a:solidFill>
@@ -4090,11 +4008,11 @@
             </a:r>
           </a:p>
           <a:p>
-            <a:pPr>
-              <a:spcAft>
-                <a:spcPts val="2400"/>
-              </a:spcAft>
-              <a:defRPr sz="1600">
+            <a:pPr algn="l">
+              <a:spcAft>
+                <a:spcPts val="2720"/>
+              </a:spcAft>
+              <a:defRPr sz="1700" b="0">
                 <a:solidFill>
                   <a:srgbClr val="FFFFFF"/>
                 </a:solidFill>
@@ -4108,11 +4026,11 @@
             </a:r>
           </a:p>
           <a:p>
-            <a:pPr>
-              <a:spcAft>
-                <a:spcPts val="2400"/>
-              </a:spcAft>
-              <a:defRPr sz="1600">
+            <a:pPr algn="l">
+              <a:spcAft>
+                <a:spcPts val="2720"/>
+              </a:spcAft>
+              <a:defRPr sz="1700" b="0">
                 <a:solidFill>
                   <a:srgbClr val="FFFFFF"/>
                 </a:solidFill>
@@ -4135,16 +4053,14 @@
         </p:nvSpPr>
         <p:spPr>
           <a:xfrm>
-            <a:off x="914400" y="5120640"/>
-            <a:ext cx="10332720" cy="1005840"/>
+            <a:off x="914400" y="5303520"/>
+            <a:ext cx="10332720" cy="822960"/>
           </a:xfrm>
           <a:prstGeom prst="roundRect">
-            <a:avLst>
-              <a:gd name="adj" fmla="val 5000"/>
-            </a:avLst>
+            <a:avLst/>
           </a:prstGeom>
           <a:solidFill>
-            <a:srgbClr val="1A1A28"/>
+            <a:srgbClr val="14141C"/>
           </a:solidFill>
           <a:ln>
             <a:noFill/>
@@ -4180,7 +4096,7 @@
         </p:nvSpPr>
         <p:spPr>
           <a:xfrm>
-            <a:off x="1188720" y="5212080"/>
+            <a:off x="1188720" y="5349240"/>
             <a:ext cx="4572000" cy="365760"/>
           </a:xfrm>
           <a:prstGeom prst="rect">
@@ -4195,7 +4111,7 @@
           <a:lstStyle/>
           <a:p>
             <a:pPr algn="l">
-              <a:defRPr sz="1500" b="1">
+              <a:defRPr sz="1600" b="1">
                 <a:solidFill>
                   <a:srgbClr val="F97316"/>
                 </a:solidFill>
@@ -4216,7 +4132,7 @@
         </p:nvSpPr>
         <p:spPr>
           <a:xfrm>
-            <a:off x="1188720" y="5577840"/>
+            <a:off x="1188720" y="5669280"/>
             <a:ext cx="4572000" cy="365760"/>
           </a:xfrm>
           <a:prstGeom prst="rect">
@@ -4231,9 +4147,9 @@
           <a:lstStyle/>
           <a:p>
             <a:pPr algn="l">
-              <a:defRPr sz="1500" b="1">
-                <a:solidFill>
-                  <a:srgbClr val="14B8A6"/>
+              <a:defRPr sz="1600" b="1">
+                <a:solidFill>
+                  <a:srgbClr val="1E3A8A"/>
                 </a:solidFill>
                 <a:latin typeface="Segoe UI"/>
               </a:defRPr>
@@ -4252,7 +4168,7 @@
         </p:nvSpPr>
         <p:spPr>
           <a:xfrm>
-            <a:off x="6400800" y="5212080"/>
+            <a:off x="6400800" y="5349240"/>
             <a:ext cx="4572000" cy="365760"/>
           </a:xfrm>
           <a:prstGeom prst="rect">
@@ -4267,7 +4183,7 @@
           <a:lstStyle/>
           <a:p>
             <a:pPr algn="l">
-              <a:defRPr sz="1500" b="1">
+              <a:defRPr sz="1600" b="1">
                 <a:solidFill>
                   <a:srgbClr val="F97316"/>
                 </a:solidFill>
@@ -4288,7 +4204,7 @@
         </p:nvSpPr>
         <p:spPr>
           <a:xfrm>
-            <a:off x="6400800" y="5577840"/>
+            <a:off x="6400800" y="5669280"/>
             <a:ext cx="4572000" cy="365760"/>
           </a:xfrm>
           <a:prstGeom prst="rect">
@@ -4303,9 +4219,9 @@
           <a:lstStyle/>
           <a:p>
             <a:pPr algn="l">
-              <a:defRPr sz="1500" b="1">
-                <a:solidFill>
-                  <a:srgbClr val="14B8A6"/>
+              <a:defRPr sz="1600" b="1">
+                <a:solidFill>
+                  <a:srgbClr val="1E3A8A"/>
                 </a:solidFill>
                 <a:latin typeface="Segoe UI"/>
               </a:defRPr>
@@ -4324,8 +4240,8 @@
         </p:nvSpPr>
         <p:spPr>
           <a:xfrm>
-            <a:off x="731520" y="6446520"/>
-            <a:ext cx="7315200" cy="320040"/>
+            <a:off x="731520" y="6400800"/>
+            <a:ext cx="7315200" cy="365760"/>
           </a:xfrm>
           <a:prstGeom prst="rect">
             <a:avLst/>
@@ -4339,7 +4255,7 @@
           <a:lstStyle/>
           <a:p>
             <a:pPr algn="l">
-              <a:defRPr sz="1000" b="0">
+              <a:defRPr sz="1100" b="0">
                 <a:solidFill>
                   <a:srgbClr val="707080"/>
                 </a:solidFill>
@@ -4393,7 +4309,7 @@
             <a:avLst/>
           </a:prstGeom>
           <a:solidFill>
-            <a:srgbClr val="14B8A6"/>
+            <a:srgbClr val="F97316"/>
           </a:solidFill>
           <a:ln>
             <a:noFill/>
@@ -4444,7 +4360,7 @@
           <a:lstStyle/>
           <a:p>
             <a:pPr algn="l">
-              <a:defRPr sz="2800" b="1">
+              <a:defRPr sz="3000" b="1">
                 <a:solidFill>
                   <a:srgbClr val="FFFFFF"/>
                 </a:solidFill>
@@ -4465,7 +4381,7 @@
         </p:nvSpPr>
         <p:spPr>
           <a:xfrm>
-            <a:off x="731520" y="868680"/>
+            <a:off x="731520" y="914400"/>
             <a:ext cx="10058400" cy="457200"/>
           </a:xfrm>
           <a:prstGeom prst="rect">
@@ -4480,7 +4396,7 @@
           <a:lstStyle/>
           <a:p>
             <a:pPr algn="l">
-              <a:defRPr sz="1400" b="0">
+              <a:defRPr sz="1500" b="0">
                 <a:solidFill>
                   <a:srgbClr val="B0B0C0"/>
                 </a:solidFill>
@@ -4488,7 +4404,7 @@
               </a:defRPr>
             </a:pPr>
             <a:r>
-              <a:t>Secure content management — admin-only access</a:t>
+              <a:t>Content management dashboard — admin-only access</a:t>
             </a:r>
           </a:p>
         </p:txBody>
@@ -4501,8 +4417,8 @@
         </p:nvSpPr>
         <p:spPr>
           <a:xfrm>
-            <a:off x="11247120" y="365760"/>
-            <a:ext cx="640080" cy="365760"/>
+            <a:off x="11155680" y="365760"/>
+            <a:ext cx="731520" cy="457200"/>
           </a:xfrm>
           <a:prstGeom prst="rect">
             <a:avLst/>
@@ -4516,7 +4432,7 @@
           <a:lstStyle/>
           <a:p>
             <a:pPr algn="r">
-              <a:defRPr sz="1300" b="0">
+              <a:defRPr sz="1400" b="0">
                 <a:solidFill>
                   <a:srgbClr val="707080"/>
                 </a:solidFill>
@@ -4537,14 +4453,14 @@
         </p:nvSpPr>
         <p:spPr>
           <a:xfrm>
-            <a:off x="731520" y="1234440"/>
+            <a:off x="731520" y="1325880"/>
             <a:ext cx="10698480" cy="19050"/>
           </a:xfrm>
           <a:prstGeom prst="rect">
             <a:avLst/>
           </a:prstGeom>
           <a:solidFill>
-            <a:srgbClr val="303040"/>
+            <a:srgbClr val="333344"/>
           </a:solidFill>
           <a:ln>
             <a:noFill/>
@@ -4580,7 +4496,7 @@
         </p:nvSpPr>
         <p:spPr>
           <a:xfrm>
-            <a:off x="914400" y="1645920"/>
+            <a:off x="914400" y="1828800"/>
             <a:ext cx="10515600" cy="4114800"/>
           </a:xfrm>
           <a:prstGeom prst="rect">
@@ -4594,11 +4510,11 @@
           </a:bodyPr>
           <a:lstStyle/>
           <a:p>
-            <a:pPr>
-              <a:spcAft>
-                <a:spcPts val="2100"/>
-              </a:spcAft>
-              <a:defRPr sz="1500">
+            <a:pPr algn="l">
+              <a:spcAft>
+                <a:spcPts val="2400"/>
+              </a:spcAft>
+              <a:defRPr sz="1600" b="0">
                 <a:solidFill>
                   <a:srgbClr val="FFFFFF"/>
                 </a:solidFill>
@@ -4608,15 +4524,15 @@
               <a:buChar char="▸"/>
             </a:pPr>
             <a:r>
-              <a:t>Admin-only access via Supabase Auth (email/password) + whitelisted emails in admin_users table</a:t>
-            </a:r>
-          </a:p>
-          <a:p>
-            <a:pPr>
-              <a:spcAft>
-                <a:spcPts val="2100"/>
-              </a:spcAft>
-              <a:defRPr sz="1500">
+              <a:t>Admin-only access via Supabase Auth + whitelisted emails in admin_users table</a:t>
+            </a:r>
+          </a:p>
+          <a:p>
+            <a:pPr algn="l">
+              <a:spcAft>
+                <a:spcPts val="2400"/>
+              </a:spcAft>
+              <a:defRPr sz="1600" b="0">
                 <a:solidFill>
                   <a:srgbClr val="FFFFFF"/>
                 </a:solidFill>
@@ -4626,15 +4542,15 @@
               <a:buChar char="▸"/>
             </a:pPr>
             <a:r>
-              <a:t>Upload and manage content across all sections — notes, PYQ, DSA, placement, imp_questions, syllabus</a:t>
-            </a:r>
-          </a:p>
-          <a:p>
-            <a:pPr>
-              <a:spcAft>
-                <a:spcPts val="2100"/>
-              </a:spcAft>
-              <a:defRPr sz="1500">
+              <a:t>Upload and manage content across all sections (notes, PYQ, DSA, placement, imp_questions, syllabus)</a:t>
+            </a:r>
+          </a:p>
+          <a:p>
+            <a:pPr algn="l">
+              <a:spcAft>
+                <a:spcPts val="2400"/>
+              </a:spcAft>
+              <a:defRPr sz="1600" b="0">
                 <a:solidFill>
                   <a:srgbClr val="FFFFFF"/>
                 </a:solidFill>
@@ -4648,11 +4564,11 @@
             </a:r>
           </a:p>
           <a:p>
-            <a:pPr>
-              <a:spcAft>
-                <a:spcPts val="2100"/>
-              </a:spcAft>
-              <a:defRPr sz="1500">
+            <a:pPr algn="l">
+              <a:spcAft>
+                <a:spcPts val="2400"/>
+              </a:spcAft>
+              <a:defRPr sz="1600" b="0">
                 <a:solidFill>
                   <a:srgbClr val="FFFFFF"/>
                 </a:solidFill>
@@ -4662,15 +4578,15 @@
               <a:buChar char="▸"/>
             </a:pPr>
             <a:r>
-              <a:t>Upload files to Supabase Storage (notes-files bucket) — PDF, image, DOCX, PPTX, DOC, PPT</a:t>
-            </a:r>
-          </a:p>
-          <a:p>
-            <a:pPr>
-              <a:spcAft>
-                <a:spcPts val="2100"/>
-              </a:spcAft>
-              <a:defRPr sz="1500">
+              <a:t>Upload files to Supabase Storage (notes-files bucket) — PDF, image, DOCX, PPTX</a:t>
+            </a:r>
+          </a:p>
+          <a:p>
+            <a:pPr algn="l">
+              <a:spcAft>
+                <a:spcPts val="2400"/>
+              </a:spcAft>
+              <a:defRPr sz="1600" b="0">
                 <a:solidFill>
                   <a:srgbClr val="FFFFFF"/>
                 </a:solidFill>
@@ -4680,15 +4596,15 @@
               <a:buChar char="▸"/>
             </a:pPr>
             <a:r>
-              <a:t>Manage academic structure — add / edit / delete branches, years, semesters, subjects</a:t>
-            </a:r>
-          </a:p>
-          <a:p>
-            <a:pPr>
-              <a:spcAft>
-                <a:spcPts val="2100"/>
-              </a:spcAft>
-              <a:defRPr sz="1500">
+              <a:t>Manage academic structure — add/edit/delete branches, years, semesters, subjects</a:t>
+            </a:r>
+          </a:p>
+          <a:p>
+            <a:pPr algn="l">
+              <a:spcAft>
+                <a:spcPts val="2400"/>
+              </a:spcAft>
+              <a:defRPr sz="1600" b="0">
                 <a:solidFill>
                   <a:srgbClr val="FFFFFF"/>
                 </a:solidFill>
@@ -4702,11 +4618,11 @@
             </a:r>
           </a:p>
           <a:p>
-            <a:pPr>
-              <a:spcAft>
-                <a:spcPts val="2100"/>
-              </a:spcAft>
-              <a:defRPr sz="1500">
+            <a:pPr algn="l">
+              <a:spcAft>
+                <a:spcPts val="2400"/>
+              </a:spcAft>
+              <a:defRPr sz="1600" b="0">
                 <a:solidFill>
                   <a:srgbClr val="FFFFFF"/>
                 </a:solidFill>
@@ -4729,8 +4645,8 @@
         </p:nvSpPr>
         <p:spPr>
           <a:xfrm>
-            <a:off x="731520" y="6446520"/>
-            <a:ext cx="7315200" cy="320040"/>
+            <a:off x="731520" y="6400800"/>
+            <a:ext cx="7315200" cy="365760"/>
           </a:xfrm>
           <a:prstGeom prst="rect">
             <a:avLst/>
@@ -4744,7 +4660,7 @@
           <a:lstStyle/>
           <a:p>
             <a:pPr algn="l">
-              <a:defRPr sz="1000" b="0">
+              <a:defRPr sz="1100" b="0">
                 <a:solidFill>
                   <a:srgbClr val="707080"/>
                 </a:solidFill>
@@ -4798,7 +4714,7 @@
             <a:avLst/>
           </a:prstGeom>
           <a:solidFill>
-            <a:srgbClr val="14B8A6"/>
+            <a:srgbClr val="F97316"/>
           </a:solidFill>
           <a:ln>
             <a:noFill/>
@@ -4849,7 +4765,7 @@
           <a:lstStyle/>
           <a:p>
             <a:pPr algn="l">
-              <a:defRPr sz="2800" b="1">
+              <a:defRPr sz="3000" b="1">
                 <a:solidFill>
                   <a:srgbClr val="FFFFFF"/>
                 </a:solidFill>
@@ -4870,7 +4786,7 @@
         </p:nvSpPr>
         <p:spPr>
           <a:xfrm>
-            <a:off x="731520" y="868680"/>
+            <a:off x="731520" y="914400"/>
             <a:ext cx="10058400" cy="457200"/>
           </a:xfrm>
           <a:prstGeom prst="rect">
@@ -4885,7 +4801,7 @@
           <a:lstStyle/>
           <a:p>
             <a:pPr algn="l">
-              <a:defRPr sz="1400" b="0">
+              <a:defRPr sz="1500" b="0">
                 <a:solidFill>
                   <a:srgbClr val="B0B0C0"/>
                 </a:solidFill>
@@ -4906,8 +4822,8 @@
         </p:nvSpPr>
         <p:spPr>
           <a:xfrm>
-            <a:off x="11247120" y="365760"/>
-            <a:ext cx="640080" cy="365760"/>
+            <a:off x="11155680" y="365760"/>
+            <a:ext cx="731520" cy="457200"/>
           </a:xfrm>
           <a:prstGeom prst="rect">
             <a:avLst/>
@@ -4921,7 +4837,7 @@
           <a:lstStyle/>
           <a:p>
             <a:pPr algn="r">
-              <a:defRPr sz="1300" b="0">
+              <a:defRPr sz="1400" b="0">
                 <a:solidFill>
                   <a:srgbClr val="707080"/>
                 </a:solidFill>
@@ -4942,14 +4858,14 @@
         </p:nvSpPr>
         <p:spPr>
           <a:xfrm>
-            <a:off x="731520" y="1234440"/>
+            <a:off x="731520" y="1325880"/>
             <a:ext cx="10698480" cy="19050"/>
           </a:xfrm>
           <a:prstGeom prst="rect">
             <a:avLst/>
           </a:prstGeom>
           <a:solidFill>
-            <a:srgbClr val="303040"/>
+            <a:srgbClr val="333344"/>
           </a:solidFill>
           <a:ln>
             <a:noFill/>
@@ -4985,13 +4901,11 @@
         </p:nvSpPr>
         <p:spPr>
           <a:xfrm>
-            <a:off x="457200" y="1554480"/>
-            <a:ext cx="2834640" cy="4114800"/>
+            <a:off x="548640" y="1645920"/>
+            <a:ext cx="2926080" cy="4114800"/>
           </a:xfrm>
           <a:prstGeom prst="roundRect">
-            <a:avLst>
-              <a:gd name="adj" fmla="val 8000"/>
-            </a:avLst>
+            <a:avLst/>
           </a:prstGeom>
           <a:solidFill>
             <a:srgbClr val="14141C"/>
@@ -5030,8 +4944,8 @@
         </p:nvSpPr>
         <p:spPr>
           <a:xfrm>
-            <a:off x="457200" y="1554480"/>
-            <a:ext cx="2834640" cy="45720"/>
+            <a:off x="548640" y="1645920"/>
+            <a:ext cx="2926080" cy="45720"/>
           </a:xfrm>
           <a:prstGeom prst="rect">
             <a:avLst/>
@@ -5073,8 +4987,8 @@
         </p:nvSpPr>
         <p:spPr>
           <a:xfrm>
-            <a:off x="640080" y="1664208"/>
-            <a:ext cx="2468880" cy="320040"/>
+            <a:off x="777240" y="1783080"/>
+            <a:ext cx="2468880" cy="365760"/>
           </a:xfrm>
           <a:prstGeom prst="rect">
             <a:avLst/>
@@ -5088,7 +5002,7 @@
           <a:lstStyle/>
           <a:p>
             <a:pPr algn="l">
-              <a:defRPr sz="1500" b="1">
+              <a:defRPr sz="1600" b="1">
                 <a:solidFill>
                   <a:srgbClr val="F97316"/>
                 </a:solidFill>
@@ -5109,8 +5023,8 @@
         </p:nvSpPr>
         <p:spPr>
           <a:xfrm>
-            <a:off x="640080" y="2011680"/>
-            <a:ext cx="2468880" cy="3566160"/>
+            <a:off x="777240" y="2194560"/>
+            <a:ext cx="2468880" cy="3474720"/>
           </a:xfrm>
           <a:prstGeom prst="rect">
             <a:avLst/>
@@ -5125,9 +5039,9 @@
           <a:p>
             <a:pPr algn="l">
               <a:spcAft>
-                <a:spcPts val="1380"/>
-              </a:spcAft>
-              <a:defRPr sz="1200" b="0">
+                <a:spcPts val="1560"/>
+              </a:spcAft>
+              <a:defRPr sz="1300" b="0">
                 <a:solidFill>
                   <a:srgbClr val="B0B0C0"/>
                 </a:solidFill>
@@ -5141,9 +5055,9 @@
           <a:p>
             <a:pPr algn="l">
               <a:spcAft>
-                <a:spcPts val="1380"/>
-              </a:spcAft>
-              <a:defRPr sz="1200" b="0">
+                <a:spcPts val="1560"/>
+              </a:spcAft>
+              <a:defRPr sz="1300" b="0">
                 <a:solidFill>
                   <a:srgbClr val="B0B0C0"/>
                 </a:solidFill>
@@ -5157,9 +5071,9 @@
           <a:p>
             <a:pPr algn="l">
               <a:spcAft>
-                <a:spcPts val="1380"/>
-              </a:spcAft>
-              <a:defRPr sz="1200" b="0">
+                <a:spcPts val="1560"/>
+              </a:spcAft>
+              <a:defRPr sz="1300" b="0">
                 <a:solidFill>
                   <a:srgbClr val="B0B0C0"/>
                 </a:solidFill>
@@ -5173,9 +5087,9 @@
           <a:p>
             <a:pPr algn="l">
               <a:spcAft>
-                <a:spcPts val="1380"/>
-              </a:spcAft>
-              <a:defRPr sz="1200" b="0">
+                <a:spcPts val="1560"/>
+              </a:spcAft>
+              <a:defRPr sz="1300" b="0">
                 <a:solidFill>
                   <a:srgbClr val="B0B0C0"/>
                 </a:solidFill>
@@ -5189,9 +5103,9 @@
           <a:p>
             <a:pPr algn="l">
               <a:spcAft>
-                <a:spcPts val="1380"/>
-              </a:spcAft>
-              <a:defRPr sz="1200" b="0">
+                <a:spcPts val="1560"/>
+              </a:spcAft>
+              <a:defRPr sz="1300" b="0">
                 <a:solidFill>
                   <a:srgbClr val="B0B0C0"/>
                 </a:solidFill>
@@ -5212,13 +5126,11 @@
         </p:nvSpPr>
         <p:spPr>
           <a:xfrm>
-            <a:off x="3657600" y="1554480"/>
-            <a:ext cx="2834640" cy="4114800"/>
+            <a:off x="3749039" y="1645920"/>
+            <a:ext cx="2926080" cy="4114800"/>
           </a:xfrm>
           <a:prstGeom prst="roundRect">
-            <a:avLst>
-              <a:gd name="adj" fmla="val 8000"/>
-            </a:avLst>
+            <a:avLst/>
           </a:prstGeom>
           <a:solidFill>
             <a:srgbClr val="14141C"/>
@@ -5257,8 +5169,8 @@
         </p:nvSpPr>
         <p:spPr>
           <a:xfrm>
-            <a:off x="3657600" y="1554480"/>
-            <a:ext cx="2834640" cy="45720"/>
+            <a:off x="3749039" y="1645920"/>
+            <a:ext cx="2926080" cy="45720"/>
           </a:xfrm>
           <a:prstGeom prst="rect">
             <a:avLst/>
@@ -5300,8 +5212,8 @@
         </p:nvSpPr>
         <p:spPr>
           <a:xfrm>
-            <a:off x="3840480" y="1664208"/>
-            <a:ext cx="2468880" cy="320040"/>
+            <a:off x="3977639" y="1783080"/>
+            <a:ext cx="2468880" cy="365760"/>
           </a:xfrm>
           <a:prstGeom prst="rect">
             <a:avLst/>
@@ -5315,7 +5227,7 @@
           <a:lstStyle/>
           <a:p>
             <a:pPr algn="l">
-              <a:defRPr sz="1500" b="1">
+              <a:defRPr sz="1600" b="1">
                 <a:solidFill>
                   <a:srgbClr val="1E3A8A"/>
                 </a:solidFill>
@@ -5336,8 +5248,8 @@
         </p:nvSpPr>
         <p:spPr>
           <a:xfrm>
-            <a:off x="3840480" y="2011680"/>
-            <a:ext cx="2468880" cy="3566160"/>
+            <a:off x="3977639" y="2194560"/>
+            <a:ext cx="2468880" cy="3474720"/>
           </a:xfrm>
           <a:prstGeom prst="rect">
             <a:avLst/>
@@ -5352,9 +5264,9 @@
           <a:p>
             <a:pPr algn="l">
               <a:spcAft>
-                <a:spcPts val="1380"/>
-              </a:spcAft>
-              <a:defRPr sz="1200" b="0">
+                <a:spcPts val="1560"/>
+              </a:spcAft>
+              <a:defRPr sz="1300" b="0">
                 <a:solidFill>
                   <a:srgbClr val="B0B0C0"/>
                 </a:solidFill>
@@ -5368,9 +5280,9 @@
           <a:p>
             <a:pPr algn="l">
               <a:spcAft>
-                <a:spcPts val="1380"/>
-              </a:spcAft>
-              <a:defRPr sz="1200" b="0">
+                <a:spcPts val="1560"/>
+              </a:spcAft>
+              <a:defRPr sz="1300" b="0">
                 <a:solidFill>
                   <a:srgbClr val="B0B0C0"/>
                 </a:solidFill>
@@ -5384,9 +5296,9 @@
           <a:p>
             <a:pPr algn="l">
               <a:spcAft>
-                <a:spcPts val="1380"/>
-              </a:spcAft>
-              <a:defRPr sz="1200" b="0">
+                <a:spcPts val="1560"/>
+              </a:spcAft>
+              <a:defRPr sz="1300" b="0">
                 <a:solidFill>
                   <a:srgbClr val="B0B0C0"/>
                 </a:solidFill>
@@ -5400,9 +5312,9 @@
           <a:p>
             <a:pPr algn="l">
               <a:spcAft>
-                <a:spcPts val="1380"/>
-              </a:spcAft>
-              <a:defRPr sz="1200" b="0">
+                <a:spcPts val="1560"/>
+              </a:spcAft>
+              <a:defRPr sz="1300" b="0">
                 <a:solidFill>
                   <a:srgbClr val="B0B0C0"/>
                 </a:solidFill>
@@ -5416,9 +5328,9 @@
           <a:p>
             <a:pPr algn="l">
               <a:spcAft>
-                <a:spcPts val="1380"/>
-              </a:spcAft>
-              <a:defRPr sz="1200" b="0">
+                <a:spcPts val="1560"/>
+              </a:spcAft>
+              <a:defRPr sz="1300" b="0">
                 <a:solidFill>
                   <a:srgbClr val="B0B0C0"/>
                 </a:solidFill>
@@ -5439,13 +5351,11 @@
         </p:nvSpPr>
         <p:spPr>
           <a:xfrm>
-            <a:off x="6858000" y="1554480"/>
-            <a:ext cx="2834640" cy="4114800"/>
+            <a:off x="6949440" y="1645920"/>
+            <a:ext cx="2926080" cy="4114800"/>
           </a:xfrm>
           <a:prstGeom prst="roundRect">
-            <a:avLst>
-              <a:gd name="adj" fmla="val 8000"/>
-            </a:avLst>
+            <a:avLst/>
           </a:prstGeom>
           <a:solidFill>
             <a:srgbClr val="14141C"/>
@@ -5484,8 +5394,8 @@
         </p:nvSpPr>
         <p:spPr>
           <a:xfrm>
-            <a:off x="6858000" y="1554480"/>
-            <a:ext cx="2834640" cy="45720"/>
+            <a:off x="6949440" y="1645920"/>
+            <a:ext cx="2926080" cy="45720"/>
           </a:xfrm>
           <a:prstGeom prst="rect">
             <a:avLst/>
@@ -5527,8 +5437,8 @@
         </p:nvSpPr>
         <p:spPr>
           <a:xfrm>
-            <a:off x="7040880" y="1664208"/>
-            <a:ext cx="2468880" cy="320040"/>
+            <a:off x="7178040" y="1783080"/>
+            <a:ext cx="2468880" cy="365760"/>
           </a:xfrm>
           <a:prstGeom prst="rect">
             <a:avLst/>
@@ -5542,7 +5452,7 @@
           <a:lstStyle/>
           <a:p>
             <a:pPr algn="l">
-              <a:defRPr sz="1500" b="1">
+              <a:defRPr sz="1600" b="1">
                 <a:solidFill>
                   <a:srgbClr val="22C55E"/>
                 </a:solidFill>
@@ -5563,8 +5473,8 @@
         </p:nvSpPr>
         <p:spPr>
           <a:xfrm>
-            <a:off x="7040880" y="2011680"/>
-            <a:ext cx="2468880" cy="3566160"/>
+            <a:off x="7178040" y="2194560"/>
+            <a:ext cx="2468880" cy="3474720"/>
           </a:xfrm>
           <a:prstGeom prst="rect">
             <a:avLst/>
@@ -5579,9 +5489,9 @@
           <a:p>
             <a:pPr algn="l">
               <a:spcAft>
-                <a:spcPts val="1380"/>
-              </a:spcAft>
-              <a:defRPr sz="1200" b="0">
+                <a:spcPts val="1560"/>
+              </a:spcAft>
+              <a:defRPr sz="1300" b="0">
                 <a:solidFill>
                   <a:srgbClr val="B0B0C0"/>
                 </a:solidFill>
@@ -5595,9 +5505,9 @@
           <a:p>
             <a:pPr algn="l">
               <a:spcAft>
-                <a:spcPts val="1380"/>
-              </a:spcAft>
-              <a:defRPr sz="1200" b="0">
+                <a:spcPts val="1560"/>
+              </a:spcAft>
+              <a:defRPr sz="1300" b="0">
                 <a:solidFill>
                   <a:srgbClr val="B0B0C0"/>
                 </a:solidFill>
@@ -5611,9 +5521,9 @@
           <a:p>
             <a:pPr algn="l">
               <a:spcAft>
-                <a:spcPts val="1380"/>
-              </a:spcAft>
-              <a:defRPr sz="1200" b="0">
+                <a:spcPts val="1560"/>
+              </a:spcAft>
+              <a:defRPr sz="1300" b="0">
                 <a:solidFill>
                   <a:srgbClr val="B0B0C0"/>
                 </a:solidFill>
@@ -5627,9 +5537,9 @@
           <a:p>
             <a:pPr algn="l">
               <a:spcAft>
-                <a:spcPts val="1380"/>
-              </a:spcAft>
-              <a:defRPr sz="1200" b="0">
+                <a:spcPts val="1560"/>
+              </a:spcAft>
+              <a:defRPr sz="1300" b="0">
                 <a:solidFill>
                   <a:srgbClr val="B0B0C0"/>
                 </a:solidFill>
@@ -5643,9 +5553,9 @@
           <a:p>
             <a:pPr algn="l">
               <a:spcAft>
-                <a:spcPts val="1380"/>
-              </a:spcAft>
-              <a:defRPr sz="1200" b="0">
+                <a:spcPts val="1560"/>
+              </a:spcAft>
+              <a:defRPr sz="1300" b="0">
                 <a:solidFill>
                   <a:srgbClr val="B0B0C0"/>
                 </a:solidFill>
@@ -5666,13 +5576,11 @@
         </p:nvSpPr>
         <p:spPr>
           <a:xfrm>
-            <a:off x="10058400" y="1554480"/>
-            <a:ext cx="2834640" cy="4114800"/>
+            <a:off x="10149840" y="1645920"/>
+            <a:ext cx="2926080" cy="4114800"/>
           </a:xfrm>
           <a:prstGeom prst="roundRect">
-            <a:avLst>
-              <a:gd name="adj" fmla="val 8000"/>
-            </a:avLst>
+            <a:avLst/>
           </a:prstGeom>
           <a:solidFill>
             <a:srgbClr val="14141C"/>
@@ -5711,8 +5619,8 @@
         </p:nvSpPr>
         <p:spPr>
           <a:xfrm>
-            <a:off x="10058400" y="1554480"/>
-            <a:ext cx="2834640" cy="45720"/>
+            <a:off x="10149840" y="1645920"/>
+            <a:ext cx="2926080" cy="45720"/>
           </a:xfrm>
           <a:prstGeom prst="rect">
             <a:avLst/>
@@ -5754,8 +5662,8 @@
         </p:nvSpPr>
         <p:spPr>
           <a:xfrm>
-            <a:off x="10241280" y="1664208"/>
-            <a:ext cx="2468880" cy="320040"/>
+            <a:off x="10378440" y="1783080"/>
+            <a:ext cx="2468880" cy="365760"/>
           </a:xfrm>
           <a:prstGeom prst="rect">
             <a:avLst/>
@@ -5769,7 +5677,7 @@
           <a:lstStyle/>
           <a:p>
             <a:pPr algn="l">
-              <a:defRPr sz="1500" b="1">
+              <a:defRPr sz="1600" b="1">
                 <a:solidFill>
                   <a:srgbClr val="A855F7"/>
                 </a:solidFill>
@@ -5777,7 +5685,7 @@
               </a:defRPr>
             </a:pPr>
             <a:r>
-              <a:t>Tools &amp; Deploy</a:t>
+              <a:t>Tools</a:t>
             </a:r>
           </a:p>
         </p:txBody>
@@ -5790,8 +5698,8 @@
         </p:nvSpPr>
         <p:spPr>
           <a:xfrm>
-            <a:off x="10241280" y="2011680"/>
-            <a:ext cx="2468880" cy="3566160"/>
+            <a:off x="10378440" y="2194560"/>
+            <a:ext cx="2468880" cy="3474720"/>
           </a:xfrm>
           <a:prstGeom prst="rect">
             <a:avLst/>
@@ -5806,9 +5714,9 @@
           <a:p>
             <a:pPr algn="l">
               <a:spcAft>
-                <a:spcPts val="1380"/>
-              </a:spcAft>
-              <a:defRPr sz="1200" b="0">
+                <a:spcPts val="1560"/>
+              </a:spcAft>
+              <a:defRPr sz="1300" b="0">
                 <a:solidFill>
                   <a:srgbClr val="B0B0C0"/>
                 </a:solidFill>
@@ -5822,9 +5730,9 @@
           <a:p>
             <a:pPr algn="l">
               <a:spcAft>
-                <a:spcPts val="1380"/>
-              </a:spcAft>
-              <a:defRPr sz="1200" b="0">
+                <a:spcPts val="1560"/>
+              </a:spcAft>
+              <a:defRPr sz="1300" b="0">
                 <a:solidFill>
                   <a:srgbClr val="B0B0C0"/>
                 </a:solidFill>
@@ -5832,15 +5740,15 @@
               </a:defRPr>
             </a:pPr>
             <a:r>
-              <a:t>React Hook Form + Zod</a:t>
-            </a:r>
-          </a:p>
-          <a:p>
-            <a:pPr algn="l">
-              <a:spcAft>
-                <a:spcPts val="1380"/>
-              </a:spcAft>
-              <a:defRPr sz="1200" b="0">
+              <a:t>React Hook Form</a:t>
+            </a:r>
+          </a:p>
+          <a:p>
+            <a:pPr algn="l">
+              <a:spcAft>
+                <a:spcPts val="1560"/>
+              </a:spcAft>
+              <a:defRPr sz="1300" b="0">
                 <a:solidFill>
                   <a:srgbClr val="B0B0C0"/>
                 </a:solidFill>
@@ -5848,15 +5756,31 @@
               </a:defRPr>
             </a:pPr>
             <a:r>
+              <a:t>Zod validation</a:t>
+            </a:r>
+          </a:p>
+          <a:p>
+            <a:pPr algn="l">
+              <a:spcAft>
+                <a:spcPts val="1560"/>
+              </a:spcAft>
+              <a:defRPr sz="1300" b="0">
+                <a:solidFill>
+                  <a:srgbClr val="B0B0C0"/>
+                </a:solidFill>
+                <a:latin typeface="Segoe UI"/>
+              </a:defRPr>
+            </a:pPr>
+            <a:r>
               <a:t>Recharts</a:t>
             </a:r>
           </a:p>
           <a:p>
             <a:pPr algn="l">
               <a:spcAft>
-                <a:spcPts val="1380"/>
-              </a:spcAft>
-              <a:defRPr sz="1200" b="0">
+                <a:spcPts val="1560"/>
+              </a:spcAft>
+              <a:defRPr sz="1300" b="0">
                 <a:solidFill>
                   <a:srgbClr val="B0B0C0"/>
                 </a:solidFill>
@@ -5865,22 +5789,6 @@
             </a:pPr>
             <a:r>
               <a:t>Netlify deployment</a:t>
-            </a:r>
-          </a:p>
-          <a:p>
-            <a:pPr algn="l">
-              <a:spcAft>
-                <a:spcPts val="1380"/>
-              </a:spcAft>
-              <a:defRPr sz="1200" b="0">
-                <a:solidFill>
-                  <a:srgbClr val="B0B0C0"/>
-                </a:solidFill>
-                <a:latin typeface="Segoe UI"/>
-              </a:defRPr>
-            </a:pPr>
-            <a:r>
-              <a:t>Vite build system</a:t>
             </a:r>
           </a:p>
         </p:txBody>
@@ -5893,8 +5801,8 @@
         </p:nvSpPr>
         <p:spPr>
           <a:xfrm>
-            <a:off x="731520" y="6446520"/>
-            <a:ext cx="7315200" cy="320040"/>
+            <a:off x="731520" y="6400800"/>
+            <a:ext cx="7315200" cy="365760"/>
           </a:xfrm>
           <a:prstGeom prst="rect">
             <a:avLst/>
@@ -5908,7 +5816,7 @@
           <a:lstStyle/>
           <a:p>
             <a:pPr algn="l">
-              <a:defRPr sz="1000" b="0">
+              <a:defRPr sz="1100" b="0">
                 <a:solidFill>
                   <a:srgbClr val="707080"/>
                 </a:solidFill>
@@ -5962,7 +5870,7 @@
             <a:avLst/>
           </a:prstGeom>
           <a:solidFill>
-            <a:srgbClr val="14B8A6"/>
+            <a:srgbClr val="F97316"/>
           </a:solidFill>
           <a:ln>
             <a:noFill/>
@@ -6013,7 +5921,7 @@
           <a:lstStyle/>
           <a:p>
             <a:pPr algn="l">
-              <a:defRPr sz="2800" b="1">
+              <a:defRPr sz="3000" b="1">
                 <a:solidFill>
                   <a:srgbClr val="FFFFFF"/>
                 </a:solidFill>
@@ -6034,7 +5942,7 @@
         </p:nvSpPr>
         <p:spPr>
           <a:xfrm>
-            <a:off x="731520" y="868680"/>
+            <a:off x="731520" y="914400"/>
             <a:ext cx="10058400" cy="457200"/>
           </a:xfrm>
           <a:prstGeom prst="rect">
@@ -6049,7 +5957,7 @@
           <a:lstStyle/>
           <a:p>
             <a:pPr algn="l">
-              <a:defRPr sz="1400" b="0">
+              <a:defRPr sz="1500" b="0">
                 <a:solidFill>
                   <a:srgbClr val="B0B0C0"/>
                 </a:solidFill>
@@ -6070,8 +5978,8 @@
         </p:nvSpPr>
         <p:spPr>
           <a:xfrm>
-            <a:off x="11247120" y="365760"/>
-            <a:ext cx="640080" cy="365760"/>
+            <a:off x="11155680" y="365760"/>
+            <a:ext cx="731520" cy="457200"/>
           </a:xfrm>
           <a:prstGeom prst="rect">
             <a:avLst/>
@@ -6085,7 +5993,7 @@
           <a:lstStyle/>
           <a:p>
             <a:pPr algn="r">
-              <a:defRPr sz="1300" b="0">
+              <a:defRPr sz="1400" b="0">
                 <a:solidFill>
                   <a:srgbClr val="707080"/>
                 </a:solidFill>
@@ -6106,14 +6014,14 @@
         </p:nvSpPr>
         <p:spPr>
           <a:xfrm>
-            <a:off x="731520" y="1234440"/>
+            <a:off x="731520" y="1325880"/>
             <a:ext cx="10698480" cy="19050"/>
           </a:xfrm>
           <a:prstGeom prst="rect">
             <a:avLst/>
           </a:prstGeom>
           <a:solidFill>
-            <a:srgbClr val="303040"/>
+            <a:srgbClr val="333344"/>
           </a:solidFill>
           <a:ln>
             <a:noFill/>
@@ -6149,7 +6057,7 @@
         </p:nvSpPr>
         <p:spPr>
           <a:xfrm>
-            <a:off x="731520" y="1554480"/>
+            <a:off x="731520" y="1645920"/>
             <a:ext cx="4572000" cy="365760"/>
           </a:xfrm>
           <a:prstGeom prst="rect">
@@ -6164,7 +6072,7 @@
           <a:lstStyle/>
           <a:p>
             <a:pPr algn="l">
-              <a:defRPr sz="1700" b="1">
+              <a:defRPr sz="1800" b="1">
                 <a:solidFill>
                   <a:srgbClr val="F97316"/>
                 </a:solidFill>
@@ -6185,7 +6093,7 @@
         </p:nvSpPr>
         <p:spPr>
           <a:xfrm>
-            <a:off x="731520" y="2011680"/>
+            <a:off x="731520" y="2103120"/>
             <a:ext cx="5029200" cy="2743200"/>
           </a:xfrm>
           <a:prstGeom prst="rect">
@@ -6211,7 +6119,7 @@
               </a:defRPr>
             </a:pPr>
             <a:r>
-              <a:t>Years (1–4)</a:t>
+              <a:t>Years (1-4)</a:t>
             </a:r>
           </a:p>
           <a:p>
@@ -6288,7 +6196,7 @@
         </p:nvSpPr>
         <p:spPr>
           <a:xfrm>
-            <a:off x="6400800" y="1554480"/>
+            <a:off x="6400800" y="1645920"/>
             <a:ext cx="4572000" cy="365760"/>
           </a:xfrm>
           <a:prstGeom prst="rect">
@@ -6303,9 +6211,9 @@
           <a:lstStyle/>
           <a:p>
             <a:pPr algn="l">
-              <a:defRPr sz="1700" b="1">
-                <a:solidFill>
-                  <a:srgbClr val="14B8A6"/>
+              <a:defRPr sz="1800" b="1">
+                <a:solidFill>
+                  <a:srgbClr val="1E3A8A"/>
                 </a:solidFill>
                 <a:latin typeface="Segoe UI"/>
               </a:defRPr>
@@ -6324,7 +6232,7 @@
         </p:nvSpPr>
         <p:spPr>
           <a:xfrm>
-            <a:off x="6400800" y="2011680"/>
+            <a:off x="6400800" y="2103120"/>
             <a:ext cx="5029200" cy="3657600"/>
           </a:xfrm>
           <a:prstGeom prst="rect">
@@ -6475,16 +6383,14 @@
         </p:nvSpPr>
         <p:spPr>
           <a:xfrm>
-            <a:off x="731520" y="4937760"/>
+            <a:off x="731520" y="5029200"/>
             <a:ext cx="10515600" cy="822960"/>
           </a:xfrm>
           <a:prstGeom prst="roundRect">
-            <a:avLst>
-              <a:gd name="adj" fmla="val 5000"/>
-            </a:avLst>
+            <a:avLst/>
           </a:prstGeom>
           <a:solidFill>
-            <a:srgbClr val="1A1A28"/>
+            <a:srgbClr val="14141C"/>
           </a:solidFill>
           <a:ln>
             <a:noFill/>
@@ -6520,7 +6426,7 @@
         </p:nvSpPr>
         <p:spPr>
           <a:xfrm>
-            <a:off x="1005840" y="4983480"/>
+            <a:off x="1005840" y="5074920"/>
             <a:ext cx="10058400" cy="365760"/>
           </a:xfrm>
           <a:prstGeom prst="rect">
@@ -6556,7 +6462,7 @@
         </p:nvSpPr>
         <p:spPr>
           <a:xfrm>
-            <a:off x="1005840" y="5303520"/>
+            <a:off x="1005840" y="5394960"/>
             <a:ext cx="10058400" cy="365760"/>
           </a:xfrm>
           <a:prstGeom prst="rect">
@@ -6592,8 +6498,8 @@
         </p:nvSpPr>
         <p:spPr>
           <a:xfrm>
-            <a:off x="731520" y="6446520"/>
-            <a:ext cx="7315200" cy="320040"/>
+            <a:off x="731520" y="6400800"/>
+            <a:ext cx="7315200" cy="365760"/>
           </a:xfrm>
           <a:prstGeom prst="rect">
             <a:avLst/>
@@ -6607,7 +6513,7 @@
           <a:lstStyle/>
           <a:p>
             <a:pPr algn="l">
-              <a:defRPr sz="1000" b="0">
+              <a:defRPr sz="1100" b="0">
                 <a:solidFill>
                   <a:srgbClr val="707080"/>
                 </a:solidFill>
@@ -6661,7 +6567,7 @@
             <a:avLst/>
           </a:prstGeom>
           <a:solidFill>
-            <a:srgbClr val="14B8A6"/>
+            <a:srgbClr val="F97316"/>
           </a:solidFill>
           <a:ln>
             <a:noFill/>
@@ -6712,7 +6618,7 @@
           <a:lstStyle/>
           <a:p>
             <a:pPr algn="l">
-              <a:defRPr sz="2800" b="1">
+              <a:defRPr sz="3000" b="1">
                 <a:solidFill>
                   <a:srgbClr val="FFFFFF"/>
                 </a:solidFill>
@@ -6733,7 +6639,7 @@
         </p:nvSpPr>
         <p:spPr>
           <a:xfrm>
-            <a:off x="731520" y="868680"/>
+            <a:off x="731520" y="914400"/>
             <a:ext cx="10058400" cy="457200"/>
           </a:xfrm>
           <a:prstGeom prst="rect">
@@ -6748,7 +6654,7 @@
           <a:lstStyle/>
           <a:p>
             <a:pPr algn="l">
-              <a:defRPr sz="1400" b="0">
+              <a:defRPr sz="1500" b="0">
                 <a:solidFill>
                   <a:srgbClr val="B0B0C0"/>
                 </a:solidFill>
@@ -6769,8 +6675,8 @@
         </p:nvSpPr>
         <p:spPr>
           <a:xfrm>
-            <a:off x="11247120" y="365760"/>
-            <a:ext cx="640080" cy="365760"/>
+            <a:off x="11155680" y="365760"/>
+            <a:ext cx="731520" cy="457200"/>
           </a:xfrm>
           <a:prstGeom prst="rect">
             <a:avLst/>
@@ -6784,7 +6690,7 @@
           <a:lstStyle/>
           <a:p>
             <a:pPr algn="r">
-              <a:defRPr sz="1300" b="0">
+              <a:defRPr sz="1400" b="0">
                 <a:solidFill>
                   <a:srgbClr val="707080"/>
                 </a:solidFill>
@@ -6805,14 +6711,14 @@
         </p:nvSpPr>
         <p:spPr>
           <a:xfrm>
-            <a:off x="731520" y="1234440"/>
+            <a:off x="731520" y="1325880"/>
             <a:ext cx="10698480" cy="19050"/>
           </a:xfrm>
           <a:prstGeom prst="rect">
             <a:avLst/>
           </a:prstGeom>
           <a:solidFill>
-            <a:srgbClr val="303040"/>
+            <a:srgbClr val="333344"/>
           </a:solidFill>
           <a:ln>
             <a:noFill/>
@@ -6848,7 +6754,7 @@
         </p:nvSpPr>
         <p:spPr>
           <a:xfrm>
-            <a:off x="914400" y="1645920"/>
+            <a:off x="914400" y="1828800"/>
             <a:ext cx="10515600" cy="4114800"/>
           </a:xfrm>
           <a:prstGeom prst="rect">
@@ -6862,11 +6768,11 @@
           </a:bodyPr>
           <a:lstStyle/>
           <a:p>
-            <a:pPr>
-              <a:spcAft>
-                <a:spcPts val="2100"/>
-              </a:spcAft>
-              <a:defRPr sz="1500">
+            <a:pPr algn="l">
+              <a:spcAft>
+                <a:spcPts val="2400"/>
+              </a:spcAft>
+              <a:defRPr sz="1600" b="0">
                 <a:solidFill>
                   <a:srgbClr val="FFFFFF"/>
                 </a:solidFill>
@@ -6876,15 +6782,15 @@
               <a:buChar char="▸"/>
             </a:pPr>
             <a:r>
-              <a:t>Row Level Security (RLS) enabled on every table — no data leaks without explicit policy</a:t>
-            </a:r>
-          </a:p>
-          <a:p>
-            <a:pPr>
-              <a:spcAft>
-                <a:spcPts val="2100"/>
-              </a:spcAft>
-              <a:defRPr sz="1500">
+              <a:t>Row Level Security (RLS) enabled on every table</a:t>
+            </a:r>
+          </a:p>
+          <a:p>
+            <a:pPr algn="l">
+              <a:spcAft>
+                <a:spcPts val="2400"/>
+              </a:spcAft>
+              <a:defRPr sz="1600" b="0">
                 <a:solidFill>
                   <a:srgbClr val="FFFFFF"/>
                 </a:solidFill>
@@ -6898,11 +6804,11 @@
             </a:r>
           </a:p>
           <a:p>
-            <a:pPr>
-              <a:spcAft>
-                <a:spcPts val="2100"/>
-              </a:spcAft>
-              <a:defRPr sz="1500">
+            <a:pPr algn="l">
+              <a:spcAft>
+                <a:spcPts val="2400"/>
+              </a:spcAft>
+              <a:defRPr sz="1600" b="0">
                 <a:solidFill>
                   <a:srgbClr val="FFFFFF"/>
                 </a:solidFill>
@@ -6916,11 +6822,11 @@
             </a:r>
           </a:p>
           <a:p>
-            <a:pPr>
-              <a:spcAft>
-                <a:spcPts val="2100"/>
-              </a:spcAft>
-              <a:defRPr sz="1500">
+            <a:pPr algn="l">
+              <a:spcAft>
+                <a:spcPts val="2400"/>
+              </a:spcAft>
+              <a:defRPr sz="1600" b="0">
                 <a:solidFill>
                   <a:srgbClr val="FFFFFF"/>
                 </a:solidFill>
@@ -6930,15 +6836,15 @@
               <a:buChar char="▸"/>
             </a:pPr>
             <a:r>
-              <a:t>Security-hardened SECURITY DEFINER function with SET search_path = '' to prevent injection</a:t>
-            </a:r>
-          </a:p>
-          <a:p>
-            <a:pPr>
-              <a:spcAft>
-                <a:spcPts val="2100"/>
-              </a:spcAft>
-              <a:defRPr sz="1500">
+              <a:t>Security-hardened SECURITY DEFINER function with SET search_path = ''</a:t>
+            </a:r>
+          </a:p>
+          <a:p>
+            <a:pPr algn="l">
+              <a:spcAft>
+                <a:spcPts val="2400"/>
+              </a:spcAft>
+              <a:defRPr sz="1600" b="0">
                 <a:solidFill>
                   <a:srgbClr val="FFFFFF"/>
                 </a:solidFill>
@@ -6948,15 +6854,15 @@
               <a:buChar char="▸"/>
             </a:pPr>
             <a:r>
-              <a:t>Feedback rate limiting: 5 submissions per IP per 24 hours, enforced server-side</a:t>
-            </a:r>
-          </a:p>
-          <a:p>
-            <a:pPr>
-              <a:spcAft>
-                <a:spcPts val="2100"/>
-              </a:spcAft>
-              <a:defRPr sz="1500">
+              <a:t>Feedback rate limiting: 5 submissions per IP per 24 hours</a:t>
+            </a:r>
+          </a:p>
+          <a:p>
+            <a:pPr algn="l">
+              <a:spcAft>
+                <a:spcPts val="2400"/>
+              </a:spcAft>
+              <a:defRPr sz="1600" b="0">
                 <a:solidFill>
                   <a:srgbClr val="FFFFFF"/>
                 </a:solidFill>
@@ -6966,15 +6872,15 @@
               <a:buChar char="▸"/>
             </a:pPr>
             <a:r>
-              <a:t>Server-side input validation and sanitization on all feedback submissions</a:t>
-            </a:r>
-          </a:p>
-          <a:p>
-            <a:pPr>
-              <a:spcAft>
-                <a:spcPts val="2100"/>
-              </a:spcAft>
-              <a:defRPr sz="1500">
+              <a:t>Server-side input validation and sanitization on feedback</a:t>
+            </a:r>
+          </a:p>
+          <a:p>
+            <a:pPr algn="l">
+              <a:spcAft>
+                <a:spcPts val="2400"/>
+              </a:spcAft>
+              <a:defRPr sz="1600" b="0">
                 <a:solidFill>
                   <a:srgbClr val="FFFFFF"/>
                 </a:solidFill>
@@ -6984,15 +6890,15 @@
               <a:buChar char="▸"/>
             </a:pPr>
             <a:r>
-              <a:t>Storage bucket: public read, admin-only write — students cannot upload or modify content</a:t>
-            </a:r>
-          </a:p>
-          <a:p>
-            <a:pPr>
-              <a:spcAft>
-                <a:spcPts val="2100"/>
-              </a:spcAft>
-              <a:defRPr sz="1500">
+              <a:t>Storage bucket: public read, admin-only write</a:t>
+            </a:r>
+          </a:p>
+          <a:p>
+            <a:pPr algn="l">
+              <a:spcAft>
+                <a:spcPts val="2400"/>
+              </a:spcAft>
+              <a:defRPr sz="1600" b="0">
                 <a:solidFill>
                   <a:srgbClr val="FFFFFF"/>
                 </a:solidFill>
@@ -7002,7 +6908,7 @@
               <a:buChar char="▸"/>
             </a:pPr>
             <a:r>
-              <a:t>Admin authorization checked via Supabase session + admin_users whitelist table</a:t>
+              <a:t>Admin authorization checked via Supabase session + admin_users table</a:t>
             </a:r>
           </a:p>
         </p:txBody>
@@ -7015,8 +6921,8 @@
         </p:nvSpPr>
         <p:spPr>
           <a:xfrm>
-            <a:off x="731520" y="6446520"/>
-            <a:ext cx="7315200" cy="320040"/>
+            <a:off x="731520" y="6400800"/>
+            <a:ext cx="7315200" cy="365760"/>
           </a:xfrm>
           <a:prstGeom prst="rect">
             <a:avLst/>
@@ -7030,7 +6936,7 @@
           <a:lstStyle/>
           <a:p>
             <a:pPr algn="l">
-              <a:defRPr sz="1000" b="0">
+              <a:defRPr sz="1100" b="0">
                 <a:solidFill>
                   <a:srgbClr val="707080"/>
                 </a:solidFill>
@@ -7084,7 +6990,7 @@
             <a:avLst/>
           </a:prstGeom>
           <a:solidFill>
-            <a:srgbClr val="14B8A6"/>
+            <a:srgbClr val="F97316"/>
           </a:solidFill>
           <a:ln>
             <a:noFill/>
@@ -7135,7 +7041,7 @@
           <a:lstStyle/>
           <a:p>
             <a:pPr algn="l">
-              <a:defRPr sz="2800" b="1">
+              <a:defRPr sz="3000" b="1">
                 <a:solidFill>
                   <a:srgbClr val="FFFFFF"/>
                 </a:solidFill>
@@ -7156,7 +7062,7 @@
         </p:nvSpPr>
         <p:spPr>
           <a:xfrm>
-            <a:off x="731520" y="868680"/>
+            <a:off x="731520" y="914400"/>
             <a:ext cx="10058400" cy="457200"/>
           </a:xfrm>
           <a:prstGeom prst="rect">
@@ -7171,7 +7077,7 @@
           <a:lstStyle/>
           <a:p>
             <a:pPr algn="l">
-              <a:defRPr sz="1400" b="0">
+              <a:defRPr sz="1500" b="0">
                 <a:solidFill>
                   <a:srgbClr val="B0B0C0"/>
                 </a:solidFill>
@@ -7192,8 +7098,8 @@
         </p:nvSpPr>
         <p:spPr>
           <a:xfrm>
-            <a:off x="11247120" y="365760"/>
-            <a:ext cx="640080" cy="365760"/>
+            <a:off x="11155680" y="365760"/>
+            <a:ext cx="731520" cy="457200"/>
           </a:xfrm>
           <a:prstGeom prst="rect">
             <a:avLst/>
@@ -7207,7 +7113,7 @@
           <a:lstStyle/>
           <a:p>
             <a:pPr algn="r">
-              <a:defRPr sz="1300" b="0">
+              <a:defRPr sz="1400" b="0">
                 <a:solidFill>
                   <a:srgbClr val="707080"/>
                 </a:solidFill>
@@ -7228,14 +7134,14 @@
         </p:nvSpPr>
         <p:spPr>
           <a:xfrm>
-            <a:off x="731520" y="1234440"/>
+            <a:off x="731520" y="1325880"/>
             <a:ext cx="10698480" cy="19050"/>
           </a:xfrm>
           <a:prstGeom prst="rect">
             <a:avLst/>
           </a:prstGeom>
           <a:solidFill>
-            <a:srgbClr val="303040"/>
+            <a:srgbClr val="333344"/>
           </a:solidFill>
           <a:ln>
             <a:noFill/>
@@ -7271,13 +7177,11 @@
         </p:nvSpPr>
         <p:spPr>
           <a:xfrm>
-            <a:off x="457200" y="1554480"/>
-            <a:ext cx="2834640" cy="4114800"/>
+            <a:off x="548640" y="1645920"/>
+            <a:ext cx="2926080" cy="4114800"/>
           </a:xfrm>
           <a:prstGeom prst="roundRect">
-            <a:avLst>
-              <a:gd name="adj" fmla="val 8000"/>
-            </a:avLst>
+            <a:avLst/>
           </a:prstGeom>
           <a:solidFill>
             <a:srgbClr val="14141C"/>
@@ -7316,8 +7220,8 @@
         </p:nvSpPr>
         <p:spPr>
           <a:xfrm>
-            <a:off x="457200" y="1554480"/>
-            <a:ext cx="2834640" cy="45720"/>
+            <a:off x="548640" y="1645920"/>
+            <a:ext cx="2926080" cy="45720"/>
           </a:xfrm>
           <a:prstGeom prst="rect">
             <a:avLst/>
@@ -7359,8 +7263,8 @@
         </p:nvSpPr>
         <p:spPr>
           <a:xfrm>
-            <a:off x="640080" y="1664208"/>
-            <a:ext cx="2468880" cy="320040"/>
+            <a:off x="777240" y="1783080"/>
+            <a:ext cx="2468880" cy="365760"/>
           </a:xfrm>
           <a:prstGeom prst="rect">
             <a:avLst/>
@@ -7374,7 +7278,7 @@
           <a:lstStyle/>
           <a:p>
             <a:pPr algn="l">
-              <a:defRPr sz="1400" b="1">
+              <a:defRPr sz="1500" b="1">
                 <a:solidFill>
                   <a:srgbClr val="F97316"/>
                 </a:solidFill>
@@ -7395,8 +7299,8 @@
         </p:nvSpPr>
         <p:spPr>
           <a:xfrm>
-            <a:off x="640080" y="2011680"/>
-            <a:ext cx="2468880" cy="3566160"/>
+            <a:off x="777240" y="2194560"/>
+            <a:ext cx="2468880" cy="3474720"/>
           </a:xfrm>
           <a:prstGeom prst="rect">
             <a:avLst/>
@@ -7411,7 +7315,7 @@
           <a:p>
             <a:pPr algn="l">
               <a:spcAft>
-                <a:spcPts val="1380"/>
+                <a:spcPts val="1439"/>
               </a:spcAft>
               <a:defRPr sz="1200" b="0">
                 <a:solidFill>
@@ -7427,7 +7331,7 @@
           <a:p>
             <a:pPr algn="l">
               <a:spcAft>
-                <a:spcPts val="1380"/>
+                <a:spcPts val="1439"/>
               </a:spcAft>
               <a:defRPr sz="1200" b="0">
                 <a:solidFill>
@@ -7443,7 +7347,7 @@
           <a:p>
             <a:pPr algn="l">
               <a:spcAft>
-                <a:spcPts val="1380"/>
+                <a:spcPts val="1439"/>
               </a:spcAft>
               <a:defRPr sz="1200" b="0">
                 <a:solidFill>
@@ -7459,7 +7363,7 @@
           <a:p>
             <a:pPr algn="l">
               <a:spcAft>
-                <a:spcPts val="1380"/>
+                <a:spcPts val="1439"/>
               </a:spcAft>
               <a:defRPr sz="1200" b="0">
                 <a:solidFill>
@@ -7475,7 +7379,7 @@
           <a:p>
             <a:pPr algn="l">
               <a:spcAft>
-                <a:spcPts val="1380"/>
+                <a:spcPts val="1439"/>
               </a:spcAft>
               <a:defRPr sz="1200" b="0">
                 <a:solidFill>
@@ -7491,7 +7395,7 @@
           <a:p>
             <a:pPr algn="l">
               <a:spcAft>
-                <a:spcPts val="1380"/>
+                <a:spcPts val="1439"/>
               </a:spcAft>
               <a:defRPr sz="1200" b="0">
                 <a:solidFill>
@@ -7507,7 +7411,7 @@
           <a:p>
             <a:pPr algn="l">
               <a:spcAft>
-                <a:spcPts val="1380"/>
+                <a:spcPts val="1439"/>
               </a:spcAft>
               <a:defRPr sz="1200" b="0">
                 <a:solidFill>
@@ -7517,7 +7421,7 @@
               </a:defRPr>
             </a:pPr>
             <a:r>
-              <a:t>/imp-questions — Imp Qs</a:t>
+              <a:t>/imp-questions — Imp Questions</a:t>
             </a:r>
           </a:p>
         </p:txBody>
@@ -7530,13 +7434,11 @@
         </p:nvSpPr>
         <p:spPr>
           <a:xfrm>
-            <a:off x="3657600" y="1554480"/>
-            <a:ext cx="2834640" cy="4114800"/>
+            <a:off x="3749039" y="1645920"/>
+            <a:ext cx="2926080" cy="4114800"/>
           </a:xfrm>
           <a:prstGeom prst="roundRect">
-            <a:avLst>
-              <a:gd name="adj" fmla="val 8000"/>
-            </a:avLst>
+            <a:avLst/>
           </a:prstGeom>
           <a:solidFill>
             <a:srgbClr val="14141C"/>
@@ -7575,8 +7477,8 @@
         </p:nvSpPr>
         <p:spPr>
           <a:xfrm>
-            <a:off x="3657600" y="1554480"/>
-            <a:ext cx="2834640" cy="45720"/>
+            <a:off x="3749039" y="1645920"/>
+            <a:ext cx="2926080" cy="45720"/>
           </a:xfrm>
           <a:prstGeom prst="rect">
             <a:avLst/>
@@ -7618,8 +7520,8 @@
         </p:nvSpPr>
         <p:spPr>
           <a:xfrm>
-            <a:off x="3840480" y="1664208"/>
-            <a:ext cx="2468880" cy="320040"/>
+            <a:off x="3977639" y="1783080"/>
+            <a:ext cx="2468880" cy="365760"/>
           </a:xfrm>
           <a:prstGeom prst="rect">
             <a:avLst/>
@@ -7633,7 +7535,7 @@
           <a:lstStyle/>
           <a:p>
             <a:pPr algn="l">
-              <a:defRPr sz="1400" b="1">
+              <a:defRPr sz="1500" b="1">
                 <a:solidFill>
                   <a:srgbClr val="1E3A8A"/>
                 </a:solidFill>
@@ -7654,8 +7556,8 @@
         </p:nvSpPr>
         <p:spPr>
           <a:xfrm>
-            <a:off x="3840480" y="2011680"/>
-            <a:ext cx="2468880" cy="3566160"/>
+            <a:off x="3977639" y="2194560"/>
+            <a:ext cx="2468880" cy="3474720"/>
           </a:xfrm>
           <a:prstGeom prst="rect">
             <a:avLst/>
@@ -7670,7 +7572,7 @@
           <a:p>
             <a:pPr algn="l">
               <a:spcAft>
-                <a:spcPts val="1380"/>
+                <a:spcPts val="1439"/>
               </a:spcAft>
               <a:defRPr sz="1200" b="0">
                 <a:solidFill>
@@ -7686,7 +7588,7 @@
           <a:p>
             <a:pPr algn="l">
               <a:spcAft>
-                <a:spcPts val="1380"/>
+                <a:spcPts val="1439"/>
               </a:spcAft>
               <a:defRPr sz="1200" b="0">
                 <a:solidFill>
@@ -7702,7 +7604,7 @@
           <a:p>
             <a:pPr algn="l">
               <a:spcAft>
-                <a:spcPts val="1380"/>
+                <a:spcPts val="1439"/>
               </a:spcAft>
               <a:defRPr sz="1200" b="0">
                 <a:solidFill>
@@ -7712,13 +7614,13 @@
               </a:defRPr>
             </a:pPr>
             <a:r>
-              <a:t>/feedback — Feedback</a:t>
-            </a:r>
-          </a:p>
-          <a:p>
-            <a:pPr algn="l">
-              <a:spcAft>
-                <a:spcPts val="1380"/>
+              <a:t>/feedback — Feedback Form</a:t>
+            </a:r>
+          </a:p>
+          <a:p>
+            <a:pPr algn="l">
+              <a:spcAft>
+                <a:spcPts val="1439"/>
               </a:spcAft>
               <a:defRPr sz="1200" b="0">
                 <a:solidFill>
@@ -7734,7 +7636,7 @@
           <a:p>
             <a:pPr algn="l">
               <a:spcAft>
-                <a:spcPts val="1380"/>
+                <a:spcPts val="1439"/>
               </a:spcAft>
               <a:defRPr sz="1200" b="0">
                 <a:solidFill>
@@ -7757,13 +7659,11 @@
         </p:nvSpPr>
         <p:spPr>
           <a:xfrm>
-            <a:off x="6858000" y="1554480"/>
-            <a:ext cx="2834640" cy="4114800"/>
+            <a:off x="6949440" y="1645920"/>
+            <a:ext cx="2926080" cy="4114800"/>
           </a:xfrm>
           <a:prstGeom prst="roundRect">
-            <a:avLst>
-              <a:gd name="adj" fmla="val 8000"/>
-            </a:avLst>
+            <a:avLst/>
           </a:prstGeom>
           <a:solidFill>
             <a:srgbClr val="14141C"/>
@@ -7802,8 +7702,8 @@
         </p:nvSpPr>
         <p:spPr>
           <a:xfrm>
-            <a:off x="6858000" y="1554480"/>
-            <a:ext cx="2834640" cy="45720"/>
+            <a:off x="6949440" y="1645920"/>
+            <a:ext cx="2926080" cy="45720"/>
           </a:xfrm>
           <a:prstGeom prst="rect">
             <a:avLst/>
@@ -7845,8 +7745,8 @@
         </p:nvSpPr>
         <p:spPr>
           <a:xfrm>
-            <a:off x="7040880" y="1664208"/>
-            <a:ext cx="2468880" cy="320040"/>
+            <a:off x="7178040" y="1783080"/>
+            <a:ext cx="2468880" cy="365760"/>
           </a:xfrm>
           <a:prstGeom prst="rect">
             <a:avLst/>
@@ -7860,7 +7760,7 @@
           <a:lstStyle/>
           <a:p>
             <a:pPr algn="l">
-              <a:defRPr sz="1400" b="1">
+              <a:defRPr sz="1500" b="1">
                 <a:solidFill>
                   <a:srgbClr val="22C55E"/>
                 </a:solidFill>
@@ -7881,8 +7781,8 @@
         </p:nvSpPr>
         <p:spPr>
           <a:xfrm>
-            <a:off x="7040880" y="2011680"/>
-            <a:ext cx="2468880" cy="3566160"/>
+            <a:off x="7178040" y="2194560"/>
+            <a:ext cx="2468880" cy="3474720"/>
           </a:xfrm>
           <a:prstGeom prst="rect">
             <a:avLst/>
@@ -7897,7 +7797,7 @@
           <a:p>
             <a:pPr algn="l">
               <a:spcAft>
-                <a:spcPts val="1380"/>
+                <a:spcPts val="1439"/>
               </a:spcAft>
               <a:defRPr sz="1200" b="0">
                 <a:solidFill>
@@ -7913,7 +7813,7 @@
           <a:p>
             <a:pPr algn="l">
               <a:spcAft>
-                <a:spcPts val="1380"/>
+                <a:spcPts val="1439"/>
               </a:spcAft>
               <a:defRPr sz="1200" b="0">
                 <a:solidFill>
@@ -7929,7 +7829,7 @@
           <a:p>
             <a:pPr algn="l">
               <a:spcAft>
-                <a:spcPts val="1380"/>
+                <a:spcPts val="1439"/>
               </a:spcAft>
               <a:defRPr sz="1200" b="0">
                 <a:solidFill>
@@ -7939,13 +7839,13 @@
               </a:defRPr>
             </a:pPr>
             <a:r>
-              <a:t>/year/.../sem/[sem] — Subjects</a:t>
-            </a:r>
-          </a:p>
-          <a:p>
-            <a:pPr algn="l">
-              <a:spcAft>
-                <a:spcPts val="1380"/>
+              <a:t>/year/.../semester/[sem] — Subjects</a:t>
+            </a:r>
+          </a:p>
+          <a:p>
+            <a:pPr algn="l">
+              <a:spcAft>
+                <a:spcPts val="1439"/>
               </a:spcAft>
               <a:defRPr sz="1200" b="0">
                 <a:solidFill>
@@ -7968,13 +7868,11 @@
         </p:nvSpPr>
         <p:spPr>
           <a:xfrm>
-            <a:off x="10058400" y="1554480"/>
-            <a:ext cx="2834640" cy="4114800"/>
+            <a:off x="10149840" y="1645920"/>
+            <a:ext cx="2926080" cy="4114800"/>
           </a:xfrm>
           <a:prstGeom prst="roundRect">
-            <a:avLst>
-              <a:gd name="adj" fmla="val 8000"/>
-            </a:avLst>
+            <a:avLst/>
           </a:prstGeom>
           <a:solidFill>
             <a:srgbClr val="14141C"/>
@@ -8013,8 +7911,8 @@
         </p:nvSpPr>
         <p:spPr>
           <a:xfrm>
-            <a:off x="10058400" y="1554480"/>
-            <a:ext cx="2834640" cy="45720"/>
+            <a:off x="10149840" y="1645920"/>
+            <a:ext cx="2926080" cy="45720"/>
           </a:xfrm>
           <a:prstGeom prst="rect">
             <a:avLst/>
@@ -8056,8 +7954,8 @@
         </p:nvSpPr>
         <p:spPr>
           <a:xfrm>
-            <a:off x="10241280" y="1664208"/>
-            <a:ext cx="2468880" cy="320040"/>
+            <a:off x="10378440" y="1783080"/>
+            <a:ext cx="2468880" cy="365760"/>
           </a:xfrm>
           <a:prstGeom prst="rect">
             <a:avLst/>
@@ -8071,7 +7969,7 @@
           <a:lstStyle/>
           <a:p>
             <a:pPr algn="l">
-              <a:defRPr sz="1400" b="1">
+              <a:defRPr sz="1500" b="1">
                 <a:solidFill>
                   <a:srgbClr val="A855F7"/>
                 </a:solidFill>
@@ -8092,8 +7990,8 @@
         </p:nvSpPr>
         <p:spPr>
           <a:xfrm>
-            <a:off x="10241280" y="2011680"/>
-            <a:ext cx="2468880" cy="3566160"/>
+            <a:off x="10378440" y="2194560"/>
+            <a:ext cx="2468880" cy="3474720"/>
           </a:xfrm>
           <a:prstGeom prst="rect">
             <a:avLst/>
@@ -8108,7 +8006,7 @@
           <a:p>
             <a:pPr algn="l">
               <a:spcAft>
-                <a:spcPts val="1380"/>
+                <a:spcPts val="1439"/>
               </a:spcAft>
               <a:defRPr sz="1200" b="0">
                 <a:solidFill>
@@ -8124,7 +8022,7 @@
           <a:p>
             <a:pPr algn="l">
               <a:spcAft>
-                <a:spcPts val="1380"/>
+                <a:spcPts val="1439"/>
               </a:spcAft>
               <a:defRPr sz="1200" b="0">
                 <a:solidFill>
@@ -8140,7 +8038,7 @@
           <a:p>
             <a:pPr algn="l">
               <a:spcAft>
-                <a:spcPts val="1380"/>
+                <a:spcPts val="1439"/>
               </a:spcAft>
               <a:defRPr sz="1200" b="0">
                 <a:solidFill>
@@ -8156,7 +8054,7 @@
           <a:p>
             <a:pPr algn="l">
               <a:spcAft>
-                <a:spcPts val="1380"/>
+                <a:spcPts val="1439"/>
               </a:spcAft>
               <a:defRPr sz="1200" b="0">
                 <a:solidFill>
@@ -8172,7 +8070,7 @@
           <a:p>
             <a:pPr algn="l">
               <a:spcAft>
-                <a:spcPts val="1380"/>
+                <a:spcPts val="1439"/>
               </a:spcAft>
               <a:defRPr sz="1200" b="0">
                 <a:solidFill>
@@ -8195,8 +8093,8 @@
         </p:nvSpPr>
         <p:spPr>
           <a:xfrm>
-            <a:off x="731520" y="6446520"/>
-            <a:ext cx="7315200" cy="320040"/>
+            <a:off x="731520" y="6400800"/>
+            <a:ext cx="7315200" cy="365760"/>
           </a:xfrm>
           <a:prstGeom prst="rect">
             <a:avLst/>
@@ -8210,7 +8108,7 @@
           <a:lstStyle/>
           <a:p>
             <a:pPr algn="l">
-              <a:defRPr sz="1000" b="0">
+              <a:defRPr sz="1100" b="0">
                 <a:solidFill>
                   <a:srgbClr val="707080"/>
                 </a:solidFill>
@@ -8264,7 +8162,7 @@
             <a:avLst/>
           </a:prstGeom>
           <a:solidFill>
-            <a:srgbClr val="14B8A6"/>
+            <a:srgbClr val="F97316"/>
           </a:solidFill>
           <a:ln>
             <a:noFill/>
@@ -8315,7 +8213,7 @@
           <a:lstStyle/>
           <a:p>
             <a:pPr algn="l">
-              <a:defRPr sz="2800" b="1">
+              <a:defRPr sz="3000" b="1">
                 <a:solidFill>
                   <a:srgbClr val="FFFFFF"/>
                 </a:solidFill>
@@ -8323,7 +8221,7 @@
               </a:defRPr>
             </a:pPr>
             <a:r>
-              <a:t>Challenges &amp; Learnings</a:t>
+              <a:t>User Flow</a:t>
             </a:r>
           </a:p>
         </p:txBody>
@@ -8336,7 +8234,7 @@
         </p:nvSpPr>
         <p:spPr>
           <a:xfrm>
-            <a:off x="731520" y="868680"/>
+            <a:off x="731520" y="914400"/>
             <a:ext cx="10058400" cy="457200"/>
           </a:xfrm>
           <a:prstGeom prst="rect">
@@ -8351,7 +8249,7 @@
           <a:lstStyle/>
           <a:p>
             <a:pPr algn="l">
-              <a:defRPr sz="1400" b="0">
+              <a:defRPr sz="1500" b="0">
                 <a:solidFill>
                   <a:srgbClr val="B0B0C0"/>
                 </a:solidFill>
@@ -8359,7 +8257,7 @@
               </a:defRPr>
             </a:pPr>
             <a:r>
-              <a:t>What we faced and what we learned</a:t>
+              <a:t>How a student uses TechNotes AI</a:t>
             </a:r>
           </a:p>
         </p:txBody>
@@ -8372,8 +8270,8 @@
         </p:nvSpPr>
         <p:spPr>
           <a:xfrm>
-            <a:off x="11247120" y="365760"/>
-            <a:ext cx="640080" cy="365760"/>
+            <a:off x="11155680" y="365760"/>
+            <a:ext cx="731520" cy="457200"/>
           </a:xfrm>
           <a:prstGeom prst="rect">
             <a:avLst/>
@@ -8387,7 +8285,7 @@
           <a:lstStyle/>
           <a:p>
             <a:pPr algn="r">
-              <a:defRPr sz="1300" b="0">
+              <a:defRPr sz="1400" b="0">
                 <a:solidFill>
                   <a:srgbClr val="707080"/>
                 </a:solidFill>
@@ -8408,14 +8306,14 @@
         </p:nvSpPr>
         <p:spPr>
           <a:xfrm>
-            <a:off x="731520" y="1234440"/>
+            <a:off x="731520" y="1325880"/>
             <a:ext cx="10698480" cy="19050"/>
           </a:xfrm>
           <a:prstGeom prst="rect">
             <a:avLst/>
           </a:prstGeom>
           <a:solidFill>
-            <a:srgbClr val="303040"/>
+            <a:srgbClr val="333344"/>
           </a:solidFill>
           <a:ln>
             <a:noFill/>
@@ -8445,102 +8343,14 @@
       </p:sp>
       <p:sp>
         <p:nvSpPr>
-          <p:cNvPr id="7" name="Rounded Rectangle 6"/>
-          <p:cNvSpPr/>
-          <p:nvPr/>
-        </p:nvSpPr>
-        <p:spPr>
-          <a:xfrm>
-            <a:off x="548640" y="1554480"/>
-            <a:ext cx="5303520" cy="4389120"/>
-          </a:xfrm>
-          <a:prstGeom prst="roundRect">
-            <a:avLst>
-              <a:gd name="adj" fmla="val 8000"/>
-            </a:avLst>
-          </a:prstGeom>
-          <a:solidFill>
-            <a:srgbClr val="14141C"/>
-          </a:solidFill>
-          <a:ln>
-            <a:noFill/>
-          </a:ln>
-        </p:spPr>
-        <p:style>
-          <a:lnRef idx="1">
-            <a:schemeClr val="accent1"/>
-          </a:lnRef>
-          <a:fillRef idx="3">
-            <a:schemeClr val="accent1"/>
-          </a:fillRef>
-          <a:effectRef idx="2">
-            <a:schemeClr val="accent1"/>
-          </a:effectRef>
-          <a:fontRef idx="minor">
-            <a:schemeClr val="lt1"/>
-          </a:fontRef>
-        </p:style>
-        <p:txBody>
-          <a:bodyPr rtlCol="0" anchor="ctr"/>
-          <a:lstStyle/>
-          <a:p>
-            <a:pPr algn="ctr"/>
-          </a:p>
-        </p:txBody>
-      </p:sp>
-      <p:sp>
-        <p:nvSpPr>
-          <p:cNvPr id="8" name="Rectangle 7"/>
-          <p:cNvSpPr/>
-          <p:nvPr/>
-        </p:nvSpPr>
-        <p:spPr>
-          <a:xfrm>
-            <a:off x="548640" y="1554480"/>
-            <a:ext cx="5303520" cy="45720"/>
-          </a:xfrm>
-          <a:prstGeom prst="rect">
-            <a:avLst/>
-          </a:prstGeom>
-          <a:solidFill>
-            <a:srgbClr val="EF4444"/>
-          </a:solidFill>
-          <a:ln>
-            <a:noFill/>
-          </a:ln>
-        </p:spPr>
-        <p:style>
-          <a:lnRef idx="1">
-            <a:schemeClr val="accent1"/>
-          </a:lnRef>
-          <a:fillRef idx="3">
-            <a:schemeClr val="accent1"/>
-          </a:fillRef>
-          <a:effectRef idx="2">
-            <a:schemeClr val="accent1"/>
-          </a:effectRef>
-          <a:fontRef idx="minor">
-            <a:schemeClr val="lt1"/>
-          </a:fontRef>
-        </p:style>
-        <p:txBody>
-          <a:bodyPr rtlCol="0" anchor="ctr"/>
-          <a:lstStyle/>
-          <a:p>
-            <a:pPr algn="ctr"/>
-          </a:p>
-        </p:txBody>
-      </p:sp>
-      <p:sp>
-        <p:nvSpPr>
-          <p:cNvPr id="9" name="TextBox 8"/>
+          <p:cNvPr id="7" name="TextBox 6"/>
           <p:cNvSpPr txBox="1"/>
           <p:nvPr/>
         </p:nvSpPr>
         <p:spPr>
           <a:xfrm>
-            <a:off x="731520" y="1664208"/>
-            <a:ext cx="4937760" cy="320040"/>
+            <a:off x="914400" y="1828800"/>
+            <a:ext cx="10515600" cy="4114800"/>
           </a:xfrm>
           <a:prstGeom prst="rect">
             <a:avLst/>
@@ -8554,29 +8364,160 @@
           <a:lstStyle/>
           <a:p>
             <a:pPr algn="l">
-              <a:defRPr sz="1700" b="1">
-                <a:solidFill>
-                  <a:srgbClr val="EF4444"/>
-                </a:solidFill>
-                <a:latin typeface="Segoe UI"/>
-              </a:defRPr>
-            </a:pPr>
-            <a:r>
-              <a:t>Challenges Faced</a:t>
-            </a:r>
-          </a:p>
-        </p:txBody>
-      </p:sp>
-      <p:sp>
-        <p:nvSpPr>
-          <p:cNvPr id="10" name="TextBox 9"/>
+              <a:spcAft>
+                <a:spcPts val="2550"/>
+              </a:spcAft>
+              <a:defRPr sz="1700" b="0">
+                <a:solidFill>
+                  <a:srgbClr val="FFFFFF"/>
+                </a:solidFill>
+                <a:latin typeface="Segoe UI"/>
+              </a:defRPr>
+              <a:buFont typeface="Arial"/>
+              <a:buChar char="▸"/>
+            </a:pPr>
+            <a:r>
+              <a:t>1.  Student lands on the home page</a:t>
+            </a:r>
+          </a:p>
+          <a:p>
+            <a:pPr algn="l">
+              <a:spcAft>
+                <a:spcPts val="2550"/>
+              </a:spcAft>
+              <a:defRPr sz="1700" b="0">
+                <a:solidFill>
+                  <a:srgbClr val="FFFFFF"/>
+                </a:solidFill>
+                <a:latin typeface="Segoe UI"/>
+              </a:defRPr>
+              <a:buFont typeface="Arial"/>
+              <a:buChar char="▸"/>
+            </a:pPr>
+            <a:r>
+              <a:t>2.  Picks a section — Notes, PYQ, DSA, Placement, Syllabus, or Important Questions</a:t>
+            </a:r>
+          </a:p>
+          <a:p>
+            <a:pPr algn="l">
+              <a:spcAft>
+                <a:spcPts val="2550"/>
+              </a:spcAft>
+              <a:defRPr sz="1700" b="0">
+                <a:solidFill>
+                  <a:srgbClr val="FFFFFF"/>
+                </a:solidFill>
+                <a:latin typeface="Segoe UI"/>
+              </a:defRPr>
+              <a:buFont typeface="Arial"/>
+              <a:buChar char="▸"/>
+            </a:pPr>
+            <a:r>
+              <a:t>3.  Navigates: Year → Branch → Semester → Subject</a:t>
+            </a:r>
+          </a:p>
+          <a:p>
+            <a:pPr algn="l">
+              <a:spcAft>
+                <a:spcPts val="2550"/>
+              </a:spcAft>
+              <a:defRPr sz="1700" b="0">
+                <a:solidFill>
+                  <a:srgbClr val="FFFFFF"/>
+                </a:solidFill>
+                <a:latin typeface="Segoe UI"/>
+              </a:defRPr>
+              <a:buFont typeface="Arial"/>
+              <a:buChar char="▸"/>
+            </a:pPr>
+            <a:r>
+              <a:t>4.  Views or downloads the content (PDF, image, or text)</a:t>
+            </a:r>
+          </a:p>
+          <a:p>
+            <a:pPr algn="l">
+              <a:spcAft>
+                <a:spcPts val="2550"/>
+              </a:spcAft>
+              <a:defRPr sz="1700" b="0">
+                <a:solidFill>
+                  <a:srgbClr val="FFFFFF"/>
+                </a:solidFill>
+                <a:latin typeface="Segoe UI"/>
+              </a:defRPr>
+              <a:buFont typeface="Arial"/>
+              <a:buChar char="▸"/>
+            </a:pPr>
+            <a:r>
+              <a:t>5.  Opens the floating chat widget for quick doubt solving</a:t>
+            </a:r>
+          </a:p>
+          <a:p>
+            <a:pPr algn="l">
+              <a:spcAft>
+                <a:spcPts val="2550"/>
+              </a:spcAft>
+              <a:defRPr sz="1700" b="0">
+                <a:solidFill>
+                  <a:srgbClr val="FFFFFF"/>
+                </a:solidFill>
+                <a:latin typeface="Segoe UI"/>
+              </a:defRPr>
+              <a:buFont typeface="Arial"/>
+              <a:buChar char="▸"/>
+            </a:pPr>
+            <a:r>
+              <a:t>6.  Uploads a PDF or image to the chatbot for analysis</a:t>
+            </a:r>
+          </a:p>
+          <a:p>
+            <a:pPr algn="l">
+              <a:spcAft>
+                <a:spcPts val="2550"/>
+              </a:spcAft>
+              <a:defRPr sz="1700" b="0">
+                <a:solidFill>
+                  <a:srgbClr val="FFFFFF"/>
+                </a:solidFill>
+                <a:latin typeface="Segoe UI"/>
+              </a:defRPr>
+              <a:buFont typeface="Arial"/>
+              <a:buChar char="▸"/>
+            </a:pPr>
+            <a:r>
+              <a:t>7.  Gets a detailed, subject-specific answer with formulas and examples</a:t>
+            </a:r>
+          </a:p>
+          <a:p>
+            <a:pPr algn="l">
+              <a:spcAft>
+                <a:spcPts val="2550"/>
+              </a:spcAft>
+              <a:defRPr sz="1700" b="0">
+                <a:solidFill>
+                  <a:srgbClr val="FFFFFF"/>
+                </a:solidFill>
+                <a:latin typeface="Segoe UI"/>
+              </a:defRPr>
+              <a:buFont typeface="Arial"/>
+              <a:buChar char="▸"/>
+            </a:pPr>
+            <a:r>
+              <a:t>8.  Submits feedback (optional)</a:t>
+            </a:r>
+          </a:p>
+        </p:txBody>
+      </p:sp>
+      <p:sp>
+        <p:nvSpPr>
+          <p:cNvPr id="8" name="TextBox 7"/>
           <p:cNvSpPr txBox="1"/>
           <p:nvPr/>
         </p:nvSpPr>
         <p:spPr>
           <a:xfrm>
-            <a:off x="731520" y="2011680"/>
-            <a:ext cx="4937760" cy="3840480"/>
+            <a:off x="731520" y="6400800"/>
+            <a:ext cx="7315200" cy="365760"/>
           </a:xfrm>
           <a:prstGeom prst="rect">
             <a:avLst/>
@@ -8590,369 +8531,7 @@
           <a:lstStyle/>
           <a:p>
             <a:pPr algn="l">
-              <a:spcAft>
-                <a:spcPts val="1495"/>
-              </a:spcAft>
-              <a:defRPr sz="1300" b="0">
-                <a:solidFill>
-                  <a:srgbClr val="B0B0C0"/>
-                </a:solidFill>
-                <a:latin typeface="Segoe UI"/>
-              </a:defRPr>
-            </a:pPr>
-            <a:r>
-              <a:t>Gemini API rate limits — solved with 6-key rotation system</a:t>
-            </a:r>
-          </a:p>
-          <a:p>
-            <a:pPr algn="l">
-              <a:spcAft>
-                <a:spcPts val="1495"/>
-              </a:spcAft>
-              <a:defRPr sz="1300" b="0">
-                <a:solidFill>
-                  <a:srgbClr val="B0B0C0"/>
-                </a:solidFill>
-                <a:latin typeface="Segoe UI"/>
-              </a:defRPr>
-            </a:pPr>
-            <a:r>
-              <a:t>Managing 6 content types in one schema — solved with unified content_files table</a:t>
-            </a:r>
-          </a:p>
-          <a:p>
-            <a:pPr algn="l">
-              <a:spcAft>
-                <a:spcPts val="1495"/>
-              </a:spcAft>
-              <a:defRPr sz="1300" b="0">
-                <a:solidFill>
-                  <a:srgbClr val="B0B0C0"/>
-                </a:solidFill>
-                <a:latin typeface="Segoe UI"/>
-              </a:defRPr>
-            </a:pPr>
-            <a:r>
-              <a:t>Bilingual support without translation files — solved with inline t(en, hi) pattern</a:t>
-            </a:r>
-          </a:p>
-          <a:p>
-            <a:pPr algn="l">
-              <a:spcAft>
-                <a:spcPts val="1495"/>
-              </a:spcAft>
-              <a:defRPr sz="1300" b="0">
-                <a:solidFill>
-                  <a:srgbClr val="B0B0C0"/>
-                </a:solidFill>
-                <a:latin typeface="Segoe UI"/>
-              </a:defRPr>
-            </a:pPr>
-            <a:r>
-              <a:t>Security hardening of SECURITY DEFINER functions — SET search_path = ''</a:t>
-            </a:r>
-          </a:p>
-          <a:p>
-            <a:pPr algn="l">
-              <a:spcAft>
-                <a:spcPts val="1495"/>
-              </a:spcAft>
-              <a:defRPr sz="1300" b="0">
-                <a:solidFill>
-                  <a:srgbClr val="B0B0C0"/>
-                </a:solidFill>
-                <a:latin typeface="Segoe UI"/>
-              </a:defRPr>
-            </a:pPr>
-            <a:r>
-              <a:t>Office document viewing — integrated Google Docs Viewer</a:t>
-            </a:r>
-          </a:p>
-          <a:p>
-            <a:pPr algn="l">
-              <a:spcAft>
-                <a:spcPts val="1495"/>
-              </a:spcAft>
-              <a:defRPr sz="1300" b="0">
-                <a:solidFill>
-                  <a:srgbClr val="B0B0C0"/>
-                </a:solidFill>
-                <a:latin typeface="Segoe UI"/>
-              </a:defRPr>
-            </a:pPr>
-            <a:r>
-              <a:t>Backward compatibility during schema migration — fallback reads</a:t>
-            </a:r>
-          </a:p>
-        </p:txBody>
-      </p:sp>
-      <p:sp>
-        <p:nvSpPr>
-          <p:cNvPr id="11" name="Rounded Rectangle 10"/>
-          <p:cNvSpPr/>
-          <p:nvPr/>
-        </p:nvSpPr>
-        <p:spPr>
-          <a:xfrm>
-            <a:off x="6217920" y="1554480"/>
-            <a:ext cx="5303520" cy="4389120"/>
-          </a:xfrm>
-          <a:prstGeom prst="roundRect">
-            <a:avLst>
-              <a:gd name="adj" fmla="val 8000"/>
-            </a:avLst>
-          </a:prstGeom>
-          <a:solidFill>
-            <a:srgbClr val="14141C"/>
-          </a:solidFill>
-          <a:ln>
-            <a:noFill/>
-          </a:ln>
-        </p:spPr>
-        <p:style>
-          <a:lnRef idx="1">
-            <a:schemeClr val="accent1"/>
-          </a:lnRef>
-          <a:fillRef idx="3">
-            <a:schemeClr val="accent1"/>
-          </a:fillRef>
-          <a:effectRef idx="2">
-            <a:schemeClr val="accent1"/>
-          </a:effectRef>
-          <a:fontRef idx="minor">
-            <a:schemeClr val="lt1"/>
-          </a:fontRef>
-        </p:style>
-        <p:txBody>
-          <a:bodyPr rtlCol="0" anchor="ctr"/>
-          <a:lstStyle/>
-          <a:p>
-            <a:pPr algn="ctr"/>
-          </a:p>
-        </p:txBody>
-      </p:sp>
-      <p:sp>
-        <p:nvSpPr>
-          <p:cNvPr id="12" name="Rectangle 11"/>
-          <p:cNvSpPr/>
-          <p:nvPr/>
-        </p:nvSpPr>
-        <p:spPr>
-          <a:xfrm>
-            <a:off x="6217920" y="1554480"/>
-            <a:ext cx="5303520" cy="45720"/>
-          </a:xfrm>
-          <a:prstGeom prst="rect">
-            <a:avLst/>
-          </a:prstGeom>
-          <a:solidFill>
-            <a:srgbClr val="14B8A6"/>
-          </a:solidFill>
-          <a:ln>
-            <a:noFill/>
-          </a:ln>
-        </p:spPr>
-        <p:style>
-          <a:lnRef idx="1">
-            <a:schemeClr val="accent1"/>
-          </a:lnRef>
-          <a:fillRef idx="3">
-            <a:schemeClr val="accent1"/>
-          </a:fillRef>
-          <a:effectRef idx="2">
-            <a:schemeClr val="accent1"/>
-          </a:effectRef>
-          <a:fontRef idx="minor">
-            <a:schemeClr val="lt1"/>
-          </a:fontRef>
-        </p:style>
-        <p:txBody>
-          <a:bodyPr rtlCol="0" anchor="ctr"/>
-          <a:lstStyle/>
-          <a:p>
-            <a:pPr algn="ctr"/>
-          </a:p>
-        </p:txBody>
-      </p:sp>
-      <p:sp>
-        <p:nvSpPr>
-          <p:cNvPr id="13" name="TextBox 12"/>
-          <p:cNvSpPr txBox="1"/>
-          <p:nvPr/>
-        </p:nvSpPr>
-        <p:spPr>
-          <a:xfrm>
-            <a:off x="6400800" y="1664208"/>
-            <a:ext cx="4937760" cy="320040"/>
-          </a:xfrm>
-          <a:prstGeom prst="rect">
-            <a:avLst/>
-          </a:prstGeom>
-          <a:noFill/>
-        </p:spPr>
-        <p:txBody>
-          <a:bodyPr wrap="square">
-            <a:spAutoFit/>
-          </a:bodyPr>
-          <a:lstStyle/>
-          <a:p>
-            <a:pPr algn="l">
-              <a:defRPr sz="1700" b="1">
-                <a:solidFill>
-                  <a:srgbClr val="14B8A6"/>
-                </a:solidFill>
-                <a:latin typeface="Segoe UI"/>
-              </a:defRPr>
-            </a:pPr>
-            <a:r>
-              <a:t>Key Learnings</a:t>
-            </a:r>
-          </a:p>
-        </p:txBody>
-      </p:sp>
-      <p:sp>
-        <p:nvSpPr>
-          <p:cNvPr id="14" name="TextBox 13"/>
-          <p:cNvSpPr txBox="1"/>
-          <p:nvPr/>
-        </p:nvSpPr>
-        <p:spPr>
-          <a:xfrm>
-            <a:off x="6400800" y="2011680"/>
-            <a:ext cx="4937760" cy="3840480"/>
-          </a:xfrm>
-          <a:prstGeom prst="rect">
-            <a:avLst/>
-          </a:prstGeom>
-          <a:noFill/>
-        </p:spPr>
-        <p:txBody>
-          <a:bodyPr wrap="square">
-            <a:spAutoFit/>
-          </a:bodyPr>
-          <a:lstStyle/>
-          <a:p>
-            <a:pPr algn="l">
-              <a:spcAft>
-                <a:spcPts val="1495"/>
-              </a:spcAft>
-              <a:defRPr sz="1300" b="0">
-                <a:solidFill>
-                  <a:srgbClr val="B0B0C0"/>
-                </a:solidFill>
-                <a:latin typeface="Segoe UI"/>
-              </a:defRPr>
-            </a:pPr>
-            <a:r>
-              <a:t>RLS is essential — never expose tables without policies</a:t>
-            </a:r>
-          </a:p>
-          <a:p>
-            <a:pPr algn="l">
-              <a:spcAft>
-                <a:spcPts val="1495"/>
-              </a:spcAft>
-              <a:defRPr sz="1300" b="0">
-                <a:solidFill>
-                  <a:srgbClr val="B0B0C0"/>
-                </a:solidFill>
-                <a:latin typeface="Segoe UI"/>
-              </a:defRPr>
-            </a:pPr>
-            <a:r>
-              <a:t>Unified table design is better than many small tables for polymorphic content</a:t>
-            </a:r>
-          </a:p>
-          <a:p>
-            <a:pPr algn="l">
-              <a:spcAft>
-                <a:spcPts val="1495"/>
-              </a:spcAft>
-              <a:defRPr sz="1300" b="0">
-                <a:solidFill>
-                  <a:srgbClr val="B0B0C0"/>
-                </a:solidFill>
-                <a:latin typeface="Segoe UI"/>
-              </a:defRPr>
-            </a:pPr>
-            <a:r>
-              <a:t>Edge functions need mandatory CORS headers on every response</a:t>
-            </a:r>
-          </a:p>
-          <a:p>
-            <a:pPr algn="l">
-              <a:spcAft>
-                <a:spcPts val="1495"/>
-              </a:spcAft>
-              <a:defRPr sz="1300" b="0">
-                <a:solidFill>
-                  <a:srgbClr val="B0B0C0"/>
-                </a:solidFill>
-                <a:latin typeface="Segoe UI"/>
-              </a:defRPr>
-            </a:pPr>
-            <a:r>
-              <a:t>Client-side API key rotation improves UX during rate limits</a:t>
-            </a:r>
-          </a:p>
-          <a:p>
-            <a:pPr algn="l">
-              <a:spcAft>
-                <a:spcPts val="1495"/>
-              </a:spcAft>
-              <a:defRPr sz="1300" b="0">
-                <a:solidFill>
-                  <a:srgbClr val="B0B0C0"/>
-                </a:solidFill>
-                <a:latin typeface="Segoe UI"/>
-              </a:defRPr>
-            </a:pPr>
-            <a:r>
-              <a:t>Inline translation pattern scales better than separate locale files</a:t>
-            </a:r>
-          </a:p>
-          <a:p>
-            <a:pPr algn="l">
-              <a:spcAft>
-                <a:spcPts val="1495"/>
-              </a:spcAft>
-              <a:defRPr sz="1300" b="0">
-                <a:solidFill>
-                  <a:srgbClr val="B0B0C0"/>
-                </a:solidFill>
-                <a:latin typeface="Segoe UI"/>
-              </a:defRPr>
-            </a:pPr>
-            <a:r>
-              <a:t>Security DEFINER functions need search_path hardening</a:t>
-            </a:r>
-          </a:p>
-        </p:txBody>
-      </p:sp>
-      <p:sp>
-        <p:nvSpPr>
-          <p:cNvPr id="15" name="TextBox 14"/>
-          <p:cNvSpPr txBox="1"/>
-          <p:nvPr/>
-        </p:nvSpPr>
-        <p:spPr>
-          <a:xfrm>
-            <a:off x="731520" y="6446520"/>
-            <a:ext cx="7315200" cy="320040"/>
-          </a:xfrm>
-          <a:prstGeom prst="rect">
-            <a:avLst/>
-          </a:prstGeom>
-          <a:noFill/>
-        </p:spPr>
-        <p:txBody>
-          <a:bodyPr wrap="square">
-            <a:spAutoFit/>
-          </a:bodyPr>
-          <a:lstStyle/>
-          <a:p>
-            <a:pPr algn="l">
-              <a:defRPr sz="1000" b="0">
+              <a:defRPr sz="1100" b="0">
                 <a:solidFill>
                   <a:srgbClr val="707080"/>
                 </a:solidFill>
@@ -9006,7 +8585,7 @@
             <a:avLst/>
           </a:prstGeom>
           <a:solidFill>
-            <a:srgbClr val="14B8A6"/>
+            <a:srgbClr val="F97316"/>
           </a:solidFill>
           <a:ln>
             <a:noFill/>
@@ -9057,7 +8636,7 @@
           <a:lstStyle/>
           <a:p>
             <a:pPr algn="l">
-              <a:defRPr sz="2800" b="1">
+              <a:defRPr sz="3000" b="1">
                 <a:solidFill>
                   <a:srgbClr val="FFFFFF"/>
                 </a:solidFill>
@@ -9078,7 +8657,7 @@
         </p:nvSpPr>
         <p:spPr>
           <a:xfrm>
-            <a:off x="731520" y="868680"/>
+            <a:off x="731520" y="914400"/>
             <a:ext cx="10058400" cy="457200"/>
           </a:xfrm>
           <a:prstGeom prst="rect">
@@ -9093,7 +8672,7 @@
           <a:lstStyle/>
           <a:p>
             <a:pPr algn="l">
-              <a:defRPr sz="1400" b="0">
+              <a:defRPr sz="1500" b="0">
                 <a:solidFill>
                   <a:srgbClr val="B0B0C0"/>
                 </a:solidFill>
@@ -9114,8 +8693,8 @@
         </p:nvSpPr>
         <p:spPr>
           <a:xfrm>
-            <a:off x="11247120" y="365760"/>
-            <a:ext cx="640080" cy="365760"/>
+            <a:off x="11155680" y="365760"/>
+            <a:ext cx="731520" cy="457200"/>
           </a:xfrm>
           <a:prstGeom prst="rect">
             <a:avLst/>
@@ -9129,7 +8708,7 @@
           <a:lstStyle/>
           <a:p>
             <a:pPr algn="r">
-              <a:defRPr sz="1300" b="0">
+              <a:defRPr sz="1400" b="0">
                 <a:solidFill>
                   <a:srgbClr val="707080"/>
                 </a:solidFill>
@@ -9150,14 +8729,14 @@
         </p:nvSpPr>
         <p:spPr>
           <a:xfrm>
-            <a:off x="731520" y="1234440"/>
+            <a:off x="731520" y="1325880"/>
             <a:ext cx="10698480" cy="19050"/>
           </a:xfrm>
           <a:prstGeom prst="rect">
             <a:avLst/>
           </a:prstGeom>
           <a:solidFill>
-            <a:srgbClr val="303040"/>
+            <a:srgbClr val="333344"/>
           </a:solidFill>
           <a:ln>
             <a:noFill/>
@@ -9193,7 +8772,7 @@
         </p:nvSpPr>
         <p:spPr>
           <a:xfrm>
-            <a:off x="914400" y="1645920"/>
+            <a:off x="914400" y="1828800"/>
             <a:ext cx="10515600" cy="4114800"/>
           </a:xfrm>
           <a:prstGeom prst="rect">
@@ -9207,11 +8786,11 @@
           </a:bodyPr>
           <a:lstStyle/>
           <a:p>
-            <a:pPr>
-              <a:spcAft>
-                <a:spcPts val="2400"/>
-              </a:spcAft>
-              <a:defRPr sz="1600">
+            <a:pPr algn="l">
+              <a:spcAft>
+                <a:spcPts val="2550"/>
+              </a:spcAft>
+              <a:defRPr sz="1700" b="0">
                 <a:solidFill>
                   <a:srgbClr val="FFFFFF"/>
                 </a:solidFill>
@@ -9225,11 +8804,11 @@
             </a:r>
           </a:p>
           <a:p>
-            <a:pPr>
-              <a:spcAft>
-                <a:spcPts val="2400"/>
-              </a:spcAft>
-              <a:defRPr sz="1600">
+            <a:pPr algn="l">
+              <a:spcAft>
+                <a:spcPts val="2550"/>
+              </a:spcAft>
+              <a:defRPr sz="1700" b="0">
                 <a:solidFill>
                   <a:srgbClr val="FFFFFF"/>
                 </a:solidFill>
@@ -9243,11 +8822,11 @@
             </a:r>
           </a:p>
           <a:p>
-            <a:pPr>
-              <a:spcAft>
-                <a:spcPts val="2400"/>
-              </a:spcAft>
-              <a:defRPr sz="1600">
+            <a:pPr algn="l">
+              <a:spcAft>
+                <a:spcPts val="2550"/>
+              </a:spcAft>
+              <a:defRPr sz="1700" b="0">
                 <a:solidFill>
                   <a:srgbClr val="FFFFFF"/>
                 </a:solidFill>
@@ -9261,11 +8840,11 @@
             </a:r>
           </a:p>
           <a:p>
-            <a:pPr>
-              <a:spcAft>
-                <a:spcPts val="2400"/>
-              </a:spcAft>
-              <a:defRPr sz="1600">
+            <a:pPr algn="l">
+              <a:spcAft>
+                <a:spcPts val="2550"/>
+              </a:spcAft>
+              <a:defRPr sz="1700" b="0">
                 <a:solidFill>
                   <a:srgbClr val="FFFFFF"/>
                 </a:solidFill>
@@ -9275,15 +8854,15 @@
               <a:buChar char="▸"/>
             </a:pPr>
             <a:r>
-              <a:t>More branches and subjects — ECE, ME, CE, EE already in AI</a:t>
-            </a:r>
-          </a:p>
-          <a:p>
-            <a:pPr>
-              <a:spcAft>
-                <a:spcPts val="2400"/>
-              </a:spcAft>
-              <a:defRPr sz="1600">
+              <a:t>More branches and subjects (ECE, ME, CE, EE already in AI)</a:t>
+            </a:r>
+          </a:p>
+          <a:p>
+            <a:pPr algn="l">
+              <a:spcAft>
+                <a:spcPts val="2550"/>
+              </a:spcAft>
+              <a:defRPr sz="1700" b="0">
                 <a:solidFill>
                   <a:srgbClr val="FFFFFF"/>
                 </a:solidFill>
@@ -9297,11 +8876,11 @@
             </a:r>
           </a:p>
           <a:p>
-            <a:pPr>
-              <a:spcAft>
-                <a:spcPts val="2400"/>
-              </a:spcAft>
-              <a:defRPr sz="1600">
+            <a:pPr algn="l">
+              <a:spcAft>
+                <a:spcPts val="2550"/>
+              </a:spcAft>
+              <a:defRPr sz="1700" b="0">
                 <a:solidFill>
                   <a:srgbClr val="FFFFFF"/>
                 </a:solidFill>
@@ -9315,11 +8894,11 @@
             </a:r>
           </a:p>
           <a:p>
-            <a:pPr>
-              <a:spcAft>
-                <a:spcPts val="2400"/>
-              </a:spcAft>
-              <a:defRPr sz="1600">
+            <a:pPr algn="l">
+              <a:spcAft>
+                <a:spcPts val="2550"/>
+              </a:spcAft>
+              <a:defRPr sz="1700" b="0">
                 <a:solidFill>
                   <a:srgbClr val="FFFFFF"/>
                 </a:solidFill>
@@ -9333,11 +8912,11 @@
             </a:r>
           </a:p>
           <a:p>
-            <a:pPr>
-              <a:spcAft>
-                <a:spcPts val="2400"/>
-              </a:spcAft>
-              <a:defRPr sz="1600">
+            <a:pPr algn="l">
+              <a:spcAft>
+                <a:spcPts val="2550"/>
+              </a:spcAft>
+              <a:defRPr sz="1700" b="0">
                 <a:solidFill>
                   <a:srgbClr val="FFFFFF"/>
                 </a:solidFill>
@@ -9360,8 +8939,8 @@
         </p:nvSpPr>
         <p:spPr>
           <a:xfrm>
-            <a:off x="731520" y="6446520"/>
-            <a:ext cx="7315200" cy="320040"/>
+            <a:off x="731520" y="6400800"/>
+            <a:ext cx="7315200" cy="365760"/>
           </a:xfrm>
           <a:prstGeom prst="rect">
             <a:avLst/>
@@ -9375,7 +8954,7 @@
           <a:lstStyle/>
           <a:p>
             <a:pPr algn="l">
-              <a:defRPr sz="1000" b="0">
+              <a:defRPr sz="1100" b="0">
                 <a:solidFill>
                   <a:srgbClr val="707080"/>
                 </a:solidFill>
@@ -9429,7 +9008,7 @@
             <a:avLst/>
           </a:prstGeom>
           <a:solidFill>
-            <a:srgbClr val="14B8A6"/>
+            <a:srgbClr val="F97316"/>
           </a:solidFill>
           <a:ln>
             <a:noFill/>
@@ -9472,7 +9051,7 @@
             <a:avLst/>
           </a:prstGeom>
           <a:solidFill>
-            <a:srgbClr val="0D1A18"/>
+            <a:srgbClr val="1A1A2E"/>
           </a:solidFill>
           <a:ln>
             <a:noFill/>
@@ -9508,7 +9087,7 @@
         </p:nvSpPr>
         <p:spPr>
           <a:xfrm>
-            <a:off x="914400" y="1188720"/>
+            <a:off x="914400" y="1371600"/>
             <a:ext cx="10332720" cy="457200"/>
           </a:xfrm>
           <a:prstGeom prst="rect">
@@ -9523,9 +9102,9 @@
           <a:lstStyle/>
           <a:p>
             <a:pPr algn="ctr">
-              <a:defRPr sz="1500" b="1">
-                <a:solidFill>
-                  <a:srgbClr val="14B8A6"/>
+              <a:defRPr sz="1600" b="1">
+                <a:solidFill>
+                  <a:srgbClr val="F97316"/>
                 </a:solidFill>
                 <a:latin typeface="Segoe UI"/>
               </a:defRPr>
@@ -9544,7 +9123,7 @@
         </p:nvSpPr>
         <p:spPr>
           <a:xfrm>
-            <a:off x="914400" y="1828800"/>
+            <a:off x="914400" y="2011680"/>
             <a:ext cx="10332720" cy="731520"/>
           </a:xfrm>
           <a:prstGeom prst="rect">
@@ -9559,7 +9138,7 @@
           <a:lstStyle/>
           <a:p>
             <a:pPr algn="ctr">
-              <a:defRPr sz="4200" b="1">
+              <a:defRPr sz="4400" b="1">
                 <a:solidFill>
                   <a:srgbClr val="FFFFFF"/>
                 </a:solidFill>
@@ -9580,7 +9159,7 @@
         </p:nvSpPr>
         <p:spPr>
           <a:xfrm>
-            <a:off x="1828800" y="3017520"/>
+            <a:off x="1828800" y="3200400"/>
             <a:ext cx="8503920" cy="2286000"/>
           </a:xfrm>
           <a:prstGeom prst="rect">
@@ -9594,11 +9173,11 @@
           </a:bodyPr>
           <a:lstStyle/>
           <a:p>
-            <a:pPr>
-              <a:spcAft>
-                <a:spcPts val="2720"/>
-              </a:spcAft>
-              <a:defRPr sz="1700">
+            <a:pPr algn="l">
+              <a:spcAft>
+                <a:spcPts val="2880"/>
+              </a:spcAft>
+              <a:defRPr sz="1800" b="0">
                 <a:solidFill>
                   <a:srgbClr val="B0B0C0"/>
                 </a:solidFill>
@@ -9612,11 +9191,11 @@
             </a:r>
           </a:p>
           <a:p>
-            <a:pPr>
-              <a:spcAft>
-                <a:spcPts val="2720"/>
-              </a:spcAft>
-              <a:defRPr sz="1700">
+            <a:pPr algn="l">
+              <a:spcAft>
+                <a:spcPts val="2880"/>
+              </a:spcAft>
+              <a:defRPr sz="1800" b="0">
                 <a:solidFill>
                   <a:srgbClr val="B0B0C0"/>
                 </a:solidFill>
@@ -9630,11 +9209,11 @@
             </a:r>
           </a:p>
           <a:p>
-            <a:pPr>
-              <a:spcAft>
-                <a:spcPts val="2720"/>
-              </a:spcAft>
-              <a:defRPr sz="1700">
+            <a:pPr algn="l">
+              <a:spcAft>
+                <a:spcPts val="2880"/>
+              </a:spcAft>
+              <a:defRPr sz="1800" b="0">
                 <a:solidFill>
                   <a:srgbClr val="B0B0C0"/>
                 </a:solidFill>
@@ -9648,11 +9227,11 @@
             </a:r>
           </a:p>
           <a:p>
-            <a:pPr>
-              <a:spcAft>
-                <a:spcPts val="2720"/>
-              </a:spcAft>
-              <a:defRPr sz="1700">
+            <a:pPr algn="l">
+              <a:spcAft>
+                <a:spcPts val="2880"/>
+              </a:spcAft>
+              <a:defRPr sz="1800" b="0">
                 <a:solidFill>
                   <a:srgbClr val="B0B0C0"/>
                 </a:solidFill>
@@ -9675,7 +9254,7 @@
         </p:nvSpPr>
         <p:spPr>
           <a:xfrm>
-            <a:off x="914400" y="5486400"/>
+            <a:off x="914400" y="5669280"/>
             <a:ext cx="10332720" cy="548640"/>
           </a:xfrm>
           <a:prstGeom prst="rect">
@@ -9690,9 +9269,9 @@
           <a:lstStyle/>
           <a:p>
             <a:pPr algn="ctr">
-              <a:defRPr sz="2000" b="1">
-                <a:solidFill>
-                  <a:srgbClr val="14B8A6"/>
+              <a:defRPr sz="2200" b="1">
+                <a:solidFill>
+                  <a:srgbClr val="F97316"/>
                 </a:solidFill>
                 <a:latin typeface="Segoe UI"/>
               </a:defRPr>
@@ -9711,7 +9290,7 @@
         </p:nvSpPr>
         <p:spPr>
           <a:xfrm>
-            <a:off x="914400" y="6126480"/>
+            <a:off x="914400" y="6217920"/>
             <a:ext cx="10332720" cy="365760"/>
           </a:xfrm>
           <a:prstGeom prst="rect">
@@ -9726,7 +9305,7 @@
           <a:lstStyle/>
           <a:p>
             <a:pPr algn="ctr">
-              <a:defRPr sz="1500" b="0">
+              <a:defRPr sz="1600" b="0">
                 <a:solidFill>
                   <a:srgbClr val="707080"/>
                 </a:solidFill>
@@ -9780,7 +9359,7 @@
             <a:avLst/>
           </a:prstGeom>
           <a:solidFill>
-            <a:srgbClr val="14B8A6"/>
+            <a:srgbClr val="F97316"/>
           </a:solidFill>
           <a:ln>
             <a:noFill/>
@@ -9831,7 +9410,7 @@
           <a:lstStyle/>
           <a:p>
             <a:pPr algn="l">
-              <a:defRPr sz="2800" b="1">
+              <a:defRPr sz="3000" b="1">
                 <a:solidFill>
                   <a:srgbClr val="FFFFFF"/>
                 </a:solidFill>
@@ -9852,7 +9431,7 @@
         </p:nvSpPr>
         <p:spPr>
           <a:xfrm>
-            <a:off x="731520" y="868680"/>
+            <a:off x="731520" y="914400"/>
             <a:ext cx="10058400" cy="457200"/>
           </a:xfrm>
           <a:prstGeom prst="rect">
@@ -9867,7 +9446,7 @@
           <a:lstStyle/>
           <a:p>
             <a:pPr algn="l">
-              <a:defRPr sz="1400" b="0">
+              <a:defRPr sz="1500" b="0">
                 <a:solidFill>
                   <a:srgbClr val="B0B0C0"/>
                 </a:solidFill>
@@ -9875,7 +9454,7 @@
               </a:defRPr>
             </a:pPr>
             <a:r>
-              <a:t>Why we built TechNotes AI</a:t>
+              <a:t>Why TechNotes AI was built</a:t>
             </a:r>
           </a:p>
         </p:txBody>
@@ -9888,8 +9467,8 @@
         </p:nvSpPr>
         <p:spPr>
           <a:xfrm>
-            <a:off x="11247120" y="365760"/>
-            <a:ext cx="640080" cy="365760"/>
+            <a:off x="11155680" y="365760"/>
+            <a:ext cx="731520" cy="457200"/>
           </a:xfrm>
           <a:prstGeom prst="rect">
             <a:avLst/>
@@ -9903,7 +9482,7 @@
           <a:lstStyle/>
           <a:p>
             <a:pPr algn="r">
-              <a:defRPr sz="1300" b="0">
+              <a:defRPr sz="1400" b="0">
                 <a:solidFill>
                   <a:srgbClr val="707080"/>
                 </a:solidFill>
@@ -9924,14 +9503,14 @@
         </p:nvSpPr>
         <p:spPr>
           <a:xfrm>
-            <a:off x="731520" y="1234440"/>
+            <a:off x="731520" y="1325880"/>
             <a:ext cx="10698480" cy="19050"/>
           </a:xfrm>
           <a:prstGeom prst="rect">
             <a:avLst/>
           </a:prstGeom>
           <a:solidFill>
-            <a:srgbClr val="303040"/>
+            <a:srgbClr val="333344"/>
           </a:solidFill>
           <a:ln>
             <a:noFill/>
@@ -9967,8 +9546,8 @@
         </p:nvSpPr>
         <p:spPr>
           <a:xfrm>
-            <a:off x="914400" y="1645920"/>
-            <a:ext cx="10332720" cy="4114800"/>
+            <a:off x="914400" y="1828800"/>
+            <a:ext cx="10515600" cy="4114800"/>
           </a:xfrm>
           <a:prstGeom prst="rect">
             <a:avLst/>
@@ -9981,11 +9560,11 @@
           </a:bodyPr>
           <a:lstStyle/>
           <a:p>
-            <a:pPr>
-              <a:spcAft>
-                <a:spcPts val="2550"/>
-              </a:spcAft>
-              <a:defRPr sz="1700">
+            <a:pPr algn="l">
+              <a:spcAft>
+                <a:spcPts val="2880"/>
+              </a:spcAft>
+              <a:defRPr sz="1800" b="0">
                 <a:solidFill>
                   <a:srgbClr val="FFFFFF"/>
                 </a:solidFill>
@@ -9995,15 +9574,15 @@
               <a:buChar char="▸"/>
             </a:pPr>
             <a:r>
-              <a:t>Scattered resources — notes, PYQs, and syllabus spread across WhatsApp groups, Google Drive links, and outdated websites</a:t>
-            </a:r>
-          </a:p>
-          <a:p>
-            <a:pPr>
-              <a:spcAft>
-                <a:spcPts val="2550"/>
-              </a:spcAft>
-              <a:defRPr sz="1700">
+              <a:t>Engineering students struggle to find organized, branch-specific study material in one place</a:t>
+            </a:r>
+          </a:p>
+          <a:p>
+            <a:pPr algn="l">
+              <a:spcAft>
+                <a:spcPts val="2880"/>
+              </a:spcAft>
+              <a:defRPr sz="1800" b="0">
                 <a:solidFill>
                   <a:srgbClr val="FFFFFF"/>
                 </a:solidFill>
@@ -10013,15 +9592,15 @@
               <a:buChar char="▸"/>
             </a:pPr>
             <a:r>
-              <a:t>No central hub — students waste hours searching for branch-specific study material instead of studying</a:t>
-            </a:r>
-          </a:p>
-          <a:p>
-            <a:pPr>
-              <a:spcAft>
-                <a:spcPts val="2550"/>
-              </a:spcAft>
-              <a:defRPr sz="1700">
+              <a:t>Notes, PYQs, syllabus, and important questions are scattered across WhatsApp groups and drive links</a:t>
+            </a:r>
+          </a:p>
+          <a:p>
+            <a:pPr algn="l">
+              <a:spcAft>
+                <a:spcPts val="2880"/>
+              </a:spcAft>
+              <a:defRPr sz="1800" b="0">
                 <a:solidFill>
                   <a:srgbClr val="FFFFFF"/>
                 </a:solidFill>
@@ -10031,15 +9610,15 @@
               <a:buChar char="▸"/>
             </a:pPr>
             <a:r>
-              <a:t>Language barrier — most online resources are English-only, excluding Hindi-speaking students</a:t>
-            </a:r>
-          </a:p>
-          <a:p>
-            <a:pPr>
-              <a:spcAft>
-                <a:spcPts val="2550"/>
-              </a:spcAft>
-              <a:defRPr sz="1700">
+              <a:t>No AI assistant that answers subject-specific questions with formulas, diagrams, and examples</a:t>
+            </a:r>
+          </a:p>
+          <a:p>
+            <a:pPr algn="l">
+              <a:spcAft>
+                <a:spcPts val="2880"/>
+              </a:spcAft>
+              <a:defRPr sz="1800" b="0">
                 <a:solidFill>
                   <a:srgbClr val="FFFFFF"/>
                 </a:solidFill>
@@ -10049,15 +9628,15 @@
               <a:buChar char="▸"/>
             </a:pPr>
             <a:r>
-              <a:t>No AI doubt-solving — no assistant that gives subject-specific answers with formulas, diagrams, and examples</a:t>
-            </a:r>
-          </a:p>
-          <a:p>
-            <a:pPr>
-              <a:spcAft>
-                <a:spcPts val="2550"/>
-              </a:spcAft>
-              <a:defRPr sz="1700">
+              <a:t>Most resources are English-only — a barrier for Hindi-speaking students</a:t>
+            </a:r>
+          </a:p>
+          <a:p>
+            <a:pPr algn="l">
+              <a:spcAft>
+                <a:spcPts val="2880"/>
+              </a:spcAft>
+              <a:defRPr sz="1800" b="0">
                 <a:solidFill>
                   <a:srgbClr val="FFFFFF"/>
                 </a:solidFill>
@@ -10067,15 +9646,15 @@
               <a:buChar char="▸"/>
             </a:pPr>
             <a:r>
-              <a:t>Ad-cluttered platforms — existing sites are full of pop-ups, paywalls, and irrelevant content</a:t>
-            </a:r>
-          </a:p>
-          <a:p>
-            <a:pPr>
-              <a:spcAft>
-                <a:spcPts val="2550"/>
-              </a:spcAft>
-              <a:defRPr sz="1700">
+              <a:t>Existing platforms are cluttered with ads and paywalls</a:t>
+            </a:r>
+          </a:p>
+          <a:p>
+            <a:pPr algn="l">
+              <a:spcAft>
+                <a:spcPts val="2880"/>
+              </a:spcAft>
+              <a:defRPr sz="1800" b="0">
                 <a:solidFill>
                   <a:srgbClr val="FFFFFF"/>
                 </a:solidFill>
@@ -10085,7 +9664,7 @@
               <a:buChar char="▸"/>
             </a:pPr>
             <a:r>
-              <a:t>No placement prep hub — DSA resources and company-wise interview material are not organized in one place</a:t>
+              <a:t>No centralized place for DSA and placement preparation resources</a:t>
             </a:r>
           </a:p>
         </p:txBody>
@@ -10099,15 +9678,13 @@
         <p:spPr>
           <a:xfrm>
             <a:off x="914400" y="5303520"/>
-            <a:ext cx="10332720" cy="777240"/>
+            <a:ext cx="10332720" cy="822960"/>
           </a:xfrm>
           <a:prstGeom prst="roundRect">
-            <a:avLst>
-              <a:gd name="adj" fmla="val 6000"/>
-            </a:avLst>
+            <a:avLst/>
           </a:prstGeom>
           <a:solidFill>
-            <a:srgbClr val="14B8A6"/>
+            <a:srgbClr val="F97316"/>
           </a:solidFill>
           <a:ln>
             <a:noFill/>
@@ -10128,19 +9705,19 @@
           </a:fontRef>
         </p:style>
         <p:txBody>
-          <a:bodyPr rtlCol="0" anchor="ctr" tIns="127000"/>
+          <a:bodyPr rtlCol="0" anchor="ctr" wrap="square" tIns="127000"/>
           <a:lstStyle/>
           <a:p>
             <a:pPr algn="ctr">
-              <a:defRPr sz="1700" b="1">
-                <a:solidFill>
-                  <a:srgbClr val="0A0A0F"/>
-                </a:solidFill>
-                <a:latin typeface="Segoe UI"/>
-              </a:defRPr>
-            </a:pPr>
-            <a:r>
-              <a:t>TechNotes AI solves all of this — one platform, all branches, AI-powered, bilingual, and completely free.</a:t>
+              <a:defRPr sz="1800" b="1">
+                <a:solidFill>
+                  <a:srgbClr val="FFFFFF"/>
+                </a:solidFill>
+                <a:latin typeface="Segoe UI"/>
+              </a:defRPr>
+            </a:pPr>
+            <a:r>
+              <a:t>TechNotes AI solves all of this — one platform, all branches, AI-powered, bilingual, free.</a:t>
             </a:r>
           </a:p>
         </p:txBody>
@@ -10153,8 +9730,8 @@
         </p:nvSpPr>
         <p:spPr>
           <a:xfrm>
-            <a:off x="731520" y="6446520"/>
-            <a:ext cx="7315200" cy="320040"/>
+            <a:off x="731520" y="6400800"/>
+            <a:ext cx="7315200" cy="365760"/>
           </a:xfrm>
           <a:prstGeom prst="rect">
             <a:avLst/>
@@ -10168,7 +9745,7 @@
           <a:lstStyle/>
           <a:p>
             <a:pPr algn="l">
-              <a:defRPr sz="1000" b="0">
+              <a:defRPr sz="1100" b="0">
                 <a:solidFill>
                   <a:srgbClr val="707080"/>
                 </a:solidFill>
@@ -10222,7 +9799,7 @@
             <a:avLst/>
           </a:prstGeom>
           <a:solidFill>
-            <a:srgbClr val="14B8A6"/>
+            <a:srgbClr val="F97316"/>
           </a:solidFill>
           <a:ln>
             <a:noFill/>
@@ -10273,7 +9850,7 @@
           <a:lstStyle/>
           <a:p>
             <a:pPr algn="l">
-              <a:defRPr sz="2800" b="1">
+              <a:defRPr sz="3000" b="1">
                 <a:solidFill>
                   <a:srgbClr val="FFFFFF"/>
                 </a:solidFill>
@@ -10281,7 +9858,7 @@
               </a:defRPr>
             </a:pPr>
             <a:r>
-              <a:t>Our Solution</a:t>
+              <a:t>What is TechNotes AI?</a:t>
             </a:r>
           </a:p>
         </p:txBody>
@@ -10294,7 +9871,7 @@
         </p:nvSpPr>
         <p:spPr>
           <a:xfrm>
-            <a:off x="731520" y="868680"/>
+            <a:off x="731520" y="914400"/>
             <a:ext cx="10058400" cy="457200"/>
           </a:xfrm>
           <a:prstGeom prst="rect">
@@ -10309,7 +9886,7 @@
           <a:lstStyle/>
           <a:p>
             <a:pPr algn="l">
-              <a:defRPr sz="1400" b="0">
+              <a:defRPr sz="1500" b="0">
                 <a:solidFill>
                   <a:srgbClr val="B0B0C0"/>
                 </a:solidFill>
@@ -10317,7 +9894,7 @@
               </a:defRPr>
             </a:pPr>
             <a:r>
-              <a:t>What TechNotes AI does</a:t>
+              <a:t>A free, ad-free study platform built for RGPV students</a:t>
             </a:r>
           </a:p>
         </p:txBody>
@@ -10330,8 +9907,8 @@
         </p:nvSpPr>
         <p:spPr>
           <a:xfrm>
-            <a:off x="11247120" y="365760"/>
-            <a:ext cx="640080" cy="365760"/>
+            <a:off x="11155680" y="365760"/>
+            <a:ext cx="731520" cy="457200"/>
           </a:xfrm>
           <a:prstGeom prst="rect">
             <a:avLst/>
@@ -10345,7 +9922,7 @@
           <a:lstStyle/>
           <a:p>
             <a:pPr algn="r">
-              <a:defRPr sz="1300" b="0">
+              <a:defRPr sz="1400" b="0">
                 <a:solidFill>
                   <a:srgbClr val="707080"/>
                 </a:solidFill>
@@ -10366,14 +9943,14 @@
         </p:nvSpPr>
         <p:spPr>
           <a:xfrm>
-            <a:off x="731520" y="1234440"/>
+            <a:off x="731520" y="1325880"/>
             <a:ext cx="10698480" cy="19050"/>
           </a:xfrm>
           <a:prstGeom prst="rect">
             <a:avLst/>
           </a:prstGeom>
           <a:solidFill>
-            <a:srgbClr val="303040"/>
+            <a:srgbClr val="333344"/>
           </a:solidFill>
           <a:ln>
             <a:noFill/>
@@ -10409,7 +9986,7 @@
         </p:nvSpPr>
         <p:spPr>
           <a:xfrm>
-            <a:off x="914400" y="1554480"/>
+            <a:off x="914400" y="1645920"/>
             <a:ext cx="10332720" cy="1097280"/>
           </a:xfrm>
           <a:prstGeom prst="rect">
@@ -10424,7 +10001,7 @@
           <a:lstStyle/>
           <a:p>
             <a:pPr algn="l">
-              <a:defRPr sz="1600" b="0">
+              <a:defRPr sz="1700" b="0">
                 <a:solidFill>
                   <a:srgbClr val="B0B0C0"/>
                 </a:solidFill>
@@ -10432,7 +10009,7 @@
               </a:defRPr>
             </a:pPr>
             <a:r>
-              <a:t>A free, ad-free study platform that centralizes everything an RGPV engineering student needs — academic notes, previous year papers, syllabus, important questions, DSA and placement prep — paired with an AI chatbot that answers questions across ALL engineering branches and analyzes uploaded PDFs and images.</a:t>
+              <a:t>TechNotes AI centralizes everything an engineering student needs — academic notes, previous year papers, syllabus, important questions, DSA and placement prep — paired with an AI chatbot that answers questions across ALL engineering branches and analyzes uploaded PDFs and images.</a:t>
             </a:r>
           </a:p>
         </p:txBody>
@@ -10445,7 +10022,7 @@
         </p:nvSpPr>
         <p:spPr>
           <a:xfrm>
-            <a:off x="914400" y="2926080"/>
+            <a:off x="914400" y="3017520"/>
             <a:ext cx="10515600" cy="3200400"/>
           </a:xfrm>
           <a:prstGeom prst="rect">
@@ -10459,11 +10036,11 @@
           </a:bodyPr>
           <a:lstStyle/>
           <a:p>
-            <a:pPr>
-              <a:spcAft>
-                <a:spcPts val="2080"/>
-              </a:spcAft>
-              <a:defRPr sz="1600">
+            <a:pPr algn="l">
+              <a:spcAft>
+                <a:spcPts val="2550"/>
+              </a:spcAft>
+              <a:defRPr sz="1700" b="0">
                 <a:solidFill>
                   <a:srgbClr val="FFFFFF"/>
                 </a:solidFill>
@@ -10473,15 +10050,15 @@
               <a:buChar char="▸"/>
             </a:pPr>
             <a:r>
-              <a:t>Centralized academic notes and PDFs across all engineering branches</a:t>
-            </a:r>
-          </a:p>
-          <a:p>
-            <a:pPr>
-              <a:spcAft>
-                <a:spcPts val="2080"/>
-              </a:spcAft>
-              <a:defRPr sz="1600">
+              <a:t>Academic notes and PDFs across all engineering branches</a:t>
+            </a:r>
+          </a:p>
+          <a:p>
+            <a:pPr algn="l">
+              <a:spcAft>
+                <a:spcPts val="2550"/>
+              </a:spcAft>
+              <a:defRPr sz="1700" b="0">
                 <a:solidFill>
                   <a:srgbClr val="FFFFFF"/>
                 </a:solidFill>
@@ -10491,15 +10068,15 @@
               <a:buChar char="▸"/>
             </a:pPr>
             <a:r>
-              <a:t>Previous Year Question papers (PYQs) with optional answer keys</a:t>
-            </a:r>
-          </a:p>
-          <a:p>
-            <a:pPr>
-              <a:spcAft>
-                <a:spcPts val="2080"/>
-              </a:spcAft>
-              <a:defRPr sz="1600">
+              <a:t>Previous Year Question papers (PYQs) with answer keys</a:t>
+            </a:r>
+          </a:p>
+          <a:p>
+            <a:pPr algn="l">
+              <a:spcAft>
+                <a:spcPts val="2550"/>
+              </a:spcAft>
+              <a:defRPr sz="1700" b="0">
                 <a:solidFill>
                   <a:srgbClr val="FFFFFF"/>
                 </a:solidFill>
@@ -10509,15 +10086,15 @@
               <a:buChar char="▸"/>
             </a:pPr>
             <a:r>
-              <a:t>Unit-wise syllabus and important questions per subject</a:t>
-            </a:r>
-          </a:p>
-          <a:p>
-            <a:pPr>
-              <a:spcAft>
-                <a:spcPts val="2080"/>
-              </a:spcAft>
-              <a:defRPr sz="1600">
+              <a:t>Unit-wise syllabus and important questions</a:t>
+            </a:r>
+          </a:p>
+          <a:p>
+            <a:pPr algn="l">
+              <a:spcAft>
+                <a:spcPts val="2550"/>
+              </a:spcAft>
+              <a:defRPr sz="1700" b="0">
                 <a:solidFill>
                   <a:srgbClr val="FFFFFF"/>
                 </a:solidFill>
@@ -10527,15 +10104,15 @@
               <a:buChar char="▸"/>
             </a:pPr>
             <a:r>
-              <a:t>DSA preparation hub with notes and practice questions</a:t>
-            </a:r>
-          </a:p>
-          <a:p>
-            <a:pPr>
-              <a:spcAft>
-                <a:spcPts val="2080"/>
-              </a:spcAft>
-              <a:defRPr sz="1600">
+              <a:t>DSA and placement preparation resources</a:t>
+            </a:r>
+          </a:p>
+          <a:p>
+            <a:pPr algn="l">
+              <a:spcAft>
+                <a:spcPts val="2550"/>
+              </a:spcAft>
+              <a:defRPr sz="1700" b="0">
                 <a:solidFill>
                   <a:srgbClr val="FFFFFF"/>
                 </a:solidFill>
@@ -10545,15 +10122,15 @@
               <a:buChar char="▸"/>
             </a:pPr>
             <a:r>
-              <a:t>Placement preparation with company-wise filtering</a:t>
-            </a:r>
-          </a:p>
-          <a:p>
-            <a:pPr>
-              <a:spcAft>
-                <a:spcPts val="2080"/>
-              </a:spcAft>
-              <a:defRPr sz="1600">
+              <a:t>AI chatbot covering all engineering branches</a:t>
+            </a:r>
+          </a:p>
+          <a:p>
+            <a:pPr algn="l">
+              <a:spcAft>
+                <a:spcPts val="2550"/>
+              </a:spcAft>
+              <a:defRPr sz="1700" b="0">
                 <a:solidFill>
                   <a:srgbClr val="FFFFFF"/>
                 </a:solidFill>
@@ -10563,43 +10140,7 @@
               <a:buChar char="▸"/>
             </a:pPr>
             <a:r>
-              <a:t>AI chatbot covering CSE, Civil, Electrical, Electronics, Mechanical, Math, Physics, Chemistry</a:t>
-            </a:r>
-          </a:p>
-          <a:p>
-            <a:pPr>
-              <a:spcAft>
-                <a:spcPts val="2080"/>
-              </a:spcAft>
-              <a:defRPr sz="1600">
-                <a:solidFill>
-                  <a:srgbClr val="FFFFFF"/>
-                </a:solidFill>
-                <a:latin typeface="Segoe UI"/>
-              </a:defRPr>
-              <a:buFont typeface="Arial"/>
-              <a:buChar char="▸"/>
-            </a:pPr>
-            <a:r>
-              <a:t>Bilingual interface — Hindi and English with instant toggle</a:t>
-            </a:r>
-          </a:p>
-          <a:p>
-            <a:pPr>
-              <a:spcAft>
-                <a:spcPts val="2080"/>
-              </a:spcAft>
-              <a:defRPr sz="1600">
-                <a:solidFill>
-                  <a:srgbClr val="FFFFFF"/>
-                </a:solidFill>
-                <a:latin typeface="Segoe UI"/>
-              </a:defRPr>
-              <a:buFont typeface="Arial"/>
-              <a:buChar char="▸"/>
-            </a:pPr>
-            <a:r>
-              <a:t>Admin panel for secure content management</a:t>
+              <a:t>Bilingual interface (Hindi / English)</a:t>
             </a:r>
           </a:p>
         </p:txBody>
@@ -10612,8 +10153,8 @@
         </p:nvSpPr>
         <p:spPr>
           <a:xfrm>
-            <a:off x="731520" y="6446520"/>
-            <a:ext cx="7315200" cy="320040"/>
+            <a:off x="731520" y="6400800"/>
+            <a:ext cx="7315200" cy="365760"/>
           </a:xfrm>
           <a:prstGeom prst="rect">
             <a:avLst/>
@@ -10627,7 +10168,7 @@
           <a:lstStyle/>
           <a:p>
             <a:pPr algn="l">
-              <a:defRPr sz="1000" b="0">
+              <a:defRPr sz="1100" b="0">
                 <a:solidFill>
                   <a:srgbClr val="707080"/>
                 </a:solidFill>
@@ -10681,7 +10222,7 @@
             <a:avLst/>
           </a:prstGeom>
           <a:solidFill>
-            <a:srgbClr val="14B8A6"/>
+            <a:srgbClr val="F97316"/>
           </a:solidFill>
           <a:ln>
             <a:noFill/>
@@ -10732,7 +10273,7 @@
           <a:lstStyle/>
           <a:p>
             <a:pPr algn="l">
-              <a:defRPr sz="2800" b="1">
+              <a:defRPr sz="3000" b="1">
                 <a:solidFill>
                   <a:srgbClr val="FFFFFF"/>
                 </a:solidFill>
@@ -10753,7 +10294,7 @@
         </p:nvSpPr>
         <p:spPr>
           <a:xfrm>
-            <a:off x="731520" y="868680"/>
+            <a:off x="731520" y="914400"/>
             <a:ext cx="10058400" cy="457200"/>
           </a:xfrm>
           <a:prstGeom prst="rect">
@@ -10768,7 +10309,7 @@
           <a:lstStyle/>
           <a:p>
             <a:pPr algn="l">
-              <a:defRPr sz="1400" b="0">
+              <a:defRPr sz="1500" b="0">
                 <a:solidFill>
                   <a:srgbClr val="B0B0C0"/>
                 </a:solidFill>
@@ -10789,8 +10330,8 @@
         </p:nvSpPr>
         <p:spPr>
           <a:xfrm>
-            <a:off x="11247120" y="365760"/>
-            <a:ext cx="640080" cy="365760"/>
+            <a:off x="11155680" y="365760"/>
+            <a:ext cx="731520" cy="457200"/>
           </a:xfrm>
           <a:prstGeom prst="rect">
             <a:avLst/>
@@ -10804,7 +10345,7 @@
           <a:lstStyle/>
           <a:p>
             <a:pPr algn="r">
-              <a:defRPr sz="1300" b="0">
+              <a:defRPr sz="1400" b="0">
                 <a:solidFill>
                   <a:srgbClr val="707080"/>
                 </a:solidFill>
@@ -10825,14 +10366,14 @@
         </p:nvSpPr>
         <p:spPr>
           <a:xfrm>
-            <a:off x="731520" y="1234440"/>
+            <a:off x="731520" y="1325880"/>
             <a:ext cx="10698480" cy="19050"/>
           </a:xfrm>
           <a:prstGeom prst="rect">
             <a:avLst/>
           </a:prstGeom>
           <a:solidFill>
-            <a:srgbClr val="303040"/>
+            <a:srgbClr val="333344"/>
           </a:solidFill>
           <a:ln>
             <a:noFill/>
@@ -10868,13 +10409,11 @@
         </p:nvSpPr>
         <p:spPr>
           <a:xfrm>
-            <a:off x="457200" y="1554480"/>
-            <a:ext cx="2834640" cy="2194560"/>
+            <a:off x="548640" y="1645920"/>
+            <a:ext cx="2926080" cy="2286000"/>
           </a:xfrm>
           <a:prstGeom prst="roundRect">
-            <a:avLst>
-              <a:gd name="adj" fmla="val 8000"/>
-            </a:avLst>
+            <a:avLst/>
           </a:prstGeom>
           <a:solidFill>
             <a:srgbClr val="14141C"/>
@@ -10913,8 +10452,8 @@
         </p:nvSpPr>
         <p:spPr>
           <a:xfrm>
-            <a:off x="457200" y="1554480"/>
-            <a:ext cx="2834640" cy="45720"/>
+            <a:off x="548640" y="1645920"/>
+            <a:ext cx="2926080" cy="45720"/>
           </a:xfrm>
           <a:prstGeom prst="rect">
             <a:avLst/>
@@ -10956,8 +10495,8 @@
         </p:nvSpPr>
         <p:spPr>
           <a:xfrm>
-            <a:off x="640080" y="1664208"/>
-            <a:ext cx="2468880" cy="320040"/>
+            <a:off x="777240" y="1783080"/>
+            <a:ext cx="2468880" cy="365760"/>
           </a:xfrm>
           <a:prstGeom prst="rect">
             <a:avLst/>
@@ -10971,7 +10510,7 @@
           <a:lstStyle/>
           <a:p>
             <a:pPr algn="l">
-              <a:defRPr sz="1400" b="1">
+              <a:defRPr sz="1600" b="1">
                 <a:solidFill>
                   <a:srgbClr val="F97316"/>
                 </a:solidFill>
@@ -10992,7 +10531,7 @@
         </p:nvSpPr>
         <p:spPr>
           <a:xfrm>
-            <a:off x="640080" y="2011680"/>
+            <a:off x="777240" y="2194560"/>
             <a:ext cx="2468880" cy="1645920"/>
           </a:xfrm>
           <a:prstGeom prst="rect">
@@ -11008,9 +10547,9 @@
           <a:p>
             <a:pPr algn="l">
               <a:spcAft>
-                <a:spcPts val="1264"/>
-              </a:spcAft>
-              <a:defRPr sz="1100" b="0">
+                <a:spcPts val="1560"/>
+              </a:spcAft>
+              <a:defRPr sz="1300" b="0">
                 <a:solidFill>
                   <a:srgbClr val="B0B0C0"/>
                 </a:solidFill>
@@ -11024,9 +10563,9 @@
           <a:p>
             <a:pPr algn="l">
               <a:spcAft>
-                <a:spcPts val="1264"/>
-              </a:spcAft>
-              <a:defRPr sz="1100" b="0">
+                <a:spcPts val="1560"/>
+              </a:spcAft>
+              <a:defRPr sz="1300" b="0">
                 <a:solidFill>
                   <a:srgbClr val="B0B0C0"/>
                 </a:solidFill>
@@ -11040,9 +10579,9 @@
           <a:p>
             <a:pPr algn="l">
               <a:spcAft>
-                <a:spcPts val="1264"/>
-              </a:spcAft>
-              <a:defRPr sz="1100" b="0">
+                <a:spcPts val="1560"/>
+              </a:spcAft>
+              <a:defRPr sz="1300" b="0">
                 <a:solidFill>
                   <a:srgbClr val="B0B0C0"/>
                 </a:solidFill>
@@ -11050,15 +10589,15 @@
               </a:defRPr>
             </a:pPr>
             <a:r>
-              <a:t>PDF / image upload</a:t>
-            </a:r>
-          </a:p>
-          <a:p>
-            <a:pPr algn="l">
-              <a:spcAft>
-                <a:spcPts val="1264"/>
-              </a:spcAft>
-              <a:defRPr sz="1100" b="0">
+              <a:t>PDF/image upload</a:t>
+            </a:r>
+          </a:p>
+          <a:p>
+            <a:pPr algn="l">
+              <a:spcAft>
+                <a:spcPts val="1560"/>
+              </a:spcAft>
+              <a:defRPr sz="1300" b="0">
                 <a:solidFill>
                   <a:srgbClr val="B0B0C0"/>
                 </a:solidFill>
@@ -11079,13 +10618,11 @@
         </p:nvSpPr>
         <p:spPr>
           <a:xfrm>
-            <a:off x="3657600" y="1554480"/>
-            <a:ext cx="2834640" cy="2194560"/>
+            <a:off x="3749039" y="1645920"/>
+            <a:ext cx="2926080" cy="2286000"/>
           </a:xfrm>
           <a:prstGeom prst="roundRect">
-            <a:avLst>
-              <a:gd name="adj" fmla="val 8000"/>
-            </a:avLst>
+            <a:avLst/>
           </a:prstGeom>
           <a:solidFill>
             <a:srgbClr val="14141C"/>
@@ -11124,8 +10661,8 @@
         </p:nvSpPr>
         <p:spPr>
           <a:xfrm>
-            <a:off x="3657600" y="1554480"/>
-            <a:ext cx="2834640" cy="45720"/>
+            <a:off x="3749039" y="1645920"/>
+            <a:ext cx="2926080" cy="45720"/>
           </a:xfrm>
           <a:prstGeom prst="rect">
             <a:avLst/>
@@ -11167,8 +10704,8 @@
         </p:nvSpPr>
         <p:spPr>
           <a:xfrm>
-            <a:off x="3840480" y="1664208"/>
-            <a:ext cx="2468880" cy="320040"/>
+            <a:off x="3977639" y="1783080"/>
+            <a:ext cx="2468880" cy="365760"/>
           </a:xfrm>
           <a:prstGeom prst="rect">
             <a:avLst/>
@@ -11182,7 +10719,7 @@
           <a:lstStyle/>
           <a:p>
             <a:pPr algn="l">
-              <a:defRPr sz="1400" b="1">
+              <a:defRPr sz="1600" b="1">
                 <a:solidFill>
                   <a:srgbClr val="1E3A8A"/>
                 </a:solidFill>
@@ -11203,7 +10740,7 @@
         </p:nvSpPr>
         <p:spPr>
           <a:xfrm>
-            <a:off x="3840480" y="2011680"/>
+            <a:off x="3977639" y="2194560"/>
             <a:ext cx="2468880" cy="1645920"/>
           </a:xfrm>
           <a:prstGeom prst="rect">
@@ -11219,9 +10756,9 @@
           <a:p>
             <a:pPr algn="l">
               <a:spcAft>
-                <a:spcPts val="1264"/>
-              </a:spcAft>
-              <a:defRPr sz="1100" b="0">
+                <a:spcPts val="1560"/>
+              </a:spcAft>
+              <a:defRPr sz="1300" b="0">
                 <a:solidFill>
                   <a:srgbClr val="B0B0C0"/>
                 </a:solidFill>
@@ -11235,9 +10772,9 @@
           <a:p>
             <a:pPr algn="l">
               <a:spcAft>
-                <a:spcPts val="1264"/>
-              </a:spcAft>
-              <a:defRPr sz="1100" b="0">
+                <a:spcPts val="1560"/>
+              </a:spcAft>
+              <a:defRPr sz="1300" b="0">
                 <a:solidFill>
                   <a:srgbClr val="B0B0C0"/>
                 </a:solidFill>
@@ -11251,9 +10788,9 @@
           <a:p>
             <a:pPr algn="l">
               <a:spcAft>
-                <a:spcPts val="1264"/>
-              </a:spcAft>
-              <a:defRPr sz="1100" b="0">
+                <a:spcPts val="1560"/>
+              </a:spcAft>
+              <a:defRPr sz="1300" b="0">
                 <a:solidFill>
                   <a:srgbClr val="B0B0C0"/>
                 </a:solidFill>
@@ -11267,9 +10804,9 @@
           <a:p>
             <a:pPr algn="l">
               <a:spcAft>
-                <a:spcPts val="1264"/>
-              </a:spcAft>
-              <a:defRPr sz="1100" b="0">
+                <a:spcPts val="1560"/>
+              </a:spcAft>
+              <a:defRPr sz="1300" b="0">
                 <a:solidFill>
                   <a:srgbClr val="B0B0C0"/>
                 </a:solidFill>
@@ -11290,13 +10827,11 @@
         </p:nvSpPr>
         <p:spPr>
           <a:xfrm>
-            <a:off x="6858000" y="1554480"/>
-            <a:ext cx="2834640" cy="2194560"/>
+            <a:off x="6949440" y="1645920"/>
+            <a:ext cx="2926080" cy="2286000"/>
           </a:xfrm>
           <a:prstGeom prst="roundRect">
-            <a:avLst>
-              <a:gd name="adj" fmla="val 8000"/>
-            </a:avLst>
+            <a:avLst/>
           </a:prstGeom>
           <a:solidFill>
             <a:srgbClr val="14141C"/>
@@ -11335,8 +10870,8 @@
         </p:nvSpPr>
         <p:spPr>
           <a:xfrm>
-            <a:off x="6858000" y="1554480"/>
-            <a:ext cx="2834640" cy="45720"/>
+            <a:off x="6949440" y="1645920"/>
+            <a:ext cx="2926080" cy="45720"/>
           </a:xfrm>
           <a:prstGeom prst="rect">
             <a:avLst/>
@@ -11378,8 +10913,8 @@
         </p:nvSpPr>
         <p:spPr>
           <a:xfrm>
-            <a:off x="7040880" y="1664208"/>
-            <a:ext cx="2468880" cy="320040"/>
+            <a:off x="7178040" y="1783080"/>
+            <a:ext cx="2468880" cy="365760"/>
           </a:xfrm>
           <a:prstGeom prst="rect">
             <a:avLst/>
@@ -11393,7 +10928,7 @@
           <a:lstStyle/>
           <a:p>
             <a:pPr algn="l">
-              <a:defRPr sz="1400" b="1">
+              <a:defRPr sz="1600" b="1">
                 <a:solidFill>
                   <a:srgbClr val="22C55E"/>
                 </a:solidFill>
@@ -11414,7 +10949,7 @@
         </p:nvSpPr>
         <p:spPr>
           <a:xfrm>
-            <a:off x="7040880" y="2011680"/>
+            <a:off x="7178040" y="2194560"/>
             <a:ext cx="2468880" cy="1645920"/>
           </a:xfrm>
           <a:prstGeom prst="rect">
@@ -11430,9 +10965,9 @@
           <a:p>
             <a:pPr algn="l">
               <a:spcAft>
-                <a:spcPts val="1264"/>
-              </a:spcAft>
-              <a:defRPr sz="1100" b="0">
+                <a:spcPts val="1560"/>
+              </a:spcAft>
+              <a:defRPr sz="1300" b="0">
                 <a:solidFill>
                   <a:srgbClr val="B0B0C0"/>
                 </a:solidFill>
@@ -11446,9 +10981,9 @@
           <a:p>
             <a:pPr algn="l">
               <a:spcAft>
-                <a:spcPts val="1264"/>
-              </a:spcAft>
-              <a:defRPr sz="1100" b="0">
+                <a:spcPts val="1560"/>
+              </a:spcAft>
+              <a:defRPr sz="1300" b="0">
                 <a:solidFill>
                   <a:srgbClr val="B0B0C0"/>
                 </a:solidFill>
@@ -11462,9 +10997,9 @@
           <a:p>
             <a:pPr algn="l">
               <a:spcAft>
-                <a:spcPts val="1264"/>
-              </a:spcAft>
-              <a:defRPr sz="1100" b="0">
+                <a:spcPts val="1560"/>
+              </a:spcAft>
+              <a:defRPr sz="1300" b="0">
                 <a:solidFill>
                   <a:srgbClr val="B0B0C0"/>
                 </a:solidFill>
@@ -11478,9 +11013,9 @@
           <a:p>
             <a:pPr algn="l">
               <a:spcAft>
-                <a:spcPts val="1264"/>
-              </a:spcAft>
-              <a:defRPr sz="1100" b="0">
+                <a:spcPts val="1560"/>
+              </a:spcAft>
+              <a:defRPr sz="1300" b="0">
                 <a:solidFill>
                   <a:srgbClr val="B0B0C0"/>
                 </a:solidFill>
@@ -11501,13 +11036,11 @@
         </p:nvSpPr>
         <p:spPr>
           <a:xfrm>
-            <a:off x="10058400" y="1554480"/>
-            <a:ext cx="2834640" cy="2194560"/>
+            <a:off x="10149840" y="1645920"/>
+            <a:ext cx="2926080" cy="2286000"/>
           </a:xfrm>
           <a:prstGeom prst="roundRect">
-            <a:avLst>
-              <a:gd name="adj" fmla="val 8000"/>
-            </a:avLst>
+            <a:avLst/>
           </a:prstGeom>
           <a:solidFill>
             <a:srgbClr val="14141C"/>
@@ -11546,8 +11079,8 @@
         </p:nvSpPr>
         <p:spPr>
           <a:xfrm>
-            <a:off x="10058400" y="1554480"/>
-            <a:ext cx="2834640" cy="45720"/>
+            <a:off x="10149840" y="1645920"/>
+            <a:ext cx="2926080" cy="45720"/>
           </a:xfrm>
           <a:prstGeom prst="rect">
             <a:avLst/>
@@ -11589,8 +11122,8 @@
         </p:nvSpPr>
         <p:spPr>
           <a:xfrm>
-            <a:off x="10241280" y="1664208"/>
-            <a:ext cx="2468880" cy="320040"/>
+            <a:off x="10378440" y="1783080"/>
+            <a:ext cx="2468880" cy="365760"/>
           </a:xfrm>
           <a:prstGeom prst="rect">
             <a:avLst/>
@@ -11604,7 +11137,7 @@
           <a:lstStyle/>
           <a:p>
             <a:pPr algn="l">
-              <a:defRPr sz="1400" b="1">
+              <a:defRPr sz="1600" b="1">
                 <a:solidFill>
                   <a:srgbClr val="A855F7"/>
                 </a:solidFill>
@@ -11625,7 +11158,7 @@
         </p:nvSpPr>
         <p:spPr>
           <a:xfrm>
-            <a:off x="10241280" y="2011680"/>
+            <a:off x="10378440" y="2194560"/>
             <a:ext cx="2468880" cy="1645920"/>
           </a:xfrm>
           <a:prstGeom prst="rect">
@@ -11641,9 +11174,9 @@
           <a:p>
             <a:pPr algn="l">
               <a:spcAft>
-                <a:spcPts val="1264"/>
-              </a:spcAft>
-              <a:defRPr sz="1100" b="0">
+                <a:spcPts val="1560"/>
+              </a:spcAft>
+              <a:defRPr sz="1300" b="0">
                 <a:solidFill>
                   <a:srgbClr val="B0B0C0"/>
                 </a:solidFill>
@@ -11657,9 +11190,9 @@
           <a:p>
             <a:pPr algn="l">
               <a:spcAft>
-                <a:spcPts val="1264"/>
-              </a:spcAft>
-              <a:defRPr sz="1100" b="0">
+                <a:spcPts val="1560"/>
+              </a:spcAft>
+              <a:defRPr sz="1300" b="0">
                 <a:solidFill>
                   <a:srgbClr val="B0B0C0"/>
                 </a:solidFill>
@@ -11673,9 +11206,9 @@
           <a:p>
             <a:pPr algn="l">
               <a:spcAft>
-                <a:spcPts val="1264"/>
-              </a:spcAft>
-              <a:defRPr sz="1100" b="0">
+                <a:spcPts val="1560"/>
+              </a:spcAft>
+              <a:defRPr sz="1300" b="0">
                 <a:solidFill>
                   <a:srgbClr val="B0B0C0"/>
                 </a:solidFill>
@@ -11689,9 +11222,9 @@
           <a:p>
             <a:pPr algn="l">
               <a:spcAft>
-                <a:spcPts val="1264"/>
-              </a:spcAft>
-              <a:defRPr sz="1100" b="0">
+                <a:spcPts val="1560"/>
+              </a:spcAft>
+              <a:defRPr sz="1300" b="0">
                 <a:solidFill>
                   <a:srgbClr val="B0B0C0"/>
                 </a:solidFill>
@@ -11712,13 +11245,11 @@
         </p:nvSpPr>
         <p:spPr>
           <a:xfrm>
-            <a:off x="457200" y="3931920"/>
-            <a:ext cx="2834640" cy="2194560"/>
+            <a:off x="548640" y="4114800"/>
+            <a:ext cx="2926080" cy="2286000"/>
           </a:xfrm>
           <a:prstGeom prst="roundRect">
-            <a:avLst>
-              <a:gd name="adj" fmla="val 8000"/>
-            </a:avLst>
+            <a:avLst/>
           </a:prstGeom>
           <a:solidFill>
             <a:srgbClr val="14141C"/>
@@ -11757,8 +11288,8 @@
         </p:nvSpPr>
         <p:spPr>
           <a:xfrm>
-            <a:off x="457200" y="3931920"/>
-            <a:ext cx="2834640" cy="45720"/>
+            <a:off x="548640" y="4114800"/>
+            <a:ext cx="2926080" cy="45720"/>
           </a:xfrm>
           <a:prstGeom prst="rect">
             <a:avLst/>
@@ -11800,8 +11331,8 @@
         </p:nvSpPr>
         <p:spPr>
           <a:xfrm>
-            <a:off x="640080" y="4041648"/>
-            <a:ext cx="2468880" cy="320040"/>
+            <a:off x="777240" y="4251960"/>
+            <a:ext cx="2468880" cy="365760"/>
           </a:xfrm>
           <a:prstGeom prst="rect">
             <a:avLst/>
@@ -11815,7 +11346,7 @@
           <a:lstStyle/>
           <a:p>
             <a:pPr algn="l">
-              <a:defRPr sz="1400" b="1">
+              <a:defRPr sz="1600" b="1">
                 <a:solidFill>
                   <a:srgbClr val="14B8A6"/>
                 </a:solidFill>
@@ -11836,7 +11367,7 @@
         </p:nvSpPr>
         <p:spPr>
           <a:xfrm>
-            <a:off x="640080" y="4389120"/>
+            <a:off x="777240" y="4663440"/>
             <a:ext cx="2468880" cy="1645920"/>
           </a:xfrm>
           <a:prstGeom prst="rect">
@@ -11852,9 +11383,9 @@
           <a:p>
             <a:pPr algn="l">
               <a:spcAft>
-                <a:spcPts val="1264"/>
-              </a:spcAft>
-              <a:defRPr sz="1100" b="0">
+                <a:spcPts val="1560"/>
+              </a:spcAft>
+              <a:defRPr sz="1300" b="0">
                 <a:solidFill>
                   <a:srgbClr val="B0B0C0"/>
                 </a:solidFill>
@@ -11868,9 +11399,9 @@
           <a:p>
             <a:pPr algn="l">
               <a:spcAft>
-                <a:spcPts val="1264"/>
-              </a:spcAft>
-              <a:defRPr sz="1100" b="0">
+                <a:spcPts val="1560"/>
+              </a:spcAft>
+              <a:defRPr sz="1300" b="0">
                 <a:solidFill>
                   <a:srgbClr val="B0B0C0"/>
                 </a:solidFill>
@@ -11884,9 +11415,9 @@
           <a:p>
             <a:pPr algn="l">
               <a:spcAft>
-                <a:spcPts val="1264"/>
-              </a:spcAft>
-              <a:defRPr sz="1100" b="0">
+                <a:spcPts val="1560"/>
+              </a:spcAft>
+              <a:defRPr sz="1300" b="0">
                 <a:solidFill>
                   <a:srgbClr val="B0B0C0"/>
                 </a:solidFill>
@@ -11900,9 +11431,9 @@
           <a:p>
             <a:pPr algn="l">
               <a:spcAft>
-                <a:spcPts val="1264"/>
-              </a:spcAft>
-              <a:defRPr sz="1100" b="0">
+                <a:spcPts val="1560"/>
+              </a:spcAft>
+              <a:defRPr sz="1300" b="0">
                 <a:solidFill>
                   <a:srgbClr val="B0B0C0"/>
                 </a:solidFill>
@@ -11923,13 +11454,11 @@
         </p:nvSpPr>
         <p:spPr>
           <a:xfrm>
-            <a:off x="3657600" y="3931920"/>
-            <a:ext cx="2834640" cy="2194560"/>
+            <a:off x="3749039" y="4114800"/>
+            <a:ext cx="2926080" cy="2286000"/>
           </a:xfrm>
           <a:prstGeom prst="roundRect">
-            <a:avLst>
-              <a:gd name="adj" fmla="val 8000"/>
-            </a:avLst>
+            <a:avLst/>
           </a:prstGeom>
           <a:solidFill>
             <a:srgbClr val="14141C"/>
@@ -11968,8 +11497,8 @@
         </p:nvSpPr>
         <p:spPr>
           <a:xfrm>
-            <a:off x="3657600" y="3931920"/>
-            <a:ext cx="2834640" cy="45720"/>
+            <a:off x="3749039" y="4114800"/>
+            <a:ext cx="2926080" cy="45720"/>
           </a:xfrm>
           <a:prstGeom prst="rect">
             <a:avLst/>
@@ -12011,8 +11540,8 @@
         </p:nvSpPr>
         <p:spPr>
           <a:xfrm>
-            <a:off x="3840480" y="4041648"/>
-            <a:ext cx="2468880" cy="320040"/>
+            <a:off x="3977639" y="4251960"/>
+            <a:ext cx="2468880" cy="365760"/>
           </a:xfrm>
           <a:prstGeom prst="rect">
             <a:avLst/>
@@ -12026,7 +11555,7 @@
           <a:lstStyle/>
           <a:p>
             <a:pPr algn="l">
-              <a:defRPr sz="1400" b="1">
+              <a:defRPr sz="1600" b="1">
                 <a:solidFill>
                   <a:srgbClr val="EF4444"/>
                 </a:solidFill>
@@ -12047,7 +11576,7 @@
         </p:nvSpPr>
         <p:spPr>
           <a:xfrm>
-            <a:off x="3840480" y="4389120"/>
+            <a:off x="3977639" y="4663440"/>
             <a:ext cx="2468880" cy="1645920"/>
           </a:xfrm>
           <a:prstGeom prst="rect">
@@ -12063,9 +11592,9 @@
           <a:p>
             <a:pPr algn="l">
               <a:spcAft>
-                <a:spcPts val="1264"/>
-              </a:spcAft>
-              <a:defRPr sz="1100" b="0">
+                <a:spcPts val="1560"/>
+              </a:spcAft>
+              <a:defRPr sz="1300" b="0">
                 <a:solidFill>
                   <a:srgbClr val="B0B0C0"/>
                 </a:solidFill>
@@ -12079,9 +11608,9 @@
           <a:p>
             <a:pPr algn="l">
               <a:spcAft>
-                <a:spcPts val="1264"/>
-              </a:spcAft>
-              <a:defRPr sz="1100" b="0">
+                <a:spcPts val="1560"/>
+              </a:spcAft>
+              <a:defRPr sz="1300" b="0">
                 <a:solidFill>
                   <a:srgbClr val="B0B0C0"/>
                 </a:solidFill>
@@ -12095,9 +11624,9 @@
           <a:p>
             <a:pPr algn="l">
               <a:spcAft>
-                <a:spcPts val="1264"/>
-              </a:spcAft>
-              <a:defRPr sz="1100" b="0">
+                <a:spcPts val="1560"/>
+              </a:spcAft>
+              <a:defRPr sz="1300" b="0">
                 <a:solidFill>
                   <a:srgbClr val="B0B0C0"/>
                 </a:solidFill>
@@ -12105,15 +11634,15 @@
               </a:defRPr>
             </a:pPr>
             <a:r>
-              <a:t>AI in user language</a:t>
-            </a:r>
-          </a:p>
-          <a:p>
-            <a:pPr algn="l">
-              <a:spcAft>
-                <a:spcPts val="1264"/>
-              </a:spcAft>
-              <a:defRPr sz="1100" b="0">
+              <a:t>AI responds in user language</a:t>
+            </a:r>
+          </a:p>
+          <a:p>
+            <a:pPr algn="l">
+              <a:spcAft>
+                <a:spcPts val="1560"/>
+              </a:spcAft>
+              <a:defRPr sz="1300" b="0">
                 <a:solidFill>
                   <a:srgbClr val="B0B0C0"/>
                 </a:solidFill>
@@ -12134,13 +11663,11 @@
         </p:nvSpPr>
         <p:spPr>
           <a:xfrm>
-            <a:off x="6858000" y="3931920"/>
-            <a:ext cx="2834640" cy="2194560"/>
+            <a:off x="6949440" y="4114800"/>
+            <a:ext cx="2926080" cy="2286000"/>
           </a:xfrm>
           <a:prstGeom prst="roundRect">
-            <a:avLst>
-              <a:gd name="adj" fmla="val 8000"/>
-            </a:avLst>
+            <a:avLst/>
           </a:prstGeom>
           <a:solidFill>
             <a:srgbClr val="14141C"/>
@@ -12179,8 +11706,8 @@
         </p:nvSpPr>
         <p:spPr>
           <a:xfrm>
-            <a:off x="6858000" y="3931920"/>
-            <a:ext cx="2834640" cy="45720"/>
+            <a:off x="6949440" y="4114800"/>
+            <a:ext cx="2926080" cy="45720"/>
           </a:xfrm>
           <a:prstGeom prst="rect">
             <a:avLst/>
@@ -12222,8 +11749,8 @@
         </p:nvSpPr>
         <p:spPr>
           <a:xfrm>
-            <a:off x="7040880" y="4041648"/>
-            <a:ext cx="2468880" cy="320040"/>
+            <a:off x="7178040" y="4251960"/>
+            <a:ext cx="2468880" cy="365760"/>
           </a:xfrm>
           <a:prstGeom prst="rect">
             <a:avLst/>
@@ -12237,7 +11764,7 @@
           <a:lstStyle/>
           <a:p>
             <a:pPr algn="l">
-              <a:defRPr sz="1400" b="1">
+              <a:defRPr sz="1600" b="1">
                 <a:solidFill>
                   <a:srgbClr val="F97316"/>
                 </a:solidFill>
@@ -12258,7 +11785,7 @@
         </p:nvSpPr>
         <p:spPr>
           <a:xfrm>
-            <a:off x="7040880" y="4389120"/>
+            <a:off x="7178040" y="4663440"/>
             <a:ext cx="2468880" cy="1645920"/>
           </a:xfrm>
           <a:prstGeom prst="rect">
@@ -12274,9 +11801,9 @@
           <a:p>
             <a:pPr algn="l">
               <a:spcAft>
-                <a:spcPts val="1264"/>
-              </a:spcAft>
-              <a:defRPr sz="1100" b="0">
+                <a:spcPts val="1560"/>
+              </a:spcAft>
+              <a:defRPr sz="1300" b="0">
                 <a:solidFill>
                   <a:srgbClr val="B0B0C0"/>
                 </a:solidFill>
@@ -12290,9 +11817,9 @@
           <a:p>
             <a:pPr algn="l">
               <a:spcAft>
-                <a:spcPts val="1264"/>
-              </a:spcAft>
-              <a:defRPr sz="1100" b="0">
+                <a:spcPts val="1560"/>
+              </a:spcAft>
+              <a:defRPr sz="1300" b="0">
                 <a:solidFill>
                   <a:srgbClr val="B0B0C0"/>
                 </a:solidFill>
@@ -12300,15 +11827,15 @@
               </a:defRPr>
             </a:pPr>
             <a:r>
-              <a:t>File uploads to storage</a:t>
-            </a:r>
-          </a:p>
-          <a:p>
-            <a:pPr algn="l">
-              <a:spcAft>
-                <a:spcPts val="1264"/>
-              </a:spcAft>
-              <a:defRPr sz="1100" b="0">
+              <a:t>File uploads</a:t>
+            </a:r>
+          </a:p>
+          <a:p>
+            <a:pPr algn="l">
+              <a:spcAft>
+                <a:spcPts val="1560"/>
+              </a:spcAft>
+              <a:defRPr sz="1300" b="0">
                 <a:solidFill>
                   <a:srgbClr val="B0B0C0"/>
                 </a:solidFill>
@@ -12322,9 +11849,9 @@
           <a:p>
             <a:pPr algn="l">
               <a:spcAft>
-                <a:spcPts val="1264"/>
-              </a:spcAft>
-              <a:defRPr sz="1100" b="0">
+                <a:spcPts val="1560"/>
+              </a:spcAft>
+              <a:defRPr sz="1300" b="0">
                 <a:solidFill>
                   <a:srgbClr val="B0B0C0"/>
                 </a:solidFill>
@@ -12345,13 +11872,11 @@
         </p:nvSpPr>
         <p:spPr>
           <a:xfrm>
-            <a:off x="10058400" y="3931920"/>
-            <a:ext cx="2834640" cy="2194560"/>
+            <a:off x="10149840" y="4114800"/>
+            <a:ext cx="2926080" cy="2286000"/>
           </a:xfrm>
           <a:prstGeom prst="roundRect">
-            <a:avLst>
-              <a:gd name="adj" fmla="val 8000"/>
-            </a:avLst>
+            <a:avLst/>
           </a:prstGeom>
           <a:solidFill>
             <a:srgbClr val="14141C"/>
@@ -12390,8 +11915,8 @@
         </p:nvSpPr>
         <p:spPr>
           <a:xfrm>
-            <a:off x="10058400" y="3931920"/>
-            <a:ext cx="2834640" cy="45720"/>
+            <a:off x="10149840" y="4114800"/>
+            <a:ext cx="2926080" cy="45720"/>
           </a:xfrm>
           <a:prstGeom prst="rect">
             <a:avLst/>
@@ -12433,8 +11958,8 @@
         </p:nvSpPr>
         <p:spPr>
           <a:xfrm>
-            <a:off x="10241280" y="4041648"/>
-            <a:ext cx="2468880" cy="320040"/>
+            <a:off x="10378440" y="4251960"/>
+            <a:ext cx="2468880" cy="365760"/>
           </a:xfrm>
           <a:prstGeom prst="rect">
             <a:avLst/>
@@ -12448,7 +11973,7 @@
           <a:lstStyle/>
           <a:p>
             <a:pPr algn="l">
-              <a:defRPr sz="1400" b="1">
+              <a:defRPr sz="1600" b="1">
                 <a:solidFill>
                   <a:srgbClr val="1E3A8A"/>
                 </a:solidFill>
@@ -12469,7 +11994,7 @@
         </p:nvSpPr>
         <p:spPr>
           <a:xfrm>
-            <a:off x="10241280" y="4389120"/>
+            <a:off x="10378440" y="4663440"/>
             <a:ext cx="2468880" cy="1645920"/>
           </a:xfrm>
           <a:prstGeom prst="rect">
@@ -12485,9 +12010,9 @@
           <a:p>
             <a:pPr algn="l">
               <a:spcAft>
-                <a:spcPts val="1264"/>
-              </a:spcAft>
-              <a:defRPr sz="1100" b="0">
+                <a:spcPts val="1560"/>
+              </a:spcAft>
+              <a:defRPr sz="1300" b="0">
                 <a:solidFill>
                   <a:srgbClr val="B0B0C0"/>
                 </a:solidFill>
@@ -12495,15 +12020,15 @@
               </a:defRPr>
             </a:pPr>
             <a:r>
-              <a:t>Subject + note search</a:t>
-            </a:r>
-          </a:p>
-          <a:p>
-            <a:pPr algn="l">
-              <a:spcAft>
-                <a:spcPts val="1264"/>
-              </a:spcAft>
-              <a:defRPr sz="1100" b="0">
+              <a:t>Subject search</a:t>
+            </a:r>
+          </a:p>
+          <a:p>
+            <a:pPr algn="l">
+              <a:spcAft>
+                <a:spcPts val="1560"/>
+              </a:spcAft>
+              <a:defRPr sz="1300" b="0">
                 <a:solidFill>
                   <a:srgbClr val="B0B0C0"/>
                 </a:solidFill>
@@ -12511,15 +12036,31 @@
               </a:defRPr>
             </a:pPr>
             <a:r>
+              <a:t>Note search</a:t>
+            </a:r>
+          </a:p>
+          <a:p>
+            <a:pPr algn="l">
+              <a:spcAft>
+                <a:spcPts val="1560"/>
+              </a:spcAft>
+              <a:defRPr sz="1300" b="0">
+                <a:solidFill>
+                  <a:srgbClr val="B0B0C0"/>
+                </a:solidFill>
+                <a:latin typeface="Segoe UI"/>
+              </a:defRPr>
+            </a:pPr>
+            <a:r>
               <a:t>Instant results</a:t>
             </a:r>
           </a:p>
           <a:p>
             <a:pPr algn="l">
               <a:spcAft>
-                <a:spcPts val="1264"/>
-              </a:spcAft>
-              <a:defRPr sz="1100" b="0">
+                <a:spcPts val="1560"/>
+              </a:spcAft>
+              <a:defRPr sz="1300" b="0">
                 <a:solidFill>
                   <a:srgbClr val="B0B0C0"/>
                 </a:solidFill>
@@ -12528,22 +12069,6 @@
             </a:pPr>
             <a:r>
               <a:t>Type badges</a:t>
-            </a:r>
-          </a:p>
-          <a:p>
-            <a:pPr algn="l">
-              <a:spcAft>
-                <a:spcPts val="1264"/>
-              </a:spcAft>
-              <a:defRPr sz="1100" b="0">
-                <a:solidFill>
-                  <a:srgbClr val="B0B0C0"/>
-                </a:solidFill>
-                <a:latin typeface="Segoe UI"/>
-              </a:defRPr>
-            </a:pPr>
-            <a:r>
-              <a:t>View / download</a:t>
             </a:r>
           </a:p>
         </p:txBody>
@@ -12556,8 +12081,8 @@
         </p:nvSpPr>
         <p:spPr>
           <a:xfrm>
-            <a:off x="731520" y="6446520"/>
-            <a:ext cx="7315200" cy="320040"/>
+            <a:off x="731520" y="6400800"/>
+            <a:ext cx="7315200" cy="365760"/>
           </a:xfrm>
           <a:prstGeom prst="rect">
             <a:avLst/>
@@ -12571,7 +12096,7 @@
           <a:lstStyle/>
           <a:p>
             <a:pPr algn="l">
-              <a:defRPr sz="1000" b="0">
+              <a:defRPr sz="1100" b="0">
                 <a:solidFill>
                   <a:srgbClr val="707080"/>
                 </a:solidFill>
@@ -12625,7 +12150,7 @@
             <a:avLst/>
           </a:prstGeom>
           <a:solidFill>
-            <a:srgbClr val="14B8A6"/>
+            <a:srgbClr val="F97316"/>
           </a:solidFill>
           <a:ln>
             <a:noFill/>
@@ -12676,7 +12201,7 @@
           <a:lstStyle/>
           <a:p>
             <a:pPr algn="l">
-              <a:defRPr sz="2800" b="1">
+              <a:defRPr sz="3000" b="1">
                 <a:solidFill>
                   <a:srgbClr val="FFFFFF"/>
                 </a:solidFill>
@@ -12684,7 +12209,7 @@
               </a:defRPr>
             </a:pPr>
             <a:r>
-              <a:t>AI Chatbot — All Engineering Branches</a:t>
+              <a:t>AI Chatbot</a:t>
             </a:r>
           </a:p>
         </p:txBody>
@@ -12697,7 +12222,7 @@
         </p:nvSpPr>
         <p:spPr>
           <a:xfrm>
-            <a:off x="731520" y="868680"/>
+            <a:off x="731520" y="914400"/>
             <a:ext cx="10058400" cy="457200"/>
           </a:xfrm>
           <a:prstGeom prst="rect">
@@ -12712,7 +12237,7 @@
           <a:lstStyle/>
           <a:p>
             <a:pPr algn="l">
-              <a:defRPr sz="1400" b="0">
+              <a:defRPr sz="1500" b="0">
                 <a:solidFill>
                   <a:srgbClr val="B0B0C0"/>
                 </a:solidFill>
@@ -12720,7 +12245,7 @@
               </a:defRPr>
             </a:pPr>
             <a:r>
-              <a:t>Powered by Google Gemini 2.5 Flash</a:t>
+              <a:t>Powered by Google Gemini 2.5 Flash — covers ALL engineering branches</a:t>
             </a:r>
           </a:p>
         </p:txBody>
@@ -12733,8 +12258,8 @@
         </p:nvSpPr>
         <p:spPr>
           <a:xfrm>
-            <a:off x="11247120" y="365760"/>
-            <a:ext cx="640080" cy="365760"/>
+            <a:off x="11155680" y="365760"/>
+            <a:ext cx="731520" cy="457200"/>
           </a:xfrm>
           <a:prstGeom prst="rect">
             <a:avLst/>
@@ -12748,7 +12273,7 @@
           <a:lstStyle/>
           <a:p>
             <a:pPr algn="r">
-              <a:defRPr sz="1300" b="0">
+              <a:defRPr sz="1400" b="0">
                 <a:solidFill>
                   <a:srgbClr val="707080"/>
                 </a:solidFill>
@@ -12769,14 +12294,14 @@
         </p:nvSpPr>
         <p:spPr>
           <a:xfrm>
-            <a:off x="731520" y="1234440"/>
+            <a:off x="731520" y="1325880"/>
             <a:ext cx="10698480" cy="19050"/>
           </a:xfrm>
           <a:prstGeom prst="rect">
             <a:avLst/>
           </a:prstGeom>
           <a:solidFill>
-            <a:srgbClr val="303040"/>
+            <a:srgbClr val="333344"/>
           </a:solidFill>
           <a:ln>
             <a:noFill/>
@@ -12812,13 +12337,11 @@
         </p:nvSpPr>
         <p:spPr>
           <a:xfrm>
-            <a:off x="457200" y="1554480"/>
-            <a:ext cx="3108960" cy="2194560"/>
+            <a:off x="548640" y="1645920"/>
+            <a:ext cx="3200400" cy="2286000"/>
           </a:xfrm>
           <a:prstGeom prst="roundRect">
-            <a:avLst>
-              <a:gd name="adj" fmla="val 8000"/>
-            </a:avLst>
+            <a:avLst/>
           </a:prstGeom>
           <a:solidFill>
             <a:srgbClr val="14141C"/>
@@ -12857,8 +12380,8 @@
         </p:nvSpPr>
         <p:spPr>
           <a:xfrm>
-            <a:off x="457200" y="1554480"/>
-            <a:ext cx="3108960" cy="45720"/>
+            <a:off x="548640" y="1645920"/>
+            <a:ext cx="3200400" cy="45720"/>
           </a:xfrm>
           <a:prstGeom prst="rect">
             <a:avLst/>
@@ -12900,8 +12423,8 @@
         </p:nvSpPr>
         <p:spPr>
           <a:xfrm>
-            <a:off x="640080" y="1664208"/>
-            <a:ext cx="2743200" cy="320040"/>
+            <a:off x="777240" y="1783080"/>
+            <a:ext cx="2743200" cy="365760"/>
           </a:xfrm>
           <a:prstGeom prst="rect">
             <a:avLst/>
@@ -12915,7 +12438,7 @@
           <a:lstStyle/>
           <a:p>
             <a:pPr algn="l">
-              <a:defRPr sz="1300" b="1">
+              <a:defRPr sz="1400" b="1">
                 <a:solidFill>
                   <a:srgbClr val="F97316"/>
                 </a:solidFill>
@@ -12936,7 +12459,7 @@
         </p:nvSpPr>
         <p:spPr>
           <a:xfrm>
-            <a:off x="640080" y="2011680"/>
+            <a:off x="777240" y="2194560"/>
             <a:ext cx="2743200" cy="1645920"/>
           </a:xfrm>
           <a:prstGeom prst="rect">
@@ -12952,9 +12475,9 @@
           <a:p>
             <a:pPr algn="l">
               <a:spcAft>
-                <a:spcPts val="1264"/>
-              </a:spcAft>
-              <a:defRPr sz="1100" b="0">
+                <a:spcPts val="1439"/>
+              </a:spcAft>
+              <a:defRPr sz="1200" b="0">
                 <a:solidFill>
                   <a:srgbClr val="B0B0C0"/>
                 </a:solidFill>
@@ -12968,9 +12491,9 @@
           <a:p>
             <a:pPr algn="l">
               <a:spcAft>
-                <a:spcPts val="1264"/>
-              </a:spcAft>
-              <a:defRPr sz="1100" b="0">
+                <a:spcPts val="1439"/>
+              </a:spcAft>
+              <a:defRPr sz="1200" b="0">
                 <a:solidFill>
                   <a:srgbClr val="B0B0C0"/>
                 </a:solidFill>
@@ -12984,9 +12507,9 @@
           <a:p>
             <a:pPr algn="l">
               <a:spcAft>
-                <a:spcPts val="1264"/>
-              </a:spcAft>
-              <a:defRPr sz="1100" b="0">
+                <a:spcPts val="1439"/>
+              </a:spcAft>
+              <a:defRPr sz="1200" b="0">
                 <a:solidFill>
                   <a:srgbClr val="B0B0C0"/>
                 </a:solidFill>
@@ -13000,9 +12523,9 @@
           <a:p>
             <a:pPr algn="l">
               <a:spcAft>
-                <a:spcPts val="1264"/>
-              </a:spcAft>
-              <a:defRPr sz="1100" b="0">
+                <a:spcPts val="1439"/>
+              </a:spcAft>
+              <a:defRPr sz="1200" b="0">
                 <a:solidFill>
                   <a:srgbClr val="B0B0C0"/>
                 </a:solidFill>
@@ -13010,7 +12533,7 @@
               </a:defRPr>
             </a:pPr>
             <a:r>
-              <a:t>Web Tech, Cloud, Security</a:t>
+              <a:t>Web Tech, Cloud</a:t>
             </a:r>
           </a:p>
         </p:txBody>
@@ -13023,13 +12546,11 @@
         </p:nvSpPr>
         <p:spPr>
           <a:xfrm>
-            <a:off x="3657600" y="1554480"/>
-            <a:ext cx="3108960" cy="2194560"/>
+            <a:off x="3749039" y="1645920"/>
+            <a:ext cx="3200400" cy="2286000"/>
           </a:xfrm>
           <a:prstGeom prst="roundRect">
-            <a:avLst>
-              <a:gd name="adj" fmla="val 8000"/>
-            </a:avLst>
+            <a:avLst/>
           </a:prstGeom>
           <a:solidFill>
             <a:srgbClr val="14141C"/>
@@ -13068,8 +12589,8 @@
         </p:nvSpPr>
         <p:spPr>
           <a:xfrm>
-            <a:off x="3657600" y="1554480"/>
-            <a:ext cx="3108960" cy="45720"/>
+            <a:off x="3749039" y="1645920"/>
+            <a:ext cx="3200400" cy="45720"/>
           </a:xfrm>
           <a:prstGeom prst="rect">
             <a:avLst/>
@@ -13111,8 +12632,8 @@
         </p:nvSpPr>
         <p:spPr>
           <a:xfrm>
-            <a:off x="3840480" y="1664208"/>
-            <a:ext cx="2743200" cy="320040"/>
+            <a:off x="3977639" y="1783080"/>
+            <a:ext cx="2743200" cy="365760"/>
           </a:xfrm>
           <a:prstGeom prst="rect">
             <a:avLst/>
@@ -13126,7 +12647,7 @@
           <a:lstStyle/>
           <a:p>
             <a:pPr algn="l">
-              <a:defRPr sz="1300" b="1">
+              <a:defRPr sz="1400" b="1">
                 <a:solidFill>
                   <a:srgbClr val="1E3A8A"/>
                 </a:solidFill>
@@ -13147,7 +12668,7 @@
         </p:nvSpPr>
         <p:spPr>
           <a:xfrm>
-            <a:off x="3840480" y="2011680"/>
+            <a:off x="3977639" y="2194560"/>
             <a:ext cx="2743200" cy="1645920"/>
           </a:xfrm>
           <a:prstGeom prst="rect">
@@ -13163,9 +12684,9 @@
           <a:p>
             <a:pPr algn="l">
               <a:spcAft>
-                <a:spcPts val="1264"/>
-              </a:spcAft>
-              <a:defRPr sz="1100" b="0">
+                <a:spcPts val="1439"/>
+              </a:spcAft>
+              <a:defRPr sz="1200" b="0">
                 <a:solidFill>
                   <a:srgbClr val="B0B0C0"/>
                 </a:solidFill>
@@ -13179,9 +12700,9 @@
           <a:p>
             <a:pPr algn="l">
               <a:spcAft>
-                <a:spcPts val="1264"/>
-              </a:spcAft>
-              <a:defRPr sz="1100" b="0">
+                <a:spcPts val="1439"/>
+              </a:spcAft>
+              <a:defRPr sz="1200" b="0">
                 <a:solidFill>
                   <a:srgbClr val="B0B0C0"/>
                 </a:solidFill>
@@ -13195,9 +12716,9 @@
           <a:p>
             <a:pPr algn="l">
               <a:spcAft>
-                <a:spcPts val="1264"/>
-              </a:spcAft>
-              <a:defRPr sz="1100" b="0">
+                <a:spcPts val="1439"/>
+              </a:spcAft>
+              <a:defRPr sz="1200" b="0">
                 <a:solidFill>
                   <a:srgbClr val="B0B0C0"/>
                 </a:solidFill>
@@ -13211,9 +12732,9 @@
           <a:p>
             <a:pPr algn="l">
               <a:spcAft>
-                <a:spcPts val="1264"/>
-              </a:spcAft>
-              <a:defRPr sz="1100" b="0">
+                <a:spcPts val="1439"/>
+              </a:spcAft>
+              <a:defRPr sz="1200" b="0">
                 <a:solidFill>
                   <a:srgbClr val="B0B0C0"/>
                 </a:solidFill>
@@ -13221,7 +12742,7 @@
               </a:defRPr>
             </a:pPr>
             <a:r>
-              <a:t>Transportation, Hydrology</a:t>
+              <a:t>Transportation</a:t>
             </a:r>
           </a:p>
         </p:txBody>
@@ -13234,13 +12755,11 @@
         </p:nvSpPr>
         <p:spPr>
           <a:xfrm>
-            <a:off x="6858000" y="1554480"/>
-            <a:ext cx="3108960" cy="2194560"/>
+            <a:off x="6949440" y="1645920"/>
+            <a:ext cx="3200400" cy="2286000"/>
           </a:xfrm>
           <a:prstGeom prst="roundRect">
-            <a:avLst>
-              <a:gd name="adj" fmla="val 8000"/>
-            </a:avLst>
+            <a:avLst/>
           </a:prstGeom>
           <a:solidFill>
             <a:srgbClr val="14141C"/>
@@ -13279,8 +12798,8 @@
         </p:nvSpPr>
         <p:spPr>
           <a:xfrm>
-            <a:off x="6858000" y="1554480"/>
-            <a:ext cx="3108960" cy="45720"/>
+            <a:off x="6949440" y="1645920"/>
+            <a:ext cx="3200400" cy="45720"/>
           </a:xfrm>
           <a:prstGeom prst="rect">
             <a:avLst/>
@@ -13322,8 +12841,8 @@
         </p:nvSpPr>
         <p:spPr>
           <a:xfrm>
-            <a:off x="7040880" y="1664208"/>
-            <a:ext cx="2743200" cy="320040"/>
+            <a:off x="7178040" y="1783080"/>
+            <a:ext cx="2743200" cy="365760"/>
           </a:xfrm>
           <a:prstGeom prst="rect">
             <a:avLst/>
@@ -13337,7 +12856,7 @@
           <a:lstStyle/>
           <a:p>
             <a:pPr algn="l">
-              <a:defRPr sz="1300" b="1">
+              <a:defRPr sz="1400" b="1">
                 <a:solidFill>
                   <a:srgbClr val="22C55E"/>
                 </a:solidFill>
@@ -13358,7 +12877,7 @@
         </p:nvSpPr>
         <p:spPr>
           <a:xfrm>
-            <a:off x="7040880" y="2011680"/>
+            <a:off x="7178040" y="2194560"/>
             <a:ext cx="2743200" cy="1645920"/>
           </a:xfrm>
           <a:prstGeom prst="rect">
@@ -13374,9 +12893,9 @@
           <a:p>
             <a:pPr algn="l">
               <a:spcAft>
-                <a:spcPts val="1264"/>
-              </a:spcAft>
-              <a:defRPr sz="1100" b="0">
+                <a:spcPts val="1439"/>
+              </a:spcAft>
+              <a:defRPr sz="1200" b="0">
                 <a:solidFill>
                   <a:srgbClr val="B0B0C0"/>
                 </a:solidFill>
@@ -13390,9 +12909,9 @@
           <a:p>
             <a:pPr algn="l">
               <a:spcAft>
-                <a:spcPts val="1264"/>
-              </a:spcAft>
-              <a:defRPr sz="1100" b="0">
+                <a:spcPts val="1439"/>
+              </a:spcAft>
+              <a:defRPr sz="1200" b="0">
                 <a:solidFill>
                   <a:srgbClr val="B0B0C0"/>
                 </a:solidFill>
@@ -13406,9 +12925,9 @@
           <a:p>
             <a:pPr algn="l">
               <a:spcAft>
-                <a:spcPts val="1264"/>
-              </a:spcAft>
-              <a:defRPr sz="1100" b="0">
+                <a:spcPts val="1439"/>
+              </a:spcAft>
+              <a:defRPr sz="1200" b="0">
                 <a:solidFill>
                   <a:srgbClr val="B0B0C0"/>
                 </a:solidFill>
@@ -13422,9 +12941,9 @@
           <a:p>
             <a:pPr algn="l">
               <a:spcAft>
-                <a:spcPts val="1264"/>
-              </a:spcAft>
-              <a:defRPr sz="1100" b="0">
+                <a:spcPts val="1439"/>
+              </a:spcAft>
+              <a:defRPr sz="1200" b="0">
                 <a:solidFill>
                   <a:srgbClr val="B0B0C0"/>
                 </a:solidFill>
@@ -13432,7 +12951,7 @@
               </a:defRPr>
             </a:pPr>
             <a:r>
-              <a:t>Power Electronics, Drives</a:t>
+              <a:t>Power Electronics</a:t>
             </a:r>
           </a:p>
         </p:txBody>
@@ -13445,13 +12964,11 @@
         </p:nvSpPr>
         <p:spPr>
           <a:xfrm>
-            <a:off x="10058400" y="1554480"/>
-            <a:ext cx="3108960" cy="2194560"/>
+            <a:off x="10149840" y="1645920"/>
+            <a:ext cx="3200400" cy="2286000"/>
           </a:xfrm>
           <a:prstGeom prst="roundRect">
-            <a:avLst>
-              <a:gd name="adj" fmla="val 8000"/>
-            </a:avLst>
+            <a:avLst/>
           </a:prstGeom>
           <a:solidFill>
             <a:srgbClr val="14141C"/>
@@ -13490,8 +13007,8 @@
         </p:nvSpPr>
         <p:spPr>
           <a:xfrm>
-            <a:off x="10058400" y="1554480"/>
-            <a:ext cx="3108960" cy="45720"/>
+            <a:off x="10149840" y="1645920"/>
+            <a:ext cx="3200400" cy="45720"/>
           </a:xfrm>
           <a:prstGeom prst="rect">
             <a:avLst/>
@@ -13533,8 +13050,8 @@
         </p:nvSpPr>
         <p:spPr>
           <a:xfrm>
-            <a:off x="10241280" y="1664208"/>
-            <a:ext cx="2743200" cy="320040"/>
+            <a:off x="10378440" y="1783080"/>
+            <a:ext cx="2743200" cy="365760"/>
           </a:xfrm>
           <a:prstGeom prst="rect">
             <a:avLst/>
@@ -13548,7 +13065,7 @@
           <a:lstStyle/>
           <a:p>
             <a:pPr algn="l">
-              <a:defRPr sz="1300" b="1">
+              <a:defRPr sz="1400" b="1">
                 <a:solidFill>
                   <a:srgbClr val="A855F7"/>
                 </a:solidFill>
@@ -13569,7 +13086,7 @@
         </p:nvSpPr>
         <p:spPr>
           <a:xfrm>
-            <a:off x="10241280" y="2011680"/>
+            <a:off x="10378440" y="2194560"/>
             <a:ext cx="2743200" cy="1645920"/>
           </a:xfrm>
           <a:prstGeom prst="rect">
@@ -13585,9 +13102,9 @@
           <a:p>
             <a:pPr algn="l">
               <a:spcAft>
-                <a:spcPts val="1264"/>
-              </a:spcAft>
-              <a:defRPr sz="1100" b="0">
+                <a:spcPts val="1439"/>
+              </a:spcAft>
+              <a:defRPr sz="1200" b="0">
                 <a:solidFill>
                   <a:srgbClr val="B0B0C0"/>
                 </a:solidFill>
@@ -13601,9 +13118,9 @@
           <a:p>
             <a:pPr algn="l">
               <a:spcAft>
-                <a:spcPts val="1264"/>
-              </a:spcAft>
-              <a:defRPr sz="1100" b="0">
+                <a:spcPts val="1439"/>
+              </a:spcAft>
+              <a:defRPr sz="1200" b="0">
                 <a:solidFill>
                   <a:srgbClr val="B0B0C0"/>
                 </a:solidFill>
@@ -13617,9 +13134,9 @@
           <a:p>
             <a:pPr algn="l">
               <a:spcAft>
-                <a:spcPts val="1264"/>
-              </a:spcAft>
-              <a:defRPr sz="1100" b="0">
+                <a:spcPts val="1439"/>
+              </a:spcAft>
+              <a:defRPr sz="1200" b="0">
                 <a:solidFill>
                   <a:srgbClr val="B0B0C0"/>
                 </a:solidFill>
@@ -13633,9 +13150,9 @@
           <a:p>
             <a:pPr algn="l">
               <a:spcAft>
-                <a:spcPts val="1264"/>
-              </a:spcAft>
-              <a:defRPr sz="1100" b="0">
+                <a:spcPts val="1439"/>
+              </a:spcAft>
+              <a:defRPr sz="1200" b="0">
                 <a:solidFill>
                   <a:srgbClr val="B0B0C0"/>
                 </a:solidFill>
@@ -13656,13 +13173,11 @@
         </p:nvSpPr>
         <p:spPr>
           <a:xfrm>
-            <a:off x="2011680" y="3931920"/>
-            <a:ext cx="3108960" cy="2194560"/>
+            <a:off x="2103120" y="4114800"/>
+            <a:ext cx="3200400" cy="2286000"/>
           </a:xfrm>
           <a:prstGeom prst="roundRect">
-            <a:avLst>
-              <a:gd name="adj" fmla="val 8000"/>
-            </a:avLst>
+            <a:avLst/>
           </a:prstGeom>
           <a:solidFill>
             <a:srgbClr val="14141C"/>
@@ -13701,8 +13216,8 @@
         </p:nvSpPr>
         <p:spPr>
           <a:xfrm>
-            <a:off x="2011680" y="3931920"/>
-            <a:ext cx="3108960" cy="45720"/>
+            <a:off x="2103120" y="4114800"/>
+            <a:ext cx="3200400" cy="45720"/>
           </a:xfrm>
           <a:prstGeom prst="rect">
             <a:avLst/>
@@ -13744,8 +13259,8 @@
         </p:nvSpPr>
         <p:spPr>
           <a:xfrm>
-            <a:off x="2194560" y="4041648"/>
-            <a:ext cx="2743200" cy="320040"/>
+            <a:off x="2331720" y="4251960"/>
+            <a:ext cx="2743200" cy="365760"/>
           </a:xfrm>
           <a:prstGeom prst="rect">
             <a:avLst/>
@@ -13759,7 +13274,7 @@
           <a:lstStyle/>
           <a:p>
             <a:pPr algn="l">
-              <a:defRPr sz="1300" b="1">
+              <a:defRPr sz="1400" b="1">
                 <a:solidFill>
                   <a:srgbClr val="14B8A6"/>
                 </a:solidFill>
@@ -13780,7 +13295,7 @@
         </p:nvSpPr>
         <p:spPr>
           <a:xfrm>
-            <a:off x="2194560" y="4389120"/>
+            <a:off x="2331720" y="4663440"/>
             <a:ext cx="2743200" cy="1645920"/>
           </a:xfrm>
           <a:prstGeom prst="rect">
@@ -13796,9 +13311,9 @@
           <a:p>
             <a:pPr algn="l">
               <a:spcAft>
-                <a:spcPts val="1264"/>
-              </a:spcAft>
-              <a:defRPr sz="1100" b="0">
+                <a:spcPts val="1439"/>
+              </a:spcAft>
+              <a:defRPr sz="1200" b="0">
                 <a:solidFill>
                   <a:srgbClr val="B0B0C0"/>
                 </a:solidFill>
@@ -13812,9 +13327,9 @@
           <a:p>
             <a:pPr algn="l">
               <a:spcAft>
-                <a:spcPts val="1264"/>
-              </a:spcAft>
-              <a:defRPr sz="1100" b="0">
+                <a:spcPts val="1439"/>
+              </a:spcAft>
+              <a:defRPr sz="1200" b="0">
                 <a:solidFill>
                   <a:srgbClr val="B0B0C0"/>
                 </a:solidFill>
@@ -13828,9 +13343,9 @@
           <a:p>
             <a:pPr algn="l">
               <a:spcAft>
-                <a:spcPts val="1264"/>
-              </a:spcAft>
-              <a:defRPr sz="1100" b="0">
+                <a:spcPts val="1439"/>
+              </a:spcAft>
+              <a:defRPr sz="1200" b="0">
                 <a:solidFill>
                   <a:srgbClr val="B0B0C0"/>
                 </a:solidFill>
@@ -13844,9 +13359,9 @@
           <a:p>
             <a:pPr algn="l">
               <a:spcAft>
-                <a:spcPts val="1264"/>
-              </a:spcAft>
-              <a:defRPr sz="1100" b="0">
+                <a:spcPts val="1439"/>
+              </a:spcAft>
+              <a:defRPr sz="1200" b="0">
                 <a:solidFill>
                   <a:srgbClr val="B0B0C0"/>
                 </a:solidFill>
@@ -13867,13 +13382,11 @@
         </p:nvSpPr>
         <p:spPr>
           <a:xfrm>
-            <a:off x="5852160" y="3931920"/>
-            <a:ext cx="3108960" cy="2194560"/>
+            <a:off x="5943600" y="4114800"/>
+            <a:ext cx="3200400" cy="2286000"/>
           </a:xfrm>
           <a:prstGeom prst="roundRect">
-            <a:avLst>
-              <a:gd name="adj" fmla="val 8000"/>
-            </a:avLst>
+            <a:avLst/>
           </a:prstGeom>
           <a:solidFill>
             <a:srgbClr val="14141C"/>
@@ -13912,8 +13425,8 @@
         </p:nvSpPr>
         <p:spPr>
           <a:xfrm>
-            <a:off x="5852160" y="3931920"/>
-            <a:ext cx="3108960" cy="45720"/>
+            <a:off x="5943600" y="4114800"/>
+            <a:ext cx="3200400" cy="45720"/>
           </a:xfrm>
           <a:prstGeom prst="rect">
             <a:avLst/>
@@ -13955,8 +13468,8 @@
         </p:nvSpPr>
         <p:spPr>
           <a:xfrm>
-            <a:off x="6035040" y="4041648"/>
-            <a:ext cx="2743200" cy="320040"/>
+            <a:off x="6172200" y="4251960"/>
+            <a:ext cx="2743200" cy="365760"/>
           </a:xfrm>
           <a:prstGeom prst="rect">
             <a:avLst/>
@@ -13970,7 +13483,7 @@
           <a:lstStyle/>
           <a:p>
             <a:pPr algn="l">
-              <a:defRPr sz="1300" b="1">
+              <a:defRPr sz="1400" b="1">
                 <a:solidFill>
                   <a:srgbClr val="EF4444"/>
                 </a:solidFill>
@@ -13991,7 +13504,7 @@
         </p:nvSpPr>
         <p:spPr>
           <a:xfrm>
-            <a:off x="6035040" y="4389120"/>
+            <a:off x="6172200" y="4663440"/>
             <a:ext cx="2743200" cy="1645920"/>
           </a:xfrm>
           <a:prstGeom prst="rect">
@@ -14007,9 +13520,9 @@
           <a:p>
             <a:pPr algn="l">
               <a:spcAft>
-                <a:spcPts val="1264"/>
-              </a:spcAft>
-              <a:defRPr sz="1100" b="0">
+                <a:spcPts val="1439"/>
+              </a:spcAft>
+              <a:defRPr sz="1200" b="0">
                 <a:solidFill>
                   <a:srgbClr val="B0B0C0"/>
                 </a:solidFill>
@@ -14023,9 +13536,9 @@
           <a:p>
             <a:pPr algn="l">
               <a:spcAft>
-                <a:spcPts val="1264"/>
-              </a:spcAft>
-              <a:defRPr sz="1100" b="0">
+                <a:spcPts val="1439"/>
+              </a:spcAft>
+              <a:defRPr sz="1200" b="0">
                 <a:solidFill>
                   <a:srgbClr val="B0B0C0"/>
                 </a:solidFill>
@@ -14039,9 +13552,9 @@
           <a:p>
             <a:pPr algn="l">
               <a:spcAft>
-                <a:spcPts val="1264"/>
-              </a:spcAft>
-              <a:defRPr sz="1100" b="0">
+                <a:spcPts val="1439"/>
+              </a:spcAft>
+              <a:defRPr sz="1200" b="0">
                 <a:solidFill>
                   <a:srgbClr val="B0B0C0"/>
                 </a:solidFill>
@@ -14055,9 +13568,9 @@
           <a:p>
             <a:pPr algn="l">
               <a:spcAft>
-                <a:spcPts val="1264"/>
-              </a:spcAft>
-              <a:defRPr sz="1100" b="0">
+                <a:spcPts val="1439"/>
+              </a:spcAft>
+              <a:defRPr sz="1200" b="0">
                 <a:solidFill>
                   <a:srgbClr val="B0B0C0"/>
                 </a:solidFill>
@@ -14078,13 +13591,11 @@
         </p:nvSpPr>
         <p:spPr>
           <a:xfrm>
-            <a:off x="9692640" y="3931920"/>
-            <a:ext cx="3108960" cy="2194560"/>
+            <a:off x="9784080" y="4114800"/>
+            <a:ext cx="3200400" cy="2286000"/>
           </a:xfrm>
           <a:prstGeom prst="roundRect">
-            <a:avLst>
-              <a:gd name="adj" fmla="val 8000"/>
-            </a:avLst>
+            <a:avLst/>
           </a:prstGeom>
           <a:solidFill>
             <a:srgbClr val="14141C"/>
@@ -14123,8 +13634,8 @@
         </p:nvSpPr>
         <p:spPr>
           <a:xfrm>
-            <a:off x="9692640" y="3931920"/>
-            <a:ext cx="3108960" cy="45720"/>
+            <a:off x="9784080" y="4114800"/>
+            <a:ext cx="3200400" cy="45720"/>
           </a:xfrm>
           <a:prstGeom prst="rect">
             <a:avLst/>
@@ -14166,8 +13677,8 @@
         </p:nvSpPr>
         <p:spPr>
           <a:xfrm>
-            <a:off x="9875520" y="4041648"/>
-            <a:ext cx="2743200" cy="320040"/>
+            <a:off x="10012680" y="4251960"/>
+            <a:ext cx="2743200" cy="365760"/>
           </a:xfrm>
           <a:prstGeom prst="rect">
             <a:avLst/>
@@ -14181,7 +13692,7 @@
           <a:lstStyle/>
           <a:p>
             <a:pPr algn="l">
-              <a:defRPr sz="1300" b="1">
+              <a:defRPr sz="1400" b="1">
                 <a:solidFill>
                   <a:srgbClr val="F97316"/>
                 </a:solidFill>
@@ -14202,7 +13713,7 @@
         </p:nvSpPr>
         <p:spPr>
           <a:xfrm>
-            <a:off x="9875520" y="4389120"/>
+            <a:off x="10012680" y="4663440"/>
             <a:ext cx="2743200" cy="1645920"/>
           </a:xfrm>
           <a:prstGeom prst="rect">
@@ -14218,9 +13729,9 @@
           <a:p>
             <a:pPr algn="l">
               <a:spcAft>
-                <a:spcPts val="1264"/>
-              </a:spcAft>
-              <a:defRPr sz="1100" b="0">
+                <a:spcPts val="1439"/>
+              </a:spcAft>
+              <a:defRPr sz="1200" b="0">
                 <a:solidFill>
                   <a:srgbClr val="B0B0C0"/>
                 </a:solidFill>
@@ -14234,9 +13745,9 @@
           <a:p>
             <a:pPr algn="l">
               <a:spcAft>
-                <a:spcPts val="1264"/>
-              </a:spcAft>
-              <a:defRPr sz="1100" b="0">
+                <a:spcPts val="1439"/>
+              </a:spcAft>
+              <a:defRPr sz="1200" b="0">
                 <a:solidFill>
                   <a:srgbClr val="B0B0C0"/>
                 </a:solidFill>
@@ -14250,9 +13761,9 @@
           <a:p>
             <a:pPr algn="l">
               <a:spcAft>
-                <a:spcPts val="1264"/>
-              </a:spcAft>
-              <a:defRPr sz="1100" b="0">
+                <a:spcPts val="1439"/>
+              </a:spcAft>
+              <a:defRPr sz="1200" b="0">
                 <a:solidFill>
                   <a:srgbClr val="B0B0C0"/>
                 </a:solidFill>
@@ -14266,9 +13777,9 @@
           <a:p>
             <a:pPr algn="l">
               <a:spcAft>
-                <a:spcPts val="1264"/>
-              </a:spcAft>
-              <a:defRPr sz="1100" b="0">
+                <a:spcPts val="1439"/>
+              </a:spcAft>
+              <a:defRPr sz="1200" b="0">
                 <a:solidFill>
                   <a:srgbClr val="B0B0C0"/>
                 </a:solidFill>
@@ -14289,8 +13800,8 @@
         </p:nvSpPr>
         <p:spPr>
           <a:xfrm>
-            <a:off x="731520" y="6446520"/>
-            <a:ext cx="7315200" cy="320040"/>
+            <a:off x="731520" y="6400800"/>
+            <a:ext cx="7315200" cy="365760"/>
           </a:xfrm>
           <a:prstGeom prst="rect">
             <a:avLst/>
@@ -14304,7 +13815,7 @@
           <a:lstStyle/>
           <a:p>
             <a:pPr algn="l">
-              <a:defRPr sz="1000" b="0">
+              <a:defRPr sz="1100" b="0">
                 <a:solidFill>
                   <a:srgbClr val="707080"/>
                 </a:solidFill>
@@ -14358,7 +13869,7 @@
             <a:avLst/>
           </a:prstGeom>
           <a:solidFill>
-            <a:srgbClr val="14B8A6"/>
+            <a:srgbClr val="F97316"/>
           </a:solidFill>
           <a:ln>
             <a:noFill/>
@@ -14409,7 +13920,7 @@
           <a:lstStyle/>
           <a:p>
             <a:pPr algn="l">
-              <a:defRPr sz="2800" b="1">
+              <a:defRPr sz="3000" b="1">
                 <a:solidFill>
                   <a:srgbClr val="FFFFFF"/>
                 </a:solidFill>
@@ -14417,7 +13928,7 @@
               </a:defRPr>
             </a:pPr>
             <a:r>
-              <a:t>AI Chatbot — How It Works</a:t>
+              <a:t>AI Chatbot — Technical</a:t>
             </a:r>
           </a:p>
         </p:txBody>
@@ -14430,7 +13941,7 @@
         </p:nvSpPr>
         <p:spPr>
           <a:xfrm>
-            <a:off x="731520" y="868680"/>
+            <a:off x="731520" y="914400"/>
             <a:ext cx="10058400" cy="457200"/>
           </a:xfrm>
           <a:prstGeom prst="rect">
@@ -14445,7 +13956,7 @@
           <a:lstStyle/>
           <a:p>
             <a:pPr algn="l">
-              <a:defRPr sz="1400" b="0">
+              <a:defRPr sz="1500" b="0">
                 <a:solidFill>
                   <a:srgbClr val="B0B0C0"/>
                 </a:solidFill>
@@ -14453,7 +13964,7 @@
               </a:defRPr>
             </a:pPr>
             <a:r>
-              <a:t>Technical architecture and capabilities</a:t>
+              <a:t>How the chatbot works under the hood</a:t>
             </a:r>
           </a:p>
         </p:txBody>
@@ -14466,8 +13977,8 @@
         </p:nvSpPr>
         <p:spPr>
           <a:xfrm>
-            <a:off x="11247120" y="365760"/>
-            <a:ext cx="640080" cy="365760"/>
+            <a:off x="11155680" y="365760"/>
+            <a:ext cx="731520" cy="457200"/>
           </a:xfrm>
           <a:prstGeom prst="rect">
             <a:avLst/>
@@ -14481,7 +13992,7 @@
           <a:lstStyle/>
           <a:p>
             <a:pPr algn="r">
-              <a:defRPr sz="1300" b="0">
+              <a:defRPr sz="1400" b="0">
                 <a:solidFill>
                   <a:srgbClr val="707080"/>
                 </a:solidFill>
@@ -14502,14 +14013,14 @@
         </p:nvSpPr>
         <p:spPr>
           <a:xfrm>
-            <a:off x="731520" y="1234440"/>
+            <a:off x="731520" y="1325880"/>
             <a:ext cx="10698480" cy="19050"/>
           </a:xfrm>
           <a:prstGeom prst="rect">
             <a:avLst/>
           </a:prstGeom>
           <a:solidFill>
-            <a:srgbClr val="303040"/>
+            <a:srgbClr val="333344"/>
           </a:solidFill>
           <a:ln>
             <a:noFill/>
@@ -14545,7 +14056,7 @@
         </p:nvSpPr>
         <p:spPr>
           <a:xfrm>
-            <a:off x="731520" y="1554480"/>
+            <a:off x="731520" y="1645920"/>
             <a:ext cx="5029200" cy="365760"/>
           </a:xfrm>
           <a:prstGeom prst="rect">
@@ -14560,7 +14071,7 @@
           <a:lstStyle/>
           <a:p>
             <a:pPr algn="l">
-              <a:defRPr sz="1700" b="1">
+              <a:defRPr sz="1800" b="1">
                 <a:solidFill>
                   <a:srgbClr val="F97316"/>
                 </a:solidFill>
@@ -14581,7 +14092,7 @@
         </p:nvSpPr>
         <p:spPr>
           <a:xfrm>
-            <a:off x="731520" y="2011680"/>
+            <a:off x="731520" y="2103120"/>
             <a:ext cx="5029200" cy="3200400"/>
           </a:xfrm>
           <a:prstGeom prst="rect">
@@ -14595,11 +14106,11 @@
           </a:bodyPr>
           <a:lstStyle/>
           <a:p>
-            <a:pPr>
-              <a:spcAft>
-                <a:spcPts val="1959"/>
-              </a:spcAft>
-              <a:defRPr sz="1400">
+            <a:pPr algn="l">
+              <a:spcAft>
+                <a:spcPts val="2250"/>
+              </a:spcAft>
+              <a:defRPr sz="1500" b="0">
                 <a:solidFill>
                   <a:srgbClr val="FFFFFF"/>
                 </a:solidFill>
@@ -14609,15 +14120,15 @@
               <a:buChar char="▸"/>
             </a:pPr>
             <a:r>
-              <a:t>Multimodal — PDFs and images sent as base64 inline_data to Gemini</a:t>
-            </a:r>
-          </a:p>
-          <a:p>
-            <a:pPr>
-              <a:spcAft>
-                <a:spcPts val="1959"/>
-              </a:spcAft>
-              <a:defRPr sz="1400">
+              <a:t>Multimodal input — PDFs and images sent as base64 to Gemini</a:t>
+            </a:r>
+          </a:p>
+          <a:p>
+            <a:pPr algn="l">
+              <a:spcAft>
+                <a:spcPts val="2250"/>
+              </a:spcAft>
+              <a:defRPr sz="1500" b="0">
                 <a:solidFill>
                   <a:srgbClr val="FFFFFF"/>
                 </a:solidFill>
@@ -14627,15 +14138,15 @@
               <a:buChar char="▸"/>
             </a:pPr>
             <a:r>
-              <a:t>Multi-key rotation with up to 6 API keys for rate-limit handling</a:t>
-            </a:r>
-          </a:p>
-          <a:p>
-            <a:pPr>
-              <a:spcAft>
-                <a:spcPts val="1959"/>
-              </a:spcAft>
-              <a:defRPr sz="1400">
+              <a:t>Multi-key rotation with up to 6 API keys for rate limit handling</a:t>
+            </a:r>
+          </a:p>
+          <a:p>
+            <a:pPr algn="l">
+              <a:spcAft>
+                <a:spcPts val="2250"/>
+              </a:spcAft>
+              <a:defRPr sz="1500" b="0">
                 <a:solidFill>
                   <a:srgbClr val="FFFFFF"/>
                 </a:solidFill>
@@ -14649,11 +14160,11 @@
             </a:r>
           </a:p>
           <a:p>
-            <a:pPr>
-              <a:spcAft>
-                <a:spcPts val="1959"/>
-              </a:spcAft>
-              <a:defRPr sz="1400">
+            <a:pPr algn="l">
+              <a:spcAft>
+                <a:spcPts val="2250"/>
+              </a:spcAft>
+              <a:defRPr sz="1500" b="0">
                 <a:solidFill>
                   <a:srgbClr val="FFFFFF"/>
                 </a:solidFill>
@@ -14663,25 +14174,7 @@
               <a:buChar char="▸"/>
             </a:pPr>
             <a:r>
-              <a:t>Custom formatting — no markdown, uses symbols and spacing</a:t>
-            </a:r>
-          </a:p>
-          <a:p>
-            <a:pPr>
-              <a:spcAft>
-                <a:spcPts val="1959"/>
-              </a:spcAft>
-              <a:defRPr sz="1400">
-                <a:solidFill>
-                  <a:srgbClr val="FFFFFF"/>
-                </a:solidFill>
-                <a:latin typeface="Segoe UI"/>
-              </a:defRPr>
-              <a:buFont typeface="Arial"/>
-              <a:buChar char="▸"/>
-            </a:pPr>
-            <a:r>
-              <a:t>Temperature 0.7, max 4096 output tokens</a:t>
+              <a:t>Custom response formatting — no markdown, uses symbols and spacing</a:t>
             </a:r>
           </a:p>
         </p:txBody>
@@ -14694,7 +14187,7 @@
         </p:nvSpPr>
         <p:spPr>
           <a:xfrm>
-            <a:off x="6400800" y="1554480"/>
+            <a:off x="6400800" y="1645920"/>
             <a:ext cx="5029200" cy="365760"/>
           </a:xfrm>
           <a:prstGeom prst="rect">
@@ -14709,9 +14202,9 @@
           <a:lstStyle/>
           <a:p>
             <a:pPr algn="l">
-              <a:defRPr sz="1700" b="1">
-                <a:solidFill>
-                  <a:srgbClr val="14B8A6"/>
+              <a:defRPr sz="1800" b="1">
+                <a:solidFill>
+                  <a:srgbClr val="1E3A8A"/>
                 </a:solidFill>
                 <a:latin typeface="Segoe UI"/>
               </a:defRPr>
@@ -14730,7 +14223,7 @@
         </p:nvSpPr>
         <p:spPr>
           <a:xfrm>
-            <a:off x="6400800" y="2011680"/>
+            <a:off x="6400800" y="2103120"/>
             <a:ext cx="5029200" cy="3200400"/>
           </a:xfrm>
           <a:prstGeom prst="rect">
@@ -14744,11 +14237,11 @@
           </a:bodyPr>
           <a:lstStyle/>
           <a:p>
-            <a:pPr>
-              <a:spcAft>
-                <a:spcPts val="1959"/>
-              </a:spcAft>
-              <a:defRPr sz="1400">
+            <a:pPr algn="l">
+              <a:spcAft>
+                <a:spcPts val="2250"/>
+              </a:spcAft>
+              <a:defRPr sz="1500" b="0">
                 <a:solidFill>
                   <a:srgbClr val="FFFFFF"/>
                 </a:solidFill>
@@ -14762,11 +14255,11 @@
             </a:r>
           </a:p>
           <a:p>
-            <a:pPr>
-              <a:spcAft>
-                <a:spcPts val="1959"/>
-              </a:spcAft>
-              <a:defRPr sz="1400">
+            <a:pPr algn="l">
+              <a:spcAft>
+                <a:spcPts val="2250"/>
+              </a:spcAft>
+              <a:defRPr sz="1500" b="0">
                 <a:solidFill>
                   <a:srgbClr val="FFFFFF"/>
                 </a:solidFill>
@@ -14780,11 +14273,11 @@
             </a:r>
           </a:p>
           <a:p>
-            <a:pPr>
-              <a:spcAft>
-                <a:spcPts val="1959"/>
-              </a:spcAft>
-              <a:defRPr sz="1400">
+            <a:pPr algn="l">
+              <a:spcAft>
+                <a:spcPts val="2250"/>
+              </a:spcAft>
+              <a:defRPr sz="1500" b="0">
                 <a:solidFill>
                   <a:srgbClr val="FFFFFF"/>
                 </a:solidFill>
@@ -14798,11 +14291,11 @@
             </a:r>
           </a:p>
           <a:p>
-            <a:pPr>
-              <a:spcAft>
-                <a:spcPts val="1959"/>
-              </a:spcAft>
-              <a:defRPr sz="1400">
+            <a:pPr algn="l">
+              <a:spcAft>
+                <a:spcPts val="2250"/>
+              </a:spcAft>
+              <a:defRPr sz="1500" b="0">
                 <a:solidFill>
                   <a:srgbClr val="FFFFFF"/>
                 </a:solidFill>
@@ -14812,25 +14305,7 @@
               <a:buChar char="▸"/>
             </a:pPr>
             <a:r>
-              <a:t>Branch-specific guidance: IS codes, circuit equations, thermodynamic formulas</a:t>
-            </a:r>
-          </a:p>
-          <a:p>
-            <a:pPr>
-              <a:spcAft>
-                <a:spcPts val="1959"/>
-              </a:spcAft>
-              <a:defRPr sz="1400">
-                <a:solidFill>
-                  <a:srgbClr val="FFFFFF"/>
-                </a:solidFill>
-                <a:latin typeface="Segoe UI"/>
-              </a:defRPr>
-              <a:buFont typeface="Arial"/>
-              <a:buChar char="▸"/>
-            </a:pPr>
-            <a:r>
-              <a:t>Step-by-step derivations for Mathematics</a:t>
+              <a:t>Temperature 0.7, max 4096 output tokens</a:t>
             </a:r>
           </a:p>
         </p:txBody>
@@ -14843,7 +14318,7 @@
         </p:nvSpPr>
         <p:spPr>
           <a:xfrm>
-            <a:off x="731520" y="4937760"/>
+            <a:off x="731520" y="5029200"/>
             <a:ext cx="10515600" cy="365760"/>
           </a:xfrm>
           <a:prstGeom prst="rect">
@@ -14858,7 +14333,7 @@
           <a:lstStyle/>
           <a:p>
             <a:pPr algn="l">
-              <a:defRPr sz="1500" b="1">
+              <a:defRPr sz="1600" b="1">
                 <a:solidFill>
                   <a:srgbClr val="F97316"/>
                 </a:solidFill>
@@ -14866,7 +14341,7 @@
               </a:defRPr>
             </a:pPr>
             <a:r>
-              <a:t>Request Flow</a:t>
+              <a:t>Request Flow:</a:t>
             </a:r>
           </a:p>
         </p:txBody>
@@ -14879,16 +14354,14 @@
         </p:nvSpPr>
         <p:spPr>
           <a:xfrm>
-            <a:off x="731520" y="5394960"/>
-            <a:ext cx="10515600" cy="594360"/>
+            <a:off x="731520" y="5486400"/>
+            <a:ext cx="10515600" cy="640080"/>
           </a:xfrm>
           <a:prstGeom prst="roundRect">
-            <a:avLst>
-              <a:gd name="adj" fmla="val 5000"/>
-            </a:avLst>
+            <a:avLst/>
           </a:prstGeom>
           <a:solidFill>
-            <a:srgbClr val="1A1A28"/>
+            <a:srgbClr val="14141C"/>
           </a:solidFill>
           <a:ln>
             <a:noFill/>
@@ -14909,20 +14382,10 @@
           </a:fontRef>
         </p:style>
         <p:txBody>
-          <a:bodyPr rtlCol="0" anchor="ctr" tIns="101600"/>
-          <a:lstStyle/>
-          <a:p>
-            <a:pPr algn="ctr">
-              <a:defRPr sz="1400">
-                <a:solidFill>
-                  <a:srgbClr val="B0B0C0"/>
-                </a:solidFill>
-                <a:latin typeface="Segoe UI"/>
-              </a:defRPr>
-            </a:pPr>
-            <a:r>
-              <a:t>Student  →  Chat UI  →  Edge Function  →  Gemini API (key rotation)  →  Formatted Response  →  Student</a:t>
-            </a:r>
+          <a:bodyPr rtlCol="0" anchor="ctr"/>
+          <a:lstStyle/>
+          <a:p>
+            <a:pPr algn="ctr"/>
           </a:p>
         </p:txBody>
       </p:sp>
@@ -14934,8 +14397,8 @@
         </p:nvSpPr>
         <p:spPr>
           <a:xfrm>
-            <a:off x="731520" y="6446520"/>
-            <a:ext cx="7315200" cy="320040"/>
+            <a:off x="914400" y="5532120"/>
+            <a:ext cx="10058400" cy="548640"/>
           </a:xfrm>
           <a:prstGeom prst="rect">
             <a:avLst/>
@@ -14948,8 +14411,44 @@
           </a:bodyPr>
           <a:lstStyle/>
           <a:p>
-            <a:pPr algn="l">
-              <a:defRPr sz="1000" b="0">
+            <a:pPr algn="ctr">
+              <a:defRPr sz="1400" b="0">
+                <a:solidFill>
+                  <a:srgbClr val="B0B0C0"/>
+                </a:solidFill>
+                <a:latin typeface="Segoe UI"/>
+              </a:defRPr>
+            </a:pPr>
+            <a:r>
+              <a:t>Student → Chat UI → Edge Function → Gemini API (key rotation) → Formatted Response → Student</a:t>
+            </a:r>
+          </a:p>
+        </p:txBody>
+      </p:sp>
+      <p:sp>
+        <p:nvSpPr>
+          <p:cNvPr id="14" name="TextBox 13"/>
+          <p:cNvSpPr txBox="1"/>
+          <p:nvPr/>
+        </p:nvSpPr>
+        <p:spPr>
+          <a:xfrm>
+            <a:off x="731520" y="6400800"/>
+            <a:ext cx="7315200" cy="365760"/>
+          </a:xfrm>
+          <a:prstGeom prst="rect">
+            <a:avLst/>
+          </a:prstGeom>
+          <a:noFill/>
+        </p:spPr>
+        <p:txBody>
+          <a:bodyPr wrap="square">
+            <a:spAutoFit/>
+          </a:bodyPr>
+          <a:lstStyle/>
+          <a:p>
+            <a:pPr algn="l">
+              <a:defRPr sz="1100" b="0">
                 <a:solidFill>
                   <a:srgbClr val="707080"/>
                 </a:solidFill>
@@ -15003,7 +14502,7 @@
             <a:avLst/>
           </a:prstGeom>
           <a:solidFill>
-            <a:srgbClr val="14B8A6"/>
+            <a:srgbClr val="F97316"/>
           </a:solidFill>
           <a:ln>
             <a:noFill/>
@@ -15054,7 +14553,7 @@
           <a:lstStyle/>
           <a:p>
             <a:pPr algn="l">
-              <a:defRPr sz="2800" b="1">
+              <a:defRPr sz="3000" b="1">
                 <a:solidFill>
                   <a:srgbClr val="FFFFFF"/>
                 </a:solidFill>
@@ -15075,7 +14574,7 @@
         </p:nvSpPr>
         <p:spPr>
           <a:xfrm>
-            <a:off x="731520" y="868680"/>
+            <a:off x="731520" y="914400"/>
             <a:ext cx="10058400" cy="457200"/>
           </a:xfrm>
           <a:prstGeom prst="rect">
@@ -15090,7 +14589,7 @@
           <a:lstStyle/>
           <a:p>
             <a:pPr algn="l">
-              <a:defRPr sz="1400" b="0">
+              <a:defRPr sz="1500" b="0">
                 <a:solidFill>
                   <a:srgbClr val="B0B0C0"/>
                 </a:solidFill>
@@ -15111,8 +14610,8 @@
         </p:nvSpPr>
         <p:spPr>
           <a:xfrm>
-            <a:off x="11247120" y="365760"/>
-            <a:ext cx="640080" cy="365760"/>
+            <a:off x="11155680" y="365760"/>
+            <a:ext cx="731520" cy="457200"/>
           </a:xfrm>
           <a:prstGeom prst="rect">
             <a:avLst/>
@@ -15126,7 +14625,7 @@
           <a:lstStyle/>
           <a:p>
             <a:pPr algn="r">
-              <a:defRPr sz="1300" b="0">
+              <a:defRPr sz="1400" b="0">
                 <a:solidFill>
                   <a:srgbClr val="707080"/>
                 </a:solidFill>
@@ -15147,14 +14646,14 @@
         </p:nvSpPr>
         <p:spPr>
           <a:xfrm>
-            <a:off x="731520" y="1234440"/>
+            <a:off x="731520" y="1325880"/>
             <a:ext cx="10698480" cy="19050"/>
           </a:xfrm>
           <a:prstGeom prst="rect">
             <a:avLst/>
           </a:prstGeom>
           <a:solidFill>
-            <a:srgbClr val="303040"/>
+            <a:srgbClr val="333344"/>
           </a:solidFill>
           <a:ln>
             <a:noFill/>
@@ -15190,13 +14689,11 @@
         </p:nvSpPr>
         <p:spPr>
           <a:xfrm>
-            <a:off x="548640" y="1554480"/>
-            <a:ext cx="5303520" cy="4389120"/>
+            <a:off x="548640" y="1645920"/>
+            <a:ext cx="5303520" cy="4114800"/>
           </a:xfrm>
           <a:prstGeom prst="roundRect">
-            <a:avLst>
-              <a:gd name="adj" fmla="val 8000"/>
-            </a:avLst>
+            <a:avLst/>
           </a:prstGeom>
           <a:solidFill>
             <a:srgbClr val="14141C"/>
@@ -15235,7 +14732,7 @@
         </p:nvSpPr>
         <p:spPr>
           <a:xfrm>
-            <a:off x="548640" y="1554480"/>
+            <a:off x="548640" y="1645920"/>
             <a:ext cx="5303520" cy="45720"/>
           </a:xfrm>
           <a:prstGeom prst="rect">
@@ -15278,8 +14775,8 @@
         </p:nvSpPr>
         <p:spPr>
           <a:xfrm>
-            <a:off x="731520" y="1664208"/>
-            <a:ext cx="4937760" cy="320040"/>
+            <a:off x="777240" y="1783080"/>
+            <a:ext cx="4846320" cy="365760"/>
           </a:xfrm>
           <a:prstGeom prst="rect">
             <a:avLst/>
@@ -15293,7 +14790,7 @@
           <a:lstStyle/>
           <a:p>
             <a:pPr algn="l">
-              <a:defRPr sz="1700" b="1">
+              <a:defRPr sz="1800" b="1">
                 <a:solidFill>
                   <a:srgbClr val="F97316"/>
                 </a:solidFill>
@@ -15314,8 +14811,8 @@
         </p:nvSpPr>
         <p:spPr>
           <a:xfrm>
-            <a:off x="731520" y="2011680"/>
-            <a:ext cx="4937760" cy="3840480"/>
+            <a:off x="777240" y="2194560"/>
+            <a:ext cx="4846320" cy="3474720"/>
           </a:xfrm>
           <a:prstGeom prst="rect">
             <a:avLst/>
@@ -15330,7 +14827,7 @@
           <a:p>
             <a:pPr algn="l">
               <a:spcAft>
-                <a:spcPts val="1609"/>
+                <a:spcPts val="1680"/>
               </a:spcAft>
               <a:defRPr sz="1400" b="0">
                 <a:solidFill>
@@ -15346,7 +14843,7 @@
           <a:p>
             <a:pPr algn="l">
               <a:spcAft>
-                <a:spcPts val="1609"/>
+                <a:spcPts val="1680"/>
               </a:spcAft>
               <a:defRPr sz="1400" b="0">
                 <a:solidFill>
@@ -15362,7 +14859,7 @@
           <a:p>
             <a:pPr algn="l">
               <a:spcAft>
-                <a:spcPts val="1609"/>
+                <a:spcPts val="1680"/>
               </a:spcAft>
               <a:defRPr sz="1400" b="0">
                 <a:solidFill>
@@ -15378,7 +14875,7 @@
           <a:p>
             <a:pPr algn="l">
               <a:spcAft>
-                <a:spcPts val="1609"/>
+                <a:spcPts val="1680"/>
               </a:spcAft>
               <a:defRPr sz="1400" b="0">
                 <a:solidFill>
@@ -15394,7 +14891,7 @@
           <a:p>
             <a:pPr algn="l">
               <a:spcAft>
-                <a:spcPts val="1609"/>
+                <a:spcPts val="1680"/>
               </a:spcAft>
               <a:defRPr sz="1400" b="0">
                 <a:solidFill>
@@ -15410,7 +14907,7 @@
           <a:p>
             <a:pPr algn="l">
               <a:spcAft>
-                <a:spcPts val="1609"/>
+                <a:spcPts val="1680"/>
               </a:spcAft>
               <a:defRPr sz="1400" b="0">
                 <a:solidFill>
@@ -15426,7 +14923,7 @@
           <a:p>
             <a:pPr algn="l">
               <a:spcAft>
-                <a:spcPts val="1609"/>
+                <a:spcPts val="1680"/>
               </a:spcAft>
               <a:defRPr sz="1400" b="0">
                 <a:solidFill>
@@ -15449,13 +14946,11 @@
         </p:nvSpPr>
         <p:spPr>
           <a:xfrm>
-            <a:off x="6217920" y="1554480"/>
-            <a:ext cx="5303520" cy="4389120"/>
+            <a:off x="6217920" y="1645920"/>
+            <a:ext cx="5303520" cy="4114800"/>
           </a:xfrm>
           <a:prstGeom prst="roundRect">
-            <a:avLst>
-              <a:gd name="adj" fmla="val 8000"/>
-            </a:avLst>
+            <a:avLst/>
           </a:prstGeom>
           <a:solidFill>
             <a:srgbClr val="14141C"/>
@@ -15494,7 +14989,7 @@
         </p:nvSpPr>
         <p:spPr>
           <a:xfrm>
-            <a:off x="6217920" y="1554480"/>
+            <a:off x="6217920" y="1645920"/>
             <a:ext cx="5303520" cy="45720"/>
           </a:xfrm>
           <a:prstGeom prst="rect">
@@ -15537,8 +15032,8 @@
         </p:nvSpPr>
         <p:spPr>
           <a:xfrm>
-            <a:off x="6400800" y="1664208"/>
-            <a:ext cx="4937760" cy="320040"/>
+            <a:off x="6446520" y="1783080"/>
+            <a:ext cx="4846320" cy="365760"/>
           </a:xfrm>
           <a:prstGeom prst="rect">
             <a:avLst/>
@@ -15552,7 +15047,7 @@
           <a:lstStyle/>
           <a:p>
             <a:pPr algn="l">
-              <a:defRPr sz="1700" b="1">
+              <a:defRPr sz="1800" b="1">
                 <a:solidFill>
                   <a:srgbClr val="1E3A8A"/>
                 </a:solidFill>
@@ -15573,8 +15068,8 @@
         </p:nvSpPr>
         <p:spPr>
           <a:xfrm>
-            <a:off x="6400800" y="2011680"/>
-            <a:ext cx="4937760" cy="3840480"/>
+            <a:off x="6446520" y="2194560"/>
+            <a:ext cx="4846320" cy="3474720"/>
           </a:xfrm>
           <a:prstGeom prst="rect">
             <a:avLst/>
@@ -15589,7 +15084,7 @@
           <a:p>
             <a:pPr algn="l">
               <a:spcAft>
-                <a:spcPts val="1609"/>
+                <a:spcPts val="1680"/>
               </a:spcAft>
               <a:defRPr sz="1400" b="0">
                 <a:solidFill>
@@ -15605,7 +15100,7 @@
           <a:p>
             <a:pPr algn="l">
               <a:spcAft>
-                <a:spcPts val="1609"/>
+                <a:spcPts val="1680"/>
               </a:spcAft>
               <a:defRPr sz="1400" b="0">
                 <a:solidFill>
@@ -15621,7 +15116,7 @@
           <a:p>
             <a:pPr algn="l">
               <a:spcAft>
-                <a:spcPts val="1609"/>
+                <a:spcPts val="1680"/>
               </a:spcAft>
               <a:defRPr sz="1400" b="0">
                 <a:solidFill>
@@ -15637,7 +15132,7 @@
           <a:p>
             <a:pPr algn="l">
               <a:spcAft>
-                <a:spcPts val="1609"/>
+                <a:spcPts val="1680"/>
               </a:spcAft>
               <a:defRPr sz="1400" b="0">
                 <a:solidFill>
@@ -15653,7 +15148,7 @@
           <a:p>
             <a:pPr algn="l">
               <a:spcAft>
-                <a:spcPts val="1609"/>
+                <a:spcPts val="1680"/>
               </a:spcAft>
               <a:defRPr sz="1400" b="0">
                 <a:solidFill>
@@ -15669,7 +15164,7 @@
           <a:p>
             <a:pPr algn="l">
               <a:spcAft>
-                <a:spcPts val="1609"/>
+                <a:spcPts val="1680"/>
               </a:spcAft>
               <a:defRPr sz="1400" b="0">
                 <a:solidFill>
@@ -15685,7 +15180,7 @@
           <a:p>
             <a:pPr algn="l">
               <a:spcAft>
-                <a:spcPts val="1609"/>
+                <a:spcPts val="1680"/>
               </a:spcAft>
               <a:defRPr sz="1400" b="0">
                 <a:solidFill>
@@ -15708,8 +15203,8 @@
         </p:nvSpPr>
         <p:spPr>
           <a:xfrm>
-            <a:off x="731520" y="6446520"/>
-            <a:ext cx="7315200" cy="320040"/>
+            <a:off x="731520" y="6400800"/>
+            <a:ext cx="7315200" cy="365760"/>
           </a:xfrm>
           <a:prstGeom prst="rect">
             <a:avLst/>
@@ -15723,7 +15218,7 @@
           <a:lstStyle/>
           <a:p>
             <a:pPr algn="l">
-              <a:defRPr sz="1000" b="0">
+              <a:defRPr sz="1100" b="0">
                 <a:solidFill>
                   <a:srgbClr val="707080"/>
                 </a:solidFill>
@@ -15777,7 +15272,7 @@
             <a:avLst/>
           </a:prstGeom>
           <a:solidFill>
-            <a:srgbClr val="14B8A6"/>
+            <a:srgbClr val="F97316"/>
           </a:solidFill>
           <a:ln>
             <a:noFill/>
@@ -15828,7 +15323,7 @@
           <a:lstStyle/>
           <a:p>
             <a:pPr algn="l">
-              <a:defRPr sz="2800" b="1">
+              <a:defRPr sz="3000" b="1">
                 <a:solidFill>
                   <a:srgbClr val="FFFFFF"/>
                 </a:solidFill>
@@ -15849,7 +15344,7 @@
         </p:nvSpPr>
         <p:spPr>
           <a:xfrm>
-            <a:off x="731520" y="868680"/>
+            <a:off x="731520" y="914400"/>
             <a:ext cx="10058400" cy="457200"/>
           </a:xfrm>
           <a:prstGeom prst="rect">
@@ -15864,7 +15359,7 @@
           <a:lstStyle/>
           <a:p>
             <a:pPr algn="l">
-              <a:defRPr sz="1400" b="0">
+              <a:defRPr sz="1500" b="0">
                 <a:solidFill>
                   <a:srgbClr val="B0B0C0"/>
                 </a:solidFill>
@@ -15885,8 +15380,8 @@
         </p:nvSpPr>
         <p:spPr>
           <a:xfrm>
-            <a:off x="11247120" y="365760"/>
-            <a:ext cx="640080" cy="365760"/>
+            <a:off x="11155680" y="365760"/>
+            <a:ext cx="731520" cy="457200"/>
           </a:xfrm>
           <a:prstGeom prst="rect">
             <a:avLst/>
@@ -15900,7 +15395,7 @@
           <a:lstStyle/>
           <a:p>
             <a:pPr algn="r">
-              <a:defRPr sz="1300" b="0">
+              <a:defRPr sz="1400" b="0">
                 <a:solidFill>
                   <a:srgbClr val="707080"/>
                 </a:solidFill>
@@ -15921,14 +15416,14 @@
         </p:nvSpPr>
         <p:spPr>
           <a:xfrm>
-            <a:off x="731520" y="1234440"/>
+            <a:off x="731520" y="1325880"/>
             <a:ext cx="10698480" cy="19050"/>
           </a:xfrm>
           <a:prstGeom prst="rect">
             <a:avLst/>
           </a:prstGeom>
           <a:solidFill>
-            <a:srgbClr val="303040"/>
+            <a:srgbClr val="333344"/>
           </a:solidFill>
           <a:ln>
             <a:noFill/>
@@ -15964,13 +15459,11 @@
         </p:nvSpPr>
         <p:spPr>
           <a:xfrm>
-            <a:off x="548640" y="1554480"/>
-            <a:ext cx="5303520" cy="4389120"/>
+            <a:off x="548640" y="1645920"/>
+            <a:ext cx="5303520" cy="4114800"/>
           </a:xfrm>
           <a:prstGeom prst="roundRect">
-            <a:avLst>
-              <a:gd name="adj" fmla="val 8000"/>
-            </a:avLst>
+            <a:avLst/>
           </a:prstGeom>
           <a:solidFill>
             <a:srgbClr val="14141C"/>
@@ -16009,7 +15502,7 @@
         </p:nvSpPr>
         <p:spPr>
           <a:xfrm>
-            <a:off x="548640" y="1554480"/>
+            <a:off x="548640" y="1645920"/>
             <a:ext cx="5303520" cy="45720"/>
           </a:xfrm>
           <a:prstGeom prst="rect">
@@ -16052,8 +15545,8 @@
         </p:nvSpPr>
         <p:spPr>
           <a:xfrm>
-            <a:off x="731520" y="1664208"/>
-            <a:ext cx="4937760" cy="320040"/>
+            <a:off x="777240" y="1783080"/>
+            <a:ext cx="4846320" cy="365760"/>
           </a:xfrm>
           <a:prstGeom prst="rect">
             <a:avLst/>
@@ -16067,7 +15560,7 @@
           <a:lstStyle/>
           <a:p>
             <a:pPr algn="l">
-              <a:defRPr sz="1700" b="1">
+              <a:defRPr sz="1800" b="1">
                 <a:solidFill>
                   <a:srgbClr val="14B8A6"/>
                 </a:solidFill>
@@ -16088,8 +15581,8 @@
         </p:nvSpPr>
         <p:spPr>
           <a:xfrm>
-            <a:off x="731520" y="2011680"/>
-            <a:ext cx="4937760" cy="3840480"/>
+            <a:off x="777240" y="2194560"/>
+            <a:ext cx="4846320" cy="3474720"/>
           </a:xfrm>
           <a:prstGeom prst="rect">
             <a:avLst/>
@@ -16104,7 +15597,7 @@
           <a:p>
             <a:pPr algn="l">
               <a:spcAft>
-                <a:spcPts val="1609"/>
+                <a:spcPts val="1680"/>
               </a:spcAft>
               <a:defRPr sz="1400" b="0">
                 <a:solidFill>
@@ -16120,7 +15613,7 @@
           <a:p>
             <a:pPr algn="l">
               <a:spcAft>
-                <a:spcPts val="1609"/>
+                <a:spcPts val="1680"/>
               </a:spcAft>
               <a:defRPr sz="1400" b="0">
                 <a:solidFill>
@@ -16136,7 +15629,7 @@
           <a:p>
             <a:pPr algn="l">
               <a:spcAft>
-                <a:spcPts val="1609"/>
+                <a:spcPts val="1680"/>
               </a:spcAft>
               <a:defRPr sz="1400" b="0">
                 <a:solidFill>
@@ -16152,7 +15645,7 @@
           <a:p>
             <a:pPr algn="l">
               <a:spcAft>
-                <a:spcPts val="1609"/>
+                <a:spcPts val="1680"/>
               </a:spcAft>
               <a:defRPr sz="1400" b="0">
                 <a:solidFill>
@@ -16168,7 +15661,7 @@
           <a:p>
             <a:pPr algn="l">
               <a:spcAft>
-                <a:spcPts val="1609"/>
+                <a:spcPts val="1680"/>
               </a:spcAft>
               <a:defRPr sz="1400" b="0">
                 <a:solidFill>
@@ -16184,7 +15677,7 @@
           <a:p>
             <a:pPr algn="l">
               <a:spcAft>
-                <a:spcPts val="1609"/>
+                <a:spcPts val="1680"/>
               </a:spcAft>
               <a:defRPr sz="1400" b="0">
                 <a:solidFill>
@@ -16200,7 +15693,7 @@
           <a:p>
             <a:pPr algn="l">
               <a:spcAft>
-                <a:spcPts val="1609"/>
+                <a:spcPts val="1680"/>
               </a:spcAft>
               <a:defRPr sz="1400" b="0">
                 <a:solidFill>
@@ -16223,13 +15716,11 @@
         </p:nvSpPr>
         <p:spPr>
           <a:xfrm>
-            <a:off x="6217920" y="1554480"/>
-            <a:ext cx="5303520" cy="4389120"/>
+            <a:off x="6217920" y="1645920"/>
+            <a:ext cx="5303520" cy="4114800"/>
           </a:xfrm>
           <a:prstGeom prst="roundRect">
-            <a:avLst>
-              <a:gd name="adj" fmla="val 8000"/>
-            </a:avLst>
+            <a:avLst/>
           </a:prstGeom>
           <a:solidFill>
             <a:srgbClr val="14141C"/>
@@ -16268,7 +15759,7 @@
         </p:nvSpPr>
         <p:spPr>
           <a:xfrm>
-            <a:off x="6217920" y="1554480"/>
+            <a:off x="6217920" y="1645920"/>
             <a:ext cx="5303520" cy="45720"/>
           </a:xfrm>
           <a:prstGeom prst="rect">
@@ -16311,8 +15802,8 @@
         </p:nvSpPr>
         <p:spPr>
           <a:xfrm>
-            <a:off x="6400800" y="1664208"/>
-            <a:ext cx="4937760" cy="320040"/>
+            <a:off x="6446520" y="1783080"/>
+            <a:ext cx="4846320" cy="365760"/>
           </a:xfrm>
           <a:prstGeom prst="rect">
             <a:avLst/>
@@ -16326,7 +15817,7 @@
           <a:lstStyle/>
           <a:p>
             <a:pPr algn="l">
-              <a:defRPr sz="1700" b="1">
+              <a:defRPr sz="1800" b="1">
                 <a:solidFill>
                   <a:srgbClr val="A855F7"/>
                 </a:solidFill>
@@ -16347,8 +15838,8 @@
         </p:nvSpPr>
         <p:spPr>
           <a:xfrm>
-            <a:off x="6400800" y="2011680"/>
-            <a:ext cx="4937760" cy="3840480"/>
+            <a:off x="6446520" y="2194560"/>
+            <a:ext cx="4846320" cy="3474720"/>
           </a:xfrm>
           <a:prstGeom prst="rect">
             <a:avLst/>
@@ -16363,7 +15854,7 @@
           <a:p>
             <a:pPr algn="l">
               <a:spcAft>
-                <a:spcPts val="1609"/>
+                <a:spcPts val="1680"/>
               </a:spcAft>
               <a:defRPr sz="1400" b="0">
                 <a:solidFill>
@@ -16379,7 +15870,7 @@
           <a:p>
             <a:pPr algn="l">
               <a:spcAft>
-                <a:spcPts val="1609"/>
+                <a:spcPts val="1680"/>
               </a:spcAft>
               <a:defRPr sz="1400" b="0">
                 <a:solidFill>
@@ -16395,7 +15886,7 @@
           <a:p>
             <a:pPr algn="l">
               <a:spcAft>
-                <a:spcPts val="1609"/>
+                <a:spcPts val="1680"/>
               </a:spcAft>
               <a:defRPr sz="1400" b="0">
                 <a:solidFill>
@@ -16411,7 +15902,7 @@
           <a:p>
             <a:pPr algn="l">
               <a:spcAft>
-                <a:spcPts val="1609"/>
+                <a:spcPts val="1680"/>
               </a:spcAft>
               <a:defRPr sz="1400" b="0">
                 <a:solidFill>
@@ -16427,7 +15918,7 @@
           <a:p>
             <a:pPr algn="l">
               <a:spcAft>
-                <a:spcPts val="1609"/>
+                <a:spcPts val="1680"/>
               </a:spcAft>
               <a:defRPr sz="1400" b="0">
                 <a:solidFill>
@@ -16443,7 +15934,7 @@
           <a:p>
             <a:pPr algn="l">
               <a:spcAft>
-                <a:spcPts val="1609"/>
+                <a:spcPts val="1680"/>
               </a:spcAft>
               <a:defRPr sz="1400" b="0">
                 <a:solidFill>
@@ -16459,7 +15950,7 @@
           <a:p>
             <a:pPr algn="l">
               <a:spcAft>
-                <a:spcPts val="1609"/>
+                <a:spcPts val="1680"/>
               </a:spcAft>
               <a:defRPr sz="1400" b="0">
                 <a:solidFill>
@@ -16482,8 +15973,8 @@
         </p:nvSpPr>
         <p:spPr>
           <a:xfrm>
-            <a:off x="731520" y="6446520"/>
-            <a:ext cx="7315200" cy="320040"/>
+            <a:off x="731520" y="6400800"/>
+            <a:ext cx="7315200" cy="365760"/>
           </a:xfrm>
           <a:prstGeom prst="rect">
             <a:avLst/>
@@ -16497,7 +15988,7 @@
           <a:lstStyle/>
           <a:p>
             <a:pPr algn="l">
-              <a:defRPr sz="1000" b="0">
+              <a:defRPr sz="1100" b="0">
                 <a:solidFill>
                   <a:srgbClr val="707080"/>
                 </a:solidFill>
@@ -16551,7 +16042,7 @@
             <a:avLst/>
           </a:prstGeom>
           <a:solidFill>
-            <a:srgbClr val="14B8A6"/>
+            <a:srgbClr val="F97316"/>
           </a:solidFill>
           <a:ln>
             <a:noFill/>
@@ -16602,7 +16093,7 @@
           <a:lstStyle/>
           <a:p>
             <a:pPr algn="l">
-              <a:defRPr sz="2800" b="1">
+              <a:defRPr sz="3000" b="1">
                 <a:solidFill>
                   <a:srgbClr val="FFFFFF"/>
                 </a:solidFill>
@@ -16623,7 +16114,7 @@
         </p:nvSpPr>
         <p:spPr>
           <a:xfrm>
-            <a:off x="731520" y="868680"/>
+            <a:off x="731520" y="914400"/>
             <a:ext cx="10058400" cy="457200"/>
           </a:xfrm>
           <a:prstGeom prst="rect">
@@ -16638,7 +16129,7 @@
           <a:lstStyle/>
           <a:p>
             <a:pPr algn="l">
-              <a:defRPr sz="1400" b="0">
+              <a:defRPr sz="1500" b="0">
                 <a:solidFill>
                   <a:srgbClr val="B0B0C0"/>
                 </a:solidFill>
@@ -16659,8 +16150,8 @@
         </p:nvSpPr>
         <p:spPr>
           <a:xfrm>
-            <a:off x="11247120" y="365760"/>
-            <a:ext cx="640080" cy="365760"/>
+            <a:off x="11155680" y="365760"/>
+            <a:ext cx="731520" cy="457200"/>
           </a:xfrm>
           <a:prstGeom prst="rect">
             <a:avLst/>
@@ -16674,7 +16165,7 @@
           <a:lstStyle/>
           <a:p>
             <a:pPr algn="r">
-              <a:defRPr sz="1300" b="0">
+              <a:defRPr sz="1400" b="0">
                 <a:solidFill>
                   <a:srgbClr val="707080"/>
                 </a:solidFill>
@@ -16695,14 +16186,14 @@
         </p:nvSpPr>
         <p:spPr>
           <a:xfrm>
-            <a:off x="731520" y="1234440"/>
+            <a:off x="731520" y="1325880"/>
             <a:ext cx="10698480" cy="19050"/>
           </a:xfrm>
           <a:prstGeom prst="rect">
             <a:avLst/>
           </a:prstGeom>
           <a:solidFill>
-            <a:srgbClr val="303040"/>
+            <a:srgbClr val="333344"/>
           </a:solidFill>
           <a:ln>
             <a:noFill/>
@@ -16738,13 +16229,11 @@
         </p:nvSpPr>
         <p:spPr>
           <a:xfrm>
-            <a:off x="548640" y="1554480"/>
-            <a:ext cx="5303520" cy="4389120"/>
+            <a:off x="548640" y="1645920"/>
+            <a:ext cx="5303520" cy="4114800"/>
           </a:xfrm>
           <a:prstGeom prst="roundRect">
-            <a:avLst>
-              <a:gd name="adj" fmla="val 8000"/>
-            </a:avLst>
+            <a:avLst/>
           </a:prstGeom>
           <a:solidFill>
             <a:srgbClr val="14141C"/>
@@ -16783,7 +16272,7 @@
         </p:nvSpPr>
         <p:spPr>
           <a:xfrm>
-            <a:off x="548640" y="1554480"/>
+            <a:off x="548640" y="1645920"/>
             <a:ext cx="5303520" cy="45720"/>
           </a:xfrm>
           <a:prstGeom prst="rect">
@@ -16826,8 +16315,8 @@
         </p:nvSpPr>
         <p:spPr>
           <a:xfrm>
-            <a:off x="731520" y="1664208"/>
-            <a:ext cx="4937760" cy="320040"/>
+            <a:off x="777240" y="1783080"/>
+            <a:ext cx="4846320" cy="365760"/>
           </a:xfrm>
           <a:prstGeom prst="rect">
             <a:avLst/>
@@ -16841,7 +16330,7 @@
           <a:lstStyle/>
           <a:p>
             <a:pPr algn="l">
-              <a:defRPr sz="1700" b="1">
+              <a:defRPr sz="1800" b="1">
                 <a:solidFill>
                   <a:srgbClr val="22C55E"/>
                 </a:solidFill>
@@ -16862,8 +16351,8 @@
         </p:nvSpPr>
         <p:spPr>
           <a:xfrm>
-            <a:off x="731520" y="2011680"/>
-            <a:ext cx="4937760" cy="3840480"/>
+            <a:off x="777240" y="2194560"/>
+            <a:ext cx="4846320" cy="3474720"/>
           </a:xfrm>
           <a:prstGeom prst="rect">
             <a:avLst/>
@@ -16878,7 +16367,7 @@
           <a:p>
             <a:pPr algn="l">
               <a:spcAft>
-                <a:spcPts val="1609"/>
+                <a:spcPts val="1680"/>
               </a:spcAft>
               <a:defRPr sz="1400" b="0">
                 <a:solidFill>
@@ -16894,7 +16383,7 @@
           <a:p>
             <a:pPr algn="l">
               <a:spcAft>
-                <a:spcPts val="1609"/>
+                <a:spcPts val="1680"/>
               </a:spcAft>
               <a:defRPr sz="1400" b="0">
                 <a:solidFill>
@@ -16910,7 +16399,7 @@
           <a:p>
             <a:pPr algn="l">
               <a:spcAft>
-                <a:spcPts val="1609"/>
+                <a:spcPts val="1680"/>
               </a:spcAft>
               <a:defRPr sz="1400" b="0">
                 <a:solidFill>
@@ -16926,7 +16415,7 @@
           <a:p>
             <a:pPr algn="l">
               <a:spcAft>
-                <a:spcPts val="1609"/>
+                <a:spcPts val="1680"/>
               </a:spcAft>
               <a:defRPr sz="1400" b="0">
                 <a:solidFill>
@@ -16942,7 +16431,7 @@
           <a:p>
             <a:pPr algn="l">
               <a:spcAft>
-                <a:spcPts val="1609"/>
+                <a:spcPts val="1680"/>
               </a:spcAft>
               <a:defRPr sz="1400" b="0">
                 <a:solidFill>
@@ -16958,7 +16447,7 @@
           <a:p>
             <a:pPr algn="l">
               <a:spcAft>
-                <a:spcPts val="1609"/>
+                <a:spcPts val="1680"/>
               </a:spcAft>
               <a:defRPr sz="1400" b="0">
                 <a:solidFill>
@@ -16974,7 +16463,7 @@
           <a:p>
             <a:pPr algn="l">
               <a:spcAft>
-                <a:spcPts val="1609"/>
+                <a:spcPts val="1680"/>
               </a:spcAft>
               <a:defRPr sz="1400" b="0">
                 <a:solidFill>
@@ -16997,13 +16486,11 @@
         </p:nvSpPr>
         <p:spPr>
           <a:xfrm>
-            <a:off x="6217920" y="1554480"/>
-            <a:ext cx="5303520" cy="4389120"/>
+            <a:off x="6217920" y="1645920"/>
+            <a:ext cx="5303520" cy="4114800"/>
           </a:xfrm>
           <a:prstGeom prst="roundRect">
-            <a:avLst>
-              <a:gd name="adj" fmla="val 8000"/>
-            </a:avLst>
+            <a:avLst/>
           </a:prstGeom>
           <a:solidFill>
             <a:srgbClr val="14141C"/>
@@ -17042,7 +16529,7 @@
         </p:nvSpPr>
         <p:spPr>
           <a:xfrm>
-            <a:off x="6217920" y="1554480"/>
+            <a:off x="6217920" y="1645920"/>
             <a:ext cx="5303520" cy="45720"/>
           </a:xfrm>
           <a:prstGeom prst="rect">
@@ -17085,8 +16572,8 @@
         </p:nvSpPr>
         <p:spPr>
           <a:xfrm>
-            <a:off x="6400800" y="1664208"/>
-            <a:ext cx="4937760" cy="320040"/>
+            <a:off x="6446520" y="1783080"/>
+            <a:ext cx="4846320" cy="365760"/>
           </a:xfrm>
           <a:prstGeom prst="rect">
             <a:avLst/>
@@ -17100,7 +16587,7 @@
           <a:lstStyle/>
           <a:p>
             <a:pPr algn="l">
-              <a:defRPr sz="1700" b="1">
+              <a:defRPr sz="1800" b="1">
                 <a:solidFill>
                   <a:srgbClr val="EF4444"/>
                 </a:solidFill>
@@ -17121,8 +16608,8 @@
         </p:nvSpPr>
         <p:spPr>
           <a:xfrm>
-            <a:off x="6400800" y="2011680"/>
-            <a:ext cx="4937760" cy="3840480"/>
+            <a:off x="6446520" y="2194560"/>
+            <a:ext cx="4846320" cy="3474720"/>
           </a:xfrm>
           <a:prstGeom prst="rect">
             <a:avLst/>
@@ -17137,7 +16624,7 @@
           <a:p>
             <a:pPr algn="l">
               <a:spcAft>
-                <a:spcPts val="1609"/>
+                <a:spcPts val="1680"/>
               </a:spcAft>
               <a:defRPr sz="1400" b="0">
                 <a:solidFill>
@@ -17153,7 +16640,7 @@
           <a:p>
             <a:pPr algn="l">
               <a:spcAft>
-                <a:spcPts val="1609"/>
+                <a:spcPts val="1680"/>
               </a:spcAft>
               <a:defRPr sz="1400" b="0">
                 <a:solidFill>
@@ -17169,7 +16656,7 @@
           <a:p>
             <a:pPr algn="l">
               <a:spcAft>
-                <a:spcPts val="1609"/>
+                <a:spcPts val="1680"/>
               </a:spcAft>
               <a:defRPr sz="1400" b="0">
                 <a:solidFill>
@@ -17185,7 +16672,7 @@
           <a:p>
             <a:pPr algn="l">
               <a:spcAft>
-                <a:spcPts val="1609"/>
+                <a:spcPts val="1680"/>
               </a:spcAft>
               <a:defRPr sz="1400" b="0">
                 <a:solidFill>
@@ -17201,7 +16688,7 @@
           <a:p>
             <a:pPr algn="l">
               <a:spcAft>
-                <a:spcPts val="1609"/>
+                <a:spcPts val="1680"/>
               </a:spcAft>
               <a:defRPr sz="1400" b="0">
                 <a:solidFill>
@@ -17217,7 +16704,7 @@
           <a:p>
             <a:pPr algn="l">
               <a:spcAft>
-                <a:spcPts val="1609"/>
+                <a:spcPts val="1680"/>
               </a:spcAft>
               <a:defRPr sz="1400" b="0">
                 <a:solidFill>
@@ -17233,7 +16720,7 @@
           <a:p>
             <a:pPr algn="l">
               <a:spcAft>
-                <a:spcPts val="1609"/>
+                <a:spcPts val="1680"/>
               </a:spcAft>
               <a:defRPr sz="1400" b="0">
                 <a:solidFill>
@@ -17256,8 +16743,8 @@
         </p:nvSpPr>
         <p:spPr>
           <a:xfrm>
-            <a:off x="731520" y="6446520"/>
-            <a:ext cx="7315200" cy="320040"/>
+            <a:off x="731520" y="6400800"/>
+            <a:ext cx="7315200" cy="365760"/>
           </a:xfrm>
           <a:prstGeom prst="rect">
             <a:avLst/>
@@ -17271,7 +16758,7 @@
           <a:lstStyle/>
           <a:p>
             <a:pPr algn="l">
-              <a:defRPr sz="1000" b="0">
+              <a:defRPr sz="1100" b="0">
                 <a:solidFill>
                   <a:srgbClr val="707080"/>
                 </a:solidFill>
